--- a/docs/public/course-assets/course-pptx/in-008.pptx
+++ b/docs/public/course-assets/course-pptx/in-008.pptx
@@ -2,25 +2,25 @@
 <file path=ppt/presentation.xml><?xml version="1.0" encoding="utf-8"?>
 <p:presentation xmlns:p="http://schemas.openxmlformats.org/presentationml/2006/main">
   <p:sldMasterIdLst>
-    <p:sldMasterId xmlns:r="http://schemas.openxmlformats.org/officeDocument/2006/relationships" id="2147483648" r:id="R27bd1424542e4c1a"/>
+    <p:sldMasterId xmlns:r="http://schemas.openxmlformats.org/officeDocument/2006/relationships" id="2147483648" r:id="Rfba2941276b44f87"/>
   </p:sldMasterIdLst>
   <p:notesMasterIdLst>
-    <p:notesMasterId xmlns:r="http://schemas.openxmlformats.org/officeDocument/2006/relationships" r:id="R8a09d2ba7d3f484a"/>
+    <p:notesMasterId xmlns:r="http://schemas.openxmlformats.org/officeDocument/2006/relationships" r:id="Ra17dde9de2e94c63"/>
   </p:notesMasterIdLst>
   <p:sldIdLst>
-    <p:sldId xmlns:r="http://schemas.openxmlformats.org/officeDocument/2006/relationships" id="256" r:id="Rc943bf3940fd4cea"/>
-    <p:sldId xmlns:r="http://schemas.openxmlformats.org/officeDocument/2006/relationships" id="257" r:id="R66b27bb507d14a75"/>
-    <p:sldId xmlns:r="http://schemas.openxmlformats.org/officeDocument/2006/relationships" id="258" r:id="R4c3126627217452c"/>
-    <p:sldId xmlns:r="http://schemas.openxmlformats.org/officeDocument/2006/relationships" id="259" r:id="Reaca39e824074544"/>
-    <p:sldId xmlns:r="http://schemas.openxmlformats.org/officeDocument/2006/relationships" id="260" r:id="R522ab40ac2ea476c"/>
-    <p:sldId xmlns:r="http://schemas.openxmlformats.org/officeDocument/2006/relationships" id="261" r:id="R25c5c2325fc748b8"/>
-    <p:sldId xmlns:r="http://schemas.openxmlformats.org/officeDocument/2006/relationships" id="262" r:id="Rc0f88f7f07df4c5f"/>
-    <p:sldId xmlns:r="http://schemas.openxmlformats.org/officeDocument/2006/relationships" id="263" r:id="Rccbe2bd6fe384a87"/>
-    <p:sldId xmlns:r="http://schemas.openxmlformats.org/officeDocument/2006/relationships" id="264" r:id="R763a0c143ed34e1f"/>
-    <p:sldId xmlns:r="http://schemas.openxmlformats.org/officeDocument/2006/relationships" id="265" r:id="R670498e876b347a1"/>
-    <p:sldId xmlns:r="http://schemas.openxmlformats.org/officeDocument/2006/relationships" id="266" r:id="R9e1d03a84e4e46b0"/>
-    <p:sldId xmlns:r="http://schemas.openxmlformats.org/officeDocument/2006/relationships" id="267" r:id="R0b49ebe4f3bf47f8"/>
-    <p:sldId xmlns:r="http://schemas.openxmlformats.org/officeDocument/2006/relationships" id="268" r:id="R79cc07b8e6624509"/>
+    <p:sldId xmlns:r="http://schemas.openxmlformats.org/officeDocument/2006/relationships" id="256" r:id="Rd8cbe6fd6b774030"/>
+    <p:sldId xmlns:r="http://schemas.openxmlformats.org/officeDocument/2006/relationships" id="257" r:id="Rc4214ed33ce243dc"/>
+    <p:sldId xmlns:r="http://schemas.openxmlformats.org/officeDocument/2006/relationships" id="258" r:id="Rd52d6219571642b6"/>
+    <p:sldId xmlns:r="http://schemas.openxmlformats.org/officeDocument/2006/relationships" id="259" r:id="R944f47a8756d4e78"/>
+    <p:sldId xmlns:r="http://schemas.openxmlformats.org/officeDocument/2006/relationships" id="260" r:id="R2c810cf5c3bd4528"/>
+    <p:sldId xmlns:r="http://schemas.openxmlformats.org/officeDocument/2006/relationships" id="261" r:id="Rccf1814887d44cb1"/>
+    <p:sldId xmlns:r="http://schemas.openxmlformats.org/officeDocument/2006/relationships" id="262" r:id="R50440f4949ed4c80"/>
+    <p:sldId xmlns:r="http://schemas.openxmlformats.org/officeDocument/2006/relationships" id="263" r:id="R8da8edd49c514a66"/>
+    <p:sldId xmlns:r="http://schemas.openxmlformats.org/officeDocument/2006/relationships" id="264" r:id="Rce66f1974ecd430b"/>
+    <p:sldId xmlns:r="http://schemas.openxmlformats.org/officeDocument/2006/relationships" id="265" r:id="R069d2154f3314469"/>
+    <p:sldId xmlns:r="http://schemas.openxmlformats.org/officeDocument/2006/relationships" id="266" r:id="Rd7a7265a196a4531"/>
+    <p:sldId xmlns:r="http://schemas.openxmlformats.org/officeDocument/2006/relationships" id="267" r:id="R7655b0ca9fcc41f4"/>
+    <p:sldId xmlns:r="http://schemas.openxmlformats.org/officeDocument/2006/relationships" id="268" r:id="R4fb912fc21154e6a"/>
   </p:sldIdLst>
   <p:sldSz cx="12192000" cy="6858000"/>
   <p:notesSz cx="6858000" cy="9144000"/>
@@ -1405,7 +1405,7 @@
   </p:cSld>
   <p:clrMap bg1="lt1" tx1="dk1" bg2="lt2" tx2="dk2" accent1="accent1" accent2="accent2" accent3="accent3" accent4="accent4" accent5="accent5" accent6="accent6" hlink="hlink" folHlink="folHlink"/>
   <p:sldLayoutIdLst>
-    <p:sldLayoutId xmlns:r="http://schemas.openxmlformats.org/officeDocument/2006/relationships" id="2147483649" r:id="R68a1bc52aa824d54"/>
+    <p:sldLayoutId xmlns:r="http://schemas.openxmlformats.org/officeDocument/2006/relationships" id="2147483649" r:id="Rfaa6341e684d4ac3"/>
   </p:sldLayoutIdLst>
   <p:txStyles>
     <p:titleStyle>
@@ -1956,7 +1956,7 @@
           <p:cNvPr id="1" name="cover-rule">
             <a:extLst xmlns:a="http://schemas.openxmlformats.org/drawingml/2006/main">
               <a:ext uri="{FF2B5EF4-FFF2-40B4-BE49-F238E27FC236}">
-                <a16:creationId xmlns:a16="http://schemas.microsoft.com/office/drawing/2014/main" id="{9C2A80FD-575A-442B-9E9C-8585B29D7125}"/>
+                <a16:creationId xmlns:a16="http://schemas.microsoft.com/office/drawing/2014/main" id="{5DCD79CE-1BDF-4A1B-AC4E-12F444D6284E}"/>
               </a:ext>
             </a:extLst>
           </p:cNvPr>
@@ -1989,7 +1989,7 @@
           <p:cNvPr id="2" name="cover-ring-1">
             <a:extLst xmlns:a="http://schemas.openxmlformats.org/drawingml/2006/main">
               <a:ext uri="{FF2B5EF4-FFF2-40B4-BE49-F238E27FC236}">
-                <a16:creationId xmlns:a16="http://schemas.microsoft.com/office/drawing/2014/main" id="{7F68AC9C-C216-43A4-B3DC-DED59B605C11}"/>
+                <a16:creationId xmlns:a16="http://schemas.microsoft.com/office/drawing/2014/main" id="{35923B57-A581-46F6-9230-52EC155F4AD6}"/>
               </a:ext>
             </a:extLst>
           </p:cNvPr>
@@ -2020,7 +2020,7 @@
           <p:cNvPr id="3" name="cover-ring-2">
             <a:extLst xmlns:a="http://schemas.openxmlformats.org/drawingml/2006/main">
               <a:ext uri="{FF2B5EF4-FFF2-40B4-BE49-F238E27FC236}">
-                <a16:creationId xmlns:a16="http://schemas.microsoft.com/office/drawing/2014/main" id="{11095D9E-B592-4A19-8583-659752BCDDBC}"/>
+                <a16:creationId xmlns:a16="http://schemas.microsoft.com/office/drawing/2014/main" id="{563501F4-D8A8-4C07-9D45-C77FB4DCC0F2}"/>
               </a:ext>
             </a:extLst>
           </p:cNvPr>
@@ -2051,7 +2051,7 @@
           <p:cNvPr id="4" name="cover-core">
             <a:extLst xmlns:a="http://schemas.openxmlformats.org/drawingml/2006/main">
               <a:ext uri="{FF2B5EF4-FFF2-40B4-BE49-F238E27FC236}">
-                <a16:creationId xmlns:a16="http://schemas.microsoft.com/office/drawing/2014/main" id="{97815F20-D4E8-4309-BE92-411C4D7E55F3}"/>
+                <a16:creationId xmlns:a16="http://schemas.microsoft.com/office/drawing/2014/main" id="{2CE79F95-F62C-4AB4-B4B8-15DA7D66FB1B}"/>
               </a:ext>
             </a:extLst>
           </p:cNvPr>
@@ -2084,7 +2084,7 @@
           <p:cNvPr id="5" name="cover-line-1">
             <a:extLst xmlns:a="http://schemas.openxmlformats.org/drawingml/2006/main">
               <a:ext uri="{FF2B5EF4-FFF2-40B4-BE49-F238E27FC236}">
-                <a16:creationId xmlns:a16="http://schemas.microsoft.com/office/drawing/2014/main" id="{5C3286D0-6D29-4AE3-8B06-B9D8ABE7EE11}"/>
+                <a16:creationId xmlns:a16="http://schemas.microsoft.com/office/drawing/2014/main" id="{11B560A8-2F74-423A-B67E-CC93D2E13FC9}"/>
               </a:ext>
             </a:extLst>
           </p:cNvPr>
@@ -2115,7 +2115,7 @@
           <p:cNvPr id="6" name="cover-line-2">
             <a:extLst xmlns:a="http://schemas.openxmlformats.org/drawingml/2006/main">
               <a:ext uri="{FF2B5EF4-FFF2-40B4-BE49-F238E27FC236}">
-                <a16:creationId xmlns:a16="http://schemas.microsoft.com/office/drawing/2014/main" id="{7EA61F26-67A0-4120-A5CD-B9DC8F5687C3}"/>
+                <a16:creationId xmlns:a16="http://schemas.microsoft.com/office/drawing/2014/main" id="{45F55F16-902E-431C-AC7D-D30DA8A48DBA}"/>
               </a:ext>
             </a:extLst>
           </p:cNvPr>
@@ -2146,7 +2146,7 @@
           <p:cNvPr id="7" name="cover-eyebrow">
             <a:extLst xmlns:a="http://schemas.openxmlformats.org/drawingml/2006/main">
               <a:ext uri="{FF2B5EF4-FFF2-40B4-BE49-F238E27FC236}">
-                <a16:creationId xmlns:a16="http://schemas.microsoft.com/office/drawing/2014/main" id="{551C902B-BF97-4124-B9DF-6D2ED9DF1E55}"/>
+                <a16:creationId xmlns:a16="http://schemas.microsoft.com/office/drawing/2014/main" id="{9D11406C-3254-40A8-A2FB-A7BDD6C1DA43}"/>
               </a:ext>
             </a:extLst>
           </p:cNvPr>
@@ -2204,7 +2204,7 @@
           <p:cNvPr id="8" name="cover-title">
             <a:extLst xmlns:a="http://schemas.openxmlformats.org/drawingml/2006/main">
               <a:ext uri="{FF2B5EF4-FFF2-40B4-BE49-F238E27FC236}">
-                <a16:creationId xmlns:a16="http://schemas.microsoft.com/office/drawing/2014/main" id="{4CA4FB9B-CAA3-4CE2-954A-88C9F6617DE1}"/>
+                <a16:creationId xmlns:a16="http://schemas.microsoft.com/office/drawing/2014/main" id="{BFDFCA8F-F0CC-4380-9C24-545B4B8AE1C0}"/>
               </a:ext>
             </a:extLst>
           </p:cNvPr>
@@ -2262,7 +2262,7 @@
           <p:cNvPr id="9" name="cover-subtitle">
             <a:extLst xmlns:a="http://schemas.openxmlformats.org/drawingml/2006/main">
               <a:ext uri="{FF2B5EF4-FFF2-40B4-BE49-F238E27FC236}">
-                <a16:creationId xmlns:a16="http://schemas.microsoft.com/office/drawing/2014/main" id="{2C3E83A1-915F-4109-B544-F9AF4C3FB288}"/>
+                <a16:creationId xmlns:a16="http://schemas.microsoft.com/office/drawing/2014/main" id="{E7554292-6D92-42DF-8420-B4510E161249}"/>
               </a:ext>
             </a:extLst>
           </p:cNvPr>
@@ -2324,7 +2324,7 @@
           <p:cNvPr id="10" name="cover-lead">
             <a:extLst xmlns:a="http://schemas.openxmlformats.org/drawingml/2006/main">
               <a:ext uri="{FF2B5EF4-FFF2-40B4-BE49-F238E27FC236}">
-                <a16:creationId xmlns:a16="http://schemas.microsoft.com/office/drawing/2014/main" id="{A86D47E0-0F6F-461A-B3A5-354276278BEC}"/>
+                <a16:creationId xmlns:a16="http://schemas.microsoft.com/office/drawing/2014/main" id="{AD9A557F-4566-47F3-94DC-17FC2DA529E6}"/>
               </a:ext>
             </a:extLst>
           </p:cNvPr>
@@ -2372,7 +2372,7 @@
                 <a:ea typeface="PingFang SC"/>
                 <a:cs typeface="PingFang SC"/>
               </a:rPr>
-              <a:t>海洋和地理空间问题天然具有“在哪里、什么时候、以什么尺度观察”的属性。卫星能够提供大范围重复观测，却可能受云、传感器和分辨率影响；浮标与岸站提供现场序列，但位置有限且可能缺测…</a:t>
+              <a:t>海洋和地理空间问题天然具有“在哪里、什么时候、以什么尺度观察”的属性；卫星能够提供大范围重复观测；却可能受云、传感器和分辨率影响；浮标与岸站提供现场序列；但位置有限且可能缺测</a:t>
             </a:r>
           </a:p>
         </p:txBody>
@@ -2382,7 +2382,7 @@
           <p:cNvPr id="11" name="cover-course">
             <a:extLst xmlns:a="http://schemas.openxmlformats.org/drawingml/2006/main">
               <a:ext uri="{FF2B5EF4-FFF2-40B4-BE49-F238E27FC236}">
-                <a16:creationId xmlns:a16="http://schemas.microsoft.com/office/drawing/2014/main" id="{FE99A6AA-62A2-4761-9866-C88698204C13}"/>
+                <a16:creationId xmlns:a16="http://schemas.microsoft.com/office/drawing/2014/main" id="{04E43CAA-CBF6-49F7-B5A0-316A22665614}"/>
               </a:ext>
             </a:extLst>
           </p:cNvPr>
@@ -2440,7 +2440,7 @@
           <p:cNvPr id="12" name="cover-id">
             <a:extLst xmlns:a="http://schemas.openxmlformats.org/drawingml/2006/main">
               <a:ext uri="{FF2B5EF4-FFF2-40B4-BE49-F238E27FC236}">
-                <a16:creationId xmlns:a16="http://schemas.microsoft.com/office/drawing/2014/main" id="{4E65943D-B8EC-46C6-983B-78FC9B565CC7}"/>
+                <a16:creationId xmlns:a16="http://schemas.microsoft.com/office/drawing/2014/main" id="{B23AD68B-7B6E-4323-9351-203004903B44}"/>
               </a:ext>
             </a:extLst>
           </p:cNvPr>
@@ -2496,7 +2496,7 @@
     </p:spTree>
     <p:extLst>
       <p:ext uri="{BB962C8B-B14F-4D97-AF65-F5344CB8AC3E}">
-        <p14:creationId xmlns:p14="http://schemas.microsoft.com/office/powerpoint/2010/main" val="1098870184"/>
+        <p14:creationId xmlns:p14="http://schemas.microsoft.com/office/powerpoint/2010/main" val="1129402702"/>
       </p:ext>
     </p:extLst>
   </p:cSld>
@@ -2527,7 +2527,7 @@
           <p:cNvPr id="1" name="s10-rule">
             <a:extLst xmlns:a="http://schemas.openxmlformats.org/drawingml/2006/main">
               <a:ext uri="{FF2B5EF4-FFF2-40B4-BE49-F238E27FC236}">
-                <a16:creationId xmlns:a16="http://schemas.microsoft.com/office/drawing/2014/main" id="{AE01814E-F7C7-41D5-9561-54CE4650BCD9}"/>
+                <a16:creationId xmlns:a16="http://schemas.microsoft.com/office/drawing/2014/main" id="{4FE2DEF8-B9D9-4B2E-822E-9D7F4840E0AB}"/>
               </a:ext>
             </a:extLst>
           </p:cNvPr>
@@ -2560,7 +2560,7 @@
           <p:cNvPr id="2" name="s10-eyebrow">
             <a:extLst xmlns:a="http://schemas.openxmlformats.org/drawingml/2006/main">
               <a:ext uri="{FF2B5EF4-FFF2-40B4-BE49-F238E27FC236}">
-                <a16:creationId xmlns:a16="http://schemas.microsoft.com/office/drawing/2014/main" id="{6563D4DC-943C-4AF7-92D6-BD1717F780A8}"/>
+                <a16:creationId xmlns:a16="http://schemas.microsoft.com/office/drawing/2014/main" id="{4DD43485-7A35-42B0-A379-D69934E42206}"/>
               </a:ext>
             </a:extLst>
           </p:cNvPr>
@@ -2618,7 +2618,7 @@
           <p:cNvPr id="3" name="s10-title">
             <a:extLst xmlns:a="http://schemas.openxmlformats.org/drawingml/2006/main">
               <a:ext uri="{FF2B5EF4-FFF2-40B4-BE49-F238E27FC236}">
-                <a16:creationId xmlns:a16="http://schemas.microsoft.com/office/drawing/2014/main" id="{036F45CF-29B6-42F9-942D-D9A91D470593}"/>
+                <a16:creationId xmlns:a16="http://schemas.microsoft.com/office/drawing/2014/main" id="{4F9B548F-0F82-4258-AAEA-DA77D82ACF1C}"/>
               </a:ext>
             </a:extLst>
           </p:cNvPr>
@@ -2666,7 +2666,7 @@
                 <a:ea typeface="PingFang SC"/>
                 <a:cs typeface="PingFang SC"/>
               </a:rPr>
-              <a:t>应急地理信息图必须经过边界验证</a:t>
+              <a:t>应急地图要分层呈现来源与可信状态</a:t>
             </a:r>
           </a:p>
         </p:txBody>
@@ -2676,7 +2676,7 @@
           <p:cNvPr id="4" name="s10-footer">
             <a:extLst xmlns:a="http://schemas.openxmlformats.org/drawingml/2006/main">
               <a:ext uri="{FF2B5EF4-FFF2-40B4-BE49-F238E27FC236}">
-                <a16:creationId xmlns:a16="http://schemas.microsoft.com/office/drawing/2014/main" id="{C095E054-E9A2-42E3-8776-274B1DB6DDB7}"/>
+                <a16:creationId xmlns:a16="http://schemas.microsoft.com/office/drawing/2014/main" id="{D8B34895-C726-40DB-AE6E-5AD37FC4531F}"/>
               </a:ext>
             </a:extLst>
           </p:cNvPr>
@@ -2707,7 +2707,7 @@
           <p:cNvPr id="5" name="s10-identity">
             <a:extLst xmlns:a="http://schemas.openxmlformats.org/drawingml/2006/main">
               <a:ext uri="{FF2B5EF4-FFF2-40B4-BE49-F238E27FC236}">
-                <a16:creationId xmlns:a16="http://schemas.microsoft.com/office/drawing/2014/main" id="{3F661D04-AF9A-4452-9BC0-67BE8BA98AFA}"/>
+                <a16:creationId xmlns:a16="http://schemas.microsoft.com/office/drawing/2014/main" id="{22E3EE62-96D2-4D0E-92A2-3A70FA58DECF}"/>
               </a:ext>
             </a:extLst>
           </p:cNvPr>
@@ -2765,7 +2765,7 @@
           <p:cNvPr id="6" name="case-title">
             <a:extLst xmlns:a="http://schemas.openxmlformats.org/drawingml/2006/main">
               <a:ext uri="{FF2B5EF4-FFF2-40B4-BE49-F238E27FC236}">
-                <a16:creationId xmlns:a16="http://schemas.microsoft.com/office/drawing/2014/main" id="{C08C0E05-E040-49C3-AED0-8B46581B51F1}"/>
+                <a16:creationId xmlns:a16="http://schemas.microsoft.com/office/drawing/2014/main" id="{B2B72DFE-A2B3-43D5-B3AD-FDC8315D2041}"/>
               </a:ext>
             </a:extLst>
           </p:cNvPr>
@@ -2829,23 +2829,23 @@
           <p:cNvPr id="7" name="case-row-0">
             <a:extLst xmlns:a="http://schemas.openxmlformats.org/drawingml/2006/main">
               <a:ext uri="{FF2B5EF4-FFF2-40B4-BE49-F238E27FC236}">
-                <a16:creationId xmlns:a16="http://schemas.microsoft.com/office/drawing/2014/main" id="{08CC49A3-377C-4344-B2C9-0E1CC4D52527}"/>
-              </a:ext>
-            </a:extLst>
-          </p:cNvPr>
-          <p:cNvSpPr>
-            <a:spLocks xmlns:a="http://schemas.openxmlformats.org/drawingml/2006/main" noGrp="1"/>
-          </p:cNvSpPr>
-          <p:nvPr/>
-        </p:nvSpPr>
-        <p:spPr>
-          <a:xfrm xmlns:a="http://schemas.openxmlformats.org/drawingml/2006/main">
-            <a:off x="4286250" y="2228850"/>
-            <a:ext cx="6534150" cy="1238250"/>
+                <a16:creationId xmlns:a16="http://schemas.microsoft.com/office/drawing/2014/main" id="{531EFFFF-ED54-441E-A7E2-9B6A43963E40}"/>
+              </a:ext>
+            </a:extLst>
+          </p:cNvPr>
+          <p:cNvSpPr>
+            <a:spLocks xmlns:a="http://schemas.openxmlformats.org/drawingml/2006/main" noGrp="1"/>
+          </p:cNvSpPr>
+          <p:nvPr/>
+        </p:nvSpPr>
+        <p:spPr>
+          <a:xfrm xmlns:a="http://schemas.openxmlformats.org/drawingml/2006/main">
+            <a:off x="4286250" y="2057400"/>
+            <a:ext cx="6534150" cy="838200"/>
           </a:xfrm>
           <a:prstGeom xmlns:a="http://schemas.openxmlformats.org/drawingml/2006/main" prst="roundRect">
             <a:avLst>
-              <a:gd name="adj" fmla="val 10000"/>
+              <a:gd name="adj" fmla="val 14773"/>
             </a:avLst>
           </a:prstGeom>
           <a:solidFill xmlns:a="http://schemas.openxmlformats.org/drawingml/2006/main">
@@ -2893,23 +2893,87 @@
           <p:cNvPr id="8" name="case-row-1">
             <a:extLst xmlns:a="http://schemas.openxmlformats.org/drawingml/2006/main">
               <a:ext uri="{FF2B5EF4-FFF2-40B4-BE49-F238E27FC236}">
-                <a16:creationId xmlns:a16="http://schemas.microsoft.com/office/drawing/2014/main" id="{0DE4F40B-45E5-46B7-8DD2-48C5D91640CE}"/>
-              </a:ext>
-            </a:extLst>
-          </p:cNvPr>
-          <p:cNvSpPr>
-            <a:spLocks xmlns:a="http://schemas.openxmlformats.org/drawingml/2006/main" noGrp="1"/>
-          </p:cNvSpPr>
-          <p:nvPr/>
-        </p:nvSpPr>
-        <p:spPr>
-          <a:xfrm xmlns:a="http://schemas.openxmlformats.org/drawingml/2006/main">
-            <a:off x="4286250" y="3714750"/>
-            <a:ext cx="6534150" cy="1238250"/>
+                <a16:creationId xmlns:a16="http://schemas.microsoft.com/office/drawing/2014/main" id="{A7B7EB7A-ED49-4732-9BBA-B73D6DB774E2}"/>
+              </a:ext>
+            </a:extLst>
+          </p:cNvPr>
+          <p:cNvSpPr>
+            <a:spLocks xmlns:a="http://schemas.openxmlformats.org/drawingml/2006/main" noGrp="1"/>
+          </p:cNvSpPr>
+          <p:nvPr/>
+        </p:nvSpPr>
+        <p:spPr>
+          <a:xfrm xmlns:a="http://schemas.openxmlformats.org/drawingml/2006/main">
+            <a:off x="4286250" y="3086100"/>
+            <a:ext cx="6534150" cy="838200"/>
           </a:xfrm>
           <a:prstGeom xmlns:a="http://schemas.openxmlformats.org/drawingml/2006/main" prst="roundRect">
             <a:avLst>
-              <a:gd name="adj" fmla="val 10000"/>
+              <a:gd name="adj" fmla="val 14773"/>
+            </a:avLst>
+          </a:prstGeom>
+          <a:solidFill xmlns:a="http://schemas.openxmlformats.org/drawingml/2006/main">
+            <a:srgbClr val="FFFFFF"/>
+          </a:solidFill>
+          <a:ln xmlns:a="http://schemas.openxmlformats.org/drawingml/2006/main" w="9525">
+            <a:solidFill>
+              <a:srgbClr val="D8E0E8"/>
+            </a:solidFill>
+            <a:prstDash val="solid"/>
+          </a:ln>
+        </p:spPr>
+        <p:txBody>
+          <a:bodyPr xmlns:a="http://schemas.openxmlformats.org/drawingml/2006/main" lIns="152400" tIns="133350" rIns="152400" bIns="133350" anchor="ctr">
+            <a:normAutofit fontScale="100000"/>
+          </a:bodyPr>
+          <a:lstStyle xmlns:a="http://schemas.openxmlformats.org/drawingml/2006/main"/>
+          <a:p xmlns:a="http://schemas.openxmlformats.org/drawingml/2006/main">
+            <a:pPr algn="l">
+              <a:defRPr sz="1575" b="0">
+                <a:solidFill>
+                  <a:srgbClr val="10233F"/>
+                </a:solidFill>
+                <a:latin typeface="PingFang SC"/>
+                <a:ea typeface="PingFang SC"/>
+                <a:cs typeface="PingFang SC"/>
+              </a:defRPr>
+            </a:pPr>
+            <a:r>
+              <a:rPr sz="1575" b="0">
+                <a:solidFill>
+                  <a:srgbClr val="10233F"/>
+                </a:solidFill>
+                <a:latin typeface="PingFang SC"/>
+                <a:ea typeface="PingFang SC"/>
+                <a:cs typeface="PingFang SC"/>
+              </a:rPr>
+              <a:t>任务｜把现场报告、遥感影像、道路和设施资料组织为共同态势图</a:t>
+            </a:r>
+          </a:p>
+        </p:txBody>
+      </p:sp>
+      <p:sp>
+        <p:nvSpPr>
+          <p:cNvPr id="9" name="case-row-2">
+            <a:extLst xmlns:a="http://schemas.openxmlformats.org/drawingml/2006/main">
+              <a:ext uri="{FF2B5EF4-FFF2-40B4-BE49-F238E27FC236}">
+                <a16:creationId xmlns:a16="http://schemas.microsoft.com/office/drawing/2014/main" id="{B9F548AF-419F-402F-AF1A-ABFBE97FDF4E}"/>
+              </a:ext>
+            </a:extLst>
+          </p:cNvPr>
+          <p:cNvSpPr>
+            <a:spLocks xmlns:a="http://schemas.openxmlformats.org/drawingml/2006/main" noGrp="1"/>
+          </p:cNvSpPr>
+          <p:nvPr/>
+        </p:nvSpPr>
+        <p:spPr>
+          <a:xfrm xmlns:a="http://schemas.openxmlformats.org/drawingml/2006/main">
+            <a:off x="4286250" y="4114800"/>
+            <a:ext cx="6534150" cy="838200"/>
+          </a:xfrm>
+          <a:prstGeom xmlns:a="http://schemas.openxmlformats.org/drawingml/2006/main" prst="roundRect">
+            <a:avLst>
+              <a:gd name="adj" fmla="val 14773"/>
             </a:avLst>
           </a:prstGeom>
           <a:solidFill xmlns:a="http://schemas.openxmlformats.org/drawingml/2006/main">
@@ -2917,7 +2981,7 @@
           </a:solidFill>
           <a:ln xmlns:a="http://schemas.openxmlformats.org/drawingml/2006/main" w="9525">
             <a:solidFill>
-              <a:srgbClr val="E5783F"/>
+              <a:srgbClr val="9A3F16"/>
             </a:solidFill>
             <a:prstDash val="solid"/>
           </a:ln>
@@ -2947,17 +3011,17 @@
                 <a:ea typeface="PingFang SC"/>
                 <a:cs typeface="PingFang SC"/>
               </a:rPr>
-              <a:t>验证｜验收“应急地理信息图”时，要同时记录适用场景、证据来源、失败条件与人工责任</a:t>
-            </a:r>
-          </a:p>
-        </p:txBody>
-      </p:sp>
-      <p:sp>
-        <p:nvSpPr>
-          <p:cNvPr id="9" name="s10-takeaway-rule">
-            <a:extLst xmlns:a="http://schemas.openxmlformats.org/drawingml/2006/main">
-              <a:ext uri="{FF2B5EF4-FFF2-40B4-BE49-F238E27FC236}">
-                <a16:creationId xmlns:a16="http://schemas.microsoft.com/office/drawing/2014/main" id="{CD57EACF-13D0-4ECD-9220-1CA50391FABD}"/>
+              <a:t>责任｜系统辅助制图与更新，授权人员确认图件用途、发布时间和行动指令</a:t>
+            </a:r>
+          </a:p>
+        </p:txBody>
+      </p:sp>
+      <p:sp>
+        <p:nvSpPr>
+          <p:cNvPr id="10" name="s10-takeaway-rule">
+            <a:extLst xmlns:a="http://schemas.openxmlformats.org/drawingml/2006/main">
+              <a:ext uri="{FF2B5EF4-FFF2-40B4-BE49-F238E27FC236}">
+                <a16:creationId xmlns:a16="http://schemas.microsoft.com/office/drawing/2014/main" id="{9B29BC9E-0042-4617-ADC1-866A760BBB9C}"/>
               </a:ext>
             </a:extLst>
           </p:cNvPr>
@@ -2987,10 +3051,10 @@
       </p:sp>
       <p:sp>
         <p:nvSpPr>
-          <p:cNvPr id="10" name="s10-takeaway">
-            <a:extLst xmlns:a="http://schemas.openxmlformats.org/drawingml/2006/main">
-              <a:ext uri="{FF2B5EF4-FFF2-40B4-BE49-F238E27FC236}">
-                <a16:creationId xmlns:a16="http://schemas.microsoft.com/office/drawing/2014/main" id="{7CB6649E-8B89-4F0D-B8A1-D8516DD3194A}"/>
+          <p:cNvPr id="11" name="s10-takeaway">
+            <a:extLst xmlns:a="http://schemas.openxmlformats.org/drawingml/2006/main">
+              <a:ext uri="{FF2B5EF4-FFF2-40B4-BE49-F238E27FC236}">
+                <a16:creationId xmlns:a16="http://schemas.microsoft.com/office/drawing/2014/main" id="{1211AB16-5A95-41B0-B698-D620DD902845}"/>
               </a:ext>
             </a:extLst>
           </p:cNvPr>
@@ -3038,7 +3102,7 @@
                 <a:ea typeface="PingFang SC"/>
                 <a:cs typeface="PingFang SC"/>
               </a:rPr>
-              <a:t>应急地理信息图必须经过边界验证</a:t>
+              <a:t>应急地图要分层呈现来源与可信状态</a:t>
             </a:r>
           </a:p>
         </p:txBody>
@@ -3046,7 +3110,7 @@
     </p:spTree>
     <p:extLst>
       <p:ext uri="{BB962C8B-B14F-4D97-AF65-F5344CB8AC3E}">
-        <p14:creationId xmlns:p14="http://schemas.microsoft.com/office/powerpoint/2010/main" val="907217164"/>
+        <p14:creationId xmlns:p14="http://schemas.microsoft.com/office/powerpoint/2010/main" val="367831570"/>
       </p:ext>
     </p:extLst>
   </p:cSld>
@@ -3077,7 +3141,7 @@
           <p:cNvPr id="1" name="s11-rule">
             <a:extLst xmlns:a="http://schemas.openxmlformats.org/drawingml/2006/main">
               <a:ext uri="{FF2B5EF4-FFF2-40B4-BE49-F238E27FC236}">
-                <a16:creationId xmlns:a16="http://schemas.microsoft.com/office/drawing/2014/main" id="{1F77A2C3-6803-4BBD-BB5C-E28C1571EEB2}"/>
+                <a16:creationId xmlns:a16="http://schemas.microsoft.com/office/drawing/2014/main" id="{5F36F600-EF33-4C65-818F-99832EF3A5EC}"/>
               </a:ext>
             </a:extLst>
           </p:cNvPr>
@@ -3110,7 +3174,7 @@
           <p:cNvPr id="2" name="s11-eyebrow">
             <a:extLst xmlns:a="http://schemas.openxmlformats.org/drawingml/2006/main">
               <a:ext uri="{FF2B5EF4-FFF2-40B4-BE49-F238E27FC236}">
-                <a16:creationId xmlns:a16="http://schemas.microsoft.com/office/drawing/2014/main" id="{F9504B8B-4217-4722-BEAD-BC5AA7D6A975}"/>
+                <a16:creationId xmlns:a16="http://schemas.microsoft.com/office/drawing/2014/main" id="{11B37774-49AD-412A-91EE-E3131E421041}"/>
               </a:ext>
             </a:extLst>
           </p:cNvPr>
@@ -3168,7 +3232,7 @@
           <p:cNvPr id="3" name="s11-title">
             <a:extLst xmlns:a="http://schemas.openxmlformats.org/drawingml/2006/main">
               <a:ext uri="{FF2B5EF4-FFF2-40B4-BE49-F238E27FC236}">
-                <a16:creationId xmlns:a16="http://schemas.microsoft.com/office/drawing/2014/main" id="{33665F45-6A4A-4256-97C9-3B13CE82EBA2}"/>
+                <a16:creationId xmlns:a16="http://schemas.microsoft.com/office/drawing/2014/main" id="{D8798281-871E-4AEA-8115-FA7BA67E665F}"/>
               </a:ext>
             </a:extLst>
           </p:cNvPr>
@@ -3216,7 +3280,7 @@
                 <a:ea typeface="PingFang SC"/>
                 <a:cs typeface="PingFang SC"/>
               </a:rPr>
-              <a:t>把方法落实为可验证的行动</a:t>
+              <a:t>海洋与地理空间：一次可验收练习</a:t>
             </a:r>
           </a:p>
         </p:txBody>
@@ -3226,7 +3290,7 @@
           <p:cNvPr id="4" name="s11-footer">
             <a:extLst xmlns:a="http://schemas.openxmlformats.org/drawingml/2006/main">
               <a:ext uri="{FF2B5EF4-FFF2-40B4-BE49-F238E27FC236}">
-                <a16:creationId xmlns:a16="http://schemas.microsoft.com/office/drawing/2014/main" id="{2BC2B6A0-7D95-4B70-88DA-C153CB3FB15C}"/>
+                <a16:creationId xmlns:a16="http://schemas.microsoft.com/office/drawing/2014/main" id="{EC56B582-AAA5-4CA9-BAAE-3B4BCD29FA5F}"/>
               </a:ext>
             </a:extLst>
           </p:cNvPr>
@@ -3257,7 +3321,7 @@
           <p:cNvPr id="5" name="s11-identity">
             <a:extLst xmlns:a="http://schemas.openxmlformats.org/drawingml/2006/main">
               <a:ext uri="{FF2B5EF4-FFF2-40B4-BE49-F238E27FC236}">
-                <a16:creationId xmlns:a16="http://schemas.microsoft.com/office/drawing/2014/main" id="{961DFE9A-C684-440F-941B-AE148A0C7865}"/>
+                <a16:creationId xmlns:a16="http://schemas.microsoft.com/office/drawing/2014/main" id="{B24F0D09-06BF-4ECA-9019-8CFAA8130E29}"/>
               </a:ext>
             </a:extLst>
           </p:cNvPr>
@@ -3315,7 +3379,7 @@
           <p:cNvPr id="6" name="practice-circle-0">
             <a:extLst xmlns:a="http://schemas.openxmlformats.org/drawingml/2006/main">
               <a:ext uri="{FF2B5EF4-FFF2-40B4-BE49-F238E27FC236}">
-                <a16:creationId xmlns:a16="http://schemas.microsoft.com/office/drawing/2014/main" id="{12787A9E-7D2E-4922-B33E-BDF79434EF07}"/>
+                <a16:creationId xmlns:a16="http://schemas.microsoft.com/office/drawing/2014/main" id="{C4A288CB-A908-4CA2-959A-519A27D1B91B}"/>
               </a:ext>
             </a:extLst>
           </p:cNvPr>
@@ -3348,7 +3412,7 @@
           <p:cNvPr id="7" name="practice-number-0">
             <a:extLst xmlns:a="http://schemas.openxmlformats.org/drawingml/2006/main">
               <a:ext uri="{FF2B5EF4-FFF2-40B4-BE49-F238E27FC236}">
-                <a16:creationId xmlns:a16="http://schemas.microsoft.com/office/drawing/2014/main" id="{88301CC4-311B-4F75-AB3E-8C66490B94C3}"/>
+                <a16:creationId xmlns:a16="http://schemas.microsoft.com/office/drawing/2014/main" id="{6DFA505F-6A90-40AA-95C8-39916A403D42}"/>
               </a:ext>
             </a:extLst>
           </p:cNvPr>
@@ -3406,7 +3470,7 @@
           <p:cNvPr id="8" name="practice-item-0">
             <a:extLst xmlns:a="http://schemas.openxmlformats.org/drawingml/2006/main">
               <a:ext uri="{FF2B5EF4-FFF2-40B4-BE49-F238E27FC236}">
-                <a16:creationId xmlns:a16="http://schemas.microsoft.com/office/drawing/2014/main" id="{49814D11-05BF-49CD-99C2-771A1925576D}"/>
+                <a16:creationId xmlns:a16="http://schemas.microsoft.com/office/drawing/2014/main" id="{6B81BD38-F8EB-4890-83AD-8B1A0A11EF7C}"/>
               </a:ext>
             </a:extLst>
           </p:cNvPr>
@@ -3470,7 +3534,7 @@
           <p:cNvPr id="9" name="practice-connector-0">
             <a:extLst xmlns:a="http://schemas.openxmlformats.org/drawingml/2006/main">
               <a:ext uri="{FF2B5EF4-FFF2-40B4-BE49-F238E27FC236}">
-                <a16:creationId xmlns:a16="http://schemas.microsoft.com/office/drawing/2014/main" id="{AEFF7341-B133-4430-8BEA-5798BE42F0E8}"/>
+                <a16:creationId xmlns:a16="http://schemas.microsoft.com/office/drawing/2014/main" id="{EC0CCD3E-CC0F-484C-B737-C451FE7681EB}"/>
               </a:ext>
             </a:extLst>
           </p:cNvPr>
@@ -3490,7 +3554,7 @@
           <a:noFill xmlns:a="http://schemas.openxmlformats.org/drawingml/2006/main"/>
           <a:ln xmlns:a="http://schemas.openxmlformats.org/drawingml/2006/main" w="28575">
             <a:solidFill>
-              <a:srgbClr val="E5783F"/>
+              <a:srgbClr val="9A3F16"/>
             </a:solidFill>
             <a:prstDash val="solid"/>
           </a:ln>
@@ -3501,7 +3565,7 @@
           <p:cNvPr id="10" name="practice-circle-1">
             <a:extLst xmlns:a="http://schemas.openxmlformats.org/drawingml/2006/main">
               <a:ext uri="{FF2B5EF4-FFF2-40B4-BE49-F238E27FC236}">
-                <a16:creationId xmlns:a16="http://schemas.microsoft.com/office/drawing/2014/main" id="{A5AA485B-0DE0-49C4-8520-3A743C65FE3B}"/>
+                <a16:creationId xmlns:a16="http://schemas.microsoft.com/office/drawing/2014/main" id="{CDB4FD42-4124-4EA6-9C6F-1B82BFFB0C4D}"/>
               </a:ext>
             </a:extLst>
           </p:cNvPr>
@@ -3534,7 +3598,7 @@
           <p:cNvPr id="11" name="practice-number-1">
             <a:extLst xmlns:a="http://schemas.openxmlformats.org/drawingml/2006/main">
               <a:ext uri="{FF2B5EF4-FFF2-40B4-BE49-F238E27FC236}">
-                <a16:creationId xmlns:a16="http://schemas.microsoft.com/office/drawing/2014/main" id="{0AC0D0EC-FE18-4122-A286-0849E69D0346}"/>
+                <a16:creationId xmlns:a16="http://schemas.microsoft.com/office/drawing/2014/main" id="{64847978-2653-490F-B54B-205D8CCE18ED}"/>
               </a:ext>
             </a:extLst>
           </p:cNvPr>
@@ -3592,7 +3656,7 @@
           <p:cNvPr id="12" name="practice-item-1">
             <a:extLst xmlns:a="http://schemas.openxmlformats.org/drawingml/2006/main">
               <a:ext uri="{FF2B5EF4-FFF2-40B4-BE49-F238E27FC236}">
-                <a16:creationId xmlns:a16="http://schemas.microsoft.com/office/drawing/2014/main" id="{FE02623A-4E73-480C-A89C-D91CC703E229}"/>
+                <a16:creationId xmlns:a16="http://schemas.microsoft.com/office/drawing/2014/main" id="{E0352BCC-106C-4E1D-B3E4-E6C906B74B44}"/>
               </a:ext>
             </a:extLst>
           </p:cNvPr>
@@ -3656,7 +3720,7 @@
           <p:cNvPr id="13" name="practice-connector-1">
             <a:extLst xmlns:a="http://schemas.openxmlformats.org/drawingml/2006/main">
               <a:ext uri="{FF2B5EF4-FFF2-40B4-BE49-F238E27FC236}">
-                <a16:creationId xmlns:a16="http://schemas.microsoft.com/office/drawing/2014/main" id="{78FBC907-73AF-4C4E-ACBB-8355DA591E4C}"/>
+                <a16:creationId xmlns:a16="http://schemas.microsoft.com/office/drawing/2014/main" id="{2D666E8C-F60D-4780-810E-9F261A607906}"/>
               </a:ext>
             </a:extLst>
           </p:cNvPr>
@@ -3676,7 +3740,7 @@
           <a:noFill xmlns:a="http://schemas.openxmlformats.org/drawingml/2006/main"/>
           <a:ln xmlns:a="http://schemas.openxmlformats.org/drawingml/2006/main" w="28575">
             <a:solidFill>
-              <a:srgbClr val="E5783F"/>
+              <a:srgbClr val="9A3F16"/>
             </a:solidFill>
             <a:prstDash val="solid"/>
           </a:ln>
@@ -3687,7 +3751,7 @@
           <p:cNvPr id="14" name="practice-circle-2">
             <a:extLst xmlns:a="http://schemas.openxmlformats.org/drawingml/2006/main">
               <a:ext uri="{FF2B5EF4-FFF2-40B4-BE49-F238E27FC236}">
-                <a16:creationId xmlns:a16="http://schemas.microsoft.com/office/drawing/2014/main" id="{02E1FB4C-F2CE-4419-BFF9-C5A679C12DD9}"/>
+                <a16:creationId xmlns:a16="http://schemas.microsoft.com/office/drawing/2014/main" id="{78C23777-2A86-4A2D-825B-2A2C4EEA9176}"/>
               </a:ext>
             </a:extLst>
           </p:cNvPr>
@@ -3705,7 +3769,7 @@
             <a:avLst/>
           </a:prstGeom>
           <a:solidFill xmlns:a="http://schemas.openxmlformats.org/drawingml/2006/main">
-            <a:srgbClr val="E5783F"/>
+            <a:srgbClr val="9A3F16"/>
           </a:solidFill>
           <a:ln xmlns:a="http://schemas.openxmlformats.org/drawingml/2006/main" w="28575">
             <a:solidFill>
@@ -3720,7 +3784,7 @@
           <p:cNvPr id="15" name="practice-number-2">
             <a:extLst xmlns:a="http://schemas.openxmlformats.org/drawingml/2006/main">
               <a:ext uri="{FF2B5EF4-FFF2-40B4-BE49-F238E27FC236}">
-                <a16:creationId xmlns:a16="http://schemas.microsoft.com/office/drawing/2014/main" id="{B0272980-30DC-4426-A85E-34ACFA288871}"/>
+                <a16:creationId xmlns:a16="http://schemas.microsoft.com/office/drawing/2014/main" id="{677D3531-0257-4E24-A1A6-63F1070961AA}"/>
               </a:ext>
             </a:extLst>
           </p:cNvPr>
@@ -3778,7 +3842,7 @@
           <p:cNvPr id="16" name="practice-item-2">
             <a:extLst xmlns:a="http://schemas.openxmlformats.org/drawingml/2006/main">
               <a:ext uri="{FF2B5EF4-FFF2-40B4-BE49-F238E27FC236}">
-                <a16:creationId xmlns:a16="http://schemas.microsoft.com/office/drawing/2014/main" id="{D46AB800-B12F-4790-A300-4C95241450CF}"/>
+                <a16:creationId xmlns:a16="http://schemas.microsoft.com/office/drawing/2014/main" id="{E90B8941-322E-4026-8F56-E63B9A1A2315}"/>
               </a:ext>
             </a:extLst>
           </p:cNvPr>
@@ -3802,7 +3866,7 @@
           </a:solidFill>
           <a:ln xmlns:a="http://schemas.openxmlformats.org/drawingml/2006/main" w="19050">
             <a:solidFill>
-              <a:srgbClr val="E5783F"/>
+              <a:srgbClr val="9A3F16"/>
             </a:solidFill>
             <a:prstDash val="solid"/>
           </a:ln>
@@ -3840,7 +3904,7 @@
     </p:spTree>
     <p:extLst>
       <p:ext uri="{BB962C8B-B14F-4D97-AF65-F5344CB8AC3E}">
-        <p14:creationId xmlns:p14="http://schemas.microsoft.com/office/powerpoint/2010/main" val="970683601"/>
+        <p14:creationId xmlns:p14="http://schemas.microsoft.com/office/powerpoint/2010/main" val="702824744"/>
       </p:ext>
     </p:extLst>
   </p:cSld>
@@ -3871,7 +3935,7 @@
           <p:cNvPr id="1" name="s12-rule">
             <a:extLst xmlns:a="http://schemas.openxmlformats.org/drawingml/2006/main">
               <a:ext uri="{FF2B5EF4-FFF2-40B4-BE49-F238E27FC236}">
-                <a16:creationId xmlns:a16="http://schemas.microsoft.com/office/drawing/2014/main" id="{CF5E0F21-56B3-4394-AE40-3CE16B05502A}"/>
+                <a16:creationId xmlns:a16="http://schemas.microsoft.com/office/drawing/2014/main" id="{13F243CF-3698-42F5-9B0F-94939DA56AAE}"/>
               </a:ext>
             </a:extLst>
           </p:cNvPr>
@@ -3904,7 +3968,7 @@
           <p:cNvPr id="2" name="s12-eyebrow">
             <a:extLst xmlns:a="http://schemas.openxmlformats.org/drawingml/2006/main">
               <a:ext uri="{FF2B5EF4-FFF2-40B4-BE49-F238E27FC236}">
-                <a16:creationId xmlns:a16="http://schemas.microsoft.com/office/drawing/2014/main" id="{67384A73-6FFC-4875-BEBB-457A43180FEC}"/>
+                <a16:creationId xmlns:a16="http://schemas.microsoft.com/office/drawing/2014/main" id="{2DF44F6F-8F8E-4D2B-A746-97C69D407CDB}"/>
               </a:ext>
             </a:extLst>
           </p:cNvPr>
@@ -3962,7 +4026,7 @@
           <p:cNvPr id="3" name="s12-title">
             <a:extLst xmlns:a="http://schemas.openxmlformats.org/drawingml/2006/main">
               <a:ext uri="{FF2B5EF4-FFF2-40B4-BE49-F238E27FC236}">
-                <a16:creationId xmlns:a16="http://schemas.microsoft.com/office/drawing/2014/main" id="{69EF034F-47F5-4F4A-B143-8E7A607BFAED}"/>
+                <a16:creationId xmlns:a16="http://schemas.microsoft.com/office/drawing/2014/main" id="{87DC2022-E250-4147-A130-8CA91D9F4CFA}"/>
               </a:ext>
             </a:extLst>
           </p:cNvPr>
@@ -4010,7 +4074,7 @@
                 <a:ea typeface="PingFang SC"/>
                 <a:cs typeface="PingFang SC"/>
               </a:rPr>
-              <a:t>带走三条可复用的判断原则</a:t>
+              <a:t>海洋与地理空间：判断时先抓住三点</a:t>
             </a:r>
           </a:p>
         </p:txBody>
@@ -4020,7 +4084,7 @@
           <p:cNvPr id="4" name="s12-footer">
             <a:extLst xmlns:a="http://schemas.openxmlformats.org/drawingml/2006/main">
               <a:ext uri="{FF2B5EF4-FFF2-40B4-BE49-F238E27FC236}">
-                <a16:creationId xmlns:a16="http://schemas.microsoft.com/office/drawing/2014/main" id="{5988449E-D840-408A-A7D3-16432DC8A4D0}"/>
+                <a16:creationId xmlns:a16="http://schemas.microsoft.com/office/drawing/2014/main" id="{F4A0CDD6-EDB6-43B9-9085-C8EAF3090235}"/>
               </a:ext>
             </a:extLst>
           </p:cNvPr>
@@ -4051,7 +4115,7 @@
           <p:cNvPr id="5" name="s12-identity">
             <a:extLst xmlns:a="http://schemas.openxmlformats.org/drawingml/2006/main">
               <a:ext uri="{FF2B5EF4-FFF2-40B4-BE49-F238E27FC236}">
-                <a16:creationId xmlns:a16="http://schemas.microsoft.com/office/drawing/2014/main" id="{188546BA-EFD1-437D-9572-B0225C9DB9F0}"/>
+                <a16:creationId xmlns:a16="http://schemas.microsoft.com/office/drawing/2014/main" id="{557BB487-C3F0-49A8-B684-AF8D16F4CB66}"/>
               </a:ext>
             </a:extLst>
           </p:cNvPr>
@@ -4109,7 +4173,7 @@
           <p:cNvPr id="6" name="recap-circle-0">
             <a:extLst xmlns:a="http://schemas.openxmlformats.org/drawingml/2006/main">
               <a:ext uri="{FF2B5EF4-FFF2-40B4-BE49-F238E27FC236}">
-                <a16:creationId xmlns:a16="http://schemas.microsoft.com/office/drawing/2014/main" id="{9CD18DF8-D702-44ED-805B-FEF0684C1AAF}"/>
+                <a16:creationId xmlns:a16="http://schemas.microsoft.com/office/drawing/2014/main" id="{DC239278-7353-451C-B41F-89B0E5BB951D}"/>
               </a:ext>
             </a:extLst>
           </p:cNvPr>
@@ -4142,7 +4206,7 @@
           <p:cNvPr id="7" name="recap-number-0">
             <a:extLst xmlns:a="http://schemas.openxmlformats.org/drawingml/2006/main">
               <a:ext uri="{FF2B5EF4-FFF2-40B4-BE49-F238E27FC236}">
-                <a16:creationId xmlns:a16="http://schemas.microsoft.com/office/drawing/2014/main" id="{8BA99F99-6246-41D9-A5CE-940E5D1E8246}"/>
+                <a16:creationId xmlns:a16="http://schemas.microsoft.com/office/drawing/2014/main" id="{E549C74F-5BC8-493B-8D95-1F9BABCBDAA1}"/>
               </a:ext>
             </a:extLst>
           </p:cNvPr>
@@ -4200,7 +4264,7 @@
           <p:cNvPr id="8" name="recap-item-0">
             <a:extLst xmlns:a="http://schemas.openxmlformats.org/drawingml/2006/main">
               <a:ext uri="{FF2B5EF4-FFF2-40B4-BE49-F238E27FC236}">
-                <a16:creationId xmlns:a16="http://schemas.microsoft.com/office/drawing/2014/main" id="{38DD33DC-105F-4ED7-8DA8-8D5FA6F1B320}"/>
+                <a16:creationId xmlns:a16="http://schemas.microsoft.com/office/drawing/2014/main" id="{78AF6659-D055-45F0-82D6-5A3BFD0FCBF0}"/>
               </a:ext>
             </a:extLst>
           </p:cNvPr>
@@ -4264,7 +4328,7 @@
           <p:cNvPr id="9" name="recap-connector-0">
             <a:extLst xmlns:a="http://schemas.openxmlformats.org/drawingml/2006/main">
               <a:ext uri="{FF2B5EF4-FFF2-40B4-BE49-F238E27FC236}">
-                <a16:creationId xmlns:a16="http://schemas.microsoft.com/office/drawing/2014/main" id="{9D77250E-B39B-4C57-B00D-00CA70FD5026}"/>
+                <a16:creationId xmlns:a16="http://schemas.microsoft.com/office/drawing/2014/main" id="{DEF9FB30-AE66-4183-A327-9640414D6BFC}"/>
               </a:ext>
             </a:extLst>
           </p:cNvPr>
@@ -4284,7 +4348,7 @@
           <a:noFill xmlns:a="http://schemas.openxmlformats.org/drawingml/2006/main"/>
           <a:ln xmlns:a="http://schemas.openxmlformats.org/drawingml/2006/main" w="28575">
             <a:solidFill>
-              <a:srgbClr val="E5783F"/>
+              <a:srgbClr val="9A3F16"/>
             </a:solidFill>
             <a:prstDash val="solid"/>
           </a:ln>
@@ -4295,7 +4359,7 @@
           <p:cNvPr id="10" name="recap-circle-1">
             <a:extLst xmlns:a="http://schemas.openxmlformats.org/drawingml/2006/main">
               <a:ext uri="{FF2B5EF4-FFF2-40B4-BE49-F238E27FC236}">
-                <a16:creationId xmlns:a16="http://schemas.microsoft.com/office/drawing/2014/main" id="{1E48A0EB-E80C-462C-98DD-C08070697BCC}"/>
+                <a16:creationId xmlns:a16="http://schemas.microsoft.com/office/drawing/2014/main" id="{DCE75D73-10E7-4D60-B834-56797A34F3DE}"/>
               </a:ext>
             </a:extLst>
           </p:cNvPr>
@@ -4328,7 +4392,7 @@
           <p:cNvPr id="11" name="recap-number-1">
             <a:extLst xmlns:a="http://schemas.openxmlformats.org/drawingml/2006/main">
               <a:ext uri="{FF2B5EF4-FFF2-40B4-BE49-F238E27FC236}">
-                <a16:creationId xmlns:a16="http://schemas.microsoft.com/office/drawing/2014/main" id="{086D7CFB-78FC-4F45-9975-AA1510E69A85}"/>
+                <a16:creationId xmlns:a16="http://schemas.microsoft.com/office/drawing/2014/main" id="{EA926F7D-7278-4C1C-8630-65ECCC727962}"/>
               </a:ext>
             </a:extLst>
           </p:cNvPr>
@@ -4386,7 +4450,7 @@
           <p:cNvPr id="12" name="recap-item-1">
             <a:extLst xmlns:a="http://schemas.openxmlformats.org/drawingml/2006/main">
               <a:ext uri="{FF2B5EF4-FFF2-40B4-BE49-F238E27FC236}">
-                <a16:creationId xmlns:a16="http://schemas.microsoft.com/office/drawing/2014/main" id="{EB6CC10F-5CF4-458B-815B-2540EE5A71E9}"/>
+                <a16:creationId xmlns:a16="http://schemas.microsoft.com/office/drawing/2014/main" id="{F39DC2DF-AC3D-477C-AF04-08FF6A86E148}"/>
               </a:ext>
             </a:extLst>
           </p:cNvPr>
@@ -4450,7 +4514,7 @@
           <p:cNvPr id="13" name="recap-connector-1">
             <a:extLst xmlns:a="http://schemas.openxmlformats.org/drawingml/2006/main">
               <a:ext uri="{FF2B5EF4-FFF2-40B4-BE49-F238E27FC236}">
-                <a16:creationId xmlns:a16="http://schemas.microsoft.com/office/drawing/2014/main" id="{F2C291D1-1802-4F9C-854D-674EFC58CED6}"/>
+                <a16:creationId xmlns:a16="http://schemas.microsoft.com/office/drawing/2014/main" id="{F1E08DE4-6365-4BB0-9089-2CD796F6DD23}"/>
               </a:ext>
             </a:extLst>
           </p:cNvPr>
@@ -4470,7 +4534,7 @@
           <a:noFill xmlns:a="http://schemas.openxmlformats.org/drawingml/2006/main"/>
           <a:ln xmlns:a="http://schemas.openxmlformats.org/drawingml/2006/main" w="28575">
             <a:solidFill>
-              <a:srgbClr val="E5783F"/>
+              <a:srgbClr val="9A3F16"/>
             </a:solidFill>
             <a:prstDash val="solid"/>
           </a:ln>
@@ -4481,7 +4545,7 @@
           <p:cNvPr id="14" name="recap-circle-2">
             <a:extLst xmlns:a="http://schemas.openxmlformats.org/drawingml/2006/main">
               <a:ext uri="{FF2B5EF4-FFF2-40B4-BE49-F238E27FC236}">
-                <a16:creationId xmlns:a16="http://schemas.microsoft.com/office/drawing/2014/main" id="{E204555E-4523-4E85-A007-914463C42516}"/>
+                <a16:creationId xmlns:a16="http://schemas.microsoft.com/office/drawing/2014/main" id="{1A9DF142-9B70-415F-93A6-7C7D23113AC2}"/>
               </a:ext>
             </a:extLst>
           </p:cNvPr>
@@ -4499,7 +4563,7 @@
             <a:avLst/>
           </a:prstGeom>
           <a:solidFill xmlns:a="http://schemas.openxmlformats.org/drawingml/2006/main">
-            <a:srgbClr val="E5783F"/>
+            <a:srgbClr val="9A3F16"/>
           </a:solidFill>
           <a:ln xmlns:a="http://schemas.openxmlformats.org/drawingml/2006/main" w="28575">
             <a:solidFill>
@@ -4514,7 +4578,7 @@
           <p:cNvPr id="15" name="recap-number-2">
             <a:extLst xmlns:a="http://schemas.openxmlformats.org/drawingml/2006/main">
               <a:ext uri="{FF2B5EF4-FFF2-40B4-BE49-F238E27FC236}">
-                <a16:creationId xmlns:a16="http://schemas.microsoft.com/office/drawing/2014/main" id="{D6258753-BCCB-4BDB-836A-8B90C2C42004}"/>
+                <a16:creationId xmlns:a16="http://schemas.microsoft.com/office/drawing/2014/main" id="{FBE235BD-AA57-42B2-80FB-1A39DD61C5BB}"/>
               </a:ext>
             </a:extLst>
           </p:cNvPr>
@@ -4572,7 +4636,7 @@
           <p:cNvPr id="16" name="recap-item-2">
             <a:extLst xmlns:a="http://schemas.openxmlformats.org/drawingml/2006/main">
               <a:ext uri="{FF2B5EF4-FFF2-40B4-BE49-F238E27FC236}">
-                <a16:creationId xmlns:a16="http://schemas.microsoft.com/office/drawing/2014/main" id="{97FB349D-CAAF-48A6-AD31-AF7617F35C57}"/>
+                <a16:creationId xmlns:a16="http://schemas.microsoft.com/office/drawing/2014/main" id="{A4F28B7F-AE7C-4D56-916C-317A7C215849}"/>
               </a:ext>
             </a:extLst>
           </p:cNvPr>
@@ -4596,7 +4660,7 @@
           </a:solidFill>
           <a:ln xmlns:a="http://schemas.openxmlformats.org/drawingml/2006/main" w="19050">
             <a:solidFill>
-              <a:srgbClr val="E5783F"/>
+              <a:srgbClr val="9A3F16"/>
             </a:solidFill>
             <a:prstDash val="solid"/>
           </a:ln>
@@ -4634,7 +4698,7 @@
     </p:spTree>
     <p:extLst>
       <p:ext uri="{BB962C8B-B14F-4D97-AF65-F5344CB8AC3E}">
-        <p14:creationId xmlns:p14="http://schemas.microsoft.com/office/powerpoint/2010/main" val="1095989899"/>
+        <p14:creationId xmlns:p14="http://schemas.microsoft.com/office/powerpoint/2010/main" val="628588644"/>
       </p:ext>
     </p:extLst>
   </p:cSld>
@@ -4665,7 +4729,7 @@
           <p:cNvPr id="1" name="s13-rule">
             <a:extLst xmlns:a="http://schemas.openxmlformats.org/drawingml/2006/main">
               <a:ext uri="{FF2B5EF4-FFF2-40B4-BE49-F238E27FC236}">
-                <a16:creationId xmlns:a16="http://schemas.microsoft.com/office/drawing/2014/main" id="{B8E31573-1BD8-419B-84A4-5A0965881481}"/>
+                <a16:creationId xmlns:a16="http://schemas.microsoft.com/office/drawing/2014/main" id="{5FB56BC3-4BA0-4D22-B557-9AB6811A8270}"/>
               </a:ext>
             </a:extLst>
           </p:cNvPr>
@@ -4698,7 +4762,7 @@
           <p:cNvPr id="2" name="s13-eyebrow">
             <a:extLst xmlns:a="http://schemas.openxmlformats.org/drawingml/2006/main">
               <a:ext uri="{FF2B5EF4-FFF2-40B4-BE49-F238E27FC236}">
-                <a16:creationId xmlns:a16="http://schemas.microsoft.com/office/drawing/2014/main" id="{B716DD74-7FA6-47D6-92D9-6177F7FB1536}"/>
+                <a16:creationId xmlns:a16="http://schemas.microsoft.com/office/drawing/2014/main" id="{5BB48847-3DF1-4958-9C08-9F5AC63F7119}"/>
               </a:ext>
             </a:extLst>
           </p:cNvPr>
@@ -4756,7 +4820,7 @@
           <p:cNvPr id="3" name="s13-title">
             <a:extLst xmlns:a="http://schemas.openxmlformats.org/drawingml/2006/main">
               <a:ext uri="{FF2B5EF4-FFF2-40B4-BE49-F238E27FC236}">
-                <a16:creationId xmlns:a16="http://schemas.microsoft.com/office/drawing/2014/main" id="{14A4BAB3-5CB3-4921-B195-3D9713E46721}"/>
+                <a16:creationId xmlns:a16="http://schemas.microsoft.com/office/drawing/2014/main" id="{8BAD1E0E-1354-433C-9BE2-34B7380A27F3}"/>
               </a:ext>
             </a:extLst>
           </p:cNvPr>
@@ -4804,7 +4868,7 @@
                 <a:ea typeface="PingFang SC"/>
                 <a:cs typeface="PingFang SC"/>
               </a:rPr>
-              <a:t>从公开重制课件回到可核对的学习资料</a:t>
+              <a:t>海洋与地理空间：依据、边界与延伸</a:t>
             </a:r>
           </a:p>
         </p:txBody>
@@ -4814,7 +4878,7 @@
           <p:cNvPr id="4" name="s13-footer">
             <a:extLst xmlns:a="http://schemas.openxmlformats.org/drawingml/2006/main">
               <a:ext uri="{FF2B5EF4-FFF2-40B4-BE49-F238E27FC236}">
-                <a16:creationId xmlns:a16="http://schemas.microsoft.com/office/drawing/2014/main" id="{EE6DDD21-EDAA-497C-8F12-C473DA9822CE}"/>
+                <a16:creationId xmlns:a16="http://schemas.microsoft.com/office/drawing/2014/main" id="{73AF0B1B-BB42-47BC-932C-58B7A6DCFA22}"/>
               </a:ext>
             </a:extLst>
           </p:cNvPr>
@@ -4845,7 +4909,7 @@
           <p:cNvPr id="5" name="s13-identity">
             <a:extLst xmlns:a="http://schemas.openxmlformats.org/drawingml/2006/main">
               <a:ext uri="{FF2B5EF4-FFF2-40B4-BE49-F238E27FC236}">
-                <a16:creationId xmlns:a16="http://schemas.microsoft.com/office/drawing/2014/main" id="{D2150A23-5486-466A-A3C8-82DA85CDCF3F}"/>
+                <a16:creationId xmlns:a16="http://schemas.microsoft.com/office/drawing/2014/main" id="{4AF3CDF7-02DC-4676-B09A-96A7D5261DC9}"/>
               </a:ext>
             </a:extLst>
           </p:cNvPr>
@@ -4903,7 +4967,7 @@
           <p:cNvPr id="6" name="source-0">
             <a:extLst xmlns:a="http://schemas.openxmlformats.org/drawingml/2006/main">
               <a:ext uri="{FF2B5EF4-FFF2-40B4-BE49-F238E27FC236}">
-                <a16:creationId xmlns:a16="http://schemas.microsoft.com/office/drawing/2014/main" id="{8F4F282D-5848-4F0B-9672-65C0606D9C21}"/>
+                <a16:creationId xmlns:a16="http://schemas.microsoft.com/office/drawing/2014/main" id="{B51EB5A4-922D-4A2E-A726-2E3012BA2CC3}"/>
               </a:ext>
             </a:extLst>
           </p:cNvPr>
@@ -4927,7 +4991,7 @@
           </a:solidFill>
           <a:ln xmlns:a="http://schemas.openxmlformats.org/drawingml/2006/main" w="9525">
             <a:solidFill>
-              <a:srgbClr val="E5783F"/>
+              <a:srgbClr val="9A3F16"/>
             </a:solidFill>
             <a:prstDash val="solid"/>
           </a:ln>
@@ -4967,7 +5031,7 @@
           <p:cNvPr id="7" name="source-1">
             <a:extLst xmlns:a="http://schemas.openxmlformats.org/drawingml/2006/main">
               <a:ext uri="{FF2B5EF4-FFF2-40B4-BE49-F238E27FC236}">
-                <a16:creationId xmlns:a16="http://schemas.microsoft.com/office/drawing/2014/main" id="{ABCDAA95-21F5-4127-B959-41E8A22BC52E}"/>
+                <a16:creationId xmlns:a16="http://schemas.microsoft.com/office/drawing/2014/main" id="{19F0A0F9-490E-401A-AF5C-FC53D780CE07}"/>
               </a:ext>
             </a:extLst>
           </p:cNvPr>
@@ -5031,7 +5095,7 @@
           <p:cNvPr id="8" name="source-2">
             <a:extLst xmlns:a="http://schemas.openxmlformats.org/drawingml/2006/main">
               <a:ext uri="{FF2B5EF4-FFF2-40B4-BE49-F238E27FC236}">
-                <a16:creationId xmlns:a16="http://schemas.microsoft.com/office/drawing/2014/main" id="{A87DF6EA-9261-4DDC-8C80-EA80523114DC}"/>
+                <a16:creationId xmlns:a16="http://schemas.microsoft.com/office/drawing/2014/main" id="{0FAD3F7F-9974-46FF-8F75-63C61D4E6FC2}"/>
               </a:ext>
             </a:extLst>
           </p:cNvPr>
@@ -5095,7 +5159,7 @@
           <p:cNvPr id="9" name="source-3">
             <a:extLst xmlns:a="http://schemas.openxmlformats.org/drawingml/2006/main">
               <a:ext uri="{FF2B5EF4-FFF2-40B4-BE49-F238E27FC236}">
-                <a16:creationId xmlns:a16="http://schemas.microsoft.com/office/drawing/2014/main" id="{32BF5AAE-EDF0-4D06-A393-18B94AA26A61}"/>
+                <a16:creationId xmlns:a16="http://schemas.microsoft.com/office/drawing/2014/main" id="{19DD1B76-6F3A-4255-A76D-77ACD7742FEC}"/>
               </a:ext>
             </a:extLst>
           </p:cNvPr>
@@ -5159,7 +5223,7 @@
           <p:cNvPr id="10" name="source-4">
             <a:extLst xmlns:a="http://schemas.openxmlformats.org/drawingml/2006/main">
               <a:ext uri="{FF2B5EF4-FFF2-40B4-BE49-F238E27FC236}">
-                <a16:creationId xmlns:a16="http://schemas.microsoft.com/office/drawing/2014/main" id="{A3A07F2B-7356-4D5F-BE94-164101961ED5}"/>
+                <a16:creationId xmlns:a16="http://schemas.microsoft.com/office/drawing/2014/main" id="{E940332F-81C4-4CAD-8EDD-DDCC7DAF7800}"/>
               </a:ext>
             </a:extLst>
           </p:cNvPr>
@@ -5223,7 +5287,7 @@
           <p:cNvPr id="11" name="s13-takeaway-rule">
             <a:extLst xmlns:a="http://schemas.openxmlformats.org/drawingml/2006/main">
               <a:ext uri="{FF2B5EF4-FFF2-40B4-BE49-F238E27FC236}">
-                <a16:creationId xmlns:a16="http://schemas.microsoft.com/office/drawing/2014/main" id="{BB96FB5D-4493-49C5-935A-0F46F6BD367E}"/>
+                <a16:creationId xmlns:a16="http://schemas.microsoft.com/office/drawing/2014/main" id="{D4CE4993-A6C8-4284-9BAA-25467CDB0AFD}"/>
               </a:ext>
             </a:extLst>
           </p:cNvPr>
@@ -5256,7 +5320,7 @@
           <p:cNvPr id="12" name="s13-takeaway">
             <a:extLst xmlns:a="http://schemas.openxmlformats.org/drawingml/2006/main">
               <a:ext uri="{FF2B5EF4-FFF2-40B4-BE49-F238E27FC236}">
-                <a16:creationId xmlns:a16="http://schemas.microsoft.com/office/drawing/2014/main" id="{D52E7676-CD8D-438B-9C59-F6FA2FC27220}"/>
+                <a16:creationId xmlns:a16="http://schemas.microsoft.com/office/drawing/2014/main" id="{901B0520-3C12-4592-A20F-74747C999BFC}"/>
               </a:ext>
             </a:extLst>
           </p:cNvPr>
@@ -5312,7 +5376,7 @@
     </p:spTree>
     <p:extLst>
       <p:ext uri="{BB962C8B-B14F-4D97-AF65-F5344CB8AC3E}">
-        <p14:creationId xmlns:p14="http://schemas.microsoft.com/office/powerpoint/2010/main" val="1860398641"/>
+        <p14:creationId xmlns:p14="http://schemas.microsoft.com/office/powerpoint/2010/main" val="2097108998"/>
       </p:ext>
     </p:extLst>
   </p:cSld>
@@ -5343,7 +5407,7 @@
           <p:cNvPr id="1" name="s2-rule">
             <a:extLst xmlns:a="http://schemas.openxmlformats.org/drawingml/2006/main">
               <a:ext uri="{FF2B5EF4-FFF2-40B4-BE49-F238E27FC236}">
-                <a16:creationId xmlns:a16="http://schemas.microsoft.com/office/drawing/2014/main" id="{9285CBCA-1394-48F3-BF24-AA1F9E9878EA}"/>
+                <a16:creationId xmlns:a16="http://schemas.microsoft.com/office/drawing/2014/main" id="{F416E69C-009A-4A00-946D-BBFBE453DC58}"/>
               </a:ext>
             </a:extLst>
           </p:cNvPr>
@@ -5376,7 +5440,7 @@
           <p:cNvPr id="2" name="s2-eyebrow">
             <a:extLst xmlns:a="http://schemas.openxmlformats.org/drawingml/2006/main">
               <a:ext uri="{FF2B5EF4-FFF2-40B4-BE49-F238E27FC236}">
-                <a16:creationId xmlns:a16="http://schemas.microsoft.com/office/drawing/2014/main" id="{9D8F3014-C25B-4862-9EEA-5FA8684B0D03}"/>
+                <a16:creationId xmlns:a16="http://schemas.microsoft.com/office/drawing/2014/main" id="{A2F6C728-4398-48B2-A62D-6A399C8F8E3A}"/>
               </a:ext>
             </a:extLst>
           </p:cNvPr>
@@ -5434,7 +5498,7 @@
           <p:cNvPr id="3" name="s2-title">
             <a:extLst xmlns:a="http://schemas.openxmlformats.org/drawingml/2006/main">
               <a:ext uri="{FF2B5EF4-FFF2-40B4-BE49-F238E27FC236}">
-                <a16:creationId xmlns:a16="http://schemas.microsoft.com/office/drawing/2014/main" id="{B7BA731D-F816-4FE6-80D0-804732F035E7}"/>
+                <a16:creationId xmlns:a16="http://schemas.microsoft.com/office/drawing/2014/main" id="{81AEECE4-579F-4EFC-B1D3-5918EA6E74B5}"/>
               </a:ext>
             </a:extLst>
           </p:cNvPr>
@@ -5482,7 +5546,7 @@
                 <a:ea typeface="PingFang SC"/>
                 <a:cs typeface="PingFang SC"/>
               </a:rPr>
-              <a:t>学完这一节，你能完成这些判断与行动</a:t>
+              <a:t>海洋与地理空间：4项学习结果</a:t>
             </a:r>
           </a:p>
         </p:txBody>
@@ -5492,7 +5556,7 @@
           <p:cNvPr id="4" name="s2-footer">
             <a:extLst xmlns:a="http://schemas.openxmlformats.org/drawingml/2006/main">
               <a:ext uri="{FF2B5EF4-FFF2-40B4-BE49-F238E27FC236}">
-                <a16:creationId xmlns:a16="http://schemas.microsoft.com/office/drawing/2014/main" id="{BF745161-E143-48CD-A3AA-8F861909D12B}"/>
+                <a16:creationId xmlns:a16="http://schemas.microsoft.com/office/drawing/2014/main" id="{39FE466F-6DDF-4DFD-A754-6F9ADE3C1026}"/>
               </a:ext>
             </a:extLst>
           </p:cNvPr>
@@ -5523,7 +5587,7 @@
           <p:cNvPr id="5" name="s2-identity">
             <a:extLst xmlns:a="http://schemas.openxmlformats.org/drawingml/2006/main">
               <a:ext uri="{FF2B5EF4-FFF2-40B4-BE49-F238E27FC236}">
-                <a16:creationId xmlns:a16="http://schemas.microsoft.com/office/drawing/2014/main" id="{1A3D6462-25AF-4126-98B9-B7B9DE712A72}"/>
+                <a16:creationId xmlns:a16="http://schemas.microsoft.com/office/drawing/2014/main" id="{5ADCE7AF-0DF5-48DF-B3E2-1B8BCC1C6F01}"/>
               </a:ext>
             </a:extLst>
           </p:cNvPr>
@@ -5581,7 +5645,7 @@
           <p:cNvPr id="6" name="objective-1">
             <a:extLst xmlns:a="http://schemas.openxmlformats.org/drawingml/2006/main">
               <a:ext uri="{FF2B5EF4-FFF2-40B4-BE49-F238E27FC236}">
-                <a16:creationId xmlns:a16="http://schemas.microsoft.com/office/drawing/2014/main" id="{3B55470E-656D-4323-A30A-AD0C1884DB8C}"/>
+                <a16:creationId xmlns:a16="http://schemas.microsoft.com/office/drawing/2014/main" id="{D03EADDA-DD65-47C1-84BE-C3143795B398}"/>
               </a:ext>
             </a:extLst>
           </p:cNvPr>
@@ -5668,7 +5732,7 @@
           <p:cNvPr id="7" name="objective-2">
             <a:extLst xmlns:a="http://schemas.openxmlformats.org/drawingml/2006/main">
               <a:ext uri="{FF2B5EF4-FFF2-40B4-BE49-F238E27FC236}">
-                <a16:creationId xmlns:a16="http://schemas.microsoft.com/office/drawing/2014/main" id="{CF67C0DC-0D01-49EC-B17F-E5E0BF626B1C}"/>
+                <a16:creationId xmlns:a16="http://schemas.microsoft.com/office/drawing/2014/main" id="{56BC816C-DBCB-4715-A4F2-3AA9240E9DEF}"/>
               </a:ext>
             </a:extLst>
           </p:cNvPr>
@@ -5755,7 +5819,7 @@
           <p:cNvPr id="8" name="objective-3">
             <a:extLst xmlns:a="http://schemas.openxmlformats.org/drawingml/2006/main">
               <a:ext uri="{FF2B5EF4-FFF2-40B4-BE49-F238E27FC236}">
-                <a16:creationId xmlns:a16="http://schemas.microsoft.com/office/drawing/2014/main" id="{5B180D89-5033-40B7-B23C-4DD25C58763D}"/>
+                <a16:creationId xmlns:a16="http://schemas.microsoft.com/office/drawing/2014/main" id="{4C4DDEDF-21BB-497A-A0CB-0E6E38F53CDF}"/>
               </a:ext>
             </a:extLst>
           </p:cNvPr>
@@ -5842,7 +5906,7 @@
           <p:cNvPr id="9" name="objective-4">
             <a:extLst xmlns:a="http://schemas.openxmlformats.org/drawingml/2006/main">
               <a:ext uri="{FF2B5EF4-FFF2-40B4-BE49-F238E27FC236}">
-                <a16:creationId xmlns:a16="http://schemas.microsoft.com/office/drawing/2014/main" id="{1B740B76-B672-4127-ABDD-8A900B44757A}"/>
+                <a16:creationId xmlns:a16="http://schemas.microsoft.com/office/drawing/2014/main" id="{8FDCCDBE-40F8-4F81-A2B6-2FF8D405B48D}"/>
               </a:ext>
             </a:extLst>
           </p:cNvPr>
@@ -5866,7 +5930,7 @@
           </a:solidFill>
           <a:ln xmlns:a="http://schemas.openxmlformats.org/drawingml/2006/main" w="19050">
             <a:solidFill>
-              <a:srgbClr val="E5783F"/>
+              <a:srgbClr val="9A3F16"/>
             </a:solidFill>
             <a:prstDash val="solid"/>
           </a:ln>
@@ -5927,7 +5991,7 @@
     </p:spTree>
     <p:extLst>
       <p:ext uri="{BB962C8B-B14F-4D97-AF65-F5344CB8AC3E}">
-        <p14:creationId xmlns:p14="http://schemas.microsoft.com/office/powerpoint/2010/main" val="2120870820"/>
+        <p14:creationId xmlns:p14="http://schemas.microsoft.com/office/powerpoint/2010/main" val="1969238848"/>
       </p:ext>
     </p:extLst>
   </p:cSld>
@@ -5958,7 +6022,7 @@
           <p:cNvPr id="1" name="s3-rule">
             <a:extLst xmlns:a="http://schemas.openxmlformats.org/drawingml/2006/main">
               <a:ext uri="{FF2B5EF4-FFF2-40B4-BE49-F238E27FC236}">
-                <a16:creationId xmlns:a16="http://schemas.microsoft.com/office/drawing/2014/main" id="{1EFA06B9-B476-48D5-AAED-1D98D329C61D}"/>
+                <a16:creationId xmlns:a16="http://schemas.microsoft.com/office/drawing/2014/main" id="{2822F37A-3B80-4B09-9FBA-82A760CFDE97}"/>
               </a:ext>
             </a:extLst>
           </p:cNvPr>
@@ -5991,7 +6055,7 @@
           <p:cNvPr id="2" name="s3-eyebrow">
             <a:extLst xmlns:a="http://schemas.openxmlformats.org/drawingml/2006/main">
               <a:ext uri="{FF2B5EF4-FFF2-40B4-BE49-F238E27FC236}">
-                <a16:creationId xmlns:a16="http://schemas.microsoft.com/office/drawing/2014/main" id="{5356EF35-DC86-4B0D-B939-D4A8F9A23D8F}"/>
+                <a16:creationId xmlns:a16="http://schemas.microsoft.com/office/drawing/2014/main" id="{8B0E93C9-51A6-4D5D-A6B7-6EF8B7423BE7}"/>
               </a:ext>
             </a:extLst>
           </p:cNvPr>
@@ -6049,7 +6113,7 @@
           <p:cNvPr id="3" name="s3-title">
             <a:extLst xmlns:a="http://schemas.openxmlformats.org/drawingml/2006/main">
               <a:ext uri="{FF2B5EF4-FFF2-40B4-BE49-F238E27FC236}">
-                <a16:creationId xmlns:a16="http://schemas.microsoft.com/office/drawing/2014/main" id="{8BFF956C-C906-42EA-8653-2F1C5BA38160}"/>
+                <a16:creationId xmlns:a16="http://schemas.microsoft.com/office/drawing/2014/main" id="{1D003EC7-2DA6-4F60-984E-CEDDDAFEBCBA}"/>
               </a:ext>
             </a:extLst>
           </p:cNvPr>
@@ -6107,7 +6171,7 @@
           <p:cNvPr id="4" name="s3-footer">
             <a:extLst xmlns:a="http://schemas.openxmlformats.org/drawingml/2006/main">
               <a:ext uri="{FF2B5EF4-FFF2-40B4-BE49-F238E27FC236}">
-                <a16:creationId xmlns:a16="http://schemas.microsoft.com/office/drawing/2014/main" id="{349D7A83-923F-44EB-9E4A-B0F1384CA20E}"/>
+                <a16:creationId xmlns:a16="http://schemas.microsoft.com/office/drawing/2014/main" id="{D9897FEF-0A28-4022-9140-6F004A960146}"/>
               </a:ext>
             </a:extLst>
           </p:cNvPr>
@@ -6138,7 +6202,7 @@
           <p:cNvPr id="5" name="s3-identity">
             <a:extLst xmlns:a="http://schemas.openxmlformats.org/drawingml/2006/main">
               <a:ext uri="{FF2B5EF4-FFF2-40B4-BE49-F238E27FC236}">
-                <a16:creationId xmlns:a16="http://schemas.microsoft.com/office/drawing/2014/main" id="{09D4B95D-22A2-4348-AF3B-9D834B650D63}"/>
+                <a16:creationId xmlns:a16="http://schemas.microsoft.com/office/drawing/2014/main" id="{850B2D2C-B393-4EEF-A95B-16DE05234F62}"/>
               </a:ext>
             </a:extLst>
           </p:cNvPr>
@@ -6196,7 +6260,7 @@
           <p:cNvPr id="6" name="core-no-0">
             <a:extLst xmlns:a="http://schemas.openxmlformats.org/drawingml/2006/main">
               <a:ext uri="{FF2B5EF4-FFF2-40B4-BE49-F238E27FC236}">
-                <a16:creationId xmlns:a16="http://schemas.microsoft.com/office/drawing/2014/main" id="{BC23F76E-4859-49C8-A040-421A127DF919}"/>
+                <a16:creationId xmlns:a16="http://schemas.microsoft.com/office/drawing/2014/main" id="{A098B231-062A-4D20-90AA-58D1E6D9FCA0}"/>
               </a:ext>
             </a:extLst>
           </p:cNvPr>
@@ -6228,7 +6292,7 @@
             <a:pPr algn="l">
               <a:defRPr sz="2250" b="1">
                 <a:solidFill>
-                  <a:srgbClr val="E5783F"/>
+                  <a:srgbClr val="9A3F16"/>
                 </a:solidFill>
                 <a:latin typeface="PingFang SC"/>
                 <a:ea typeface="PingFang SC"/>
@@ -6238,7 +6302,7 @@
             <a:r>
               <a:rPr sz="2250" b="1">
                 <a:solidFill>
-                  <a:srgbClr val="E5783F"/>
+                  <a:srgbClr val="9A3F16"/>
                 </a:solidFill>
                 <a:latin typeface="PingFang SC"/>
                 <a:ea typeface="PingFang SC"/>
@@ -6254,7 +6318,7 @@
           <p:cNvPr id="7" name="core-label-0">
             <a:extLst xmlns:a="http://schemas.openxmlformats.org/drawingml/2006/main">
               <a:ext uri="{FF2B5EF4-FFF2-40B4-BE49-F238E27FC236}">
-                <a16:creationId xmlns:a16="http://schemas.microsoft.com/office/drawing/2014/main" id="{AE827197-9149-4DA7-A53B-89A745ECB243}"/>
+                <a16:creationId xmlns:a16="http://schemas.microsoft.com/office/drawing/2014/main" id="{7B03422D-878B-4DBC-B8FB-1D6AD2DF0701}"/>
               </a:ext>
             </a:extLst>
           </p:cNvPr>
@@ -6312,7 +6376,7 @@
           <p:cNvPr id="8" name="core-body-0">
             <a:extLst xmlns:a="http://schemas.openxmlformats.org/drawingml/2006/main">
               <a:ext uri="{FF2B5EF4-FFF2-40B4-BE49-F238E27FC236}">
-                <a16:creationId xmlns:a16="http://schemas.microsoft.com/office/drawing/2014/main" id="{BC12958A-512F-48A6-B665-125CD7EE28C2}"/>
+                <a16:creationId xmlns:a16="http://schemas.microsoft.com/office/drawing/2014/main" id="{6CB4C36A-08AE-4900-AD90-F531F88814B4}"/>
               </a:ext>
             </a:extLst>
           </p:cNvPr>
@@ -6336,14 +6400,14 @@
           </a:solidFill>
           <a:ln xmlns:a="http://schemas.openxmlformats.org/drawingml/2006/main" w="19050">
             <a:solidFill>
-              <a:srgbClr val="E5783F"/>
+              <a:srgbClr val="9A3F16"/>
             </a:solidFill>
             <a:prstDash val="solid"/>
           </a:ln>
         </p:spPr>
         <p:txBody>
           <a:bodyPr xmlns:a="http://schemas.openxmlformats.org/drawingml/2006/main" lIns="152400" tIns="133350" rIns="152400" bIns="133350" anchor="ctr">
-            <a:normAutofit fontScale="85261"/>
+            <a:normAutofit fontScale="90943"/>
           </a:bodyPr>
           <a:lstStyle xmlns:a="http://schemas.openxmlformats.org/drawingml/2006/main"/>
           <a:p xmlns:a="http://schemas.openxmlformats.org/drawingml/2006/main">
@@ -6366,7 +6430,7 @@
                 <a:ea typeface="PingFang SC"/>
                 <a:cs typeface="PingFang SC"/>
               </a:rPr>
-              <a:t>常见资料包括光学或雷达卫星遥感、航空与无人机影像、岸站与浮标、剖面观测、船舶位置与航迹、测深、海图、数值模式和再分析数据。每类数据都应有元数据：传感器、变量与单位、采集时间、空间分辨率…</a:t>
+              <a:t>常见资料包括光学或雷达卫星遥感、航空与无人机影像、岸站与浮标、剖面观测、船舶位置与航迹、测深、海图、数值模式和再分析数据；每类数据都应有元数据</a:t>
             </a:r>
           </a:p>
         </p:txBody>
@@ -6376,7 +6440,7 @@
           <p:cNvPr id="9" name="core-no-1">
             <a:extLst xmlns:a="http://schemas.openxmlformats.org/drawingml/2006/main">
               <a:ext uri="{FF2B5EF4-FFF2-40B4-BE49-F238E27FC236}">
-                <a16:creationId xmlns:a16="http://schemas.microsoft.com/office/drawing/2014/main" id="{19634677-1CCF-4438-A6E4-6C0041004F67}"/>
+                <a16:creationId xmlns:a16="http://schemas.microsoft.com/office/drawing/2014/main" id="{809EB5D1-B9C4-4E41-BD6C-95A2B2D74F35}"/>
               </a:ext>
             </a:extLst>
           </p:cNvPr>
@@ -6408,7 +6472,7 @@
             <a:pPr algn="l">
               <a:defRPr sz="2250" b="1">
                 <a:solidFill>
-                  <a:srgbClr val="E5783F"/>
+                  <a:srgbClr val="9A3F16"/>
                 </a:solidFill>
                 <a:latin typeface="PingFang SC"/>
                 <a:ea typeface="PingFang SC"/>
@@ -6418,7 +6482,7 @@
             <a:r>
               <a:rPr sz="2250" b="1">
                 <a:solidFill>
-                  <a:srgbClr val="E5783F"/>
+                  <a:srgbClr val="9A3F16"/>
                 </a:solidFill>
                 <a:latin typeface="PingFang SC"/>
                 <a:ea typeface="PingFang SC"/>
@@ -6434,7 +6498,7 @@
           <p:cNvPr id="10" name="core-body-1">
             <a:extLst xmlns:a="http://schemas.openxmlformats.org/drawingml/2006/main">
               <a:ext uri="{FF2B5EF4-FFF2-40B4-BE49-F238E27FC236}">
-                <a16:creationId xmlns:a16="http://schemas.microsoft.com/office/drawing/2014/main" id="{53D31A6E-B5CC-49A7-AE59-DC4C6F684BC2}"/>
+                <a16:creationId xmlns:a16="http://schemas.microsoft.com/office/drawing/2014/main" id="{D6F27893-BA1C-4293-94D0-107EAF03BAE6}"/>
               </a:ext>
             </a:extLst>
           </p:cNvPr>
@@ -6488,7 +6552,7 @@
                 <a:ea typeface="PingFang SC"/>
                 <a:cs typeface="PingFang SC"/>
               </a:rPr>
-              <a:t>遥感产品往往是经过校正或反演的结果，不等于直接测量目标量；现场观测也会受仪器漂移、维护和环境干扰。两类数据相互验证时，应考虑尺度是否匹配。例如…</a:t>
+              <a:t>遥感产品往往是经过校正或反演的结果；不等于直接测量目标量；现场观测也会受仪器漂移、维护和环境干扰；两类数据相互验证时；应考虑尺度是否匹配</a:t>
             </a:r>
           </a:p>
         </p:txBody>
@@ -6498,7 +6562,7 @@
           <p:cNvPr id="11" name="core-no-2">
             <a:extLst xmlns:a="http://schemas.openxmlformats.org/drawingml/2006/main">
               <a:ext uri="{FF2B5EF4-FFF2-40B4-BE49-F238E27FC236}">
-                <a16:creationId xmlns:a16="http://schemas.microsoft.com/office/drawing/2014/main" id="{CE87011F-D90D-4D6F-97EA-CE5280DC4EDB}"/>
+                <a16:creationId xmlns:a16="http://schemas.microsoft.com/office/drawing/2014/main" id="{B038FE4D-76A9-46B1-8C4D-63BD3692D726}"/>
               </a:ext>
             </a:extLst>
           </p:cNvPr>
@@ -6530,7 +6594,7 @@
             <a:pPr algn="l">
               <a:defRPr sz="2250" b="1">
                 <a:solidFill>
-                  <a:srgbClr val="E5783F"/>
+                  <a:srgbClr val="9A3F16"/>
                 </a:solidFill>
                 <a:latin typeface="PingFang SC"/>
                 <a:ea typeface="PingFang SC"/>
@@ -6540,7 +6604,7 @@
             <a:r>
               <a:rPr sz="2250" b="1">
                 <a:solidFill>
-                  <a:srgbClr val="E5783F"/>
+                  <a:srgbClr val="9A3F16"/>
                 </a:solidFill>
                 <a:latin typeface="PingFang SC"/>
                 <a:ea typeface="PingFang SC"/>
@@ -6556,7 +6620,7 @@
           <p:cNvPr id="12" name="core-body-2">
             <a:extLst xmlns:a="http://schemas.openxmlformats.org/drawingml/2006/main">
               <a:ext uri="{FF2B5EF4-FFF2-40B4-BE49-F238E27FC236}">
-                <a16:creationId xmlns:a16="http://schemas.microsoft.com/office/drawing/2014/main" id="{B2FF441D-0D9E-4C57-BE60-30C4AE19E8B4}"/>
+                <a16:creationId xmlns:a16="http://schemas.microsoft.com/office/drawing/2014/main" id="{912BAD41-CB57-4171-BCE1-B73FD7F390DF}"/>
               </a:ext>
             </a:extLst>
           </p:cNvPr>
@@ -6620,7 +6684,7 @@
           <p:cNvPr id="13" name="s3-takeaway-rule">
             <a:extLst xmlns:a="http://schemas.openxmlformats.org/drawingml/2006/main">
               <a:ext uri="{FF2B5EF4-FFF2-40B4-BE49-F238E27FC236}">
-                <a16:creationId xmlns:a16="http://schemas.microsoft.com/office/drawing/2014/main" id="{613713B4-53D8-4B49-96BD-F661484996C5}"/>
+                <a16:creationId xmlns:a16="http://schemas.microsoft.com/office/drawing/2014/main" id="{E4EA0AAE-FEE9-4C9E-BE5A-04F6DB151A49}"/>
               </a:ext>
             </a:extLst>
           </p:cNvPr>
@@ -6653,7 +6717,7 @@
           <p:cNvPr id="14" name="s3-takeaway">
             <a:extLst xmlns:a="http://schemas.openxmlformats.org/drawingml/2006/main">
               <a:ext uri="{FF2B5EF4-FFF2-40B4-BE49-F238E27FC236}">
-                <a16:creationId xmlns:a16="http://schemas.microsoft.com/office/drawing/2014/main" id="{64FA3BF3-F932-4654-8B9E-5F7F35460F6F}"/>
+                <a16:creationId xmlns:a16="http://schemas.microsoft.com/office/drawing/2014/main" id="{E4B6D153-F9CE-4BE7-AE8F-0E86408B14C3}"/>
               </a:ext>
             </a:extLst>
           </p:cNvPr>
@@ -6709,7 +6773,7 @@
     </p:spTree>
     <p:extLst>
       <p:ext uri="{BB962C8B-B14F-4D97-AF65-F5344CB8AC3E}">
-        <p14:creationId xmlns:p14="http://schemas.microsoft.com/office/powerpoint/2010/main" val="1769221303"/>
+        <p14:creationId xmlns:p14="http://schemas.microsoft.com/office/powerpoint/2010/main" val="573156704"/>
       </p:ext>
     </p:extLst>
   </p:cSld>
@@ -6740,7 +6804,7 @@
           <p:cNvPr id="1" name="s4-rule">
             <a:extLst xmlns:a="http://schemas.openxmlformats.org/drawingml/2006/main">
               <a:ext uri="{FF2B5EF4-FFF2-40B4-BE49-F238E27FC236}">
-                <a16:creationId xmlns:a16="http://schemas.microsoft.com/office/drawing/2014/main" id="{646E7FBF-55A5-4208-80AD-C1CF7D9D839F}"/>
+                <a16:creationId xmlns:a16="http://schemas.microsoft.com/office/drawing/2014/main" id="{9DC4D578-0620-4BC6-9155-D858DE064EB1}"/>
               </a:ext>
             </a:extLst>
           </p:cNvPr>
@@ -6773,7 +6837,7 @@
           <p:cNvPr id="2" name="s4-eyebrow">
             <a:extLst xmlns:a="http://schemas.openxmlformats.org/drawingml/2006/main">
               <a:ext uri="{FF2B5EF4-FFF2-40B4-BE49-F238E27FC236}">
-                <a16:creationId xmlns:a16="http://schemas.microsoft.com/office/drawing/2014/main" id="{B59724E1-E27B-4334-94EC-6E88600BFC69}"/>
+                <a16:creationId xmlns:a16="http://schemas.microsoft.com/office/drawing/2014/main" id="{5A44BF85-A16E-4EFC-85D2-1401B7A37E43}"/>
               </a:ext>
             </a:extLst>
           </p:cNvPr>
@@ -6831,7 +6895,7 @@
           <p:cNvPr id="3" name="s4-title">
             <a:extLst xmlns:a="http://schemas.openxmlformats.org/drawingml/2006/main">
               <a:ext uri="{FF2B5EF4-FFF2-40B4-BE49-F238E27FC236}">
-                <a16:creationId xmlns:a16="http://schemas.microsoft.com/office/drawing/2014/main" id="{822194C5-5490-48D6-A73B-E1FAA551908B}"/>
+                <a16:creationId xmlns:a16="http://schemas.microsoft.com/office/drawing/2014/main" id="{FD3A1D4B-C4C0-4F8E-AAE8-834787D9159B}"/>
               </a:ext>
             </a:extLst>
           </p:cNvPr>
@@ -6889,7 +6953,7 @@
           <p:cNvPr id="4" name="s4-footer">
             <a:extLst xmlns:a="http://schemas.openxmlformats.org/drawingml/2006/main">
               <a:ext uri="{FF2B5EF4-FFF2-40B4-BE49-F238E27FC236}">
-                <a16:creationId xmlns:a16="http://schemas.microsoft.com/office/drawing/2014/main" id="{64A6B44E-AD39-46BC-88D4-C3E2D874BE0C}"/>
+                <a16:creationId xmlns:a16="http://schemas.microsoft.com/office/drawing/2014/main" id="{6099CFD3-8702-4EB0-B210-BD09EC5CE975}"/>
               </a:ext>
             </a:extLst>
           </p:cNvPr>
@@ -6920,7 +6984,7 @@
           <p:cNvPr id="5" name="s4-identity">
             <a:extLst xmlns:a="http://schemas.openxmlformats.org/drawingml/2006/main">
               <a:ext uri="{FF2B5EF4-FFF2-40B4-BE49-F238E27FC236}">
-                <a16:creationId xmlns:a16="http://schemas.microsoft.com/office/drawing/2014/main" id="{94EE5869-199D-4568-A5C1-E7AABE979400}"/>
+                <a16:creationId xmlns:a16="http://schemas.microsoft.com/office/drawing/2014/main" id="{3E253936-241A-42D5-88D0-C55B72F2C9F2}"/>
               </a:ext>
             </a:extLst>
           </p:cNvPr>
@@ -6978,7 +7042,7 @@
           <p:cNvPr id="6" name="core-no-0">
             <a:extLst xmlns:a="http://schemas.openxmlformats.org/drawingml/2006/main">
               <a:ext uri="{FF2B5EF4-FFF2-40B4-BE49-F238E27FC236}">
-                <a16:creationId xmlns:a16="http://schemas.microsoft.com/office/drawing/2014/main" id="{CABCC633-675B-43FC-A6E9-34243934DE27}"/>
+                <a16:creationId xmlns:a16="http://schemas.microsoft.com/office/drawing/2014/main" id="{0C07785B-5B62-4F7E-8E53-EF28BF3B5AA7}"/>
               </a:ext>
             </a:extLst>
           </p:cNvPr>
@@ -7010,7 +7074,7 @@
             <a:pPr algn="l">
               <a:defRPr sz="2250" b="1">
                 <a:solidFill>
-                  <a:srgbClr val="E5783F"/>
+                  <a:srgbClr val="9A3F16"/>
                 </a:solidFill>
                 <a:latin typeface="PingFang SC"/>
                 <a:ea typeface="PingFang SC"/>
@@ -7020,7 +7084,7 @@
             <a:r>
               <a:rPr sz="2250" b="1">
                 <a:solidFill>
-                  <a:srgbClr val="E5783F"/>
+                  <a:srgbClr val="9A3F16"/>
                 </a:solidFill>
                 <a:latin typeface="PingFang SC"/>
                 <a:ea typeface="PingFang SC"/>
@@ -7036,7 +7100,7 @@
           <p:cNvPr id="7" name="core-label-0">
             <a:extLst xmlns:a="http://schemas.openxmlformats.org/drawingml/2006/main">
               <a:ext uri="{FF2B5EF4-FFF2-40B4-BE49-F238E27FC236}">
-                <a16:creationId xmlns:a16="http://schemas.microsoft.com/office/drawing/2014/main" id="{E525C53A-7A45-4567-A6C0-09B5960A96AE}"/>
+                <a16:creationId xmlns:a16="http://schemas.microsoft.com/office/drawing/2014/main" id="{4FF4C466-87A4-4833-B428-A24EE915A23E}"/>
               </a:ext>
             </a:extLst>
           </p:cNvPr>
@@ -7094,7 +7158,7 @@
           <p:cNvPr id="8" name="core-body-0">
             <a:extLst xmlns:a="http://schemas.openxmlformats.org/drawingml/2006/main">
               <a:ext uri="{FF2B5EF4-FFF2-40B4-BE49-F238E27FC236}">
-                <a16:creationId xmlns:a16="http://schemas.microsoft.com/office/drawing/2014/main" id="{22DAFF3B-A20E-4DC4-9739-61FCD1967F9C}"/>
+                <a16:creationId xmlns:a16="http://schemas.microsoft.com/office/drawing/2014/main" id="{B4CC9E0D-3101-43C4-8370-A631D5B72AAA}"/>
               </a:ext>
             </a:extLst>
           </p:cNvPr>
@@ -7118,7 +7182,7 @@
           </a:solidFill>
           <a:ln xmlns:a="http://schemas.openxmlformats.org/drawingml/2006/main" w="19050">
             <a:solidFill>
-              <a:srgbClr val="E5783F"/>
+              <a:srgbClr val="9A3F16"/>
             </a:solidFill>
             <a:prstDash val="solid"/>
           </a:ln>
@@ -7148,7 +7212,7 @@
                 <a:ea typeface="PingFang SC"/>
                 <a:cs typeface="PingFang SC"/>
               </a:rPr>
-              <a:t>空间数据可能采用不同坐标参考系、投影、网格与垂直基准。叠加前应明确转换方法，并保留原始坐标和精度。时间也要统一时区、观测时刻、汇总窗口和预报有效时间…</a:t>
+              <a:t>空间数据可能采用不同坐标参考系、投影、网格与垂直基准；叠加前应明确转换方法；并保留原始坐标和精度；时间也要统一时区、观测时刻、汇总窗口和预报有效时间</a:t>
             </a:r>
           </a:p>
         </p:txBody>
@@ -7158,7 +7222,7 @@
           <p:cNvPr id="9" name="core-no-1">
             <a:extLst xmlns:a="http://schemas.openxmlformats.org/drawingml/2006/main">
               <a:ext uri="{FF2B5EF4-FFF2-40B4-BE49-F238E27FC236}">
-                <a16:creationId xmlns:a16="http://schemas.microsoft.com/office/drawing/2014/main" id="{25BB1F0A-93A6-4DA7-BE84-4A6F2EE4D472}"/>
+                <a16:creationId xmlns:a16="http://schemas.microsoft.com/office/drawing/2014/main" id="{0D38F70B-2B36-46F7-86C5-8F7BA0AFC20A}"/>
               </a:ext>
             </a:extLst>
           </p:cNvPr>
@@ -7190,7 +7254,7 @@
             <a:pPr algn="l">
               <a:defRPr sz="2250" b="1">
                 <a:solidFill>
-                  <a:srgbClr val="E5783F"/>
+                  <a:srgbClr val="9A3F16"/>
                 </a:solidFill>
                 <a:latin typeface="PingFang SC"/>
                 <a:ea typeface="PingFang SC"/>
@@ -7200,7 +7264,7 @@
             <a:r>
               <a:rPr sz="2250" b="1">
                 <a:solidFill>
-                  <a:srgbClr val="E5783F"/>
+                  <a:srgbClr val="9A3F16"/>
                 </a:solidFill>
                 <a:latin typeface="PingFang SC"/>
                 <a:ea typeface="PingFang SC"/>
@@ -7216,7 +7280,7 @@
           <p:cNvPr id="10" name="core-body-1">
             <a:extLst xmlns:a="http://schemas.openxmlformats.org/drawingml/2006/main">
               <a:ext uri="{FF2B5EF4-FFF2-40B4-BE49-F238E27FC236}">
-                <a16:creationId xmlns:a16="http://schemas.microsoft.com/office/drawing/2014/main" id="{6C90B77B-8028-4F14-9F12-BB1E487EDE18}"/>
+                <a16:creationId xmlns:a16="http://schemas.microsoft.com/office/drawing/2014/main" id="{63DC052C-8E96-4B12-A02B-09E74530E724}"/>
               </a:ext>
             </a:extLst>
           </p:cNvPr>
@@ -7270,7 +7334,7 @@
                 <a:ea typeface="PingFang SC"/>
                 <a:cs typeface="PingFang SC"/>
               </a:rPr>
-              <a:t>缺测、云遮、岸线混合像元和传感器变化不应被静默填补。插值或生成式修复要标出方法与掩膜，让使用者区分观测值、估计值和不可用区域。数据目录还要记录处理链：裁剪、重采样、滤波…</a:t>
+              <a:t>缺测、云遮、岸线混合像元和传感器变化不应被静默填补；插值或生成式修复要标出方法与掩膜；让使用者区分观测值、估计值和不可用区域；数据目录还要记录处理链</a:t>
             </a:r>
           </a:p>
         </p:txBody>
@@ -7280,7 +7344,7 @@
           <p:cNvPr id="11" name="core-no-2">
             <a:extLst xmlns:a="http://schemas.openxmlformats.org/drawingml/2006/main">
               <a:ext uri="{FF2B5EF4-FFF2-40B4-BE49-F238E27FC236}">
-                <a16:creationId xmlns:a16="http://schemas.microsoft.com/office/drawing/2014/main" id="{58EF535D-9CB4-4664-819D-9B71DB317F93}"/>
+                <a16:creationId xmlns:a16="http://schemas.microsoft.com/office/drawing/2014/main" id="{F6D8EB21-1A0C-489D-8AAB-C22320DA9AE6}"/>
               </a:ext>
             </a:extLst>
           </p:cNvPr>
@@ -7312,7 +7376,7 @@
             <a:pPr algn="l">
               <a:defRPr sz="2250" b="1">
                 <a:solidFill>
-                  <a:srgbClr val="E5783F"/>
+                  <a:srgbClr val="9A3F16"/>
                 </a:solidFill>
                 <a:latin typeface="PingFang SC"/>
                 <a:ea typeface="PingFang SC"/>
@@ -7322,7 +7386,7 @@
             <a:r>
               <a:rPr sz="2250" b="1">
                 <a:solidFill>
-                  <a:srgbClr val="E5783F"/>
+                  <a:srgbClr val="9A3F16"/>
                 </a:solidFill>
                 <a:latin typeface="PingFang SC"/>
                 <a:ea typeface="PingFang SC"/>
@@ -7338,7 +7402,7 @@
           <p:cNvPr id="12" name="core-body-2">
             <a:extLst xmlns:a="http://schemas.openxmlformats.org/drawingml/2006/main">
               <a:ext uri="{FF2B5EF4-FFF2-40B4-BE49-F238E27FC236}">
-                <a16:creationId xmlns:a16="http://schemas.microsoft.com/office/drawing/2014/main" id="{795D95A1-40B8-4458-95D9-6B97CC592AAA}"/>
+                <a16:creationId xmlns:a16="http://schemas.microsoft.com/office/drawing/2014/main" id="{B3AB5975-BA9C-497F-A0CD-BE2937E39DC6}"/>
               </a:ext>
             </a:extLst>
           </p:cNvPr>
@@ -7402,7 +7466,7 @@
           <p:cNvPr id="13" name="s4-takeaway-rule">
             <a:extLst xmlns:a="http://schemas.openxmlformats.org/drawingml/2006/main">
               <a:ext uri="{FF2B5EF4-FFF2-40B4-BE49-F238E27FC236}">
-                <a16:creationId xmlns:a16="http://schemas.microsoft.com/office/drawing/2014/main" id="{DB73385D-BF02-4868-876E-F84AD30FB22C}"/>
+                <a16:creationId xmlns:a16="http://schemas.microsoft.com/office/drawing/2014/main" id="{D8A58710-8612-475A-A5D5-FE87D983602E}"/>
               </a:ext>
             </a:extLst>
           </p:cNvPr>
@@ -7435,7 +7499,7 @@
           <p:cNvPr id="14" name="s4-takeaway">
             <a:extLst xmlns:a="http://schemas.openxmlformats.org/drawingml/2006/main">
               <a:ext uri="{FF2B5EF4-FFF2-40B4-BE49-F238E27FC236}">
-                <a16:creationId xmlns:a16="http://schemas.microsoft.com/office/drawing/2014/main" id="{10004EE0-C1C7-4ED7-9088-7964EB462F35}"/>
+                <a16:creationId xmlns:a16="http://schemas.microsoft.com/office/drawing/2014/main" id="{DE3F66F0-7146-4B3C-BCDE-3CBF3F9CE3AD}"/>
               </a:ext>
             </a:extLst>
           </p:cNvPr>
@@ -7491,7 +7555,7 @@
     </p:spTree>
     <p:extLst>
       <p:ext uri="{BB962C8B-B14F-4D97-AF65-F5344CB8AC3E}">
-        <p14:creationId xmlns:p14="http://schemas.microsoft.com/office/powerpoint/2010/main" val="1956220497"/>
+        <p14:creationId xmlns:p14="http://schemas.microsoft.com/office/powerpoint/2010/main" val="1304490814"/>
       </p:ext>
     </p:extLst>
   </p:cSld>
@@ -7522,7 +7586,7 @@
           <p:cNvPr id="1" name="s5-rule">
             <a:extLst xmlns:a="http://schemas.openxmlformats.org/drawingml/2006/main">
               <a:ext uri="{FF2B5EF4-FFF2-40B4-BE49-F238E27FC236}">
-                <a16:creationId xmlns:a16="http://schemas.microsoft.com/office/drawing/2014/main" id="{F0E34277-29FE-45FF-B399-2353ADB0D347}"/>
+                <a16:creationId xmlns:a16="http://schemas.microsoft.com/office/drawing/2014/main" id="{9103F779-7F28-460D-8086-6E03E44F904C}"/>
               </a:ext>
             </a:extLst>
           </p:cNvPr>
@@ -7555,7 +7619,7 @@
           <p:cNvPr id="2" name="s5-eyebrow">
             <a:extLst xmlns:a="http://schemas.openxmlformats.org/drawingml/2006/main">
               <a:ext uri="{FF2B5EF4-FFF2-40B4-BE49-F238E27FC236}">
-                <a16:creationId xmlns:a16="http://schemas.microsoft.com/office/drawing/2014/main" id="{4F4B6630-A119-43EC-B883-BC04E340BC84}"/>
+                <a16:creationId xmlns:a16="http://schemas.microsoft.com/office/drawing/2014/main" id="{2A5F38AF-EFA3-47BC-9986-4A3A1DEBFED1}"/>
               </a:ext>
             </a:extLst>
           </p:cNvPr>
@@ -7613,7 +7677,7 @@
           <p:cNvPr id="3" name="s5-title">
             <a:extLst xmlns:a="http://schemas.openxmlformats.org/drawingml/2006/main">
               <a:ext uri="{FF2B5EF4-FFF2-40B4-BE49-F238E27FC236}">
-                <a16:creationId xmlns:a16="http://schemas.microsoft.com/office/drawing/2014/main" id="{09E68DF3-F357-4F98-BB88-CE7822CB6BB5}"/>
+                <a16:creationId xmlns:a16="http://schemas.microsoft.com/office/drawing/2014/main" id="{3A0CE244-C8F8-4D68-A595-8F9AAA966B70}"/>
               </a:ext>
             </a:extLst>
           </p:cNvPr>
@@ -7671,7 +7735,7 @@
           <p:cNvPr id="4" name="s5-footer">
             <a:extLst xmlns:a="http://schemas.openxmlformats.org/drawingml/2006/main">
               <a:ext uri="{FF2B5EF4-FFF2-40B4-BE49-F238E27FC236}">
-                <a16:creationId xmlns:a16="http://schemas.microsoft.com/office/drawing/2014/main" id="{1EF91E3B-380C-48D3-BA3E-9811E4EB592D}"/>
+                <a16:creationId xmlns:a16="http://schemas.microsoft.com/office/drawing/2014/main" id="{86D67274-D0AD-4486-888E-FEBE29445B63}"/>
               </a:ext>
             </a:extLst>
           </p:cNvPr>
@@ -7702,7 +7766,7 @@
           <p:cNvPr id="5" name="s5-identity">
             <a:extLst xmlns:a="http://schemas.openxmlformats.org/drawingml/2006/main">
               <a:ext uri="{FF2B5EF4-FFF2-40B4-BE49-F238E27FC236}">
-                <a16:creationId xmlns:a16="http://schemas.microsoft.com/office/drawing/2014/main" id="{DDECB0F1-9E81-422B-82B4-BA931848B11D}"/>
+                <a16:creationId xmlns:a16="http://schemas.microsoft.com/office/drawing/2014/main" id="{B150D4E4-81F9-4CD4-8EB0-9A648D31825F}"/>
               </a:ext>
             </a:extLst>
           </p:cNvPr>
@@ -7760,7 +7824,7 @@
           <p:cNvPr id="6" name="core-no-0">
             <a:extLst xmlns:a="http://schemas.openxmlformats.org/drawingml/2006/main">
               <a:ext uri="{FF2B5EF4-FFF2-40B4-BE49-F238E27FC236}">
-                <a16:creationId xmlns:a16="http://schemas.microsoft.com/office/drawing/2014/main" id="{831FBFDA-91D7-46DE-9648-981709949F99}"/>
+                <a16:creationId xmlns:a16="http://schemas.microsoft.com/office/drawing/2014/main" id="{AC1C972A-F730-48E1-80CE-821C9CDAA7F4}"/>
               </a:ext>
             </a:extLst>
           </p:cNvPr>
@@ -7792,7 +7856,7 @@
             <a:pPr algn="l">
               <a:defRPr sz="2250" b="1">
                 <a:solidFill>
-                  <a:srgbClr val="E5783F"/>
+                  <a:srgbClr val="9A3F16"/>
                 </a:solidFill>
                 <a:latin typeface="PingFang SC"/>
                 <a:ea typeface="PingFang SC"/>
@@ -7802,7 +7866,7 @@
             <a:r>
               <a:rPr sz="2250" b="1">
                 <a:solidFill>
-                  <a:srgbClr val="E5783F"/>
+                  <a:srgbClr val="9A3F16"/>
                 </a:solidFill>
                 <a:latin typeface="PingFang SC"/>
                 <a:ea typeface="PingFang SC"/>
@@ -7818,7 +7882,7 @@
           <p:cNvPr id="7" name="core-label-0">
             <a:extLst xmlns:a="http://schemas.openxmlformats.org/drawingml/2006/main">
               <a:ext uri="{FF2B5EF4-FFF2-40B4-BE49-F238E27FC236}">
-                <a16:creationId xmlns:a16="http://schemas.microsoft.com/office/drawing/2014/main" id="{4C6C9CC9-43D4-4C5C-BD97-CF6A90FA6798}"/>
+                <a16:creationId xmlns:a16="http://schemas.microsoft.com/office/drawing/2014/main" id="{C3538776-EBC3-4DBE-9D4A-C24CB21E9CF7}"/>
               </a:ext>
             </a:extLst>
           </p:cNvPr>
@@ -7876,7 +7940,7 @@
           <p:cNvPr id="8" name="core-body-0">
             <a:extLst xmlns:a="http://schemas.openxmlformats.org/drawingml/2006/main">
               <a:ext uri="{FF2B5EF4-FFF2-40B4-BE49-F238E27FC236}">
-                <a16:creationId xmlns:a16="http://schemas.microsoft.com/office/drawing/2014/main" id="{1389D6DE-ED80-4715-97E0-7EE5F748BFA6}"/>
+                <a16:creationId xmlns:a16="http://schemas.microsoft.com/office/drawing/2014/main" id="{FEEE11CD-FB20-4EBD-80F4-9FABABACCC74}"/>
               </a:ext>
             </a:extLst>
           </p:cNvPr>
@@ -7900,7 +7964,7 @@
           </a:solidFill>
           <a:ln xmlns:a="http://schemas.openxmlformats.org/drawingml/2006/main" w="19050">
             <a:solidFill>
-              <a:srgbClr val="E5783F"/>
+              <a:srgbClr val="9A3F16"/>
             </a:solidFill>
             <a:prstDash val="solid"/>
           </a:ln>
@@ -7930,7 +7994,7 @@
                 <a:ea typeface="PingFang SC"/>
                 <a:cs typeface="PingFang SC"/>
               </a:rPr>
-              <a:t>一个可复核架构可分为六层：数据目录保存元数据和权限；预处理服务完成质量检查与时空对齐；领域模型进行分类、预测或异常发现；工具层提供数据库查询、地理计算、统计和可视化；编排层根据任务调用工具…</a:t>
+              <a:t>一个可复核架构可分为六层；数据目录保存元数据和权限；预处理服务完成质量检查与时空对齐；领域模型进行分类、预测或异常发现；工具层提供数据库查询、地理计算、统计和可视化；编排层根据任务调用工具</a:t>
             </a:r>
           </a:p>
         </p:txBody>
@@ -7940,7 +8004,7 @@
           <p:cNvPr id="9" name="core-no-1">
             <a:extLst xmlns:a="http://schemas.openxmlformats.org/drawingml/2006/main">
               <a:ext uri="{FF2B5EF4-FFF2-40B4-BE49-F238E27FC236}">
-                <a16:creationId xmlns:a16="http://schemas.microsoft.com/office/drawing/2014/main" id="{DB592898-1509-4E51-827D-C6AF6E05E0A2}"/>
+                <a16:creationId xmlns:a16="http://schemas.microsoft.com/office/drawing/2014/main" id="{856F92D1-FE0E-46C5-9C53-84DE4E389AB4}"/>
               </a:ext>
             </a:extLst>
           </p:cNvPr>
@@ -7972,7 +8036,7 @@
             <a:pPr algn="l">
               <a:defRPr sz="2250" b="1">
                 <a:solidFill>
-                  <a:srgbClr val="E5783F"/>
+                  <a:srgbClr val="9A3F16"/>
                 </a:solidFill>
                 <a:latin typeface="PingFang SC"/>
                 <a:ea typeface="PingFang SC"/>
@@ -7982,7 +8046,7 @@
             <a:r>
               <a:rPr sz="2250" b="1">
                 <a:solidFill>
-                  <a:srgbClr val="E5783F"/>
+                  <a:srgbClr val="9A3F16"/>
                 </a:solidFill>
                 <a:latin typeface="PingFang SC"/>
                 <a:ea typeface="PingFang SC"/>
@@ -7998,7 +8062,7 @@
           <p:cNvPr id="10" name="core-body-1">
             <a:extLst xmlns:a="http://schemas.openxmlformats.org/drawingml/2006/main">
               <a:ext uri="{FF2B5EF4-FFF2-40B4-BE49-F238E27FC236}">
-                <a16:creationId xmlns:a16="http://schemas.microsoft.com/office/drawing/2014/main" id="{800BBFE3-E633-4FD8-AFA8-1D9EC32EA988}"/>
+                <a16:creationId xmlns:a16="http://schemas.microsoft.com/office/drawing/2014/main" id="{579C8C18-8A3C-4224-BE4C-8DADD0C5B908}"/>
               </a:ext>
             </a:extLst>
           </p:cNvPr>
@@ -8052,7 +8116,7 @@
                 <a:ea typeface="PingFang SC"/>
                 <a:cs typeface="PingFang SC"/>
               </a:rPr>
-              <a:t>大语言模型更适合解释任务、组织步骤、调用受控工具和撰写有依据的草稿，不应自行计算经纬度、猜测缺测值或虚构数据产品。关键计算由可重复运行的空间分析或科学模型完成，语言模型展示参数、结果路径和限制…</a:t>
+              <a:t>大语言模型更适合解释任务、组织步骤、调用受控工具和撰写有依据的草稿；不应自行计算经纬度、猜测缺测值或虚构数据产品；关键计算由可重复运行的空间分析或科学模型完成；语言模型展示参数、结果路径和限制</a:t>
             </a:r>
           </a:p>
         </p:txBody>
@@ -8062,7 +8126,7 @@
           <p:cNvPr id="11" name="s5-takeaway-rule">
             <a:extLst xmlns:a="http://schemas.openxmlformats.org/drawingml/2006/main">
               <a:ext uri="{FF2B5EF4-FFF2-40B4-BE49-F238E27FC236}">
-                <a16:creationId xmlns:a16="http://schemas.microsoft.com/office/drawing/2014/main" id="{21B76EA1-235D-45D7-B99F-C6F6ABCEB4A9}"/>
+                <a16:creationId xmlns:a16="http://schemas.microsoft.com/office/drawing/2014/main" id="{6A15B859-FD66-490A-8314-B74AF3FA46EA}"/>
               </a:ext>
             </a:extLst>
           </p:cNvPr>
@@ -8095,7 +8159,7 @@
           <p:cNvPr id="12" name="s5-takeaway">
             <a:extLst xmlns:a="http://schemas.openxmlformats.org/drawingml/2006/main">
               <a:ext uri="{FF2B5EF4-FFF2-40B4-BE49-F238E27FC236}">
-                <a16:creationId xmlns:a16="http://schemas.microsoft.com/office/drawing/2014/main" id="{624DD796-179C-4064-88E2-797E203BEE24}"/>
+                <a16:creationId xmlns:a16="http://schemas.microsoft.com/office/drawing/2014/main" id="{54FA856B-BC4E-4DB4-8270-3FC614E85E70}"/>
               </a:ext>
             </a:extLst>
           </p:cNvPr>
@@ -8151,7 +8215,7 @@
     </p:spTree>
     <p:extLst>
       <p:ext uri="{BB962C8B-B14F-4D97-AF65-F5344CB8AC3E}">
-        <p14:creationId xmlns:p14="http://schemas.microsoft.com/office/powerpoint/2010/main" val="717397182"/>
+        <p14:creationId xmlns:p14="http://schemas.microsoft.com/office/powerpoint/2010/main" val="1806620030"/>
       </p:ext>
     </p:extLst>
   </p:cSld>
@@ -8182,7 +8246,7 @@
           <p:cNvPr id="1" name="s6-rule">
             <a:extLst xmlns:a="http://schemas.openxmlformats.org/drawingml/2006/main">
               <a:ext uri="{FF2B5EF4-FFF2-40B4-BE49-F238E27FC236}">
-                <a16:creationId xmlns:a16="http://schemas.microsoft.com/office/drawing/2014/main" id="{3343E69D-823A-4747-AA8D-75671F6FB574}"/>
+                <a16:creationId xmlns:a16="http://schemas.microsoft.com/office/drawing/2014/main" id="{608BA9C8-0919-4631-A925-EB13DCB272EF}"/>
               </a:ext>
             </a:extLst>
           </p:cNvPr>
@@ -8215,7 +8279,7 @@
           <p:cNvPr id="2" name="s6-eyebrow">
             <a:extLst xmlns:a="http://schemas.openxmlformats.org/drawingml/2006/main">
               <a:ext uri="{FF2B5EF4-FFF2-40B4-BE49-F238E27FC236}">
-                <a16:creationId xmlns:a16="http://schemas.microsoft.com/office/drawing/2014/main" id="{F73EBA86-3822-4798-A896-19983A71853C}"/>
+                <a16:creationId xmlns:a16="http://schemas.microsoft.com/office/drawing/2014/main" id="{FE06B28F-065A-4F5E-BA6A-8A0452E88DCC}"/>
               </a:ext>
             </a:extLst>
           </p:cNvPr>
@@ -8273,7 +8337,7 @@
           <p:cNvPr id="3" name="s6-title">
             <a:extLst xmlns:a="http://schemas.openxmlformats.org/drawingml/2006/main">
               <a:ext uri="{FF2B5EF4-FFF2-40B4-BE49-F238E27FC236}">
-                <a16:creationId xmlns:a16="http://schemas.microsoft.com/office/drawing/2014/main" id="{28D30703-99CF-4A70-8B69-72829A63B2A2}"/>
+                <a16:creationId xmlns:a16="http://schemas.microsoft.com/office/drawing/2014/main" id="{6A739DDC-583A-406C-A7F9-3F4D50500459}"/>
               </a:ext>
             </a:extLst>
           </p:cNvPr>
@@ -8321,7 +8385,7 @@
                 <a:ea typeface="PingFang SC"/>
                 <a:cs typeface="PingFang SC"/>
               </a:rPr>
-              <a:t>海洋任务与地理空间任务</a:t>
+              <a:t>海洋观测重尺度变化，空间服务重位置关系</a:t>
             </a:r>
           </a:p>
         </p:txBody>
@@ -8331,7 +8395,7 @@
           <p:cNvPr id="4" name="s6-footer">
             <a:extLst xmlns:a="http://schemas.openxmlformats.org/drawingml/2006/main">
               <a:ext uri="{FF2B5EF4-FFF2-40B4-BE49-F238E27FC236}">
-                <a16:creationId xmlns:a16="http://schemas.microsoft.com/office/drawing/2014/main" id="{C76CC4C4-F0F9-4B5B-B894-3A92F73D3864}"/>
+                <a16:creationId xmlns:a16="http://schemas.microsoft.com/office/drawing/2014/main" id="{EEEF20E9-1A3D-4E23-B7EF-1904D573DC06}"/>
               </a:ext>
             </a:extLst>
           </p:cNvPr>
@@ -8362,7 +8426,7 @@
           <p:cNvPr id="5" name="s6-identity">
             <a:extLst xmlns:a="http://schemas.openxmlformats.org/drawingml/2006/main">
               <a:ext uri="{FF2B5EF4-FFF2-40B4-BE49-F238E27FC236}">
-                <a16:creationId xmlns:a16="http://schemas.microsoft.com/office/drawing/2014/main" id="{8288D487-7BEF-424B-A139-EB758AD62A09}"/>
+                <a16:creationId xmlns:a16="http://schemas.microsoft.com/office/drawing/2014/main" id="{941F853A-733D-4EC3-9C96-CEB8378A76F6}"/>
               </a:ext>
             </a:extLst>
           </p:cNvPr>
@@ -8420,7 +8484,7 @@
           <p:cNvPr id="6" name="core-no-0">
             <a:extLst xmlns:a="http://schemas.openxmlformats.org/drawingml/2006/main">
               <a:ext uri="{FF2B5EF4-FFF2-40B4-BE49-F238E27FC236}">
-                <a16:creationId xmlns:a16="http://schemas.microsoft.com/office/drawing/2014/main" id="{074CE2C0-E588-4C29-92C5-1B116D6F7331}"/>
+                <a16:creationId xmlns:a16="http://schemas.microsoft.com/office/drawing/2014/main" id="{873003D3-6BA3-4DAE-8EC8-8B02051A63B3}"/>
               </a:ext>
             </a:extLst>
           </p:cNvPr>
@@ -8452,7 +8516,7 @@
             <a:pPr algn="l">
               <a:defRPr sz="2250" b="1">
                 <a:solidFill>
-                  <a:srgbClr val="E5783F"/>
+                  <a:srgbClr val="9A3F16"/>
                 </a:solidFill>
                 <a:latin typeface="PingFang SC"/>
                 <a:ea typeface="PingFang SC"/>
@@ -8462,7 +8526,7 @@
             <a:r>
               <a:rPr sz="2250" b="1">
                 <a:solidFill>
-                  <a:srgbClr val="E5783F"/>
+                  <a:srgbClr val="9A3F16"/>
                 </a:solidFill>
                 <a:latin typeface="PingFang SC"/>
                 <a:ea typeface="PingFang SC"/>
@@ -8478,7 +8542,7 @@
           <p:cNvPr id="7" name="core-label-0">
             <a:extLst xmlns:a="http://schemas.openxmlformats.org/drawingml/2006/main">
               <a:ext uri="{FF2B5EF4-FFF2-40B4-BE49-F238E27FC236}">
-                <a16:creationId xmlns:a16="http://schemas.microsoft.com/office/drawing/2014/main" id="{5750F258-3B15-4A86-BB38-05FE729FA7DB}"/>
+                <a16:creationId xmlns:a16="http://schemas.microsoft.com/office/drawing/2014/main" id="{0C0D1E84-6105-4F83-A53A-CE22E4C5B9D6}"/>
               </a:ext>
             </a:extLst>
           </p:cNvPr>
@@ -8536,7 +8600,7 @@
           <p:cNvPr id="8" name="core-body-0">
             <a:extLst xmlns:a="http://schemas.openxmlformats.org/drawingml/2006/main">
               <a:ext uri="{FF2B5EF4-FFF2-40B4-BE49-F238E27FC236}">
-                <a16:creationId xmlns:a16="http://schemas.microsoft.com/office/drawing/2014/main" id="{50207AFE-CA4A-449D-B595-B9B5F0B751D5}"/>
+                <a16:creationId xmlns:a16="http://schemas.microsoft.com/office/drawing/2014/main" id="{C2AAE223-5CF2-4DBC-AAA5-5B2E76CEB439}"/>
               </a:ext>
             </a:extLst>
           </p:cNvPr>
@@ -8560,14 +8624,14 @@
           </a:solidFill>
           <a:ln xmlns:a="http://schemas.openxmlformats.org/drawingml/2006/main" w="19050">
             <a:solidFill>
-              <a:srgbClr val="E5783F"/>
+              <a:srgbClr val="9A3F16"/>
             </a:solidFill>
             <a:prstDash val="solid"/>
           </a:ln>
         </p:spPr>
         <p:txBody>
           <a:bodyPr xmlns:a="http://schemas.openxmlformats.org/drawingml/2006/main" lIns="152400" tIns="133350" rIns="152400" bIns="133350" anchor="ctr">
-            <a:normAutofit fontScale="85261"/>
+            <a:normAutofit fontScale="89303"/>
           </a:bodyPr>
           <a:lstStyle xmlns:a="http://schemas.openxmlformats.org/drawingml/2006/main"/>
           <a:p xmlns:a="http://schemas.openxmlformats.org/drawingml/2006/main">
@@ -8590,7 +8654,7 @@
                 <a:ea typeface="PingFang SC"/>
                 <a:cs typeface="PingFang SC"/>
               </a:rPr>
-              <a:t>海洋服务可以围绕海况信息汇总、观测质量检查、生态现象监测、航线环境信息或灾害态势整理。地理空间服务还包括土地覆盖变化、基础设施巡查、公共服务可达性和应急制图。每个任务都要明确使用者、空间范围…</a:t>
+              <a:t>海洋服务可以围绕海况信息汇总、观测质量检查、生态现象监测、航线环境信息或灾害态势整理；地理空间服务还包括土地覆盖变化、基础设施巡查、公共服务可达性和应急制图</a:t>
             </a:r>
           </a:p>
         </p:txBody>
@@ -8600,7 +8664,7 @@
           <p:cNvPr id="9" name="core-no-1">
             <a:extLst xmlns:a="http://schemas.openxmlformats.org/drawingml/2006/main">
               <a:ext uri="{FF2B5EF4-FFF2-40B4-BE49-F238E27FC236}">
-                <a16:creationId xmlns:a16="http://schemas.microsoft.com/office/drawing/2014/main" id="{9810D8B6-D54E-4C47-85E5-EC09E15EAD76}"/>
+                <a16:creationId xmlns:a16="http://schemas.microsoft.com/office/drawing/2014/main" id="{0F6EAE3E-019F-49CA-8A2D-EC0EE403675A}"/>
               </a:ext>
             </a:extLst>
           </p:cNvPr>
@@ -8632,7 +8696,7 @@
             <a:pPr algn="l">
               <a:defRPr sz="2250" b="1">
                 <a:solidFill>
-                  <a:srgbClr val="E5783F"/>
+                  <a:srgbClr val="9A3F16"/>
                 </a:solidFill>
                 <a:latin typeface="PingFang SC"/>
                 <a:ea typeface="PingFang SC"/>
@@ -8642,7 +8706,7 @@
             <a:r>
               <a:rPr sz="2250" b="1">
                 <a:solidFill>
-                  <a:srgbClr val="E5783F"/>
+                  <a:srgbClr val="9A3F16"/>
                 </a:solidFill>
                 <a:latin typeface="PingFang SC"/>
                 <a:ea typeface="PingFang SC"/>
@@ -8658,7 +8722,7 @@
           <p:cNvPr id="10" name="core-body-1">
             <a:extLst xmlns:a="http://schemas.openxmlformats.org/drawingml/2006/main">
               <a:ext uri="{FF2B5EF4-FFF2-40B4-BE49-F238E27FC236}">
-                <a16:creationId xmlns:a16="http://schemas.microsoft.com/office/drawing/2014/main" id="{EE347D8C-D183-48C5-8D5D-7E65B88F15DC}"/>
+                <a16:creationId xmlns:a16="http://schemas.microsoft.com/office/drawing/2014/main" id="{8B7E14BD-2343-4026-B39A-387651BD51FE}"/>
               </a:ext>
             </a:extLst>
           </p:cNvPr>
@@ -8712,7 +8776,7 @@
                 <a:ea typeface="PingFang SC"/>
                 <a:cs typeface="PingFang SC"/>
               </a:rPr>
-              <a:t>地图必须包含标题、时间、范围、图例、比例或分辨率、坐标信息、数据来源和不可用区域。报告中的数字应能链接回数据与计算步骤。若不同来源结论冲突，应并列展示并解释可能原因，而不是让模型平均成一个答案…</a:t>
+              <a:t>地图必须包含标题、时间、范围、图例、比例或分辨率、坐标信息、数据来源和不可用区域；报告中的数字应能链接回数据与计算步骤；若不同来源结论冲突；应并列展示并解释可能原因；而不是让模型平均成一个答案</a:t>
             </a:r>
           </a:p>
         </p:txBody>
@@ -8722,7 +8786,7 @@
           <p:cNvPr id="11" name="core-no-2">
             <a:extLst xmlns:a="http://schemas.openxmlformats.org/drawingml/2006/main">
               <a:ext uri="{FF2B5EF4-FFF2-40B4-BE49-F238E27FC236}">
-                <a16:creationId xmlns:a16="http://schemas.microsoft.com/office/drawing/2014/main" id="{BD18A02D-D64B-4D70-A550-350A8CA02E76}"/>
+                <a16:creationId xmlns:a16="http://schemas.microsoft.com/office/drawing/2014/main" id="{E18382B9-D60B-4AAC-87A4-7B76D94B0032}"/>
               </a:ext>
             </a:extLst>
           </p:cNvPr>
@@ -8754,7 +8818,7 @@
             <a:pPr algn="l">
               <a:defRPr sz="2250" b="1">
                 <a:solidFill>
-                  <a:srgbClr val="E5783F"/>
+                  <a:srgbClr val="9A3F16"/>
                 </a:solidFill>
                 <a:latin typeface="PingFang SC"/>
                 <a:ea typeface="PingFang SC"/>
@@ -8764,7 +8828,7 @@
             <a:r>
               <a:rPr sz="2250" b="1">
                 <a:solidFill>
-                  <a:srgbClr val="E5783F"/>
+                  <a:srgbClr val="9A3F16"/>
                 </a:solidFill>
                 <a:latin typeface="PingFang SC"/>
                 <a:ea typeface="PingFang SC"/>
@@ -8780,7 +8844,7 @@
           <p:cNvPr id="12" name="core-body-2">
             <a:extLst xmlns:a="http://schemas.openxmlformats.org/drawingml/2006/main">
               <a:ext uri="{FF2B5EF4-FFF2-40B4-BE49-F238E27FC236}">
-                <a16:creationId xmlns:a16="http://schemas.microsoft.com/office/drawing/2014/main" id="{421303A5-53F7-4B2E-ABE1-129072073554}"/>
+                <a16:creationId xmlns:a16="http://schemas.microsoft.com/office/drawing/2014/main" id="{DB8AC59A-46F1-4F63-8193-06927866C1AE}"/>
               </a:ext>
             </a:extLst>
           </p:cNvPr>
@@ -8844,7 +8908,7 @@
           <p:cNvPr id="13" name="s6-takeaway-rule">
             <a:extLst xmlns:a="http://schemas.openxmlformats.org/drawingml/2006/main">
               <a:ext uri="{FF2B5EF4-FFF2-40B4-BE49-F238E27FC236}">
-                <a16:creationId xmlns:a16="http://schemas.microsoft.com/office/drawing/2014/main" id="{C333A514-21F3-46CB-9A29-E627A52C503D}"/>
+                <a16:creationId xmlns:a16="http://schemas.microsoft.com/office/drawing/2014/main" id="{BE34F07B-E346-42C9-98CA-7A22EF9F6A5A}"/>
               </a:ext>
             </a:extLst>
           </p:cNvPr>
@@ -8877,7 +8941,7 @@
           <p:cNvPr id="14" name="s6-takeaway">
             <a:extLst xmlns:a="http://schemas.openxmlformats.org/drawingml/2006/main">
               <a:ext uri="{FF2B5EF4-FFF2-40B4-BE49-F238E27FC236}">
-                <a16:creationId xmlns:a16="http://schemas.microsoft.com/office/drawing/2014/main" id="{17580EE1-04B5-4360-A21F-3ABD703F3EF0}"/>
+                <a16:creationId xmlns:a16="http://schemas.microsoft.com/office/drawing/2014/main" id="{42BE47AB-B25E-426F-95EA-A2271268328A}"/>
               </a:ext>
             </a:extLst>
           </p:cNvPr>
@@ -8925,7 +8989,7 @@
                 <a:ea typeface="PingFang SC"/>
                 <a:cs typeface="PingFang SC"/>
               </a:rPr>
-              <a:t>海洋任务与地理空间任务</a:t>
+              <a:t>海洋观测重尺度变化，空间服务重位置关系</a:t>
             </a:r>
           </a:p>
         </p:txBody>
@@ -8933,7 +8997,7 @@
     </p:spTree>
     <p:extLst>
       <p:ext uri="{BB962C8B-B14F-4D97-AF65-F5344CB8AC3E}">
-        <p14:creationId xmlns:p14="http://schemas.microsoft.com/office/powerpoint/2010/main" val="674223323"/>
+        <p14:creationId xmlns:p14="http://schemas.microsoft.com/office/powerpoint/2010/main" val="513968384"/>
       </p:ext>
     </p:extLst>
   </p:cSld>
@@ -8964,7 +9028,7 @@
           <p:cNvPr id="1" name="s7-rule">
             <a:extLst xmlns:a="http://schemas.openxmlformats.org/drawingml/2006/main">
               <a:ext uri="{FF2B5EF4-FFF2-40B4-BE49-F238E27FC236}">
-                <a16:creationId xmlns:a16="http://schemas.microsoft.com/office/drawing/2014/main" id="{561120F0-962D-420C-B8B0-9BF165A6053E}"/>
+                <a16:creationId xmlns:a16="http://schemas.microsoft.com/office/drawing/2014/main" id="{40D944C0-1019-4801-8E92-02605BDF44D0}"/>
               </a:ext>
             </a:extLst>
           </p:cNvPr>
@@ -8997,7 +9061,7 @@
           <p:cNvPr id="2" name="s7-eyebrow">
             <a:extLst xmlns:a="http://schemas.openxmlformats.org/drawingml/2006/main">
               <a:ext uri="{FF2B5EF4-FFF2-40B4-BE49-F238E27FC236}">
-                <a16:creationId xmlns:a16="http://schemas.microsoft.com/office/drawing/2014/main" id="{C8AE04AC-68CE-4521-85E6-7620E1DB63B3}"/>
+                <a16:creationId xmlns:a16="http://schemas.microsoft.com/office/drawing/2014/main" id="{DD272434-F05F-48BB-8A95-5533D717A60C}"/>
               </a:ext>
             </a:extLst>
           </p:cNvPr>
@@ -9055,7 +9119,7 @@
           <p:cNvPr id="3" name="s7-title">
             <a:extLst xmlns:a="http://schemas.openxmlformats.org/drawingml/2006/main">
               <a:ext uri="{FF2B5EF4-FFF2-40B4-BE49-F238E27FC236}">
-                <a16:creationId xmlns:a16="http://schemas.microsoft.com/office/drawing/2014/main" id="{41850D70-E683-4FDB-99C9-5CE1A3EB6D4E}"/>
+                <a16:creationId xmlns:a16="http://schemas.microsoft.com/office/drawing/2014/main" id="{D7BDD847-096B-48D1-8CE9-57E40B7F3F21}"/>
               </a:ext>
             </a:extLst>
           </p:cNvPr>
@@ -9113,7 +9177,7 @@
           <p:cNvPr id="4" name="s7-footer">
             <a:extLst xmlns:a="http://schemas.openxmlformats.org/drawingml/2006/main">
               <a:ext uri="{FF2B5EF4-FFF2-40B4-BE49-F238E27FC236}">
-                <a16:creationId xmlns:a16="http://schemas.microsoft.com/office/drawing/2014/main" id="{0B1EA198-ADFB-4EF0-8F5D-623FCCEB27B3}"/>
+                <a16:creationId xmlns:a16="http://schemas.microsoft.com/office/drawing/2014/main" id="{83D48071-004D-4643-A407-EE10CBA57AA3}"/>
               </a:ext>
             </a:extLst>
           </p:cNvPr>
@@ -9144,7 +9208,7 @@
           <p:cNvPr id="5" name="s7-identity">
             <a:extLst xmlns:a="http://schemas.openxmlformats.org/drawingml/2006/main">
               <a:ext uri="{FF2B5EF4-FFF2-40B4-BE49-F238E27FC236}">
-                <a16:creationId xmlns:a16="http://schemas.microsoft.com/office/drawing/2014/main" id="{6D50BD20-7669-4418-A2A9-D38FB5C902FF}"/>
+                <a16:creationId xmlns:a16="http://schemas.microsoft.com/office/drawing/2014/main" id="{8840FEA5-B9BF-4098-A18F-D98FC6C50149}"/>
               </a:ext>
             </a:extLst>
           </p:cNvPr>
@@ -9202,7 +9266,7 @@
           <p:cNvPr id="6" name="core-no-0">
             <a:extLst xmlns:a="http://schemas.openxmlformats.org/drawingml/2006/main">
               <a:ext uri="{FF2B5EF4-FFF2-40B4-BE49-F238E27FC236}">
-                <a16:creationId xmlns:a16="http://schemas.microsoft.com/office/drawing/2014/main" id="{ECCE5878-A07B-433F-B8B6-A7D74C75E5D9}"/>
+                <a16:creationId xmlns:a16="http://schemas.microsoft.com/office/drawing/2014/main" id="{67B8CAC1-31E6-4324-9EB5-A2F885144AD5}"/>
               </a:ext>
             </a:extLst>
           </p:cNvPr>
@@ -9234,7 +9298,7 @@
             <a:pPr algn="l">
               <a:defRPr sz="2250" b="1">
                 <a:solidFill>
-                  <a:srgbClr val="E5783F"/>
+                  <a:srgbClr val="9A3F16"/>
                 </a:solidFill>
                 <a:latin typeface="PingFang SC"/>
                 <a:ea typeface="PingFang SC"/>
@@ -9244,7 +9308,7 @@
             <a:r>
               <a:rPr sz="2250" b="1">
                 <a:solidFill>
-                  <a:srgbClr val="E5783F"/>
+                  <a:srgbClr val="9A3F16"/>
                 </a:solidFill>
                 <a:latin typeface="PingFang SC"/>
                 <a:ea typeface="PingFang SC"/>
@@ -9260,7 +9324,7 @@
           <p:cNvPr id="7" name="core-label-0">
             <a:extLst xmlns:a="http://schemas.openxmlformats.org/drawingml/2006/main">
               <a:ext uri="{FF2B5EF4-FFF2-40B4-BE49-F238E27FC236}">
-                <a16:creationId xmlns:a16="http://schemas.microsoft.com/office/drawing/2014/main" id="{A64F3DBE-3F37-4D88-B7A1-83DBD8ADDC0E}"/>
+                <a16:creationId xmlns:a16="http://schemas.microsoft.com/office/drawing/2014/main" id="{3B6977BE-1D1C-4A6D-AA68-E45A8CE5D51E}"/>
               </a:ext>
             </a:extLst>
           </p:cNvPr>
@@ -9318,7 +9382,7 @@
           <p:cNvPr id="8" name="core-body-0">
             <a:extLst xmlns:a="http://schemas.openxmlformats.org/drawingml/2006/main">
               <a:ext uri="{FF2B5EF4-FFF2-40B4-BE49-F238E27FC236}">
-                <a16:creationId xmlns:a16="http://schemas.microsoft.com/office/drawing/2014/main" id="{BAE45A98-8C43-4440-8370-184457B8E05B}"/>
+                <a16:creationId xmlns:a16="http://schemas.microsoft.com/office/drawing/2014/main" id="{9EC4A0A5-F083-4CB6-895E-7210E28122B4}"/>
               </a:ext>
             </a:extLst>
           </p:cNvPr>
@@ -9342,7 +9406,7 @@
           </a:solidFill>
           <a:ln xmlns:a="http://schemas.openxmlformats.org/drawingml/2006/main" w="19050">
             <a:solidFill>
-              <a:srgbClr val="E5783F"/>
+              <a:srgbClr val="9A3F16"/>
             </a:solidFill>
             <a:prstDash val="solid"/>
           </a:ln>
@@ -9372,7 +9436,7 @@
                 <a:ea typeface="PingFang SC"/>
                 <a:cs typeface="PingFang SC"/>
               </a:rPr>
-              <a:t>团队课件以“AIMS”描述一个海洋信息服务案例，并在方案中提到“OceanFM”和“Dify”。这些名称展示了“领域模型加工具编排”的思路，但其公开版本…</a:t>
+              <a:t>团队课件以“AIMS”描述一个海洋信息服务案例；并在方案中提到“OceanFM”和“Dify”；这些名称展示了“领域模型加工具编排”的思路</a:t>
             </a:r>
           </a:p>
         </p:txBody>
@@ -9382,7 +9446,7 @@
           <p:cNvPr id="9" name="core-no-1">
             <a:extLst xmlns:a="http://schemas.openxmlformats.org/drawingml/2006/main">
               <a:ext uri="{FF2B5EF4-FFF2-40B4-BE49-F238E27FC236}">
-                <a16:creationId xmlns:a16="http://schemas.microsoft.com/office/drawing/2014/main" id="{71F0B48B-9149-4B41-951E-CDB7FFC6B784}"/>
+                <a16:creationId xmlns:a16="http://schemas.microsoft.com/office/drawing/2014/main" id="{43673B24-5F1F-4164-862D-803BD77A7A8E}"/>
               </a:ext>
             </a:extLst>
           </p:cNvPr>
@@ -9414,7 +9478,7 @@
             <a:pPr algn="l">
               <a:defRPr sz="2250" b="1">
                 <a:solidFill>
-                  <a:srgbClr val="E5783F"/>
+                  <a:srgbClr val="9A3F16"/>
                 </a:solidFill>
                 <a:latin typeface="PingFang SC"/>
                 <a:ea typeface="PingFang SC"/>
@@ -9424,7 +9488,7 @@
             <a:r>
               <a:rPr sz="2250" b="1">
                 <a:solidFill>
-                  <a:srgbClr val="E5783F"/>
+                  <a:srgbClr val="9A3F16"/>
                 </a:solidFill>
                 <a:latin typeface="PingFang SC"/>
                 <a:ea typeface="PingFang SC"/>
@@ -9440,7 +9504,7 @@
           <p:cNvPr id="10" name="core-body-1">
             <a:extLst xmlns:a="http://schemas.openxmlformats.org/drawingml/2006/main">
               <a:ext uri="{FF2B5EF4-FFF2-40B4-BE49-F238E27FC236}">
-                <a16:creationId xmlns:a16="http://schemas.microsoft.com/office/drawing/2014/main" id="{7BB1CBA3-B0D2-4C28-A7A0-2121C215CA14}"/>
+                <a16:creationId xmlns:a16="http://schemas.microsoft.com/office/drawing/2014/main" id="{FBAC3E65-0AA2-4FA8-8BBB-3C06390530BA}"/>
               </a:ext>
             </a:extLst>
           </p:cNvPr>
@@ -9494,7 +9558,7 @@
                 <a:ea typeface="PingFang SC"/>
                 <a:cs typeface="PingFang SC"/>
               </a:rPr>
-              <a:t>学习时可把 AIMS 看作团队案例中的整体服务构想，把 OceanFM 看作课件中提及、需要结合文档和评测确认的领域模型，把 Dify 看作可选的工作流编排工具。真正要验收的是…</a:t>
+              <a:t>学习时可把 AIMS 看作团队案例中的整体服务构想；把 OceanFM 看作课件中提及、需要结合文档和评测确认的领域模型；把 Dify 看作可选的工作流编排工具</a:t>
             </a:r>
           </a:p>
         </p:txBody>
@@ -9504,7 +9568,7 @@
           <p:cNvPr id="11" name="s7-takeaway-rule">
             <a:extLst xmlns:a="http://schemas.openxmlformats.org/drawingml/2006/main">
               <a:ext uri="{FF2B5EF4-FFF2-40B4-BE49-F238E27FC236}">
-                <a16:creationId xmlns:a16="http://schemas.microsoft.com/office/drawing/2014/main" id="{3EE5BC37-509E-4CAB-A7B7-2F0C7AEE1190}"/>
+                <a16:creationId xmlns:a16="http://schemas.microsoft.com/office/drawing/2014/main" id="{AFFF5E00-5BF8-41D7-A314-ED68B8B0AC23}"/>
               </a:ext>
             </a:extLst>
           </p:cNvPr>
@@ -9537,7 +9601,7 @@
           <p:cNvPr id="12" name="s7-takeaway">
             <a:extLst xmlns:a="http://schemas.openxmlformats.org/drawingml/2006/main">
               <a:ext uri="{FF2B5EF4-FFF2-40B4-BE49-F238E27FC236}">
-                <a16:creationId xmlns:a16="http://schemas.microsoft.com/office/drawing/2014/main" id="{07277FA9-B6EE-45A7-B527-583DFB355DAC}"/>
+                <a16:creationId xmlns:a16="http://schemas.microsoft.com/office/drawing/2014/main" id="{180A9C88-B25F-4464-AFC1-2D79AB5E2C46}"/>
               </a:ext>
             </a:extLst>
           </p:cNvPr>
@@ -9593,7 +9657,7 @@
     </p:spTree>
     <p:extLst>
       <p:ext uri="{BB962C8B-B14F-4D97-AF65-F5344CB8AC3E}">
-        <p14:creationId xmlns:p14="http://schemas.microsoft.com/office/powerpoint/2010/main" val="1598743355"/>
+        <p14:creationId xmlns:p14="http://schemas.microsoft.com/office/powerpoint/2010/main" val="1344564541"/>
       </p:ext>
     </p:extLst>
   </p:cSld>
@@ -9624,7 +9688,7 @@
           <p:cNvPr id="1" name="s8-rule">
             <a:extLst xmlns:a="http://schemas.openxmlformats.org/drawingml/2006/main">
               <a:ext uri="{FF2B5EF4-FFF2-40B4-BE49-F238E27FC236}">
-                <a16:creationId xmlns:a16="http://schemas.microsoft.com/office/drawing/2014/main" id="{7B357C86-A4B9-49CE-B62A-621FBABEEFE9}"/>
+                <a16:creationId xmlns:a16="http://schemas.microsoft.com/office/drawing/2014/main" id="{10D6851E-A089-4B45-B211-F98AD37D3A2A}"/>
               </a:ext>
             </a:extLst>
           </p:cNvPr>
@@ -9657,7 +9721,7 @@
           <p:cNvPr id="2" name="s8-eyebrow">
             <a:extLst xmlns:a="http://schemas.openxmlformats.org/drawingml/2006/main">
               <a:ext uri="{FF2B5EF4-FFF2-40B4-BE49-F238E27FC236}">
-                <a16:creationId xmlns:a16="http://schemas.microsoft.com/office/drawing/2014/main" id="{33249987-85E5-4D27-BAE6-46E93004B190}"/>
+                <a16:creationId xmlns:a16="http://schemas.microsoft.com/office/drawing/2014/main" id="{F039E88C-260F-4301-AA85-71A946281A24}"/>
               </a:ext>
             </a:extLst>
           </p:cNvPr>
@@ -9715,7 +9779,7 @@
           <p:cNvPr id="3" name="s8-title">
             <a:extLst xmlns:a="http://schemas.openxmlformats.org/drawingml/2006/main">
               <a:ext uri="{FF2B5EF4-FFF2-40B4-BE49-F238E27FC236}">
-                <a16:creationId xmlns:a16="http://schemas.microsoft.com/office/drawing/2014/main" id="{05CE3794-BDFC-48FF-A05A-97710B77DDDA}"/>
+                <a16:creationId xmlns:a16="http://schemas.microsoft.com/office/drawing/2014/main" id="{9668014C-ACCC-47E3-8052-4871596C0F19}"/>
               </a:ext>
             </a:extLst>
           </p:cNvPr>
@@ -9773,7 +9837,7 @@
           <p:cNvPr id="4" name="s8-footer">
             <a:extLst xmlns:a="http://schemas.openxmlformats.org/drawingml/2006/main">
               <a:ext uri="{FF2B5EF4-FFF2-40B4-BE49-F238E27FC236}">
-                <a16:creationId xmlns:a16="http://schemas.microsoft.com/office/drawing/2014/main" id="{41AEB638-3C07-4220-9BF7-391E8DB2B432}"/>
+                <a16:creationId xmlns:a16="http://schemas.microsoft.com/office/drawing/2014/main" id="{8B41DC81-B4A8-40BE-BCA2-E90BC9FB1A44}"/>
               </a:ext>
             </a:extLst>
           </p:cNvPr>
@@ -9804,7 +9868,7 @@
           <p:cNvPr id="5" name="s8-identity">
             <a:extLst xmlns:a="http://schemas.openxmlformats.org/drawingml/2006/main">
               <a:ext uri="{FF2B5EF4-FFF2-40B4-BE49-F238E27FC236}">
-                <a16:creationId xmlns:a16="http://schemas.microsoft.com/office/drawing/2014/main" id="{A58265EE-C132-47DE-A8EA-DCADE6CEFCC4}"/>
+                <a16:creationId xmlns:a16="http://schemas.microsoft.com/office/drawing/2014/main" id="{5E23B2A8-21F4-489B-A7B1-B86D91C7C65F}"/>
               </a:ext>
             </a:extLst>
           </p:cNvPr>
@@ -9862,7 +9926,7 @@
           <p:cNvPr id="6" name="core-no-0">
             <a:extLst xmlns:a="http://schemas.openxmlformats.org/drawingml/2006/main">
               <a:ext uri="{FF2B5EF4-FFF2-40B4-BE49-F238E27FC236}">
-                <a16:creationId xmlns:a16="http://schemas.microsoft.com/office/drawing/2014/main" id="{0EF38C44-4703-4C3D-A636-E5EA14CFB5DC}"/>
+                <a16:creationId xmlns:a16="http://schemas.microsoft.com/office/drawing/2014/main" id="{AF29D32A-B001-41E4-891B-EA9B1BF66438}"/>
               </a:ext>
             </a:extLst>
           </p:cNvPr>
@@ -9894,7 +9958,7 @@
             <a:pPr algn="l">
               <a:defRPr sz="2250" b="1">
                 <a:solidFill>
-                  <a:srgbClr val="E5783F"/>
+                  <a:srgbClr val="9A3F16"/>
                 </a:solidFill>
                 <a:latin typeface="PingFang SC"/>
                 <a:ea typeface="PingFang SC"/>
@@ -9904,7 +9968,7 @@
             <a:r>
               <a:rPr sz="2250" b="1">
                 <a:solidFill>
-                  <a:srgbClr val="E5783F"/>
+                  <a:srgbClr val="9A3F16"/>
                 </a:solidFill>
                 <a:latin typeface="PingFang SC"/>
                 <a:ea typeface="PingFang SC"/>
@@ -9920,7 +9984,7 @@
           <p:cNvPr id="7" name="core-label-0">
             <a:extLst xmlns:a="http://schemas.openxmlformats.org/drawingml/2006/main">
               <a:ext uri="{FF2B5EF4-FFF2-40B4-BE49-F238E27FC236}">
-                <a16:creationId xmlns:a16="http://schemas.microsoft.com/office/drawing/2014/main" id="{0056658A-0D23-4A4D-B16A-B1CC7F238D36}"/>
+                <a16:creationId xmlns:a16="http://schemas.microsoft.com/office/drawing/2014/main" id="{AC3F6F47-4894-4561-9B65-8A4F6048D841}"/>
               </a:ext>
             </a:extLst>
           </p:cNvPr>
@@ -9978,7 +10042,7 @@
           <p:cNvPr id="8" name="core-body-0">
             <a:extLst xmlns:a="http://schemas.openxmlformats.org/drawingml/2006/main">
               <a:ext uri="{FF2B5EF4-FFF2-40B4-BE49-F238E27FC236}">
-                <a16:creationId xmlns:a16="http://schemas.microsoft.com/office/drawing/2014/main" id="{C49B3429-0F17-4F02-AC16-4E1C51CC5848}"/>
+                <a16:creationId xmlns:a16="http://schemas.microsoft.com/office/drawing/2014/main" id="{06AED1C2-0733-4AD5-AFCE-2669D0850C3C}"/>
               </a:ext>
             </a:extLst>
           </p:cNvPr>
@@ -10002,7 +10066,7 @@
           </a:solidFill>
           <a:ln xmlns:a="http://schemas.openxmlformats.org/drawingml/2006/main" w="19050">
             <a:solidFill>
-              <a:srgbClr val="E5783F"/>
+              <a:srgbClr val="9A3F16"/>
             </a:solidFill>
             <a:prstDash val="solid"/>
           </a:ln>
@@ -10042,7 +10106,7 @@
           <p:cNvPr id="9" name="core-no-1">
             <a:extLst xmlns:a="http://schemas.openxmlformats.org/drawingml/2006/main">
               <a:ext uri="{FF2B5EF4-FFF2-40B4-BE49-F238E27FC236}">
-                <a16:creationId xmlns:a16="http://schemas.microsoft.com/office/drawing/2014/main" id="{B375A4D6-F512-4B23-8BB1-FB63B464E0B6}"/>
+                <a16:creationId xmlns:a16="http://schemas.microsoft.com/office/drawing/2014/main" id="{2AA117A7-6CD7-4907-AD3F-84D85D92781D}"/>
               </a:ext>
             </a:extLst>
           </p:cNvPr>
@@ -10074,7 +10138,7 @@
             <a:pPr algn="l">
               <a:defRPr sz="2250" b="1">
                 <a:solidFill>
-                  <a:srgbClr val="E5783F"/>
+                  <a:srgbClr val="9A3F16"/>
                 </a:solidFill>
                 <a:latin typeface="PingFang SC"/>
                 <a:ea typeface="PingFang SC"/>
@@ -10084,7 +10148,7 @@
             <a:r>
               <a:rPr sz="2250" b="1">
                 <a:solidFill>
-                  <a:srgbClr val="E5783F"/>
+                  <a:srgbClr val="9A3F16"/>
                 </a:solidFill>
                 <a:latin typeface="PingFang SC"/>
                 <a:ea typeface="PingFang SC"/>
@@ -10100,7 +10164,7 @@
           <p:cNvPr id="10" name="core-body-1">
             <a:extLst xmlns:a="http://schemas.openxmlformats.org/drawingml/2006/main">
               <a:ext uri="{FF2B5EF4-FFF2-40B4-BE49-F238E27FC236}">
-                <a16:creationId xmlns:a16="http://schemas.microsoft.com/office/drawing/2014/main" id="{BCB3F7BA-5D69-4837-AC22-A29853293826}"/>
+                <a16:creationId xmlns:a16="http://schemas.microsoft.com/office/drawing/2014/main" id="{8C8FFAB7-B197-477E-8E1F-9851DE43C752}"/>
               </a:ext>
             </a:extLst>
           </p:cNvPr>
@@ -10154,7 +10218,7 @@
                 <a:ea typeface="PingFang SC"/>
                 <a:cs typeface="PingFang SC"/>
               </a:rPr>
-              <a:t>数据源、传感器、海岸线、业务定义和气候背景都会变化。系统需要监测缺测率、分布漂移和异常输出，保存模型与数据版本，并在超过适用范围时降级或停止。专家纠错应进入评测样本与数据治理流程…</a:t>
+              <a:t>数据源、传感器、海岸线、业务定义和气候背景都会变化；系统需要监测缺测率、分布漂移和异常输出；保存模型与数据版本；并在超过适用范围时降级或停止；专家纠错应进入评测样本与数据治理流程</a:t>
             </a:r>
           </a:p>
         </p:txBody>
@@ -10164,7 +10228,7 @@
           <p:cNvPr id="11" name="s8-takeaway-rule">
             <a:extLst xmlns:a="http://schemas.openxmlformats.org/drawingml/2006/main">
               <a:ext uri="{FF2B5EF4-FFF2-40B4-BE49-F238E27FC236}">
-                <a16:creationId xmlns:a16="http://schemas.microsoft.com/office/drawing/2014/main" id="{6136EC53-0A4C-4C95-8BC3-D0FA42972DC9}"/>
+                <a16:creationId xmlns:a16="http://schemas.microsoft.com/office/drawing/2014/main" id="{AD759A38-400E-4BDD-9216-43A6050278D0}"/>
               </a:ext>
             </a:extLst>
           </p:cNvPr>
@@ -10197,7 +10261,7 @@
           <p:cNvPr id="12" name="s8-takeaway">
             <a:extLst xmlns:a="http://schemas.openxmlformats.org/drawingml/2006/main">
               <a:ext uri="{FF2B5EF4-FFF2-40B4-BE49-F238E27FC236}">
-                <a16:creationId xmlns:a16="http://schemas.microsoft.com/office/drawing/2014/main" id="{497C8C46-65DB-4CED-9449-7C130CF535C9}"/>
+                <a16:creationId xmlns:a16="http://schemas.microsoft.com/office/drawing/2014/main" id="{7B715EDC-F6B3-41BB-8552-227B0F66AD52}"/>
               </a:ext>
             </a:extLst>
           </p:cNvPr>
@@ -10253,7 +10317,7 @@
     </p:spTree>
     <p:extLst>
       <p:ext uri="{BB962C8B-B14F-4D97-AF65-F5344CB8AC3E}">
-        <p14:creationId xmlns:p14="http://schemas.microsoft.com/office/powerpoint/2010/main" val="1989984382"/>
+        <p14:creationId xmlns:p14="http://schemas.microsoft.com/office/powerpoint/2010/main" val="275604930"/>
       </p:ext>
     </p:extLst>
   </p:cSld>
@@ -10284,7 +10348,7 @@
           <p:cNvPr id="1" name="s9-rule">
             <a:extLst xmlns:a="http://schemas.openxmlformats.org/drawingml/2006/main">
               <a:ext uri="{FF2B5EF4-FFF2-40B4-BE49-F238E27FC236}">
-                <a16:creationId xmlns:a16="http://schemas.microsoft.com/office/drawing/2014/main" id="{62B08EB1-1A0C-4BD9-A98F-54CDFC43F082}"/>
+                <a16:creationId xmlns:a16="http://schemas.microsoft.com/office/drawing/2014/main" id="{938E1DB2-F9F2-4F7C-8055-850F23C81414}"/>
               </a:ext>
             </a:extLst>
           </p:cNvPr>
@@ -10317,7 +10381,7 @@
           <p:cNvPr id="2" name="s9-eyebrow">
             <a:extLst xmlns:a="http://schemas.openxmlformats.org/drawingml/2006/main">
               <a:ext uri="{FF2B5EF4-FFF2-40B4-BE49-F238E27FC236}">
-                <a16:creationId xmlns:a16="http://schemas.microsoft.com/office/drawing/2014/main" id="{9750DEB6-95C2-49FA-A8B0-5221782B9E0D}"/>
+                <a16:creationId xmlns:a16="http://schemas.microsoft.com/office/drawing/2014/main" id="{74C40116-39B2-41E8-9D54-0273ACB37A44}"/>
               </a:ext>
             </a:extLst>
           </p:cNvPr>
@@ -10375,7 +10439,7 @@
           <p:cNvPr id="3" name="s9-title">
             <a:extLst xmlns:a="http://schemas.openxmlformats.org/drawingml/2006/main">
               <a:ext uri="{FF2B5EF4-FFF2-40B4-BE49-F238E27FC236}">
-                <a16:creationId xmlns:a16="http://schemas.microsoft.com/office/drawing/2014/main" id="{72C5CDE1-56B0-4466-B46C-A763E02F0C85}"/>
+                <a16:creationId xmlns:a16="http://schemas.microsoft.com/office/drawing/2014/main" id="{D023DE1A-E705-43A7-851F-027FC76929F5}"/>
               </a:ext>
             </a:extLst>
           </p:cNvPr>
@@ -10433,7 +10497,7 @@
           <p:cNvPr id="4" name="s9-footer">
             <a:extLst xmlns:a="http://schemas.openxmlformats.org/drawingml/2006/main">
               <a:ext uri="{FF2B5EF4-FFF2-40B4-BE49-F238E27FC236}">
-                <a16:creationId xmlns:a16="http://schemas.microsoft.com/office/drawing/2014/main" id="{5068C0E8-4ECA-4ABA-A603-7134753055B9}"/>
+                <a16:creationId xmlns:a16="http://schemas.microsoft.com/office/drawing/2014/main" id="{A621A9BB-3EEA-479A-AA13-ABC4E47246B3}"/>
               </a:ext>
             </a:extLst>
           </p:cNvPr>
@@ -10464,7 +10528,7 @@
           <p:cNvPr id="5" name="s9-identity">
             <a:extLst xmlns:a="http://schemas.openxmlformats.org/drawingml/2006/main">
               <a:ext uri="{FF2B5EF4-FFF2-40B4-BE49-F238E27FC236}">
-                <a16:creationId xmlns:a16="http://schemas.microsoft.com/office/drawing/2014/main" id="{63803A48-7FAA-4046-BC37-4ACF03BD5D43}"/>
+                <a16:creationId xmlns:a16="http://schemas.microsoft.com/office/drawing/2014/main" id="{4A6A8BDE-3C19-4A6A-94C6-F0EDD8851E83}"/>
               </a:ext>
             </a:extLst>
           </p:cNvPr>
@@ -10522,7 +10586,7 @@
           <p:cNvPr id="6" name="case-title">
             <a:extLst xmlns:a="http://schemas.openxmlformats.org/drawingml/2006/main">
               <a:ext uri="{FF2B5EF4-FFF2-40B4-BE49-F238E27FC236}">
-                <a16:creationId xmlns:a16="http://schemas.microsoft.com/office/drawing/2014/main" id="{559D618A-FDFD-46D1-9EEE-D381BE54C203}"/>
+                <a16:creationId xmlns:a16="http://schemas.microsoft.com/office/drawing/2014/main" id="{0EB7F68D-750D-4E76-B52F-57D7B9D2B391}"/>
               </a:ext>
             </a:extLst>
           </p:cNvPr>
@@ -10586,23 +10650,23 @@
           <p:cNvPr id="7" name="case-row-0">
             <a:extLst xmlns:a="http://schemas.openxmlformats.org/drawingml/2006/main">
               <a:ext uri="{FF2B5EF4-FFF2-40B4-BE49-F238E27FC236}">
-                <a16:creationId xmlns:a16="http://schemas.microsoft.com/office/drawing/2014/main" id="{2FB31D9B-101B-4788-9641-9DFC9AA1C318}"/>
-              </a:ext>
-            </a:extLst>
-          </p:cNvPr>
-          <p:cNvSpPr>
-            <a:spLocks xmlns:a="http://schemas.openxmlformats.org/drawingml/2006/main" noGrp="1"/>
-          </p:cNvSpPr>
-          <p:nvPr/>
-        </p:nvSpPr>
-        <p:spPr>
-          <a:xfrm xmlns:a="http://schemas.openxmlformats.org/drawingml/2006/main">
-            <a:off x="4286250" y="2228850"/>
-            <a:ext cx="6534150" cy="1238250"/>
+                <a16:creationId xmlns:a16="http://schemas.microsoft.com/office/drawing/2014/main" id="{485900FF-DC7F-45A9-9706-36BBBFA31F22}"/>
+              </a:ext>
+            </a:extLst>
+          </p:cNvPr>
+          <p:cNvSpPr>
+            <a:spLocks xmlns:a="http://schemas.openxmlformats.org/drawingml/2006/main" noGrp="1"/>
+          </p:cNvSpPr>
+          <p:nvPr/>
+        </p:nvSpPr>
+        <p:spPr>
+          <a:xfrm xmlns:a="http://schemas.openxmlformats.org/drawingml/2006/main">
+            <a:off x="4286250" y="2038350"/>
+            <a:ext cx="6534150" cy="514350"/>
           </a:xfrm>
           <a:prstGeom xmlns:a="http://schemas.openxmlformats.org/drawingml/2006/main" prst="roundRect">
             <a:avLst>
-              <a:gd name="adj" fmla="val 10000"/>
+              <a:gd name="adj" fmla="val 24074"/>
             </a:avLst>
           </a:prstGeom>
           <a:solidFill xmlns:a="http://schemas.openxmlformats.org/drawingml/2006/main">
@@ -10617,7 +10681,7 @@
         </p:spPr>
         <p:txBody>
           <a:bodyPr xmlns:a="http://schemas.openxmlformats.org/drawingml/2006/main" lIns="152400" tIns="133350" rIns="152400" bIns="133350" anchor="ctr">
-            <a:normAutofit fontScale="100000"/>
+            <a:normAutofit fontScale="72956"/>
           </a:bodyPr>
           <a:lstStyle xmlns:a="http://schemas.openxmlformats.org/drawingml/2006/main"/>
           <a:p xmlns:a="http://schemas.openxmlformats.org/drawingml/2006/main">
@@ -10650,23 +10714,151 @@
           <p:cNvPr id="8" name="case-row-1">
             <a:extLst xmlns:a="http://schemas.openxmlformats.org/drawingml/2006/main">
               <a:ext uri="{FF2B5EF4-FFF2-40B4-BE49-F238E27FC236}">
-                <a16:creationId xmlns:a16="http://schemas.microsoft.com/office/drawing/2014/main" id="{03BD6524-B5DD-47C5-B4AD-B06C85B0588A}"/>
-              </a:ext>
-            </a:extLst>
-          </p:cNvPr>
-          <p:cNvSpPr>
-            <a:spLocks xmlns:a="http://schemas.openxmlformats.org/drawingml/2006/main" noGrp="1"/>
-          </p:cNvSpPr>
-          <p:nvPr/>
-        </p:nvSpPr>
-        <p:spPr>
-          <a:xfrm xmlns:a="http://schemas.openxmlformats.org/drawingml/2006/main">
-            <a:off x="4286250" y="3714750"/>
-            <a:ext cx="6534150" cy="1238250"/>
+                <a16:creationId xmlns:a16="http://schemas.microsoft.com/office/drawing/2014/main" id="{1496CF18-43D5-43A0-B624-284D00C110BF}"/>
+              </a:ext>
+            </a:extLst>
+          </p:cNvPr>
+          <p:cNvSpPr>
+            <a:spLocks xmlns:a="http://schemas.openxmlformats.org/drawingml/2006/main" noGrp="1"/>
+          </p:cNvSpPr>
+          <p:nvPr/>
+        </p:nvSpPr>
+        <p:spPr>
+          <a:xfrm xmlns:a="http://schemas.openxmlformats.org/drawingml/2006/main">
+            <a:off x="4286250" y="2667000"/>
+            <a:ext cx="6534150" cy="514350"/>
           </a:xfrm>
           <a:prstGeom xmlns:a="http://schemas.openxmlformats.org/drawingml/2006/main" prst="roundRect">
             <a:avLst>
-              <a:gd name="adj" fmla="val 10000"/>
+              <a:gd name="adj" fmla="val 24074"/>
+            </a:avLst>
+          </a:prstGeom>
+          <a:solidFill xmlns:a="http://schemas.openxmlformats.org/drawingml/2006/main">
+            <a:srgbClr val="FFFFFF"/>
+          </a:solidFill>
+          <a:ln xmlns:a="http://schemas.openxmlformats.org/drawingml/2006/main" w="9525">
+            <a:solidFill>
+              <a:srgbClr val="D8E0E8"/>
+            </a:solidFill>
+            <a:prstDash val="solid"/>
+          </a:ln>
+        </p:spPr>
+        <p:txBody>
+          <a:bodyPr xmlns:a="http://schemas.openxmlformats.org/drawingml/2006/main" lIns="152400" tIns="133350" rIns="152400" bIns="133350" anchor="ctr">
+            <a:normAutofit fontScale="72956"/>
+          </a:bodyPr>
+          <a:lstStyle xmlns:a="http://schemas.openxmlformats.org/drawingml/2006/main"/>
+          <a:p xmlns:a="http://schemas.openxmlformats.org/drawingml/2006/main">
+            <a:pPr algn="l">
+              <a:defRPr sz="1575" b="0">
+                <a:solidFill>
+                  <a:srgbClr val="10233F"/>
+                </a:solidFill>
+                <a:latin typeface="PingFang SC"/>
+                <a:ea typeface="PingFang SC"/>
+                <a:cs typeface="PingFang SC"/>
+              </a:defRPr>
+            </a:pPr>
+            <a:r>
+              <a:rPr sz="1575" b="0">
+                <a:solidFill>
+                  <a:srgbClr val="10233F"/>
+                </a:solidFill>
+                <a:latin typeface="PingFang SC"/>
+                <a:ea typeface="PingFang SC"/>
+                <a:cs typeface="PingFang SC"/>
+              </a:rPr>
+              <a:t>输入｜卫星产品、岸站与浮标观测、质量标记和适用的数值数据</a:t>
+            </a:r>
+          </a:p>
+        </p:txBody>
+      </p:sp>
+      <p:sp>
+        <p:nvSpPr>
+          <p:cNvPr id="9" name="case-row-2">
+            <a:extLst xmlns:a="http://schemas.openxmlformats.org/drawingml/2006/main">
+              <a:ext uri="{FF2B5EF4-FFF2-40B4-BE49-F238E27FC236}">
+                <a16:creationId xmlns:a16="http://schemas.microsoft.com/office/drawing/2014/main" id="{9BA87C73-1D33-4630-B37D-3E9EB6F97D27}"/>
+              </a:ext>
+            </a:extLst>
+          </p:cNvPr>
+          <p:cNvSpPr>
+            <a:spLocks xmlns:a="http://schemas.openxmlformats.org/drawingml/2006/main" noGrp="1"/>
+          </p:cNvSpPr>
+          <p:nvPr/>
+        </p:nvSpPr>
+        <p:spPr>
+          <a:xfrm xmlns:a="http://schemas.openxmlformats.org/drawingml/2006/main">
+            <a:off x="4286250" y="3295650"/>
+            <a:ext cx="6534150" cy="514350"/>
+          </a:xfrm>
+          <a:prstGeom xmlns:a="http://schemas.openxmlformats.org/drawingml/2006/main" prst="roundRect">
+            <a:avLst>
+              <a:gd name="adj" fmla="val 24074"/>
+            </a:avLst>
+          </a:prstGeom>
+          <a:solidFill xmlns:a="http://schemas.openxmlformats.org/drawingml/2006/main">
+            <a:srgbClr val="FFFFFF"/>
+          </a:solidFill>
+          <a:ln xmlns:a="http://schemas.openxmlformats.org/drawingml/2006/main" w="9525">
+            <a:solidFill>
+              <a:srgbClr val="D8E0E8"/>
+            </a:solidFill>
+            <a:prstDash val="solid"/>
+          </a:ln>
+        </p:spPr>
+        <p:txBody>
+          <a:bodyPr xmlns:a="http://schemas.openxmlformats.org/drawingml/2006/main" lIns="152400" tIns="133350" rIns="152400" bIns="133350" anchor="ctr">
+            <a:normAutofit fontScale="66940"/>
+          </a:bodyPr>
+          <a:lstStyle xmlns:a="http://schemas.openxmlformats.org/drawingml/2006/main"/>
+          <a:p xmlns:a="http://schemas.openxmlformats.org/drawingml/2006/main">
+            <a:pPr algn="l">
+              <a:defRPr sz="1575" b="0">
+                <a:solidFill>
+                  <a:srgbClr val="10233F"/>
+                </a:solidFill>
+                <a:latin typeface="PingFang SC"/>
+                <a:ea typeface="PingFang SC"/>
+                <a:cs typeface="PingFang SC"/>
+              </a:defRPr>
+            </a:pPr>
+            <a:r>
+              <a:rPr sz="1575" b="0">
+                <a:solidFill>
+                  <a:srgbClr val="10233F"/>
+                </a:solidFill>
+                <a:latin typeface="PingFang SC"/>
+                <a:ea typeface="PingFang SC"/>
+                <a:cs typeface="PingFang SC"/>
+              </a:rPr>
+              <a:t>机制｜系统统一时间和坐标，标出云遮与缺测，由科学工具计算变化，语言模型只组织带来源的解释草稿</a:t>
+            </a:r>
+          </a:p>
+        </p:txBody>
+      </p:sp>
+      <p:sp>
+        <p:nvSpPr>
+          <p:cNvPr id="10" name="case-row-3">
+            <a:extLst xmlns:a="http://schemas.openxmlformats.org/drawingml/2006/main">
+              <a:ext uri="{FF2B5EF4-FFF2-40B4-BE49-F238E27FC236}">
+                <a16:creationId xmlns:a16="http://schemas.microsoft.com/office/drawing/2014/main" id="{EE469E77-A792-403A-9550-5D4997E7A51E}"/>
+              </a:ext>
+            </a:extLst>
+          </p:cNvPr>
+          <p:cNvSpPr>
+            <a:spLocks xmlns:a="http://schemas.openxmlformats.org/drawingml/2006/main" noGrp="1"/>
+          </p:cNvSpPr>
+          <p:nvPr/>
+        </p:nvSpPr>
+        <p:spPr>
+          <a:xfrm xmlns:a="http://schemas.openxmlformats.org/drawingml/2006/main">
+            <a:off x="4286250" y="3924300"/>
+            <a:ext cx="6534150" cy="514350"/>
+          </a:xfrm>
+          <a:prstGeom xmlns:a="http://schemas.openxmlformats.org/drawingml/2006/main" prst="roundRect">
+            <a:avLst>
+              <a:gd name="adj" fmla="val 24074"/>
             </a:avLst>
           </a:prstGeom>
           <a:solidFill xmlns:a="http://schemas.openxmlformats.org/drawingml/2006/main">
@@ -10674,14 +10866,14 @@
           </a:solidFill>
           <a:ln xmlns:a="http://schemas.openxmlformats.org/drawingml/2006/main" w="9525">
             <a:solidFill>
-              <a:srgbClr val="E5783F"/>
+              <a:srgbClr val="9A3F16"/>
             </a:solidFill>
             <a:prstDash val="solid"/>
           </a:ln>
         </p:spPr>
         <p:txBody>
           <a:bodyPr xmlns:a="http://schemas.openxmlformats.org/drawingml/2006/main" lIns="152400" tIns="133350" rIns="152400" bIns="133350" anchor="ctr">
-            <a:normAutofit fontScale="100000"/>
+            <a:normAutofit fontScale="72956"/>
           </a:bodyPr>
           <a:lstStyle xmlns:a="http://schemas.openxmlformats.org/drawingml/2006/main"/>
           <a:p xmlns:a="http://schemas.openxmlformats.org/drawingml/2006/main">
@@ -10704,17 +10896,17 @@
                 <a:ea typeface="PingFang SC"/>
                 <a:cs typeface="PingFang SC"/>
               </a:rPr>
-              <a:t>验证｜验收“近岸观测周报”时，要同时记录适用场景、证据来源、失败条件与人工责任</a:t>
-            </a:r>
-          </a:p>
-        </p:txBody>
-      </p:sp>
-      <p:sp>
-        <p:nvSpPr>
-          <p:cNvPr id="9" name="s9-takeaway-rule">
-            <a:extLst xmlns:a="http://schemas.openxmlformats.org/drawingml/2006/main">
-              <a:ext uri="{FF2B5EF4-FFF2-40B4-BE49-F238E27FC236}">
-                <a16:creationId xmlns:a16="http://schemas.microsoft.com/office/drawing/2014/main" id="{9D21F50D-0E38-4009-A669-8E7AA2D777CD}"/>
+              <a:t>交付｜地图显示观测区、估计区和不可用区，报告附数据日期、分辨率、方法和不确定性</a:t>
+            </a:r>
+          </a:p>
+        </p:txBody>
+      </p:sp>
+      <p:sp>
+        <p:nvSpPr>
+          <p:cNvPr id="11" name="s9-takeaway-rule">
+            <a:extLst xmlns:a="http://schemas.openxmlformats.org/drawingml/2006/main">
+              <a:ext uri="{FF2B5EF4-FFF2-40B4-BE49-F238E27FC236}">
+                <a16:creationId xmlns:a16="http://schemas.microsoft.com/office/drawing/2014/main" id="{ACB0943E-1B70-419A-818A-852F28290B6D}"/>
               </a:ext>
             </a:extLst>
           </p:cNvPr>
@@ -10744,10 +10936,10 @@
       </p:sp>
       <p:sp>
         <p:nvSpPr>
-          <p:cNvPr id="10" name="s9-takeaway">
-            <a:extLst xmlns:a="http://schemas.openxmlformats.org/drawingml/2006/main">
-              <a:ext uri="{FF2B5EF4-FFF2-40B4-BE49-F238E27FC236}">
-                <a16:creationId xmlns:a16="http://schemas.microsoft.com/office/drawing/2014/main" id="{CF7E21E0-048F-4C69-8D64-747A1BFC7F6C}"/>
+          <p:cNvPr id="12" name="s9-takeaway">
+            <a:extLst xmlns:a="http://schemas.openxmlformats.org/drawingml/2006/main">
+              <a:ext uri="{FF2B5EF4-FFF2-40B4-BE49-F238E27FC236}">
+                <a16:creationId xmlns:a16="http://schemas.microsoft.com/office/drawing/2014/main" id="{864AFEFB-8964-4830-BF7E-CC5D7B50B62F}"/>
               </a:ext>
             </a:extLst>
           </p:cNvPr>
@@ -10803,7 +10995,7 @@
     </p:spTree>
     <p:extLst>
       <p:ext uri="{BB962C8B-B14F-4D97-AF65-F5344CB8AC3E}">
-        <p14:creationId xmlns:p14="http://schemas.microsoft.com/office/powerpoint/2010/main" val="641985565"/>
+        <p14:creationId xmlns:p14="http://schemas.microsoft.com/office/powerpoint/2010/main" val="261333662"/>
       </p:ext>
     </p:extLst>
   </p:cSld>

--- a/docs/public/course-assets/course-pptx/in-008.pptx
+++ b/docs/public/course-assets/course-pptx/in-008.pptx
@@ -2,25 +2,25 @@
 <file path=ppt/presentation.xml><?xml version="1.0" encoding="utf-8"?>
 <p:presentation xmlns:p="http://schemas.openxmlformats.org/presentationml/2006/main">
   <p:sldMasterIdLst>
-    <p:sldMasterId xmlns:r="http://schemas.openxmlformats.org/officeDocument/2006/relationships" id="2147483648" r:id="Rfba2941276b44f87"/>
+    <p:sldMasterId xmlns:r="http://schemas.openxmlformats.org/officeDocument/2006/relationships" id="2147483648" r:id="R4d61392c552d4822"/>
   </p:sldMasterIdLst>
   <p:notesMasterIdLst>
-    <p:notesMasterId xmlns:r="http://schemas.openxmlformats.org/officeDocument/2006/relationships" r:id="Ra17dde9de2e94c63"/>
+    <p:notesMasterId xmlns:r="http://schemas.openxmlformats.org/officeDocument/2006/relationships" r:id="R846f6affd94c4b63"/>
   </p:notesMasterIdLst>
   <p:sldIdLst>
-    <p:sldId xmlns:r="http://schemas.openxmlformats.org/officeDocument/2006/relationships" id="256" r:id="Rd8cbe6fd6b774030"/>
-    <p:sldId xmlns:r="http://schemas.openxmlformats.org/officeDocument/2006/relationships" id="257" r:id="Rc4214ed33ce243dc"/>
-    <p:sldId xmlns:r="http://schemas.openxmlformats.org/officeDocument/2006/relationships" id="258" r:id="Rd52d6219571642b6"/>
-    <p:sldId xmlns:r="http://schemas.openxmlformats.org/officeDocument/2006/relationships" id="259" r:id="R944f47a8756d4e78"/>
-    <p:sldId xmlns:r="http://schemas.openxmlformats.org/officeDocument/2006/relationships" id="260" r:id="R2c810cf5c3bd4528"/>
-    <p:sldId xmlns:r="http://schemas.openxmlformats.org/officeDocument/2006/relationships" id="261" r:id="Rccf1814887d44cb1"/>
-    <p:sldId xmlns:r="http://schemas.openxmlformats.org/officeDocument/2006/relationships" id="262" r:id="R50440f4949ed4c80"/>
-    <p:sldId xmlns:r="http://schemas.openxmlformats.org/officeDocument/2006/relationships" id="263" r:id="R8da8edd49c514a66"/>
-    <p:sldId xmlns:r="http://schemas.openxmlformats.org/officeDocument/2006/relationships" id="264" r:id="Rce66f1974ecd430b"/>
-    <p:sldId xmlns:r="http://schemas.openxmlformats.org/officeDocument/2006/relationships" id="265" r:id="R069d2154f3314469"/>
-    <p:sldId xmlns:r="http://schemas.openxmlformats.org/officeDocument/2006/relationships" id="266" r:id="Rd7a7265a196a4531"/>
-    <p:sldId xmlns:r="http://schemas.openxmlformats.org/officeDocument/2006/relationships" id="267" r:id="R7655b0ca9fcc41f4"/>
-    <p:sldId xmlns:r="http://schemas.openxmlformats.org/officeDocument/2006/relationships" id="268" r:id="R4fb912fc21154e6a"/>
+    <p:sldId xmlns:r="http://schemas.openxmlformats.org/officeDocument/2006/relationships" id="256" r:id="Rf5ba0996040d49df"/>
+    <p:sldId xmlns:r="http://schemas.openxmlformats.org/officeDocument/2006/relationships" id="257" r:id="R8ed80f53f2d0454b"/>
+    <p:sldId xmlns:r="http://schemas.openxmlformats.org/officeDocument/2006/relationships" id="258" r:id="R85406e9b3b314690"/>
+    <p:sldId xmlns:r="http://schemas.openxmlformats.org/officeDocument/2006/relationships" id="259" r:id="Ra947179a69264b30"/>
+    <p:sldId xmlns:r="http://schemas.openxmlformats.org/officeDocument/2006/relationships" id="260" r:id="R0610296c382d46db"/>
+    <p:sldId xmlns:r="http://schemas.openxmlformats.org/officeDocument/2006/relationships" id="261" r:id="Rd447726cac494d9f"/>
+    <p:sldId xmlns:r="http://schemas.openxmlformats.org/officeDocument/2006/relationships" id="262" r:id="R139bbe8871f14a3b"/>
+    <p:sldId xmlns:r="http://schemas.openxmlformats.org/officeDocument/2006/relationships" id="263" r:id="Rbf71dc0cee1e429c"/>
+    <p:sldId xmlns:r="http://schemas.openxmlformats.org/officeDocument/2006/relationships" id="264" r:id="Rb8be3165650947e9"/>
+    <p:sldId xmlns:r="http://schemas.openxmlformats.org/officeDocument/2006/relationships" id="265" r:id="R8c9ab71d21ec4e1d"/>
+    <p:sldId xmlns:r="http://schemas.openxmlformats.org/officeDocument/2006/relationships" id="266" r:id="R7ee44430369748e8"/>
+    <p:sldId xmlns:r="http://schemas.openxmlformats.org/officeDocument/2006/relationships" id="267" r:id="R9bacd9430b80490a"/>
+    <p:sldId xmlns:r="http://schemas.openxmlformats.org/officeDocument/2006/relationships" id="268" r:id="Rae4dc4eae2194079"/>
   </p:sldIdLst>
   <p:sldSz cx="12192000" cy="6858000"/>
   <p:notesSz cx="6858000" cy="9144000"/>
@@ -1405,7 +1405,7 @@
   </p:cSld>
   <p:clrMap bg1="lt1" tx1="dk1" bg2="lt2" tx2="dk2" accent1="accent1" accent2="accent2" accent3="accent3" accent4="accent4" accent5="accent5" accent6="accent6" hlink="hlink" folHlink="folHlink"/>
   <p:sldLayoutIdLst>
-    <p:sldLayoutId xmlns:r="http://schemas.openxmlformats.org/officeDocument/2006/relationships" id="2147483649" r:id="Rfaa6341e684d4ac3"/>
+    <p:sldLayoutId xmlns:r="http://schemas.openxmlformats.org/officeDocument/2006/relationships" id="2147483649" r:id="R6c9ef3ebaed9482a"/>
   </p:sldLayoutIdLst>
   <p:txStyles>
     <p:titleStyle>
@@ -1956,7 +1956,7 @@
           <p:cNvPr id="1" name="cover-rule">
             <a:extLst xmlns:a="http://schemas.openxmlformats.org/drawingml/2006/main">
               <a:ext uri="{FF2B5EF4-FFF2-40B4-BE49-F238E27FC236}">
-                <a16:creationId xmlns:a16="http://schemas.microsoft.com/office/drawing/2014/main" id="{5DCD79CE-1BDF-4A1B-AC4E-12F444D6284E}"/>
+                <a16:creationId xmlns:a16="http://schemas.microsoft.com/office/drawing/2014/main" id="{A9A18F95-505A-42ED-93B1-039AA7076626}"/>
               </a:ext>
             </a:extLst>
           </p:cNvPr>
@@ -1989,7 +1989,7 @@
           <p:cNvPr id="2" name="cover-ring-1">
             <a:extLst xmlns:a="http://schemas.openxmlformats.org/drawingml/2006/main">
               <a:ext uri="{FF2B5EF4-FFF2-40B4-BE49-F238E27FC236}">
-                <a16:creationId xmlns:a16="http://schemas.microsoft.com/office/drawing/2014/main" id="{35923B57-A581-46F6-9230-52EC155F4AD6}"/>
+                <a16:creationId xmlns:a16="http://schemas.microsoft.com/office/drawing/2014/main" id="{4C8D0CEA-6B58-435E-BE3C-407C329AD3C5}"/>
               </a:ext>
             </a:extLst>
           </p:cNvPr>
@@ -2020,7 +2020,7 @@
           <p:cNvPr id="3" name="cover-ring-2">
             <a:extLst xmlns:a="http://schemas.openxmlformats.org/drawingml/2006/main">
               <a:ext uri="{FF2B5EF4-FFF2-40B4-BE49-F238E27FC236}">
-                <a16:creationId xmlns:a16="http://schemas.microsoft.com/office/drawing/2014/main" id="{563501F4-D8A8-4C07-9D45-C77FB4DCC0F2}"/>
+                <a16:creationId xmlns:a16="http://schemas.microsoft.com/office/drawing/2014/main" id="{B2E04F63-07F5-4419-9955-340B8492D5D2}"/>
               </a:ext>
             </a:extLst>
           </p:cNvPr>
@@ -2051,7 +2051,7 @@
           <p:cNvPr id="4" name="cover-core">
             <a:extLst xmlns:a="http://schemas.openxmlformats.org/drawingml/2006/main">
               <a:ext uri="{FF2B5EF4-FFF2-40B4-BE49-F238E27FC236}">
-                <a16:creationId xmlns:a16="http://schemas.microsoft.com/office/drawing/2014/main" id="{2CE79F95-F62C-4AB4-B4B8-15DA7D66FB1B}"/>
+                <a16:creationId xmlns:a16="http://schemas.microsoft.com/office/drawing/2014/main" id="{A85B9161-47DA-4CEE-9969-B2EBE8E3F237}"/>
               </a:ext>
             </a:extLst>
           </p:cNvPr>
@@ -2084,7 +2084,7 @@
           <p:cNvPr id="5" name="cover-line-1">
             <a:extLst xmlns:a="http://schemas.openxmlformats.org/drawingml/2006/main">
               <a:ext uri="{FF2B5EF4-FFF2-40B4-BE49-F238E27FC236}">
-                <a16:creationId xmlns:a16="http://schemas.microsoft.com/office/drawing/2014/main" id="{11B560A8-2F74-423A-B67E-CC93D2E13FC9}"/>
+                <a16:creationId xmlns:a16="http://schemas.microsoft.com/office/drawing/2014/main" id="{7FBB6718-1580-4F40-A2C5-D7E3CA6F7ADC}"/>
               </a:ext>
             </a:extLst>
           </p:cNvPr>
@@ -2115,7 +2115,7 @@
           <p:cNvPr id="6" name="cover-line-2">
             <a:extLst xmlns:a="http://schemas.openxmlformats.org/drawingml/2006/main">
               <a:ext uri="{FF2B5EF4-FFF2-40B4-BE49-F238E27FC236}">
-                <a16:creationId xmlns:a16="http://schemas.microsoft.com/office/drawing/2014/main" id="{45F55F16-902E-431C-AC7D-D30DA8A48DBA}"/>
+                <a16:creationId xmlns:a16="http://schemas.microsoft.com/office/drawing/2014/main" id="{E2E257C5-A404-4266-9F47-F627879B873B}"/>
               </a:ext>
             </a:extLst>
           </p:cNvPr>
@@ -2146,7 +2146,7 @@
           <p:cNvPr id="7" name="cover-eyebrow">
             <a:extLst xmlns:a="http://schemas.openxmlformats.org/drawingml/2006/main">
               <a:ext uri="{FF2B5EF4-FFF2-40B4-BE49-F238E27FC236}">
-                <a16:creationId xmlns:a16="http://schemas.microsoft.com/office/drawing/2014/main" id="{9D11406C-3254-40A8-A2FB-A7BDD6C1DA43}"/>
+                <a16:creationId xmlns:a16="http://schemas.microsoft.com/office/drawing/2014/main" id="{A5ACDB3A-2B03-47C6-905A-BE16FBF54A8D}"/>
               </a:ext>
             </a:extLst>
           </p:cNvPr>
@@ -2204,7 +2204,7 @@
           <p:cNvPr id="8" name="cover-title">
             <a:extLst xmlns:a="http://schemas.openxmlformats.org/drawingml/2006/main">
               <a:ext uri="{FF2B5EF4-FFF2-40B4-BE49-F238E27FC236}">
-                <a16:creationId xmlns:a16="http://schemas.microsoft.com/office/drawing/2014/main" id="{BFDFCA8F-F0CC-4380-9C24-545B4B8AE1C0}"/>
+                <a16:creationId xmlns:a16="http://schemas.microsoft.com/office/drawing/2014/main" id="{6929237D-B69A-4270-AD3A-CFCAAD61E100}"/>
               </a:ext>
             </a:extLst>
           </p:cNvPr>
@@ -2262,7 +2262,7 @@
           <p:cNvPr id="9" name="cover-subtitle">
             <a:extLst xmlns:a="http://schemas.openxmlformats.org/drawingml/2006/main">
               <a:ext uri="{FF2B5EF4-FFF2-40B4-BE49-F238E27FC236}">
-                <a16:creationId xmlns:a16="http://schemas.microsoft.com/office/drawing/2014/main" id="{E7554292-6D92-42DF-8420-B4510E161249}"/>
+                <a16:creationId xmlns:a16="http://schemas.microsoft.com/office/drawing/2014/main" id="{903E2714-899C-46D7-BEEB-C5309D505A51}"/>
               </a:ext>
             </a:extLst>
           </p:cNvPr>
@@ -2324,7 +2324,7 @@
           <p:cNvPr id="10" name="cover-lead">
             <a:extLst xmlns:a="http://schemas.openxmlformats.org/drawingml/2006/main">
               <a:ext uri="{FF2B5EF4-FFF2-40B4-BE49-F238E27FC236}">
-                <a16:creationId xmlns:a16="http://schemas.microsoft.com/office/drawing/2014/main" id="{AD9A557F-4566-47F3-94DC-17FC2DA529E6}"/>
+                <a16:creationId xmlns:a16="http://schemas.microsoft.com/office/drawing/2014/main" id="{0A3D182A-14EA-4339-A315-9338C7AA01FC}"/>
               </a:ext>
             </a:extLst>
           </p:cNvPr>
@@ -2382,7 +2382,7 @@
           <p:cNvPr id="11" name="cover-course">
             <a:extLst xmlns:a="http://schemas.openxmlformats.org/drawingml/2006/main">
               <a:ext uri="{FF2B5EF4-FFF2-40B4-BE49-F238E27FC236}">
-                <a16:creationId xmlns:a16="http://schemas.microsoft.com/office/drawing/2014/main" id="{04E43CAA-CBF6-49F7-B5A0-316A22665614}"/>
+                <a16:creationId xmlns:a16="http://schemas.microsoft.com/office/drawing/2014/main" id="{54F838C4-0C04-4986-9BE6-C026E2D23532}"/>
               </a:ext>
             </a:extLst>
           </p:cNvPr>
@@ -2440,7 +2440,7 @@
           <p:cNvPr id="12" name="cover-id">
             <a:extLst xmlns:a="http://schemas.openxmlformats.org/drawingml/2006/main">
               <a:ext uri="{FF2B5EF4-FFF2-40B4-BE49-F238E27FC236}">
-                <a16:creationId xmlns:a16="http://schemas.microsoft.com/office/drawing/2014/main" id="{B23AD68B-7B6E-4323-9351-203004903B44}"/>
+                <a16:creationId xmlns:a16="http://schemas.microsoft.com/office/drawing/2014/main" id="{68C9ACB2-C743-4A88-89C8-05BC4F484DCC}"/>
               </a:ext>
             </a:extLst>
           </p:cNvPr>
@@ -2496,7 +2496,7 @@
     </p:spTree>
     <p:extLst>
       <p:ext uri="{BB962C8B-B14F-4D97-AF65-F5344CB8AC3E}">
-        <p14:creationId xmlns:p14="http://schemas.microsoft.com/office/powerpoint/2010/main" val="1129402702"/>
+        <p14:creationId xmlns:p14="http://schemas.microsoft.com/office/powerpoint/2010/main" val="1686830272"/>
       </p:ext>
     </p:extLst>
   </p:cSld>
@@ -2527,7 +2527,7 @@
           <p:cNvPr id="1" name="s10-rule">
             <a:extLst xmlns:a="http://schemas.openxmlformats.org/drawingml/2006/main">
               <a:ext uri="{FF2B5EF4-FFF2-40B4-BE49-F238E27FC236}">
-                <a16:creationId xmlns:a16="http://schemas.microsoft.com/office/drawing/2014/main" id="{4FE2DEF8-B9D9-4B2E-822E-9D7F4840E0AB}"/>
+                <a16:creationId xmlns:a16="http://schemas.microsoft.com/office/drawing/2014/main" id="{72FC8CE4-B52E-4891-958E-D6650E0E7B94}"/>
               </a:ext>
             </a:extLst>
           </p:cNvPr>
@@ -2560,7 +2560,7 @@
           <p:cNvPr id="2" name="s10-eyebrow">
             <a:extLst xmlns:a="http://schemas.openxmlformats.org/drawingml/2006/main">
               <a:ext uri="{FF2B5EF4-FFF2-40B4-BE49-F238E27FC236}">
-                <a16:creationId xmlns:a16="http://schemas.microsoft.com/office/drawing/2014/main" id="{4DD43485-7A35-42B0-A379-D69934E42206}"/>
+                <a16:creationId xmlns:a16="http://schemas.microsoft.com/office/drawing/2014/main" id="{0336F813-46EE-4519-BD9F-85A141D2B02B}"/>
               </a:ext>
             </a:extLst>
           </p:cNvPr>
@@ -2618,7 +2618,7 @@
           <p:cNvPr id="3" name="s10-title">
             <a:extLst xmlns:a="http://schemas.openxmlformats.org/drawingml/2006/main">
               <a:ext uri="{FF2B5EF4-FFF2-40B4-BE49-F238E27FC236}">
-                <a16:creationId xmlns:a16="http://schemas.microsoft.com/office/drawing/2014/main" id="{4F9B548F-0F82-4258-AAEA-DA77D82ACF1C}"/>
+                <a16:creationId xmlns:a16="http://schemas.microsoft.com/office/drawing/2014/main" id="{0D07CBF5-553F-420B-B749-B55AFD43F043}"/>
               </a:ext>
             </a:extLst>
           </p:cNvPr>
@@ -2676,7 +2676,7 @@
           <p:cNvPr id="4" name="s10-footer">
             <a:extLst xmlns:a="http://schemas.openxmlformats.org/drawingml/2006/main">
               <a:ext uri="{FF2B5EF4-FFF2-40B4-BE49-F238E27FC236}">
-                <a16:creationId xmlns:a16="http://schemas.microsoft.com/office/drawing/2014/main" id="{D8B34895-C726-40DB-AE6E-5AD37FC4531F}"/>
+                <a16:creationId xmlns:a16="http://schemas.microsoft.com/office/drawing/2014/main" id="{61817112-DBC6-482A-BAB4-A2084A563ADD}"/>
               </a:ext>
             </a:extLst>
           </p:cNvPr>
@@ -2707,7 +2707,7 @@
           <p:cNvPr id="5" name="s10-identity">
             <a:extLst xmlns:a="http://schemas.openxmlformats.org/drawingml/2006/main">
               <a:ext uri="{FF2B5EF4-FFF2-40B4-BE49-F238E27FC236}">
-                <a16:creationId xmlns:a16="http://schemas.microsoft.com/office/drawing/2014/main" id="{22E3EE62-96D2-4D0E-92A2-3A70FA58DECF}"/>
+                <a16:creationId xmlns:a16="http://schemas.microsoft.com/office/drawing/2014/main" id="{16234C18-47F8-43A3-A495-5E103D73ED7C}"/>
               </a:ext>
             </a:extLst>
           </p:cNvPr>
@@ -2765,7 +2765,7 @@
           <p:cNvPr id="6" name="case-title">
             <a:extLst xmlns:a="http://schemas.openxmlformats.org/drawingml/2006/main">
               <a:ext uri="{FF2B5EF4-FFF2-40B4-BE49-F238E27FC236}">
-                <a16:creationId xmlns:a16="http://schemas.microsoft.com/office/drawing/2014/main" id="{B2B72DFE-A2B3-43D5-B3AD-FDC8315D2041}"/>
+                <a16:creationId xmlns:a16="http://schemas.microsoft.com/office/drawing/2014/main" id="{B1402CC1-8C0B-4EC9-BE5F-956A6DA8222F}"/>
               </a:ext>
             </a:extLst>
           </p:cNvPr>
@@ -2829,7 +2829,7 @@
           <p:cNvPr id="7" name="case-row-0">
             <a:extLst xmlns:a="http://schemas.openxmlformats.org/drawingml/2006/main">
               <a:ext uri="{FF2B5EF4-FFF2-40B4-BE49-F238E27FC236}">
-                <a16:creationId xmlns:a16="http://schemas.microsoft.com/office/drawing/2014/main" id="{531EFFFF-ED54-441E-A7E2-9B6A43963E40}"/>
+                <a16:creationId xmlns:a16="http://schemas.microsoft.com/office/drawing/2014/main" id="{2B229075-3F7C-4BAB-91BE-00DB102E8259}"/>
               </a:ext>
             </a:extLst>
           </p:cNvPr>
@@ -2893,7 +2893,7 @@
           <p:cNvPr id="8" name="case-row-1">
             <a:extLst xmlns:a="http://schemas.openxmlformats.org/drawingml/2006/main">
               <a:ext uri="{FF2B5EF4-FFF2-40B4-BE49-F238E27FC236}">
-                <a16:creationId xmlns:a16="http://schemas.microsoft.com/office/drawing/2014/main" id="{A7B7EB7A-ED49-4732-9BBA-B73D6DB774E2}"/>
+                <a16:creationId xmlns:a16="http://schemas.microsoft.com/office/drawing/2014/main" id="{7D1A063C-FBE9-48F3-A63C-B2B4486F52DB}"/>
               </a:ext>
             </a:extLst>
           </p:cNvPr>
@@ -2957,7 +2957,7 @@
           <p:cNvPr id="9" name="case-row-2">
             <a:extLst xmlns:a="http://schemas.openxmlformats.org/drawingml/2006/main">
               <a:ext uri="{FF2B5EF4-FFF2-40B4-BE49-F238E27FC236}">
-                <a16:creationId xmlns:a16="http://schemas.microsoft.com/office/drawing/2014/main" id="{B9F548AF-419F-402F-AF1A-ABFBE97FDF4E}"/>
+                <a16:creationId xmlns:a16="http://schemas.microsoft.com/office/drawing/2014/main" id="{DE61E0C6-3EA4-4DA7-90B3-96618B1BBD1A}"/>
               </a:ext>
             </a:extLst>
           </p:cNvPr>
@@ -3021,7 +3021,7 @@
           <p:cNvPr id="10" name="s10-takeaway-rule">
             <a:extLst xmlns:a="http://schemas.openxmlformats.org/drawingml/2006/main">
               <a:ext uri="{FF2B5EF4-FFF2-40B4-BE49-F238E27FC236}">
-                <a16:creationId xmlns:a16="http://schemas.microsoft.com/office/drawing/2014/main" id="{9B29BC9E-0042-4617-ADC1-866A760BBB9C}"/>
+                <a16:creationId xmlns:a16="http://schemas.microsoft.com/office/drawing/2014/main" id="{F4E1DE8F-8FDD-4307-B3BF-C495EBE723CA}"/>
               </a:ext>
             </a:extLst>
           </p:cNvPr>
@@ -3054,7 +3054,7 @@
           <p:cNvPr id="11" name="s10-takeaway">
             <a:extLst xmlns:a="http://schemas.openxmlformats.org/drawingml/2006/main">
               <a:ext uri="{FF2B5EF4-FFF2-40B4-BE49-F238E27FC236}">
-                <a16:creationId xmlns:a16="http://schemas.microsoft.com/office/drawing/2014/main" id="{1211AB16-5A95-41B0-B698-D620DD902845}"/>
+                <a16:creationId xmlns:a16="http://schemas.microsoft.com/office/drawing/2014/main" id="{0C47DE2E-F32D-4DC3-8E15-7332B1E46F52}"/>
               </a:ext>
             </a:extLst>
           </p:cNvPr>
@@ -3110,7 +3110,7 @@
     </p:spTree>
     <p:extLst>
       <p:ext uri="{BB962C8B-B14F-4D97-AF65-F5344CB8AC3E}">
-        <p14:creationId xmlns:p14="http://schemas.microsoft.com/office/powerpoint/2010/main" val="367831570"/>
+        <p14:creationId xmlns:p14="http://schemas.microsoft.com/office/powerpoint/2010/main" val="1765639351"/>
       </p:ext>
     </p:extLst>
   </p:cSld>
@@ -3141,7 +3141,7 @@
           <p:cNvPr id="1" name="s11-rule">
             <a:extLst xmlns:a="http://schemas.openxmlformats.org/drawingml/2006/main">
               <a:ext uri="{FF2B5EF4-FFF2-40B4-BE49-F238E27FC236}">
-                <a16:creationId xmlns:a16="http://schemas.microsoft.com/office/drawing/2014/main" id="{5F36F600-EF33-4C65-818F-99832EF3A5EC}"/>
+                <a16:creationId xmlns:a16="http://schemas.microsoft.com/office/drawing/2014/main" id="{9823D2AC-D7B2-421E-8D71-29311BAF7A6C}"/>
               </a:ext>
             </a:extLst>
           </p:cNvPr>
@@ -3174,7 +3174,7 @@
           <p:cNvPr id="2" name="s11-eyebrow">
             <a:extLst xmlns:a="http://schemas.openxmlformats.org/drawingml/2006/main">
               <a:ext uri="{FF2B5EF4-FFF2-40B4-BE49-F238E27FC236}">
-                <a16:creationId xmlns:a16="http://schemas.microsoft.com/office/drawing/2014/main" id="{11B37774-49AD-412A-91EE-E3131E421041}"/>
+                <a16:creationId xmlns:a16="http://schemas.microsoft.com/office/drawing/2014/main" id="{ED00BBD5-8A0C-4649-B448-DDC4938C6D81}"/>
               </a:ext>
             </a:extLst>
           </p:cNvPr>
@@ -3232,7 +3232,7 @@
           <p:cNvPr id="3" name="s11-title">
             <a:extLst xmlns:a="http://schemas.openxmlformats.org/drawingml/2006/main">
               <a:ext uri="{FF2B5EF4-FFF2-40B4-BE49-F238E27FC236}">
-                <a16:creationId xmlns:a16="http://schemas.microsoft.com/office/drawing/2014/main" id="{D8798281-871E-4AEA-8115-FA7BA67E665F}"/>
+                <a16:creationId xmlns:a16="http://schemas.microsoft.com/office/drawing/2014/main" id="{E44AC1C2-BEC8-455C-B7D0-5C444723D5E7}"/>
               </a:ext>
             </a:extLst>
           </p:cNvPr>
@@ -3290,7 +3290,7 @@
           <p:cNvPr id="4" name="s11-footer">
             <a:extLst xmlns:a="http://schemas.openxmlformats.org/drawingml/2006/main">
               <a:ext uri="{FF2B5EF4-FFF2-40B4-BE49-F238E27FC236}">
-                <a16:creationId xmlns:a16="http://schemas.microsoft.com/office/drawing/2014/main" id="{EC56B582-AAA5-4CA9-BAAE-3B4BCD29FA5F}"/>
+                <a16:creationId xmlns:a16="http://schemas.microsoft.com/office/drawing/2014/main" id="{864BD9F5-A8EB-4018-990A-F540314CD872}"/>
               </a:ext>
             </a:extLst>
           </p:cNvPr>
@@ -3321,7 +3321,7 @@
           <p:cNvPr id="5" name="s11-identity">
             <a:extLst xmlns:a="http://schemas.openxmlformats.org/drawingml/2006/main">
               <a:ext uri="{FF2B5EF4-FFF2-40B4-BE49-F238E27FC236}">
-                <a16:creationId xmlns:a16="http://schemas.microsoft.com/office/drawing/2014/main" id="{B24F0D09-06BF-4ECA-9019-8CFAA8130E29}"/>
+                <a16:creationId xmlns:a16="http://schemas.microsoft.com/office/drawing/2014/main" id="{8DF82BB6-9C64-4A5F-9276-5D5357E96144}"/>
               </a:ext>
             </a:extLst>
           </p:cNvPr>
@@ -3379,7 +3379,7 @@
           <p:cNvPr id="6" name="practice-circle-0">
             <a:extLst xmlns:a="http://schemas.openxmlformats.org/drawingml/2006/main">
               <a:ext uri="{FF2B5EF4-FFF2-40B4-BE49-F238E27FC236}">
-                <a16:creationId xmlns:a16="http://schemas.microsoft.com/office/drawing/2014/main" id="{C4A288CB-A908-4CA2-959A-519A27D1B91B}"/>
+                <a16:creationId xmlns:a16="http://schemas.microsoft.com/office/drawing/2014/main" id="{C7F680F5-A17C-48EA-B0D8-2BE94B43E02E}"/>
               </a:ext>
             </a:extLst>
           </p:cNvPr>
@@ -3412,7 +3412,7 @@
           <p:cNvPr id="7" name="practice-number-0">
             <a:extLst xmlns:a="http://schemas.openxmlformats.org/drawingml/2006/main">
               <a:ext uri="{FF2B5EF4-FFF2-40B4-BE49-F238E27FC236}">
-                <a16:creationId xmlns:a16="http://schemas.microsoft.com/office/drawing/2014/main" id="{6DFA505F-6A90-40AA-95C8-39916A403D42}"/>
+                <a16:creationId xmlns:a16="http://schemas.microsoft.com/office/drawing/2014/main" id="{43E49673-0C7C-4882-9E18-64478916E4BC}"/>
               </a:ext>
             </a:extLst>
           </p:cNvPr>
@@ -3470,7 +3470,7 @@
           <p:cNvPr id="8" name="practice-item-0">
             <a:extLst xmlns:a="http://schemas.openxmlformats.org/drawingml/2006/main">
               <a:ext uri="{FF2B5EF4-FFF2-40B4-BE49-F238E27FC236}">
-                <a16:creationId xmlns:a16="http://schemas.microsoft.com/office/drawing/2014/main" id="{6B81BD38-F8EB-4890-83AD-8B1A0A11EF7C}"/>
+                <a16:creationId xmlns:a16="http://schemas.microsoft.com/office/drawing/2014/main" id="{072A0389-1734-47BD-9FC8-5E12F8274D2A}"/>
               </a:ext>
             </a:extLst>
           </p:cNvPr>
@@ -3534,7 +3534,7 @@
           <p:cNvPr id="9" name="practice-connector-0">
             <a:extLst xmlns:a="http://schemas.openxmlformats.org/drawingml/2006/main">
               <a:ext uri="{FF2B5EF4-FFF2-40B4-BE49-F238E27FC236}">
-                <a16:creationId xmlns:a16="http://schemas.microsoft.com/office/drawing/2014/main" id="{EC0CCD3E-CC0F-484C-B737-C451FE7681EB}"/>
+                <a16:creationId xmlns:a16="http://schemas.microsoft.com/office/drawing/2014/main" id="{767E535A-A1F7-45D9-9E17-688B604B770B}"/>
               </a:ext>
             </a:extLst>
           </p:cNvPr>
@@ -3565,7 +3565,7 @@
           <p:cNvPr id="10" name="practice-circle-1">
             <a:extLst xmlns:a="http://schemas.openxmlformats.org/drawingml/2006/main">
               <a:ext uri="{FF2B5EF4-FFF2-40B4-BE49-F238E27FC236}">
-                <a16:creationId xmlns:a16="http://schemas.microsoft.com/office/drawing/2014/main" id="{CDB4FD42-4124-4EA6-9C6F-1B82BFFB0C4D}"/>
+                <a16:creationId xmlns:a16="http://schemas.microsoft.com/office/drawing/2014/main" id="{108B21A8-CA1E-4D50-86BE-1AAD408073CE}"/>
               </a:ext>
             </a:extLst>
           </p:cNvPr>
@@ -3598,7 +3598,7 @@
           <p:cNvPr id="11" name="practice-number-1">
             <a:extLst xmlns:a="http://schemas.openxmlformats.org/drawingml/2006/main">
               <a:ext uri="{FF2B5EF4-FFF2-40B4-BE49-F238E27FC236}">
-                <a16:creationId xmlns:a16="http://schemas.microsoft.com/office/drawing/2014/main" id="{64847978-2653-490F-B54B-205D8CCE18ED}"/>
+                <a16:creationId xmlns:a16="http://schemas.microsoft.com/office/drawing/2014/main" id="{1759F6FC-8467-407D-A6EA-D52581F2B963}"/>
               </a:ext>
             </a:extLst>
           </p:cNvPr>
@@ -3656,7 +3656,7 @@
           <p:cNvPr id="12" name="practice-item-1">
             <a:extLst xmlns:a="http://schemas.openxmlformats.org/drawingml/2006/main">
               <a:ext uri="{FF2B5EF4-FFF2-40B4-BE49-F238E27FC236}">
-                <a16:creationId xmlns:a16="http://schemas.microsoft.com/office/drawing/2014/main" id="{E0352BCC-106C-4E1D-B3E4-E6C906B74B44}"/>
+                <a16:creationId xmlns:a16="http://schemas.microsoft.com/office/drawing/2014/main" id="{16450A23-75A4-49C0-ABE1-9F35A110DF4D}"/>
               </a:ext>
             </a:extLst>
           </p:cNvPr>
@@ -3720,7 +3720,7 @@
           <p:cNvPr id="13" name="practice-connector-1">
             <a:extLst xmlns:a="http://schemas.openxmlformats.org/drawingml/2006/main">
               <a:ext uri="{FF2B5EF4-FFF2-40B4-BE49-F238E27FC236}">
-                <a16:creationId xmlns:a16="http://schemas.microsoft.com/office/drawing/2014/main" id="{2D666E8C-F60D-4780-810E-9F261A607906}"/>
+                <a16:creationId xmlns:a16="http://schemas.microsoft.com/office/drawing/2014/main" id="{4C0D0C18-352F-4E41-A3F8-D2F247C9F6A9}"/>
               </a:ext>
             </a:extLst>
           </p:cNvPr>
@@ -3751,7 +3751,7 @@
           <p:cNvPr id="14" name="practice-circle-2">
             <a:extLst xmlns:a="http://schemas.openxmlformats.org/drawingml/2006/main">
               <a:ext uri="{FF2B5EF4-FFF2-40B4-BE49-F238E27FC236}">
-                <a16:creationId xmlns:a16="http://schemas.microsoft.com/office/drawing/2014/main" id="{78C23777-2A86-4A2D-825B-2A2C4EEA9176}"/>
+                <a16:creationId xmlns:a16="http://schemas.microsoft.com/office/drawing/2014/main" id="{EFFF3CA4-1C88-4BCB-A11D-A0D9A0196762}"/>
               </a:ext>
             </a:extLst>
           </p:cNvPr>
@@ -3784,7 +3784,7 @@
           <p:cNvPr id="15" name="practice-number-2">
             <a:extLst xmlns:a="http://schemas.openxmlformats.org/drawingml/2006/main">
               <a:ext uri="{FF2B5EF4-FFF2-40B4-BE49-F238E27FC236}">
-                <a16:creationId xmlns:a16="http://schemas.microsoft.com/office/drawing/2014/main" id="{677D3531-0257-4E24-A1A6-63F1070961AA}"/>
+                <a16:creationId xmlns:a16="http://schemas.microsoft.com/office/drawing/2014/main" id="{29A51D32-3EE4-4BC9-ABFA-A9DBB92A608D}"/>
               </a:ext>
             </a:extLst>
           </p:cNvPr>
@@ -3842,7 +3842,7 @@
           <p:cNvPr id="16" name="practice-item-2">
             <a:extLst xmlns:a="http://schemas.openxmlformats.org/drawingml/2006/main">
               <a:ext uri="{FF2B5EF4-FFF2-40B4-BE49-F238E27FC236}">
-                <a16:creationId xmlns:a16="http://schemas.microsoft.com/office/drawing/2014/main" id="{E90B8941-322E-4026-8F56-E63B9A1A2315}"/>
+                <a16:creationId xmlns:a16="http://schemas.microsoft.com/office/drawing/2014/main" id="{CD16567A-C1FA-4229-9EC3-15E12C2AEA3F}"/>
               </a:ext>
             </a:extLst>
           </p:cNvPr>
@@ -3904,7 +3904,7 @@
     </p:spTree>
     <p:extLst>
       <p:ext uri="{BB962C8B-B14F-4D97-AF65-F5344CB8AC3E}">
-        <p14:creationId xmlns:p14="http://schemas.microsoft.com/office/powerpoint/2010/main" val="702824744"/>
+        <p14:creationId xmlns:p14="http://schemas.microsoft.com/office/powerpoint/2010/main" val="2107189576"/>
       </p:ext>
     </p:extLst>
   </p:cSld>
@@ -3935,7 +3935,7 @@
           <p:cNvPr id="1" name="s12-rule">
             <a:extLst xmlns:a="http://schemas.openxmlformats.org/drawingml/2006/main">
               <a:ext uri="{FF2B5EF4-FFF2-40B4-BE49-F238E27FC236}">
-                <a16:creationId xmlns:a16="http://schemas.microsoft.com/office/drawing/2014/main" id="{13F243CF-3698-42F5-9B0F-94939DA56AAE}"/>
+                <a16:creationId xmlns:a16="http://schemas.microsoft.com/office/drawing/2014/main" id="{73589553-0C29-4AE3-8C7E-3EAA0826E0AC}"/>
               </a:ext>
             </a:extLst>
           </p:cNvPr>
@@ -3968,7 +3968,7 @@
           <p:cNvPr id="2" name="s12-eyebrow">
             <a:extLst xmlns:a="http://schemas.openxmlformats.org/drawingml/2006/main">
               <a:ext uri="{FF2B5EF4-FFF2-40B4-BE49-F238E27FC236}">
-                <a16:creationId xmlns:a16="http://schemas.microsoft.com/office/drawing/2014/main" id="{2DF44F6F-8F8E-4D2B-A746-97C69D407CDB}"/>
+                <a16:creationId xmlns:a16="http://schemas.microsoft.com/office/drawing/2014/main" id="{D454657B-5A20-44E8-99F2-AC94833F5E77}"/>
               </a:ext>
             </a:extLst>
           </p:cNvPr>
@@ -4026,7 +4026,7 @@
           <p:cNvPr id="3" name="s12-title">
             <a:extLst xmlns:a="http://schemas.openxmlformats.org/drawingml/2006/main">
               <a:ext uri="{FF2B5EF4-FFF2-40B4-BE49-F238E27FC236}">
-                <a16:creationId xmlns:a16="http://schemas.microsoft.com/office/drawing/2014/main" id="{87DC2022-E250-4147-A130-8CA91D9F4CFA}"/>
+                <a16:creationId xmlns:a16="http://schemas.microsoft.com/office/drawing/2014/main" id="{410780D3-26AC-4C99-BE34-5668EE883AE7}"/>
               </a:ext>
             </a:extLst>
           </p:cNvPr>
@@ -4084,7 +4084,7 @@
           <p:cNvPr id="4" name="s12-footer">
             <a:extLst xmlns:a="http://schemas.openxmlformats.org/drawingml/2006/main">
               <a:ext uri="{FF2B5EF4-FFF2-40B4-BE49-F238E27FC236}">
-                <a16:creationId xmlns:a16="http://schemas.microsoft.com/office/drawing/2014/main" id="{F4A0CDD6-EDB6-43B9-9085-C8EAF3090235}"/>
+                <a16:creationId xmlns:a16="http://schemas.microsoft.com/office/drawing/2014/main" id="{A80D28D6-DB14-48BC-893E-2C6D958F35B9}"/>
               </a:ext>
             </a:extLst>
           </p:cNvPr>
@@ -4115,7 +4115,7 @@
           <p:cNvPr id="5" name="s12-identity">
             <a:extLst xmlns:a="http://schemas.openxmlformats.org/drawingml/2006/main">
               <a:ext uri="{FF2B5EF4-FFF2-40B4-BE49-F238E27FC236}">
-                <a16:creationId xmlns:a16="http://schemas.microsoft.com/office/drawing/2014/main" id="{557BB487-C3F0-49A8-B684-AF8D16F4CB66}"/>
+                <a16:creationId xmlns:a16="http://schemas.microsoft.com/office/drawing/2014/main" id="{A2419EE0-06F5-49A1-AE2D-631DCAFD13A9}"/>
               </a:ext>
             </a:extLst>
           </p:cNvPr>
@@ -4173,7 +4173,7 @@
           <p:cNvPr id="6" name="recap-circle-0">
             <a:extLst xmlns:a="http://schemas.openxmlformats.org/drawingml/2006/main">
               <a:ext uri="{FF2B5EF4-FFF2-40B4-BE49-F238E27FC236}">
-                <a16:creationId xmlns:a16="http://schemas.microsoft.com/office/drawing/2014/main" id="{DC239278-7353-451C-B41F-89B0E5BB951D}"/>
+                <a16:creationId xmlns:a16="http://schemas.microsoft.com/office/drawing/2014/main" id="{8EA16BD0-6566-4A3E-93CD-EB39F8359B9F}"/>
               </a:ext>
             </a:extLst>
           </p:cNvPr>
@@ -4206,7 +4206,7 @@
           <p:cNvPr id="7" name="recap-number-0">
             <a:extLst xmlns:a="http://schemas.openxmlformats.org/drawingml/2006/main">
               <a:ext uri="{FF2B5EF4-FFF2-40B4-BE49-F238E27FC236}">
-                <a16:creationId xmlns:a16="http://schemas.microsoft.com/office/drawing/2014/main" id="{E549C74F-5BC8-493B-8D95-1F9BABCBDAA1}"/>
+                <a16:creationId xmlns:a16="http://schemas.microsoft.com/office/drawing/2014/main" id="{0AD2E242-9CE6-45B8-B4A9-2FBF9C99A796}"/>
               </a:ext>
             </a:extLst>
           </p:cNvPr>
@@ -4264,7 +4264,7 @@
           <p:cNvPr id="8" name="recap-item-0">
             <a:extLst xmlns:a="http://schemas.openxmlformats.org/drawingml/2006/main">
               <a:ext uri="{FF2B5EF4-FFF2-40B4-BE49-F238E27FC236}">
-                <a16:creationId xmlns:a16="http://schemas.microsoft.com/office/drawing/2014/main" id="{78AF6659-D055-45F0-82D6-5A3BFD0FCBF0}"/>
+                <a16:creationId xmlns:a16="http://schemas.microsoft.com/office/drawing/2014/main" id="{0DA73DA2-724B-488E-8510-C0ADDED457EF}"/>
               </a:ext>
             </a:extLst>
           </p:cNvPr>
@@ -4328,7 +4328,7 @@
           <p:cNvPr id="9" name="recap-connector-0">
             <a:extLst xmlns:a="http://schemas.openxmlformats.org/drawingml/2006/main">
               <a:ext uri="{FF2B5EF4-FFF2-40B4-BE49-F238E27FC236}">
-                <a16:creationId xmlns:a16="http://schemas.microsoft.com/office/drawing/2014/main" id="{DEF9FB30-AE66-4183-A327-9640414D6BFC}"/>
+                <a16:creationId xmlns:a16="http://schemas.microsoft.com/office/drawing/2014/main" id="{E5A8D532-F282-41DC-AAF7-F801DECB1A3D}"/>
               </a:ext>
             </a:extLst>
           </p:cNvPr>
@@ -4359,7 +4359,7 @@
           <p:cNvPr id="10" name="recap-circle-1">
             <a:extLst xmlns:a="http://schemas.openxmlformats.org/drawingml/2006/main">
               <a:ext uri="{FF2B5EF4-FFF2-40B4-BE49-F238E27FC236}">
-                <a16:creationId xmlns:a16="http://schemas.microsoft.com/office/drawing/2014/main" id="{DCE75D73-10E7-4D60-B834-56797A34F3DE}"/>
+                <a16:creationId xmlns:a16="http://schemas.microsoft.com/office/drawing/2014/main" id="{C87D591E-85C2-4AB6-A44F-FE4F5DEC75A3}"/>
               </a:ext>
             </a:extLst>
           </p:cNvPr>
@@ -4392,7 +4392,7 @@
           <p:cNvPr id="11" name="recap-number-1">
             <a:extLst xmlns:a="http://schemas.openxmlformats.org/drawingml/2006/main">
               <a:ext uri="{FF2B5EF4-FFF2-40B4-BE49-F238E27FC236}">
-                <a16:creationId xmlns:a16="http://schemas.microsoft.com/office/drawing/2014/main" id="{EA926F7D-7278-4C1C-8630-65ECCC727962}"/>
+                <a16:creationId xmlns:a16="http://schemas.microsoft.com/office/drawing/2014/main" id="{6E740936-2349-45B8-9F58-4794E83516F5}"/>
               </a:ext>
             </a:extLst>
           </p:cNvPr>
@@ -4450,7 +4450,7 @@
           <p:cNvPr id="12" name="recap-item-1">
             <a:extLst xmlns:a="http://schemas.openxmlformats.org/drawingml/2006/main">
               <a:ext uri="{FF2B5EF4-FFF2-40B4-BE49-F238E27FC236}">
-                <a16:creationId xmlns:a16="http://schemas.microsoft.com/office/drawing/2014/main" id="{F39DC2DF-AC3D-477C-AF04-08FF6A86E148}"/>
+                <a16:creationId xmlns:a16="http://schemas.microsoft.com/office/drawing/2014/main" id="{AAD0CF4B-481C-4A1B-9EB0-90A76E1CC219}"/>
               </a:ext>
             </a:extLst>
           </p:cNvPr>
@@ -4514,7 +4514,7 @@
           <p:cNvPr id="13" name="recap-connector-1">
             <a:extLst xmlns:a="http://schemas.openxmlformats.org/drawingml/2006/main">
               <a:ext uri="{FF2B5EF4-FFF2-40B4-BE49-F238E27FC236}">
-                <a16:creationId xmlns:a16="http://schemas.microsoft.com/office/drawing/2014/main" id="{F1E08DE4-6365-4BB0-9089-2CD796F6DD23}"/>
+                <a16:creationId xmlns:a16="http://schemas.microsoft.com/office/drawing/2014/main" id="{0EE0B3FD-2B7E-4F4B-B1A9-E339A1FC7E37}"/>
               </a:ext>
             </a:extLst>
           </p:cNvPr>
@@ -4545,7 +4545,7 @@
           <p:cNvPr id="14" name="recap-circle-2">
             <a:extLst xmlns:a="http://schemas.openxmlformats.org/drawingml/2006/main">
               <a:ext uri="{FF2B5EF4-FFF2-40B4-BE49-F238E27FC236}">
-                <a16:creationId xmlns:a16="http://schemas.microsoft.com/office/drawing/2014/main" id="{1A9DF142-9B70-415F-93A6-7C7D23113AC2}"/>
+                <a16:creationId xmlns:a16="http://schemas.microsoft.com/office/drawing/2014/main" id="{02E73BA6-3E52-4E60-901F-E3AC8617834F}"/>
               </a:ext>
             </a:extLst>
           </p:cNvPr>
@@ -4578,7 +4578,7 @@
           <p:cNvPr id="15" name="recap-number-2">
             <a:extLst xmlns:a="http://schemas.openxmlformats.org/drawingml/2006/main">
               <a:ext uri="{FF2B5EF4-FFF2-40B4-BE49-F238E27FC236}">
-                <a16:creationId xmlns:a16="http://schemas.microsoft.com/office/drawing/2014/main" id="{FBE235BD-AA57-42B2-80FB-1A39DD61C5BB}"/>
+                <a16:creationId xmlns:a16="http://schemas.microsoft.com/office/drawing/2014/main" id="{79C5A8E8-F5B1-431D-889B-5D84D585B3D9}"/>
               </a:ext>
             </a:extLst>
           </p:cNvPr>
@@ -4636,7 +4636,7 @@
           <p:cNvPr id="16" name="recap-item-2">
             <a:extLst xmlns:a="http://schemas.openxmlformats.org/drawingml/2006/main">
               <a:ext uri="{FF2B5EF4-FFF2-40B4-BE49-F238E27FC236}">
-                <a16:creationId xmlns:a16="http://schemas.microsoft.com/office/drawing/2014/main" id="{A4F28B7F-AE7C-4D56-916C-317A7C215849}"/>
+                <a16:creationId xmlns:a16="http://schemas.microsoft.com/office/drawing/2014/main" id="{D242B9B0-DCAB-4FAD-A63E-9AAB419D2BF4}"/>
               </a:ext>
             </a:extLst>
           </p:cNvPr>
@@ -4698,7 +4698,7 @@
     </p:spTree>
     <p:extLst>
       <p:ext uri="{BB962C8B-B14F-4D97-AF65-F5344CB8AC3E}">
-        <p14:creationId xmlns:p14="http://schemas.microsoft.com/office/powerpoint/2010/main" val="628588644"/>
+        <p14:creationId xmlns:p14="http://schemas.microsoft.com/office/powerpoint/2010/main" val="157049385"/>
       </p:ext>
     </p:extLst>
   </p:cSld>
@@ -4729,7 +4729,7 @@
           <p:cNvPr id="1" name="s13-rule">
             <a:extLst xmlns:a="http://schemas.openxmlformats.org/drawingml/2006/main">
               <a:ext uri="{FF2B5EF4-FFF2-40B4-BE49-F238E27FC236}">
-                <a16:creationId xmlns:a16="http://schemas.microsoft.com/office/drawing/2014/main" id="{5FB56BC3-4BA0-4D22-B557-9AB6811A8270}"/>
+                <a16:creationId xmlns:a16="http://schemas.microsoft.com/office/drawing/2014/main" id="{CB1068A1-5244-4EFC-863E-B29DCA13F599}"/>
               </a:ext>
             </a:extLst>
           </p:cNvPr>
@@ -4762,7 +4762,7 @@
           <p:cNvPr id="2" name="s13-eyebrow">
             <a:extLst xmlns:a="http://schemas.openxmlformats.org/drawingml/2006/main">
               <a:ext uri="{FF2B5EF4-FFF2-40B4-BE49-F238E27FC236}">
-                <a16:creationId xmlns:a16="http://schemas.microsoft.com/office/drawing/2014/main" id="{5BB48847-3DF1-4958-9C08-9F5AC63F7119}"/>
+                <a16:creationId xmlns:a16="http://schemas.microsoft.com/office/drawing/2014/main" id="{376BF3D4-A0A2-415F-AE7A-AEB9A5F7FFAE}"/>
               </a:ext>
             </a:extLst>
           </p:cNvPr>
@@ -4820,7 +4820,7 @@
           <p:cNvPr id="3" name="s13-title">
             <a:extLst xmlns:a="http://schemas.openxmlformats.org/drawingml/2006/main">
               <a:ext uri="{FF2B5EF4-FFF2-40B4-BE49-F238E27FC236}">
-                <a16:creationId xmlns:a16="http://schemas.microsoft.com/office/drawing/2014/main" id="{8BAD1E0E-1354-433C-9BE2-34B7380A27F3}"/>
+                <a16:creationId xmlns:a16="http://schemas.microsoft.com/office/drawing/2014/main" id="{22996CCA-0739-41D4-945C-1FDC22F5FA98}"/>
               </a:ext>
             </a:extLst>
           </p:cNvPr>
@@ -4878,7 +4878,7 @@
           <p:cNvPr id="4" name="s13-footer">
             <a:extLst xmlns:a="http://schemas.openxmlformats.org/drawingml/2006/main">
               <a:ext uri="{FF2B5EF4-FFF2-40B4-BE49-F238E27FC236}">
-                <a16:creationId xmlns:a16="http://schemas.microsoft.com/office/drawing/2014/main" id="{73AF0B1B-BB42-47BC-932C-58B7A6DCFA22}"/>
+                <a16:creationId xmlns:a16="http://schemas.microsoft.com/office/drawing/2014/main" id="{5D1BBA8E-A05E-4AEE-9FB1-6797C1DF88A2}"/>
               </a:ext>
             </a:extLst>
           </p:cNvPr>
@@ -4909,7 +4909,7 @@
           <p:cNvPr id="5" name="s13-identity">
             <a:extLst xmlns:a="http://schemas.openxmlformats.org/drawingml/2006/main">
               <a:ext uri="{FF2B5EF4-FFF2-40B4-BE49-F238E27FC236}">
-                <a16:creationId xmlns:a16="http://schemas.microsoft.com/office/drawing/2014/main" id="{4AF3CDF7-02DC-4676-B09A-96A7D5261DC9}"/>
+                <a16:creationId xmlns:a16="http://schemas.microsoft.com/office/drawing/2014/main" id="{B70CF714-A1FF-4342-9152-257BEC458CB9}"/>
               </a:ext>
             </a:extLst>
           </p:cNvPr>
@@ -4967,7 +4967,7 @@
           <p:cNvPr id="6" name="source-0">
             <a:extLst xmlns:a="http://schemas.openxmlformats.org/drawingml/2006/main">
               <a:ext uri="{FF2B5EF4-FFF2-40B4-BE49-F238E27FC236}">
-                <a16:creationId xmlns:a16="http://schemas.microsoft.com/office/drawing/2014/main" id="{B51EB5A4-922D-4A2E-A726-2E3012BA2CC3}"/>
+                <a16:creationId xmlns:a16="http://schemas.microsoft.com/office/drawing/2014/main" id="{2F246205-F447-420B-98C6-F20AFDABFBDC}"/>
               </a:ext>
             </a:extLst>
           </p:cNvPr>
@@ -5031,7 +5031,7 @@
           <p:cNvPr id="7" name="source-1">
             <a:extLst xmlns:a="http://schemas.openxmlformats.org/drawingml/2006/main">
               <a:ext uri="{FF2B5EF4-FFF2-40B4-BE49-F238E27FC236}">
-                <a16:creationId xmlns:a16="http://schemas.microsoft.com/office/drawing/2014/main" id="{19F0A0F9-490E-401A-AF5C-FC53D780CE07}"/>
+                <a16:creationId xmlns:a16="http://schemas.microsoft.com/office/drawing/2014/main" id="{3032DF3B-2FCD-4ECE-B2AF-9671D6FEDEA9}"/>
               </a:ext>
             </a:extLst>
           </p:cNvPr>
@@ -5095,7 +5095,7 @@
           <p:cNvPr id="8" name="source-2">
             <a:extLst xmlns:a="http://schemas.openxmlformats.org/drawingml/2006/main">
               <a:ext uri="{FF2B5EF4-FFF2-40B4-BE49-F238E27FC236}">
-                <a16:creationId xmlns:a16="http://schemas.microsoft.com/office/drawing/2014/main" id="{0FAD3F7F-9974-46FF-8F75-63C61D4E6FC2}"/>
+                <a16:creationId xmlns:a16="http://schemas.microsoft.com/office/drawing/2014/main" id="{365E7616-1001-460E-B054-A089DB6EF89C}"/>
               </a:ext>
             </a:extLst>
           </p:cNvPr>
@@ -5159,7 +5159,7 @@
           <p:cNvPr id="9" name="source-3">
             <a:extLst xmlns:a="http://schemas.openxmlformats.org/drawingml/2006/main">
               <a:ext uri="{FF2B5EF4-FFF2-40B4-BE49-F238E27FC236}">
-                <a16:creationId xmlns:a16="http://schemas.microsoft.com/office/drawing/2014/main" id="{19DD1B76-6F3A-4255-A76D-77ACD7742FEC}"/>
+                <a16:creationId xmlns:a16="http://schemas.microsoft.com/office/drawing/2014/main" id="{113AA22B-97CC-4665-9DA0-F596EFFC7598}"/>
               </a:ext>
             </a:extLst>
           </p:cNvPr>
@@ -5223,7 +5223,7 @@
           <p:cNvPr id="10" name="source-4">
             <a:extLst xmlns:a="http://schemas.openxmlformats.org/drawingml/2006/main">
               <a:ext uri="{FF2B5EF4-FFF2-40B4-BE49-F238E27FC236}">
-                <a16:creationId xmlns:a16="http://schemas.microsoft.com/office/drawing/2014/main" id="{E940332F-81C4-4CAD-8EDD-DDCC7DAF7800}"/>
+                <a16:creationId xmlns:a16="http://schemas.microsoft.com/office/drawing/2014/main" id="{0E0CF988-BF04-4D4F-9AFA-30E9826460A9}"/>
               </a:ext>
             </a:extLst>
           </p:cNvPr>
@@ -5287,7 +5287,7 @@
           <p:cNvPr id="11" name="s13-takeaway-rule">
             <a:extLst xmlns:a="http://schemas.openxmlformats.org/drawingml/2006/main">
               <a:ext uri="{FF2B5EF4-FFF2-40B4-BE49-F238E27FC236}">
-                <a16:creationId xmlns:a16="http://schemas.microsoft.com/office/drawing/2014/main" id="{D4CE4993-A6C8-4284-9BAA-25467CDB0AFD}"/>
+                <a16:creationId xmlns:a16="http://schemas.microsoft.com/office/drawing/2014/main" id="{1BC4F100-101B-4286-8818-7D7DC59DBFB9}"/>
               </a:ext>
             </a:extLst>
           </p:cNvPr>
@@ -5320,7 +5320,7 @@
           <p:cNvPr id="12" name="s13-takeaway">
             <a:extLst xmlns:a="http://schemas.openxmlformats.org/drawingml/2006/main">
               <a:ext uri="{FF2B5EF4-FFF2-40B4-BE49-F238E27FC236}">
-                <a16:creationId xmlns:a16="http://schemas.microsoft.com/office/drawing/2014/main" id="{901B0520-3C12-4592-A20F-74747C999BFC}"/>
+                <a16:creationId xmlns:a16="http://schemas.microsoft.com/office/drawing/2014/main" id="{D6DA61DD-ADE7-42B8-A52F-8CD91C6AD81A}"/>
               </a:ext>
             </a:extLst>
           </p:cNvPr>
@@ -5345,7 +5345,7 @@
         </p:spPr>
         <p:txBody>
           <a:bodyPr xmlns:a="http://schemas.openxmlformats.org/drawingml/2006/main" lIns="0" tIns="0" rIns="0" bIns="0" anchor="ctr">
-            <a:normAutofit fontScale="100000"/>
+            <a:normAutofit fontScale="95911"/>
           </a:bodyPr>
           <a:lstStyle xmlns:a="http://schemas.openxmlformats.org/drawingml/2006/main"/>
           <a:p xmlns:a="http://schemas.openxmlformats.org/drawingml/2006/main">
@@ -5368,7 +5368,7 @@
                 <a:ea typeface="PingFang SC"/>
                 <a:cs typeface="PingFang SC"/>
               </a:rPr>
-              <a:t>公开幻灯片只使用课程原创文字与原生图形；完整论证、链接和事实边界请见本节讲义。</a:t>
+              <a:t>课程精编页用于讲授主线；播放器中的“原课件”模式保留团队 PowerPoint 精选页、真实图片和可播放视频。</a:t>
             </a:r>
           </a:p>
         </p:txBody>
@@ -5376,7 +5376,7 @@
     </p:spTree>
     <p:extLst>
       <p:ext uri="{BB962C8B-B14F-4D97-AF65-F5344CB8AC3E}">
-        <p14:creationId xmlns:p14="http://schemas.microsoft.com/office/powerpoint/2010/main" val="2097108998"/>
+        <p14:creationId xmlns:p14="http://schemas.microsoft.com/office/powerpoint/2010/main" val="760921154"/>
       </p:ext>
     </p:extLst>
   </p:cSld>
@@ -5407,7 +5407,7 @@
           <p:cNvPr id="1" name="s2-rule">
             <a:extLst xmlns:a="http://schemas.openxmlformats.org/drawingml/2006/main">
               <a:ext uri="{FF2B5EF4-FFF2-40B4-BE49-F238E27FC236}">
-                <a16:creationId xmlns:a16="http://schemas.microsoft.com/office/drawing/2014/main" id="{F416E69C-009A-4A00-946D-BBFBE453DC58}"/>
+                <a16:creationId xmlns:a16="http://schemas.microsoft.com/office/drawing/2014/main" id="{6A95903E-CF3F-4886-B136-53B77EF8197A}"/>
               </a:ext>
             </a:extLst>
           </p:cNvPr>
@@ -5440,7 +5440,7 @@
           <p:cNvPr id="2" name="s2-eyebrow">
             <a:extLst xmlns:a="http://schemas.openxmlformats.org/drawingml/2006/main">
               <a:ext uri="{FF2B5EF4-FFF2-40B4-BE49-F238E27FC236}">
-                <a16:creationId xmlns:a16="http://schemas.microsoft.com/office/drawing/2014/main" id="{A2F6C728-4398-48B2-A62D-6A399C8F8E3A}"/>
+                <a16:creationId xmlns:a16="http://schemas.microsoft.com/office/drawing/2014/main" id="{F53BAA81-BD2C-45A0-9C82-0A9058351C75}"/>
               </a:ext>
             </a:extLst>
           </p:cNvPr>
@@ -5498,7 +5498,7 @@
           <p:cNvPr id="3" name="s2-title">
             <a:extLst xmlns:a="http://schemas.openxmlformats.org/drawingml/2006/main">
               <a:ext uri="{FF2B5EF4-FFF2-40B4-BE49-F238E27FC236}">
-                <a16:creationId xmlns:a16="http://schemas.microsoft.com/office/drawing/2014/main" id="{81AEECE4-579F-4EFC-B1D3-5918EA6E74B5}"/>
+                <a16:creationId xmlns:a16="http://schemas.microsoft.com/office/drawing/2014/main" id="{D1FA23E4-6D97-4B95-A186-D1817E9A8CC4}"/>
               </a:ext>
             </a:extLst>
           </p:cNvPr>
@@ -5556,7 +5556,7 @@
           <p:cNvPr id="4" name="s2-footer">
             <a:extLst xmlns:a="http://schemas.openxmlformats.org/drawingml/2006/main">
               <a:ext uri="{FF2B5EF4-FFF2-40B4-BE49-F238E27FC236}">
-                <a16:creationId xmlns:a16="http://schemas.microsoft.com/office/drawing/2014/main" id="{39FE466F-6DDF-4DFD-A754-6F9ADE3C1026}"/>
+                <a16:creationId xmlns:a16="http://schemas.microsoft.com/office/drawing/2014/main" id="{F512852F-909F-43A0-B313-9FC1B583F10F}"/>
               </a:ext>
             </a:extLst>
           </p:cNvPr>
@@ -5587,7 +5587,7 @@
           <p:cNvPr id="5" name="s2-identity">
             <a:extLst xmlns:a="http://schemas.openxmlformats.org/drawingml/2006/main">
               <a:ext uri="{FF2B5EF4-FFF2-40B4-BE49-F238E27FC236}">
-                <a16:creationId xmlns:a16="http://schemas.microsoft.com/office/drawing/2014/main" id="{5ADCE7AF-0DF5-48DF-B3E2-1B8BCC1C6F01}"/>
+                <a16:creationId xmlns:a16="http://schemas.microsoft.com/office/drawing/2014/main" id="{31EC85F6-A716-404A-8026-674A1F316CE8}"/>
               </a:ext>
             </a:extLst>
           </p:cNvPr>
@@ -5645,7 +5645,7 @@
           <p:cNvPr id="6" name="objective-1">
             <a:extLst xmlns:a="http://schemas.openxmlformats.org/drawingml/2006/main">
               <a:ext uri="{FF2B5EF4-FFF2-40B4-BE49-F238E27FC236}">
-                <a16:creationId xmlns:a16="http://schemas.microsoft.com/office/drawing/2014/main" id="{D03EADDA-DD65-47C1-84BE-C3143795B398}"/>
+                <a16:creationId xmlns:a16="http://schemas.microsoft.com/office/drawing/2014/main" id="{26535EB5-B8EE-4874-9DD8-098E4B6D5035}"/>
               </a:ext>
             </a:extLst>
           </p:cNvPr>
@@ -5732,7 +5732,7 @@
           <p:cNvPr id="7" name="objective-2">
             <a:extLst xmlns:a="http://schemas.openxmlformats.org/drawingml/2006/main">
               <a:ext uri="{FF2B5EF4-FFF2-40B4-BE49-F238E27FC236}">
-                <a16:creationId xmlns:a16="http://schemas.microsoft.com/office/drawing/2014/main" id="{56BC816C-DBCB-4715-A4F2-3AA9240E9DEF}"/>
+                <a16:creationId xmlns:a16="http://schemas.microsoft.com/office/drawing/2014/main" id="{288A0625-D37B-476D-B8FF-D0ECCEDA4D6A}"/>
               </a:ext>
             </a:extLst>
           </p:cNvPr>
@@ -5819,7 +5819,7 @@
           <p:cNvPr id="8" name="objective-3">
             <a:extLst xmlns:a="http://schemas.openxmlformats.org/drawingml/2006/main">
               <a:ext uri="{FF2B5EF4-FFF2-40B4-BE49-F238E27FC236}">
-                <a16:creationId xmlns:a16="http://schemas.microsoft.com/office/drawing/2014/main" id="{4C4DDEDF-21BB-497A-A0CB-0E6E38F53CDF}"/>
+                <a16:creationId xmlns:a16="http://schemas.microsoft.com/office/drawing/2014/main" id="{5F07CE7B-FFB9-4E2D-B002-0B32CDD752F0}"/>
               </a:ext>
             </a:extLst>
           </p:cNvPr>
@@ -5906,7 +5906,7 @@
           <p:cNvPr id="9" name="objective-4">
             <a:extLst xmlns:a="http://schemas.openxmlformats.org/drawingml/2006/main">
               <a:ext uri="{FF2B5EF4-FFF2-40B4-BE49-F238E27FC236}">
-                <a16:creationId xmlns:a16="http://schemas.microsoft.com/office/drawing/2014/main" id="{8FDCCDBE-40F8-4F81-A2B6-2FF8D405B48D}"/>
+                <a16:creationId xmlns:a16="http://schemas.microsoft.com/office/drawing/2014/main" id="{9E9572DB-1265-4115-A3CA-1ACF4CAAF44E}"/>
               </a:ext>
             </a:extLst>
           </p:cNvPr>
@@ -5991,7 +5991,7 @@
     </p:spTree>
     <p:extLst>
       <p:ext uri="{BB962C8B-B14F-4D97-AF65-F5344CB8AC3E}">
-        <p14:creationId xmlns:p14="http://schemas.microsoft.com/office/powerpoint/2010/main" val="1969238848"/>
+        <p14:creationId xmlns:p14="http://schemas.microsoft.com/office/powerpoint/2010/main" val="879997924"/>
       </p:ext>
     </p:extLst>
   </p:cSld>
@@ -6022,7 +6022,7 @@
           <p:cNvPr id="1" name="s3-rule">
             <a:extLst xmlns:a="http://schemas.openxmlformats.org/drawingml/2006/main">
               <a:ext uri="{FF2B5EF4-FFF2-40B4-BE49-F238E27FC236}">
-                <a16:creationId xmlns:a16="http://schemas.microsoft.com/office/drawing/2014/main" id="{2822F37A-3B80-4B09-9FBA-82A760CFDE97}"/>
+                <a16:creationId xmlns:a16="http://schemas.microsoft.com/office/drawing/2014/main" id="{CB5FB75C-E831-4BF6-91AA-18FDCE749F0C}"/>
               </a:ext>
             </a:extLst>
           </p:cNvPr>
@@ -6055,7 +6055,7 @@
           <p:cNvPr id="2" name="s3-eyebrow">
             <a:extLst xmlns:a="http://schemas.openxmlformats.org/drawingml/2006/main">
               <a:ext uri="{FF2B5EF4-FFF2-40B4-BE49-F238E27FC236}">
-                <a16:creationId xmlns:a16="http://schemas.microsoft.com/office/drawing/2014/main" id="{8B0E93C9-51A6-4D5D-A6B7-6EF8B7423BE7}"/>
+                <a16:creationId xmlns:a16="http://schemas.microsoft.com/office/drawing/2014/main" id="{BE89566C-F46F-4FA8-A670-382FB07B55F3}"/>
               </a:ext>
             </a:extLst>
           </p:cNvPr>
@@ -6113,7 +6113,7 @@
           <p:cNvPr id="3" name="s3-title">
             <a:extLst xmlns:a="http://schemas.openxmlformats.org/drawingml/2006/main">
               <a:ext uri="{FF2B5EF4-FFF2-40B4-BE49-F238E27FC236}">
-                <a16:creationId xmlns:a16="http://schemas.microsoft.com/office/drawing/2014/main" id="{1D003EC7-2DA6-4F60-984E-CEDDDAFEBCBA}"/>
+                <a16:creationId xmlns:a16="http://schemas.microsoft.com/office/drawing/2014/main" id="{10E9FF07-310E-4B4F-B2E8-D7FBF8C52FFB}"/>
               </a:ext>
             </a:extLst>
           </p:cNvPr>
@@ -6171,7 +6171,7 @@
           <p:cNvPr id="4" name="s3-footer">
             <a:extLst xmlns:a="http://schemas.openxmlformats.org/drawingml/2006/main">
               <a:ext uri="{FF2B5EF4-FFF2-40B4-BE49-F238E27FC236}">
-                <a16:creationId xmlns:a16="http://schemas.microsoft.com/office/drawing/2014/main" id="{D9897FEF-0A28-4022-9140-6F004A960146}"/>
+                <a16:creationId xmlns:a16="http://schemas.microsoft.com/office/drawing/2014/main" id="{6439D88F-9ED6-4EED-B2DF-093415AF160B}"/>
               </a:ext>
             </a:extLst>
           </p:cNvPr>
@@ -6202,7 +6202,7 @@
           <p:cNvPr id="5" name="s3-identity">
             <a:extLst xmlns:a="http://schemas.openxmlformats.org/drawingml/2006/main">
               <a:ext uri="{FF2B5EF4-FFF2-40B4-BE49-F238E27FC236}">
-                <a16:creationId xmlns:a16="http://schemas.microsoft.com/office/drawing/2014/main" id="{850B2D2C-B393-4EEF-A95B-16DE05234F62}"/>
+                <a16:creationId xmlns:a16="http://schemas.microsoft.com/office/drawing/2014/main" id="{75F1C534-03E8-4068-BFDB-000434C76523}"/>
               </a:ext>
             </a:extLst>
           </p:cNvPr>
@@ -6260,7 +6260,7 @@
           <p:cNvPr id="6" name="core-no-0">
             <a:extLst xmlns:a="http://schemas.openxmlformats.org/drawingml/2006/main">
               <a:ext uri="{FF2B5EF4-FFF2-40B4-BE49-F238E27FC236}">
-                <a16:creationId xmlns:a16="http://schemas.microsoft.com/office/drawing/2014/main" id="{A098B231-062A-4D20-90AA-58D1E6D9FCA0}"/>
+                <a16:creationId xmlns:a16="http://schemas.microsoft.com/office/drawing/2014/main" id="{78F7C225-F4E6-46BC-BC8D-5F907682C136}"/>
               </a:ext>
             </a:extLst>
           </p:cNvPr>
@@ -6318,7 +6318,7 @@
           <p:cNvPr id="7" name="core-label-0">
             <a:extLst xmlns:a="http://schemas.openxmlformats.org/drawingml/2006/main">
               <a:ext uri="{FF2B5EF4-FFF2-40B4-BE49-F238E27FC236}">
-                <a16:creationId xmlns:a16="http://schemas.microsoft.com/office/drawing/2014/main" id="{7B03422D-878B-4DBC-B8FB-1D6AD2DF0701}"/>
+                <a16:creationId xmlns:a16="http://schemas.microsoft.com/office/drawing/2014/main" id="{C85896EA-DC52-4CC3-932E-53DBDF0DC909}"/>
               </a:ext>
             </a:extLst>
           </p:cNvPr>
@@ -6376,7 +6376,7 @@
           <p:cNvPr id="8" name="core-body-0">
             <a:extLst xmlns:a="http://schemas.openxmlformats.org/drawingml/2006/main">
               <a:ext uri="{FF2B5EF4-FFF2-40B4-BE49-F238E27FC236}">
-                <a16:creationId xmlns:a16="http://schemas.microsoft.com/office/drawing/2014/main" id="{6CB4C36A-08AE-4900-AD90-F531F88814B4}"/>
+                <a16:creationId xmlns:a16="http://schemas.microsoft.com/office/drawing/2014/main" id="{47499122-4687-4756-97BB-B5A0A1E99B1B}"/>
               </a:ext>
             </a:extLst>
           </p:cNvPr>
@@ -6440,7 +6440,7 @@
           <p:cNvPr id="9" name="core-no-1">
             <a:extLst xmlns:a="http://schemas.openxmlformats.org/drawingml/2006/main">
               <a:ext uri="{FF2B5EF4-FFF2-40B4-BE49-F238E27FC236}">
-                <a16:creationId xmlns:a16="http://schemas.microsoft.com/office/drawing/2014/main" id="{809EB5D1-B9C4-4E41-BD6C-95A2B2D74F35}"/>
+                <a16:creationId xmlns:a16="http://schemas.microsoft.com/office/drawing/2014/main" id="{78BB3E22-2A60-4D81-B3D7-53DE63AB3963}"/>
               </a:ext>
             </a:extLst>
           </p:cNvPr>
@@ -6498,7 +6498,7 @@
           <p:cNvPr id="10" name="core-body-1">
             <a:extLst xmlns:a="http://schemas.openxmlformats.org/drawingml/2006/main">
               <a:ext uri="{FF2B5EF4-FFF2-40B4-BE49-F238E27FC236}">
-                <a16:creationId xmlns:a16="http://schemas.microsoft.com/office/drawing/2014/main" id="{D6F27893-BA1C-4293-94D0-107EAF03BAE6}"/>
+                <a16:creationId xmlns:a16="http://schemas.microsoft.com/office/drawing/2014/main" id="{D4ECA574-6925-4AED-B5E4-B078BEE8D493}"/>
               </a:ext>
             </a:extLst>
           </p:cNvPr>
@@ -6562,7 +6562,7 @@
           <p:cNvPr id="11" name="core-no-2">
             <a:extLst xmlns:a="http://schemas.openxmlformats.org/drawingml/2006/main">
               <a:ext uri="{FF2B5EF4-FFF2-40B4-BE49-F238E27FC236}">
-                <a16:creationId xmlns:a16="http://schemas.microsoft.com/office/drawing/2014/main" id="{B038FE4D-76A9-46B1-8C4D-63BD3692D726}"/>
+                <a16:creationId xmlns:a16="http://schemas.microsoft.com/office/drawing/2014/main" id="{0648D0B2-AECB-4F73-BA5C-F2D56FD336D7}"/>
               </a:ext>
             </a:extLst>
           </p:cNvPr>
@@ -6620,7 +6620,7 @@
           <p:cNvPr id="12" name="core-body-2">
             <a:extLst xmlns:a="http://schemas.openxmlformats.org/drawingml/2006/main">
               <a:ext uri="{FF2B5EF4-FFF2-40B4-BE49-F238E27FC236}">
-                <a16:creationId xmlns:a16="http://schemas.microsoft.com/office/drawing/2014/main" id="{912BAD41-CB57-4171-BCE1-B73FD7F390DF}"/>
+                <a16:creationId xmlns:a16="http://schemas.microsoft.com/office/drawing/2014/main" id="{56F1C9B7-CE5B-4FA9-9C90-102BF8E9D0CB}"/>
               </a:ext>
             </a:extLst>
           </p:cNvPr>
@@ -6684,7 +6684,7 @@
           <p:cNvPr id="13" name="s3-takeaway-rule">
             <a:extLst xmlns:a="http://schemas.openxmlformats.org/drawingml/2006/main">
               <a:ext uri="{FF2B5EF4-FFF2-40B4-BE49-F238E27FC236}">
-                <a16:creationId xmlns:a16="http://schemas.microsoft.com/office/drawing/2014/main" id="{E4EA0AAE-FEE9-4C9E-BE5A-04F6DB151A49}"/>
+                <a16:creationId xmlns:a16="http://schemas.microsoft.com/office/drawing/2014/main" id="{B96F3160-42F1-4606-A5AB-91C446F38EAE}"/>
               </a:ext>
             </a:extLst>
           </p:cNvPr>
@@ -6717,7 +6717,7 @@
           <p:cNvPr id="14" name="s3-takeaway">
             <a:extLst xmlns:a="http://schemas.openxmlformats.org/drawingml/2006/main">
               <a:ext uri="{FF2B5EF4-FFF2-40B4-BE49-F238E27FC236}">
-                <a16:creationId xmlns:a16="http://schemas.microsoft.com/office/drawing/2014/main" id="{E4B6D153-F9CE-4BE7-AE8F-0E86408B14C3}"/>
+                <a16:creationId xmlns:a16="http://schemas.microsoft.com/office/drawing/2014/main" id="{5EB73960-A1AF-49FE-936D-C010DB0FA9FC}"/>
               </a:ext>
             </a:extLst>
           </p:cNvPr>
@@ -6773,7 +6773,7 @@
     </p:spTree>
     <p:extLst>
       <p:ext uri="{BB962C8B-B14F-4D97-AF65-F5344CB8AC3E}">
-        <p14:creationId xmlns:p14="http://schemas.microsoft.com/office/powerpoint/2010/main" val="573156704"/>
+        <p14:creationId xmlns:p14="http://schemas.microsoft.com/office/powerpoint/2010/main" val="474168246"/>
       </p:ext>
     </p:extLst>
   </p:cSld>
@@ -6804,7 +6804,7 @@
           <p:cNvPr id="1" name="s4-rule">
             <a:extLst xmlns:a="http://schemas.openxmlformats.org/drawingml/2006/main">
               <a:ext uri="{FF2B5EF4-FFF2-40B4-BE49-F238E27FC236}">
-                <a16:creationId xmlns:a16="http://schemas.microsoft.com/office/drawing/2014/main" id="{9DC4D578-0620-4BC6-9155-D858DE064EB1}"/>
+                <a16:creationId xmlns:a16="http://schemas.microsoft.com/office/drawing/2014/main" id="{4A6D9330-2F79-44E0-92B7-07B42591A213}"/>
               </a:ext>
             </a:extLst>
           </p:cNvPr>
@@ -6837,7 +6837,7 @@
           <p:cNvPr id="2" name="s4-eyebrow">
             <a:extLst xmlns:a="http://schemas.openxmlformats.org/drawingml/2006/main">
               <a:ext uri="{FF2B5EF4-FFF2-40B4-BE49-F238E27FC236}">
-                <a16:creationId xmlns:a16="http://schemas.microsoft.com/office/drawing/2014/main" id="{5A44BF85-A16E-4EFC-85D2-1401B7A37E43}"/>
+                <a16:creationId xmlns:a16="http://schemas.microsoft.com/office/drawing/2014/main" id="{6A39CDAE-6504-41F7-8C8B-2FD5B3303F75}"/>
               </a:ext>
             </a:extLst>
           </p:cNvPr>
@@ -6895,7 +6895,7 @@
           <p:cNvPr id="3" name="s4-title">
             <a:extLst xmlns:a="http://schemas.openxmlformats.org/drawingml/2006/main">
               <a:ext uri="{FF2B5EF4-FFF2-40B4-BE49-F238E27FC236}">
-                <a16:creationId xmlns:a16="http://schemas.microsoft.com/office/drawing/2014/main" id="{FD3A1D4B-C4C0-4F8E-AAE8-834787D9159B}"/>
+                <a16:creationId xmlns:a16="http://schemas.microsoft.com/office/drawing/2014/main" id="{269DC253-DD04-457F-B55C-4EBC0A7D7DCC}"/>
               </a:ext>
             </a:extLst>
           </p:cNvPr>
@@ -6953,7 +6953,7 @@
           <p:cNvPr id="4" name="s4-footer">
             <a:extLst xmlns:a="http://schemas.openxmlformats.org/drawingml/2006/main">
               <a:ext uri="{FF2B5EF4-FFF2-40B4-BE49-F238E27FC236}">
-                <a16:creationId xmlns:a16="http://schemas.microsoft.com/office/drawing/2014/main" id="{6099CFD3-8702-4EB0-B210-BD09EC5CE975}"/>
+                <a16:creationId xmlns:a16="http://schemas.microsoft.com/office/drawing/2014/main" id="{3CF4F92F-DF6C-404E-BB83-84E56B4EC3FC}"/>
               </a:ext>
             </a:extLst>
           </p:cNvPr>
@@ -6984,7 +6984,7 @@
           <p:cNvPr id="5" name="s4-identity">
             <a:extLst xmlns:a="http://schemas.openxmlformats.org/drawingml/2006/main">
               <a:ext uri="{FF2B5EF4-FFF2-40B4-BE49-F238E27FC236}">
-                <a16:creationId xmlns:a16="http://schemas.microsoft.com/office/drawing/2014/main" id="{3E253936-241A-42D5-88D0-C55B72F2C9F2}"/>
+                <a16:creationId xmlns:a16="http://schemas.microsoft.com/office/drawing/2014/main" id="{0E5C9B42-678B-45BE-B234-E1F57AD8CE68}"/>
               </a:ext>
             </a:extLst>
           </p:cNvPr>
@@ -7042,7 +7042,7 @@
           <p:cNvPr id="6" name="core-no-0">
             <a:extLst xmlns:a="http://schemas.openxmlformats.org/drawingml/2006/main">
               <a:ext uri="{FF2B5EF4-FFF2-40B4-BE49-F238E27FC236}">
-                <a16:creationId xmlns:a16="http://schemas.microsoft.com/office/drawing/2014/main" id="{0C07785B-5B62-4F7E-8E53-EF28BF3B5AA7}"/>
+                <a16:creationId xmlns:a16="http://schemas.microsoft.com/office/drawing/2014/main" id="{E63D03F1-DE81-4836-9DB8-65BF05E680FE}"/>
               </a:ext>
             </a:extLst>
           </p:cNvPr>
@@ -7100,7 +7100,7 @@
           <p:cNvPr id="7" name="core-label-0">
             <a:extLst xmlns:a="http://schemas.openxmlformats.org/drawingml/2006/main">
               <a:ext uri="{FF2B5EF4-FFF2-40B4-BE49-F238E27FC236}">
-                <a16:creationId xmlns:a16="http://schemas.microsoft.com/office/drawing/2014/main" id="{4FF4C466-87A4-4833-B428-A24EE915A23E}"/>
+                <a16:creationId xmlns:a16="http://schemas.microsoft.com/office/drawing/2014/main" id="{22B3CFF1-DD0F-45E2-992F-F4254D2369B7}"/>
               </a:ext>
             </a:extLst>
           </p:cNvPr>
@@ -7158,7 +7158,7 @@
           <p:cNvPr id="8" name="core-body-0">
             <a:extLst xmlns:a="http://schemas.openxmlformats.org/drawingml/2006/main">
               <a:ext uri="{FF2B5EF4-FFF2-40B4-BE49-F238E27FC236}">
-                <a16:creationId xmlns:a16="http://schemas.microsoft.com/office/drawing/2014/main" id="{B4CC9E0D-3101-43C4-8370-A631D5B72AAA}"/>
+                <a16:creationId xmlns:a16="http://schemas.microsoft.com/office/drawing/2014/main" id="{3D0E8345-3CE1-4425-B887-96FE982AED28}"/>
               </a:ext>
             </a:extLst>
           </p:cNvPr>
@@ -7222,7 +7222,7 @@
           <p:cNvPr id="9" name="core-no-1">
             <a:extLst xmlns:a="http://schemas.openxmlformats.org/drawingml/2006/main">
               <a:ext uri="{FF2B5EF4-FFF2-40B4-BE49-F238E27FC236}">
-                <a16:creationId xmlns:a16="http://schemas.microsoft.com/office/drawing/2014/main" id="{0D38F70B-2B36-46F7-86C5-8F7BA0AFC20A}"/>
+                <a16:creationId xmlns:a16="http://schemas.microsoft.com/office/drawing/2014/main" id="{7E498B2F-A308-4397-8B82-B78D92C247DF}"/>
               </a:ext>
             </a:extLst>
           </p:cNvPr>
@@ -7280,7 +7280,7 @@
           <p:cNvPr id="10" name="core-body-1">
             <a:extLst xmlns:a="http://schemas.openxmlformats.org/drawingml/2006/main">
               <a:ext uri="{FF2B5EF4-FFF2-40B4-BE49-F238E27FC236}">
-                <a16:creationId xmlns:a16="http://schemas.microsoft.com/office/drawing/2014/main" id="{63DC052C-8E96-4B12-A02B-09E74530E724}"/>
+                <a16:creationId xmlns:a16="http://schemas.microsoft.com/office/drawing/2014/main" id="{21D4E792-3708-4704-804D-8AA1A28237A2}"/>
               </a:ext>
             </a:extLst>
           </p:cNvPr>
@@ -7344,7 +7344,7 @@
           <p:cNvPr id="11" name="core-no-2">
             <a:extLst xmlns:a="http://schemas.openxmlformats.org/drawingml/2006/main">
               <a:ext uri="{FF2B5EF4-FFF2-40B4-BE49-F238E27FC236}">
-                <a16:creationId xmlns:a16="http://schemas.microsoft.com/office/drawing/2014/main" id="{F6D8EB21-1A0C-489D-8AAB-C22320DA9AE6}"/>
+                <a16:creationId xmlns:a16="http://schemas.microsoft.com/office/drawing/2014/main" id="{19D0032D-BBD3-4569-A0EF-D1AE0EAB2EA8}"/>
               </a:ext>
             </a:extLst>
           </p:cNvPr>
@@ -7402,7 +7402,7 @@
           <p:cNvPr id="12" name="core-body-2">
             <a:extLst xmlns:a="http://schemas.openxmlformats.org/drawingml/2006/main">
               <a:ext uri="{FF2B5EF4-FFF2-40B4-BE49-F238E27FC236}">
-                <a16:creationId xmlns:a16="http://schemas.microsoft.com/office/drawing/2014/main" id="{B3AB5975-BA9C-497F-A0CD-BE2937E39DC6}"/>
+                <a16:creationId xmlns:a16="http://schemas.microsoft.com/office/drawing/2014/main" id="{D909F7D7-8C1C-42C4-8DB2-5DE957545FFC}"/>
               </a:ext>
             </a:extLst>
           </p:cNvPr>
@@ -7466,7 +7466,7 @@
           <p:cNvPr id="13" name="s4-takeaway-rule">
             <a:extLst xmlns:a="http://schemas.openxmlformats.org/drawingml/2006/main">
               <a:ext uri="{FF2B5EF4-FFF2-40B4-BE49-F238E27FC236}">
-                <a16:creationId xmlns:a16="http://schemas.microsoft.com/office/drawing/2014/main" id="{D8A58710-8612-475A-A5D5-FE87D983602E}"/>
+                <a16:creationId xmlns:a16="http://schemas.microsoft.com/office/drawing/2014/main" id="{6BF66AA4-AB5C-493F-9F63-268A85A68B01}"/>
               </a:ext>
             </a:extLst>
           </p:cNvPr>
@@ -7499,7 +7499,7 @@
           <p:cNvPr id="14" name="s4-takeaway">
             <a:extLst xmlns:a="http://schemas.openxmlformats.org/drawingml/2006/main">
               <a:ext uri="{FF2B5EF4-FFF2-40B4-BE49-F238E27FC236}">
-                <a16:creationId xmlns:a16="http://schemas.microsoft.com/office/drawing/2014/main" id="{DE3F66F0-7146-4B3C-BCDE-3CBF3F9CE3AD}"/>
+                <a16:creationId xmlns:a16="http://schemas.microsoft.com/office/drawing/2014/main" id="{8C240751-4AF4-4429-9227-113A4010715B}"/>
               </a:ext>
             </a:extLst>
           </p:cNvPr>
@@ -7555,7 +7555,7 @@
     </p:spTree>
     <p:extLst>
       <p:ext uri="{BB962C8B-B14F-4D97-AF65-F5344CB8AC3E}">
-        <p14:creationId xmlns:p14="http://schemas.microsoft.com/office/powerpoint/2010/main" val="1304490814"/>
+        <p14:creationId xmlns:p14="http://schemas.microsoft.com/office/powerpoint/2010/main" val="1503489180"/>
       </p:ext>
     </p:extLst>
   </p:cSld>
@@ -7586,7 +7586,7 @@
           <p:cNvPr id="1" name="s5-rule">
             <a:extLst xmlns:a="http://schemas.openxmlformats.org/drawingml/2006/main">
               <a:ext uri="{FF2B5EF4-FFF2-40B4-BE49-F238E27FC236}">
-                <a16:creationId xmlns:a16="http://schemas.microsoft.com/office/drawing/2014/main" id="{9103F779-7F28-460D-8086-6E03E44F904C}"/>
+                <a16:creationId xmlns:a16="http://schemas.microsoft.com/office/drawing/2014/main" id="{BF972F01-1190-4E24-B65D-FF57A86AE0E6}"/>
               </a:ext>
             </a:extLst>
           </p:cNvPr>
@@ -7619,7 +7619,7 @@
           <p:cNvPr id="2" name="s5-eyebrow">
             <a:extLst xmlns:a="http://schemas.openxmlformats.org/drawingml/2006/main">
               <a:ext uri="{FF2B5EF4-FFF2-40B4-BE49-F238E27FC236}">
-                <a16:creationId xmlns:a16="http://schemas.microsoft.com/office/drawing/2014/main" id="{2A5F38AF-EFA3-47BC-9986-4A3A1DEBFED1}"/>
+                <a16:creationId xmlns:a16="http://schemas.microsoft.com/office/drawing/2014/main" id="{8F18B888-04C0-4DC3-BD67-1FE83EB9DF31}"/>
               </a:ext>
             </a:extLst>
           </p:cNvPr>
@@ -7677,7 +7677,7 @@
           <p:cNvPr id="3" name="s5-title">
             <a:extLst xmlns:a="http://schemas.openxmlformats.org/drawingml/2006/main">
               <a:ext uri="{FF2B5EF4-FFF2-40B4-BE49-F238E27FC236}">
-                <a16:creationId xmlns:a16="http://schemas.microsoft.com/office/drawing/2014/main" id="{3A0CE244-C8F8-4D68-A595-8F9AAA966B70}"/>
+                <a16:creationId xmlns:a16="http://schemas.microsoft.com/office/drawing/2014/main" id="{4B1347B4-3884-4B7C-84CE-3A95C1559B91}"/>
               </a:ext>
             </a:extLst>
           </p:cNvPr>
@@ -7735,7 +7735,7 @@
           <p:cNvPr id="4" name="s5-footer">
             <a:extLst xmlns:a="http://schemas.openxmlformats.org/drawingml/2006/main">
               <a:ext uri="{FF2B5EF4-FFF2-40B4-BE49-F238E27FC236}">
-                <a16:creationId xmlns:a16="http://schemas.microsoft.com/office/drawing/2014/main" id="{86D67274-D0AD-4486-888E-FEBE29445B63}"/>
+                <a16:creationId xmlns:a16="http://schemas.microsoft.com/office/drawing/2014/main" id="{421F03A8-B141-4093-BF0C-0C25A2EFAAE4}"/>
               </a:ext>
             </a:extLst>
           </p:cNvPr>
@@ -7766,7 +7766,7 @@
           <p:cNvPr id="5" name="s5-identity">
             <a:extLst xmlns:a="http://schemas.openxmlformats.org/drawingml/2006/main">
               <a:ext uri="{FF2B5EF4-FFF2-40B4-BE49-F238E27FC236}">
-                <a16:creationId xmlns:a16="http://schemas.microsoft.com/office/drawing/2014/main" id="{B150D4E4-81F9-4CD4-8EB0-9A648D31825F}"/>
+                <a16:creationId xmlns:a16="http://schemas.microsoft.com/office/drawing/2014/main" id="{064EF1A6-1B75-496A-8C6F-671D5D61D01A}"/>
               </a:ext>
             </a:extLst>
           </p:cNvPr>
@@ -7824,7 +7824,7 @@
           <p:cNvPr id="6" name="core-no-0">
             <a:extLst xmlns:a="http://schemas.openxmlformats.org/drawingml/2006/main">
               <a:ext uri="{FF2B5EF4-FFF2-40B4-BE49-F238E27FC236}">
-                <a16:creationId xmlns:a16="http://schemas.microsoft.com/office/drawing/2014/main" id="{AC1C972A-F730-48E1-80CE-821C9CDAA7F4}"/>
+                <a16:creationId xmlns:a16="http://schemas.microsoft.com/office/drawing/2014/main" id="{C174DDBA-A204-4B58-9991-F792E4BDAF5B}"/>
               </a:ext>
             </a:extLst>
           </p:cNvPr>
@@ -7882,7 +7882,7 @@
           <p:cNvPr id="7" name="core-label-0">
             <a:extLst xmlns:a="http://schemas.openxmlformats.org/drawingml/2006/main">
               <a:ext uri="{FF2B5EF4-FFF2-40B4-BE49-F238E27FC236}">
-                <a16:creationId xmlns:a16="http://schemas.microsoft.com/office/drawing/2014/main" id="{C3538776-EBC3-4DBE-9D4A-C24CB21E9CF7}"/>
+                <a16:creationId xmlns:a16="http://schemas.microsoft.com/office/drawing/2014/main" id="{7AE3DE41-11D5-4482-A2CB-9E4CA646EE8D}"/>
               </a:ext>
             </a:extLst>
           </p:cNvPr>
@@ -7940,7 +7940,7 @@
           <p:cNvPr id="8" name="core-body-0">
             <a:extLst xmlns:a="http://schemas.openxmlformats.org/drawingml/2006/main">
               <a:ext uri="{FF2B5EF4-FFF2-40B4-BE49-F238E27FC236}">
-                <a16:creationId xmlns:a16="http://schemas.microsoft.com/office/drawing/2014/main" id="{FEEE11CD-FB20-4EBD-80F4-9FABABACCC74}"/>
+                <a16:creationId xmlns:a16="http://schemas.microsoft.com/office/drawing/2014/main" id="{4F07A212-ED66-40ED-B7F0-0415ED7E63F4}"/>
               </a:ext>
             </a:extLst>
           </p:cNvPr>
@@ -8004,7 +8004,7 @@
           <p:cNvPr id="9" name="core-no-1">
             <a:extLst xmlns:a="http://schemas.openxmlformats.org/drawingml/2006/main">
               <a:ext uri="{FF2B5EF4-FFF2-40B4-BE49-F238E27FC236}">
-                <a16:creationId xmlns:a16="http://schemas.microsoft.com/office/drawing/2014/main" id="{856F92D1-FE0E-46C5-9C53-84DE4E389AB4}"/>
+                <a16:creationId xmlns:a16="http://schemas.microsoft.com/office/drawing/2014/main" id="{AF18298C-531B-4FEC-9FB7-223FC4BFBEBB}"/>
               </a:ext>
             </a:extLst>
           </p:cNvPr>
@@ -8062,7 +8062,7 @@
           <p:cNvPr id="10" name="core-body-1">
             <a:extLst xmlns:a="http://schemas.openxmlformats.org/drawingml/2006/main">
               <a:ext uri="{FF2B5EF4-FFF2-40B4-BE49-F238E27FC236}">
-                <a16:creationId xmlns:a16="http://schemas.microsoft.com/office/drawing/2014/main" id="{579C8C18-8A3C-4224-BE4C-8DADD0C5B908}"/>
+                <a16:creationId xmlns:a16="http://schemas.microsoft.com/office/drawing/2014/main" id="{2EBE817A-7363-480F-9811-E52850D2E214}"/>
               </a:ext>
             </a:extLst>
           </p:cNvPr>
@@ -8126,7 +8126,7 @@
           <p:cNvPr id="11" name="s5-takeaway-rule">
             <a:extLst xmlns:a="http://schemas.openxmlformats.org/drawingml/2006/main">
               <a:ext uri="{FF2B5EF4-FFF2-40B4-BE49-F238E27FC236}">
-                <a16:creationId xmlns:a16="http://schemas.microsoft.com/office/drawing/2014/main" id="{6A15B859-FD66-490A-8314-B74AF3FA46EA}"/>
+                <a16:creationId xmlns:a16="http://schemas.microsoft.com/office/drawing/2014/main" id="{BA88684D-CEB1-4E20-9E9E-AC62DBD9FE8F}"/>
               </a:ext>
             </a:extLst>
           </p:cNvPr>
@@ -8159,7 +8159,7 @@
           <p:cNvPr id="12" name="s5-takeaway">
             <a:extLst xmlns:a="http://schemas.openxmlformats.org/drawingml/2006/main">
               <a:ext uri="{FF2B5EF4-FFF2-40B4-BE49-F238E27FC236}">
-                <a16:creationId xmlns:a16="http://schemas.microsoft.com/office/drawing/2014/main" id="{54FA856B-BC4E-4DB4-8270-3FC614E85E70}"/>
+                <a16:creationId xmlns:a16="http://schemas.microsoft.com/office/drawing/2014/main" id="{61893F1F-8101-40D7-88A5-7D51AAD166E9}"/>
               </a:ext>
             </a:extLst>
           </p:cNvPr>
@@ -8215,7 +8215,7 @@
     </p:spTree>
     <p:extLst>
       <p:ext uri="{BB962C8B-B14F-4D97-AF65-F5344CB8AC3E}">
-        <p14:creationId xmlns:p14="http://schemas.microsoft.com/office/powerpoint/2010/main" val="1806620030"/>
+        <p14:creationId xmlns:p14="http://schemas.microsoft.com/office/powerpoint/2010/main" val="542995129"/>
       </p:ext>
     </p:extLst>
   </p:cSld>
@@ -8246,7 +8246,7 @@
           <p:cNvPr id="1" name="s6-rule">
             <a:extLst xmlns:a="http://schemas.openxmlformats.org/drawingml/2006/main">
               <a:ext uri="{FF2B5EF4-FFF2-40B4-BE49-F238E27FC236}">
-                <a16:creationId xmlns:a16="http://schemas.microsoft.com/office/drawing/2014/main" id="{608BA9C8-0919-4631-A925-EB13DCB272EF}"/>
+                <a16:creationId xmlns:a16="http://schemas.microsoft.com/office/drawing/2014/main" id="{A230FF66-77C7-42AA-B3EF-C17AC42B5073}"/>
               </a:ext>
             </a:extLst>
           </p:cNvPr>
@@ -8279,7 +8279,7 @@
           <p:cNvPr id="2" name="s6-eyebrow">
             <a:extLst xmlns:a="http://schemas.openxmlformats.org/drawingml/2006/main">
               <a:ext uri="{FF2B5EF4-FFF2-40B4-BE49-F238E27FC236}">
-                <a16:creationId xmlns:a16="http://schemas.microsoft.com/office/drawing/2014/main" id="{FE06B28F-065A-4F5E-BA6A-8A0452E88DCC}"/>
+                <a16:creationId xmlns:a16="http://schemas.microsoft.com/office/drawing/2014/main" id="{88DBC71A-67B2-432E-B120-22A9B4D65471}"/>
               </a:ext>
             </a:extLst>
           </p:cNvPr>
@@ -8337,7 +8337,7 @@
           <p:cNvPr id="3" name="s6-title">
             <a:extLst xmlns:a="http://schemas.openxmlformats.org/drawingml/2006/main">
               <a:ext uri="{FF2B5EF4-FFF2-40B4-BE49-F238E27FC236}">
-                <a16:creationId xmlns:a16="http://schemas.microsoft.com/office/drawing/2014/main" id="{6A739DDC-583A-406C-A7F9-3F4D50500459}"/>
+                <a16:creationId xmlns:a16="http://schemas.microsoft.com/office/drawing/2014/main" id="{2BBA7DF6-CD17-474B-8118-7F39E63D519A}"/>
               </a:ext>
             </a:extLst>
           </p:cNvPr>
@@ -8395,7 +8395,7 @@
           <p:cNvPr id="4" name="s6-footer">
             <a:extLst xmlns:a="http://schemas.openxmlformats.org/drawingml/2006/main">
               <a:ext uri="{FF2B5EF4-FFF2-40B4-BE49-F238E27FC236}">
-                <a16:creationId xmlns:a16="http://schemas.microsoft.com/office/drawing/2014/main" id="{EEEF20E9-1A3D-4E23-B7EF-1904D573DC06}"/>
+                <a16:creationId xmlns:a16="http://schemas.microsoft.com/office/drawing/2014/main" id="{D44D1EE8-1DB8-4575-B815-970CB6516399}"/>
               </a:ext>
             </a:extLst>
           </p:cNvPr>
@@ -8426,7 +8426,7 @@
           <p:cNvPr id="5" name="s6-identity">
             <a:extLst xmlns:a="http://schemas.openxmlformats.org/drawingml/2006/main">
               <a:ext uri="{FF2B5EF4-FFF2-40B4-BE49-F238E27FC236}">
-                <a16:creationId xmlns:a16="http://schemas.microsoft.com/office/drawing/2014/main" id="{941F853A-733D-4EC3-9C96-CEB8378A76F6}"/>
+                <a16:creationId xmlns:a16="http://schemas.microsoft.com/office/drawing/2014/main" id="{4444A47D-7442-41A6-925D-E383D116D3B8}"/>
               </a:ext>
             </a:extLst>
           </p:cNvPr>
@@ -8484,7 +8484,7 @@
           <p:cNvPr id="6" name="core-no-0">
             <a:extLst xmlns:a="http://schemas.openxmlformats.org/drawingml/2006/main">
               <a:ext uri="{FF2B5EF4-FFF2-40B4-BE49-F238E27FC236}">
-                <a16:creationId xmlns:a16="http://schemas.microsoft.com/office/drawing/2014/main" id="{873003D3-6BA3-4DAE-8EC8-8B02051A63B3}"/>
+                <a16:creationId xmlns:a16="http://schemas.microsoft.com/office/drawing/2014/main" id="{E1235ADD-4950-41F2-93C0-141C38D92933}"/>
               </a:ext>
             </a:extLst>
           </p:cNvPr>
@@ -8542,7 +8542,7 @@
           <p:cNvPr id="7" name="core-label-0">
             <a:extLst xmlns:a="http://schemas.openxmlformats.org/drawingml/2006/main">
               <a:ext uri="{FF2B5EF4-FFF2-40B4-BE49-F238E27FC236}">
-                <a16:creationId xmlns:a16="http://schemas.microsoft.com/office/drawing/2014/main" id="{0C0D1E84-6105-4F83-A53A-CE22E4C5B9D6}"/>
+                <a16:creationId xmlns:a16="http://schemas.microsoft.com/office/drawing/2014/main" id="{43457E3A-CCF6-442D-9D89-A7611761BE09}"/>
               </a:ext>
             </a:extLst>
           </p:cNvPr>
@@ -8600,7 +8600,7 @@
           <p:cNvPr id="8" name="core-body-0">
             <a:extLst xmlns:a="http://schemas.openxmlformats.org/drawingml/2006/main">
               <a:ext uri="{FF2B5EF4-FFF2-40B4-BE49-F238E27FC236}">
-                <a16:creationId xmlns:a16="http://schemas.microsoft.com/office/drawing/2014/main" id="{C2AAE223-5CF2-4DBC-AAA5-5B2E76CEB439}"/>
+                <a16:creationId xmlns:a16="http://schemas.microsoft.com/office/drawing/2014/main" id="{64EAD693-5AEE-466D-83C1-D4751FADB1AC}"/>
               </a:ext>
             </a:extLst>
           </p:cNvPr>
@@ -8664,7 +8664,7 @@
           <p:cNvPr id="9" name="core-no-1">
             <a:extLst xmlns:a="http://schemas.openxmlformats.org/drawingml/2006/main">
               <a:ext uri="{FF2B5EF4-FFF2-40B4-BE49-F238E27FC236}">
-                <a16:creationId xmlns:a16="http://schemas.microsoft.com/office/drawing/2014/main" id="{0F6EAE3E-019F-49CA-8A2D-EC0EE403675A}"/>
+                <a16:creationId xmlns:a16="http://schemas.microsoft.com/office/drawing/2014/main" id="{842AABB4-57DC-4FA9-872A-6091F16FD80B}"/>
               </a:ext>
             </a:extLst>
           </p:cNvPr>
@@ -8722,7 +8722,7 @@
           <p:cNvPr id="10" name="core-body-1">
             <a:extLst xmlns:a="http://schemas.openxmlformats.org/drawingml/2006/main">
               <a:ext uri="{FF2B5EF4-FFF2-40B4-BE49-F238E27FC236}">
-                <a16:creationId xmlns:a16="http://schemas.microsoft.com/office/drawing/2014/main" id="{8B7E14BD-2343-4026-B39A-387651BD51FE}"/>
+                <a16:creationId xmlns:a16="http://schemas.microsoft.com/office/drawing/2014/main" id="{905160D4-7C71-4941-886F-C7269C242AFD}"/>
               </a:ext>
             </a:extLst>
           </p:cNvPr>
@@ -8786,7 +8786,7 @@
           <p:cNvPr id="11" name="core-no-2">
             <a:extLst xmlns:a="http://schemas.openxmlformats.org/drawingml/2006/main">
               <a:ext uri="{FF2B5EF4-FFF2-40B4-BE49-F238E27FC236}">
-                <a16:creationId xmlns:a16="http://schemas.microsoft.com/office/drawing/2014/main" id="{E18382B9-D60B-4AAC-87A4-7B76D94B0032}"/>
+                <a16:creationId xmlns:a16="http://schemas.microsoft.com/office/drawing/2014/main" id="{28474D08-5EE7-4E92-B4AC-A6C48EFCA790}"/>
               </a:ext>
             </a:extLst>
           </p:cNvPr>
@@ -8844,7 +8844,7 @@
           <p:cNvPr id="12" name="core-body-2">
             <a:extLst xmlns:a="http://schemas.openxmlformats.org/drawingml/2006/main">
               <a:ext uri="{FF2B5EF4-FFF2-40B4-BE49-F238E27FC236}">
-                <a16:creationId xmlns:a16="http://schemas.microsoft.com/office/drawing/2014/main" id="{DB8AC59A-46F1-4F63-8193-06927866C1AE}"/>
+                <a16:creationId xmlns:a16="http://schemas.microsoft.com/office/drawing/2014/main" id="{24DE8009-B725-46C8-B523-9A5447E1FE14}"/>
               </a:ext>
             </a:extLst>
           </p:cNvPr>
@@ -8908,7 +8908,7 @@
           <p:cNvPr id="13" name="s6-takeaway-rule">
             <a:extLst xmlns:a="http://schemas.openxmlformats.org/drawingml/2006/main">
               <a:ext uri="{FF2B5EF4-FFF2-40B4-BE49-F238E27FC236}">
-                <a16:creationId xmlns:a16="http://schemas.microsoft.com/office/drawing/2014/main" id="{BE34F07B-E346-42C9-98CA-7A22EF9F6A5A}"/>
+                <a16:creationId xmlns:a16="http://schemas.microsoft.com/office/drawing/2014/main" id="{AD02B8B3-9371-4B45-AB41-FBDAB727B862}"/>
               </a:ext>
             </a:extLst>
           </p:cNvPr>
@@ -8941,7 +8941,7 @@
           <p:cNvPr id="14" name="s6-takeaway">
             <a:extLst xmlns:a="http://schemas.openxmlformats.org/drawingml/2006/main">
               <a:ext uri="{FF2B5EF4-FFF2-40B4-BE49-F238E27FC236}">
-                <a16:creationId xmlns:a16="http://schemas.microsoft.com/office/drawing/2014/main" id="{42BE47AB-B25E-426F-95EA-A2271268328A}"/>
+                <a16:creationId xmlns:a16="http://schemas.microsoft.com/office/drawing/2014/main" id="{C574A53F-E59F-4FFC-ABFE-BA91710300E5}"/>
               </a:ext>
             </a:extLst>
           </p:cNvPr>
@@ -8997,7 +8997,7 @@
     </p:spTree>
     <p:extLst>
       <p:ext uri="{BB962C8B-B14F-4D97-AF65-F5344CB8AC3E}">
-        <p14:creationId xmlns:p14="http://schemas.microsoft.com/office/powerpoint/2010/main" val="513968384"/>
+        <p14:creationId xmlns:p14="http://schemas.microsoft.com/office/powerpoint/2010/main" val="1966273452"/>
       </p:ext>
     </p:extLst>
   </p:cSld>
@@ -9028,7 +9028,7 @@
           <p:cNvPr id="1" name="s7-rule">
             <a:extLst xmlns:a="http://schemas.openxmlformats.org/drawingml/2006/main">
               <a:ext uri="{FF2B5EF4-FFF2-40B4-BE49-F238E27FC236}">
-                <a16:creationId xmlns:a16="http://schemas.microsoft.com/office/drawing/2014/main" id="{40D944C0-1019-4801-8E92-02605BDF44D0}"/>
+                <a16:creationId xmlns:a16="http://schemas.microsoft.com/office/drawing/2014/main" id="{D23AD9F9-5286-483B-B9C7-E68FF13B0EB9}"/>
               </a:ext>
             </a:extLst>
           </p:cNvPr>
@@ -9061,7 +9061,7 @@
           <p:cNvPr id="2" name="s7-eyebrow">
             <a:extLst xmlns:a="http://schemas.openxmlformats.org/drawingml/2006/main">
               <a:ext uri="{FF2B5EF4-FFF2-40B4-BE49-F238E27FC236}">
-                <a16:creationId xmlns:a16="http://schemas.microsoft.com/office/drawing/2014/main" id="{DD272434-F05F-48BB-8A95-5533D717A60C}"/>
+                <a16:creationId xmlns:a16="http://schemas.microsoft.com/office/drawing/2014/main" id="{5C81E623-0AFB-4BB9-81D2-D50B6B2D6F62}"/>
               </a:ext>
             </a:extLst>
           </p:cNvPr>
@@ -9119,7 +9119,7 @@
           <p:cNvPr id="3" name="s7-title">
             <a:extLst xmlns:a="http://schemas.openxmlformats.org/drawingml/2006/main">
               <a:ext uri="{FF2B5EF4-FFF2-40B4-BE49-F238E27FC236}">
-                <a16:creationId xmlns:a16="http://schemas.microsoft.com/office/drawing/2014/main" id="{D7BDD847-096B-48D1-8CE9-57E40B7F3F21}"/>
+                <a16:creationId xmlns:a16="http://schemas.microsoft.com/office/drawing/2014/main" id="{C7CA4E46-E1C7-431C-9B08-F131667AC557}"/>
               </a:ext>
             </a:extLst>
           </p:cNvPr>
@@ -9177,7 +9177,7 @@
           <p:cNvPr id="4" name="s7-footer">
             <a:extLst xmlns:a="http://schemas.openxmlformats.org/drawingml/2006/main">
               <a:ext uri="{FF2B5EF4-FFF2-40B4-BE49-F238E27FC236}">
-                <a16:creationId xmlns:a16="http://schemas.microsoft.com/office/drawing/2014/main" id="{83D48071-004D-4643-A407-EE10CBA57AA3}"/>
+                <a16:creationId xmlns:a16="http://schemas.microsoft.com/office/drawing/2014/main" id="{9F1F9DDE-E4D6-442F-9A32-2229DA7E83AE}"/>
               </a:ext>
             </a:extLst>
           </p:cNvPr>
@@ -9208,7 +9208,7 @@
           <p:cNvPr id="5" name="s7-identity">
             <a:extLst xmlns:a="http://schemas.openxmlformats.org/drawingml/2006/main">
               <a:ext uri="{FF2B5EF4-FFF2-40B4-BE49-F238E27FC236}">
-                <a16:creationId xmlns:a16="http://schemas.microsoft.com/office/drawing/2014/main" id="{8840FEA5-B9BF-4098-A18F-D98FC6C50149}"/>
+                <a16:creationId xmlns:a16="http://schemas.microsoft.com/office/drawing/2014/main" id="{BAB019C9-2CA1-4594-84C6-38078F3D7AC2}"/>
               </a:ext>
             </a:extLst>
           </p:cNvPr>
@@ -9266,7 +9266,7 @@
           <p:cNvPr id="6" name="core-no-0">
             <a:extLst xmlns:a="http://schemas.openxmlformats.org/drawingml/2006/main">
               <a:ext uri="{FF2B5EF4-FFF2-40B4-BE49-F238E27FC236}">
-                <a16:creationId xmlns:a16="http://schemas.microsoft.com/office/drawing/2014/main" id="{67B8CAC1-31E6-4324-9EB5-A2F885144AD5}"/>
+                <a16:creationId xmlns:a16="http://schemas.microsoft.com/office/drawing/2014/main" id="{5D7A1C68-A72D-4F1A-841E-C8D5E5D3C5FD}"/>
               </a:ext>
             </a:extLst>
           </p:cNvPr>
@@ -9324,7 +9324,7 @@
           <p:cNvPr id="7" name="core-label-0">
             <a:extLst xmlns:a="http://schemas.openxmlformats.org/drawingml/2006/main">
               <a:ext uri="{FF2B5EF4-FFF2-40B4-BE49-F238E27FC236}">
-                <a16:creationId xmlns:a16="http://schemas.microsoft.com/office/drawing/2014/main" id="{3B6977BE-1D1C-4A6D-AA68-E45A8CE5D51E}"/>
+                <a16:creationId xmlns:a16="http://schemas.microsoft.com/office/drawing/2014/main" id="{9857E075-2EA1-4472-8856-6D701115B384}"/>
               </a:ext>
             </a:extLst>
           </p:cNvPr>
@@ -9382,7 +9382,7 @@
           <p:cNvPr id="8" name="core-body-0">
             <a:extLst xmlns:a="http://schemas.openxmlformats.org/drawingml/2006/main">
               <a:ext uri="{FF2B5EF4-FFF2-40B4-BE49-F238E27FC236}">
-                <a16:creationId xmlns:a16="http://schemas.microsoft.com/office/drawing/2014/main" id="{9EC4A0A5-F083-4CB6-895E-7210E28122B4}"/>
+                <a16:creationId xmlns:a16="http://schemas.microsoft.com/office/drawing/2014/main" id="{8A61D80E-0AC2-4387-B062-947D2C0E3B32}"/>
               </a:ext>
             </a:extLst>
           </p:cNvPr>
@@ -9446,7 +9446,7 @@
           <p:cNvPr id="9" name="core-no-1">
             <a:extLst xmlns:a="http://schemas.openxmlformats.org/drawingml/2006/main">
               <a:ext uri="{FF2B5EF4-FFF2-40B4-BE49-F238E27FC236}">
-                <a16:creationId xmlns:a16="http://schemas.microsoft.com/office/drawing/2014/main" id="{43673B24-5F1F-4164-862D-803BD77A7A8E}"/>
+                <a16:creationId xmlns:a16="http://schemas.microsoft.com/office/drawing/2014/main" id="{B0A924A3-3F47-4AAC-BF51-E1A789691D40}"/>
               </a:ext>
             </a:extLst>
           </p:cNvPr>
@@ -9504,7 +9504,7 @@
           <p:cNvPr id="10" name="core-body-1">
             <a:extLst xmlns:a="http://schemas.openxmlformats.org/drawingml/2006/main">
               <a:ext uri="{FF2B5EF4-FFF2-40B4-BE49-F238E27FC236}">
-                <a16:creationId xmlns:a16="http://schemas.microsoft.com/office/drawing/2014/main" id="{FBAC3E65-0AA2-4FA8-8BBB-3C06390530BA}"/>
+                <a16:creationId xmlns:a16="http://schemas.microsoft.com/office/drawing/2014/main" id="{F1165833-D958-44F8-B0FF-C704F099BE12}"/>
               </a:ext>
             </a:extLst>
           </p:cNvPr>
@@ -9568,7 +9568,7 @@
           <p:cNvPr id="11" name="s7-takeaway-rule">
             <a:extLst xmlns:a="http://schemas.openxmlformats.org/drawingml/2006/main">
               <a:ext uri="{FF2B5EF4-FFF2-40B4-BE49-F238E27FC236}">
-                <a16:creationId xmlns:a16="http://schemas.microsoft.com/office/drawing/2014/main" id="{AFFF5E00-5BF8-41D7-A314-ED68B8B0AC23}"/>
+                <a16:creationId xmlns:a16="http://schemas.microsoft.com/office/drawing/2014/main" id="{E39119C2-C680-4183-926D-4BE4A2CBEE30}"/>
               </a:ext>
             </a:extLst>
           </p:cNvPr>
@@ -9601,7 +9601,7 @@
           <p:cNvPr id="12" name="s7-takeaway">
             <a:extLst xmlns:a="http://schemas.openxmlformats.org/drawingml/2006/main">
               <a:ext uri="{FF2B5EF4-FFF2-40B4-BE49-F238E27FC236}">
-                <a16:creationId xmlns:a16="http://schemas.microsoft.com/office/drawing/2014/main" id="{180A9C88-B25F-4464-AFC1-2D79AB5E2C46}"/>
+                <a16:creationId xmlns:a16="http://schemas.microsoft.com/office/drawing/2014/main" id="{533EE253-28A8-4E70-8EA5-301CDA368D04}"/>
               </a:ext>
             </a:extLst>
           </p:cNvPr>
@@ -9657,7 +9657,7 @@
     </p:spTree>
     <p:extLst>
       <p:ext uri="{BB962C8B-B14F-4D97-AF65-F5344CB8AC3E}">
-        <p14:creationId xmlns:p14="http://schemas.microsoft.com/office/powerpoint/2010/main" val="1344564541"/>
+        <p14:creationId xmlns:p14="http://schemas.microsoft.com/office/powerpoint/2010/main" val="1096544860"/>
       </p:ext>
     </p:extLst>
   </p:cSld>
@@ -9688,7 +9688,7 @@
           <p:cNvPr id="1" name="s8-rule">
             <a:extLst xmlns:a="http://schemas.openxmlformats.org/drawingml/2006/main">
               <a:ext uri="{FF2B5EF4-FFF2-40B4-BE49-F238E27FC236}">
-                <a16:creationId xmlns:a16="http://schemas.microsoft.com/office/drawing/2014/main" id="{10D6851E-A089-4B45-B211-F98AD37D3A2A}"/>
+                <a16:creationId xmlns:a16="http://schemas.microsoft.com/office/drawing/2014/main" id="{7FC4E89D-9D7F-40A0-8230-B2A7B1F637BC}"/>
               </a:ext>
             </a:extLst>
           </p:cNvPr>
@@ -9721,7 +9721,7 @@
           <p:cNvPr id="2" name="s8-eyebrow">
             <a:extLst xmlns:a="http://schemas.openxmlformats.org/drawingml/2006/main">
               <a:ext uri="{FF2B5EF4-FFF2-40B4-BE49-F238E27FC236}">
-                <a16:creationId xmlns:a16="http://schemas.microsoft.com/office/drawing/2014/main" id="{F039E88C-260F-4301-AA85-71A946281A24}"/>
+                <a16:creationId xmlns:a16="http://schemas.microsoft.com/office/drawing/2014/main" id="{06D12C13-2117-4A06-88B4-0D9FFC92FCEA}"/>
               </a:ext>
             </a:extLst>
           </p:cNvPr>
@@ -9779,7 +9779,7 @@
           <p:cNvPr id="3" name="s8-title">
             <a:extLst xmlns:a="http://schemas.openxmlformats.org/drawingml/2006/main">
               <a:ext uri="{FF2B5EF4-FFF2-40B4-BE49-F238E27FC236}">
-                <a16:creationId xmlns:a16="http://schemas.microsoft.com/office/drawing/2014/main" id="{9668014C-ACCC-47E3-8052-4871596C0F19}"/>
+                <a16:creationId xmlns:a16="http://schemas.microsoft.com/office/drawing/2014/main" id="{3D30F455-150E-42A9-B59B-7DAD16E73095}"/>
               </a:ext>
             </a:extLst>
           </p:cNvPr>
@@ -9837,7 +9837,7 @@
           <p:cNvPr id="4" name="s8-footer">
             <a:extLst xmlns:a="http://schemas.openxmlformats.org/drawingml/2006/main">
               <a:ext uri="{FF2B5EF4-FFF2-40B4-BE49-F238E27FC236}">
-                <a16:creationId xmlns:a16="http://schemas.microsoft.com/office/drawing/2014/main" id="{8B41DC81-B4A8-40BE-BCA2-E90BC9FB1A44}"/>
+                <a16:creationId xmlns:a16="http://schemas.microsoft.com/office/drawing/2014/main" id="{77F765BB-14B6-49BB-B601-33B16D6B1957}"/>
               </a:ext>
             </a:extLst>
           </p:cNvPr>
@@ -9868,7 +9868,7 @@
           <p:cNvPr id="5" name="s8-identity">
             <a:extLst xmlns:a="http://schemas.openxmlformats.org/drawingml/2006/main">
               <a:ext uri="{FF2B5EF4-FFF2-40B4-BE49-F238E27FC236}">
-                <a16:creationId xmlns:a16="http://schemas.microsoft.com/office/drawing/2014/main" id="{5E23B2A8-21F4-489B-A7B1-B86D91C7C65F}"/>
+                <a16:creationId xmlns:a16="http://schemas.microsoft.com/office/drawing/2014/main" id="{EBA54C2E-4475-44E1-82EA-7D369A04DC1D}"/>
               </a:ext>
             </a:extLst>
           </p:cNvPr>
@@ -9926,7 +9926,7 @@
           <p:cNvPr id="6" name="core-no-0">
             <a:extLst xmlns:a="http://schemas.openxmlformats.org/drawingml/2006/main">
               <a:ext uri="{FF2B5EF4-FFF2-40B4-BE49-F238E27FC236}">
-                <a16:creationId xmlns:a16="http://schemas.microsoft.com/office/drawing/2014/main" id="{AF29D32A-B001-41E4-891B-EA9B1BF66438}"/>
+                <a16:creationId xmlns:a16="http://schemas.microsoft.com/office/drawing/2014/main" id="{0F124693-A165-456C-9EBC-2DFC50C6018F}"/>
               </a:ext>
             </a:extLst>
           </p:cNvPr>
@@ -9984,7 +9984,7 @@
           <p:cNvPr id="7" name="core-label-0">
             <a:extLst xmlns:a="http://schemas.openxmlformats.org/drawingml/2006/main">
               <a:ext uri="{FF2B5EF4-FFF2-40B4-BE49-F238E27FC236}">
-                <a16:creationId xmlns:a16="http://schemas.microsoft.com/office/drawing/2014/main" id="{AC3F6F47-4894-4561-9B65-8A4F6048D841}"/>
+                <a16:creationId xmlns:a16="http://schemas.microsoft.com/office/drawing/2014/main" id="{FCE4E7E0-2EC6-4115-83FD-8DD4C5C87EE9}"/>
               </a:ext>
             </a:extLst>
           </p:cNvPr>
@@ -10042,7 +10042,7 @@
           <p:cNvPr id="8" name="core-body-0">
             <a:extLst xmlns:a="http://schemas.openxmlformats.org/drawingml/2006/main">
               <a:ext uri="{FF2B5EF4-FFF2-40B4-BE49-F238E27FC236}">
-                <a16:creationId xmlns:a16="http://schemas.microsoft.com/office/drawing/2014/main" id="{06AED1C2-0733-4AD5-AFCE-2669D0850C3C}"/>
+                <a16:creationId xmlns:a16="http://schemas.microsoft.com/office/drawing/2014/main" id="{AD03625B-AD28-449B-84E2-6F527CEF7203}"/>
               </a:ext>
             </a:extLst>
           </p:cNvPr>
@@ -10106,7 +10106,7 @@
           <p:cNvPr id="9" name="core-no-1">
             <a:extLst xmlns:a="http://schemas.openxmlformats.org/drawingml/2006/main">
               <a:ext uri="{FF2B5EF4-FFF2-40B4-BE49-F238E27FC236}">
-                <a16:creationId xmlns:a16="http://schemas.microsoft.com/office/drawing/2014/main" id="{2AA117A7-6CD7-4907-AD3F-84D85D92781D}"/>
+                <a16:creationId xmlns:a16="http://schemas.microsoft.com/office/drawing/2014/main" id="{0CBEC322-BEF8-4F8B-A68E-AE65C320CD4E}"/>
               </a:ext>
             </a:extLst>
           </p:cNvPr>
@@ -10164,7 +10164,7 @@
           <p:cNvPr id="10" name="core-body-1">
             <a:extLst xmlns:a="http://schemas.openxmlformats.org/drawingml/2006/main">
               <a:ext uri="{FF2B5EF4-FFF2-40B4-BE49-F238E27FC236}">
-                <a16:creationId xmlns:a16="http://schemas.microsoft.com/office/drawing/2014/main" id="{8C8FFAB7-B197-477E-8E1F-9851DE43C752}"/>
+                <a16:creationId xmlns:a16="http://schemas.microsoft.com/office/drawing/2014/main" id="{E1803548-4D77-4DA5-8DC7-9309AD38504A}"/>
               </a:ext>
             </a:extLst>
           </p:cNvPr>
@@ -10228,7 +10228,7 @@
           <p:cNvPr id="11" name="s8-takeaway-rule">
             <a:extLst xmlns:a="http://schemas.openxmlformats.org/drawingml/2006/main">
               <a:ext uri="{FF2B5EF4-FFF2-40B4-BE49-F238E27FC236}">
-                <a16:creationId xmlns:a16="http://schemas.microsoft.com/office/drawing/2014/main" id="{AD759A38-400E-4BDD-9216-43A6050278D0}"/>
+                <a16:creationId xmlns:a16="http://schemas.microsoft.com/office/drawing/2014/main" id="{A584D9E9-B6A6-4C89-AC60-C31B342EB750}"/>
               </a:ext>
             </a:extLst>
           </p:cNvPr>
@@ -10261,7 +10261,7 @@
           <p:cNvPr id="12" name="s8-takeaway">
             <a:extLst xmlns:a="http://schemas.openxmlformats.org/drawingml/2006/main">
               <a:ext uri="{FF2B5EF4-FFF2-40B4-BE49-F238E27FC236}">
-                <a16:creationId xmlns:a16="http://schemas.microsoft.com/office/drawing/2014/main" id="{7B715EDC-F6B3-41BB-8552-227B0F66AD52}"/>
+                <a16:creationId xmlns:a16="http://schemas.microsoft.com/office/drawing/2014/main" id="{384F1B01-3873-414F-9F98-64173C7BC17A}"/>
               </a:ext>
             </a:extLst>
           </p:cNvPr>
@@ -10317,7 +10317,7 @@
     </p:spTree>
     <p:extLst>
       <p:ext uri="{BB962C8B-B14F-4D97-AF65-F5344CB8AC3E}">
-        <p14:creationId xmlns:p14="http://schemas.microsoft.com/office/powerpoint/2010/main" val="275604930"/>
+        <p14:creationId xmlns:p14="http://schemas.microsoft.com/office/powerpoint/2010/main" val="1396712685"/>
       </p:ext>
     </p:extLst>
   </p:cSld>
@@ -10348,7 +10348,7 @@
           <p:cNvPr id="1" name="s9-rule">
             <a:extLst xmlns:a="http://schemas.openxmlformats.org/drawingml/2006/main">
               <a:ext uri="{FF2B5EF4-FFF2-40B4-BE49-F238E27FC236}">
-                <a16:creationId xmlns:a16="http://schemas.microsoft.com/office/drawing/2014/main" id="{938E1DB2-F9F2-4F7C-8055-850F23C81414}"/>
+                <a16:creationId xmlns:a16="http://schemas.microsoft.com/office/drawing/2014/main" id="{DE70E4C7-CD11-4D07-9E9E-6FE72039DDAE}"/>
               </a:ext>
             </a:extLst>
           </p:cNvPr>
@@ -10381,7 +10381,7 @@
           <p:cNvPr id="2" name="s9-eyebrow">
             <a:extLst xmlns:a="http://schemas.openxmlformats.org/drawingml/2006/main">
               <a:ext uri="{FF2B5EF4-FFF2-40B4-BE49-F238E27FC236}">
-                <a16:creationId xmlns:a16="http://schemas.microsoft.com/office/drawing/2014/main" id="{74C40116-39B2-41E8-9D54-0273ACB37A44}"/>
+                <a16:creationId xmlns:a16="http://schemas.microsoft.com/office/drawing/2014/main" id="{32B43663-DA3B-481B-9276-CE007A986950}"/>
               </a:ext>
             </a:extLst>
           </p:cNvPr>
@@ -10439,7 +10439,7 @@
           <p:cNvPr id="3" name="s9-title">
             <a:extLst xmlns:a="http://schemas.openxmlformats.org/drawingml/2006/main">
               <a:ext uri="{FF2B5EF4-FFF2-40B4-BE49-F238E27FC236}">
-                <a16:creationId xmlns:a16="http://schemas.microsoft.com/office/drawing/2014/main" id="{D023DE1A-E705-43A7-851F-027FC76929F5}"/>
+                <a16:creationId xmlns:a16="http://schemas.microsoft.com/office/drawing/2014/main" id="{8DCED290-A4DC-484D-9828-71A0A2A370FE}"/>
               </a:ext>
             </a:extLst>
           </p:cNvPr>
@@ -10497,7 +10497,7 @@
           <p:cNvPr id="4" name="s9-footer">
             <a:extLst xmlns:a="http://schemas.openxmlformats.org/drawingml/2006/main">
               <a:ext uri="{FF2B5EF4-FFF2-40B4-BE49-F238E27FC236}">
-                <a16:creationId xmlns:a16="http://schemas.microsoft.com/office/drawing/2014/main" id="{A621A9BB-3EEA-479A-AA13-ABC4E47246B3}"/>
+                <a16:creationId xmlns:a16="http://schemas.microsoft.com/office/drawing/2014/main" id="{C8A1205B-BB2F-462A-843A-F90F4B772F2A}"/>
               </a:ext>
             </a:extLst>
           </p:cNvPr>
@@ -10528,7 +10528,7 @@
           <p:cNvPr id="5" name="s9-identity">
             <a:extLst xmlns:a="http://schemas.openxmlformats.org/drawingml/2006/main">
               <a:ext uri="{FF2B5EF4-FFF2-40B4-BE49-F238E27FC236}">
-                <a16:creationId xmlns:a16="http://schemas.microsoft.com/office/drawing/2014/main" id="{4A6A8BDE-3C19-4A6A-94C6-F0EDD8851E83}"/>
+                <a16:creationId xmlns:a16="http://schemas.microsoft.com/office/drawing/2014/main" id="{2467F1FF-0410-49B8-BB1D-EDF64AFB0EC1}"/>
               </a:ext>
             </a:extLst>
           </p:cNvPr>
@@ -10586,7 +10586,7 @@
           <p:cNvPr id="6" name="case-title">
             <a:extLst xmlns:a="http://schemas.openxmlformats.org/drawingml/2006/main">
               <a:ext uri="{FF2B5EF4-FFF2-40B4-BE49-F238E27FC236}">
-                <a16:creationId xmlns:a16="http://schemas.microsoft.com/office/drawing/2014/main" id="{0EB7F68D-750D-4E76-B52F-57D7B9D2B391}"/>
+                <a16:creationId xmlns:a16="http://schemas.microsoft.com/office/drawing/2014/main" id="{478E9A00-D047-4610-934A-124FC3781E61}"/>
               </a:ext>
             </a:extLst>
           </p:cNvPr>
@@ -10650,7 +10650,7 @@
           <p:cNvPr id="7" name="case-row-0">
             <a:extLst xmlns:a="http://schemas.openxmlformats.org/drawingml/2006/main">
               <a:ext uri="{FF2B5EF4-FFF2-40B4-BE49-F238E27FC236}">
-                <a16:creationId xmlns:a16="http://schemas.microsoft.com/office/drawing/2014/main" id="{485900FF-DC7F-45A9-9706-36BBBFA31F22}"/>
+                <a16:creationId xmlns:a16="http://schemas.microsoft.com/office/drawing/2014/main" id="{81EE1EAA-9768-4C07-A2EC-2780C291DE72}"/>
               </a:ext>
             </a:extLst>
           </p:cNvPr>
@@ -10714,7 +10714,7 @@
           <p:cNvPr id="8" name="case-row-1">
             <a:extLst xmlns:a="http://schemas.openxmlformats.org/drawingml/2006/main">
               <a:ext uri="{FF2B5EF4-FFF2-40B4-BE49-F238E27FC236}">
-                <a16:creationId xmlns:a16="http://schemas.microsoft.com/office/drawing/2014/main" id="{1496CF18-43D5-43A0-B624-284D00C110BF}"/>
+                <a16:creationId xmlns:a16="http://schemas.microsoft.com/office/drawing/2014/main" id="{C0155C5A-C759-4ACD-A2C9-71FF714BEDC6}"/>
               </a:ext>
             </a:extLst>
           </p:cNvPr>
@@ -10778,7 +10778,7 @@
           <p:cNvPr id="9" name="case-row-2">
             <a:extLst xmlns:a="http://schemas.openxmlformats.org/drawingml/2006/main">
               <a:ext uri="{FF2B5EF4-FFF2-40B4-BE49-F238E27FC236}">
-                <a16:creationId xmlns:a16="http://schemas.microsoft.com/office/drawing/2014/main" id="{9BA87C73-1D33-4630-B37D-3E9EB6F97D27}"/>
+                <a16:creationId xmlns:a16="http://schemas.microsoft.com/office/drawing/2014/main" id="{FA036E1A-B2BB-4EEE-9170-5B3DE06C16AC}"/>
               </a:ext>
             </a:extLst>
           </p:cNvPr>
@@ -10842,7 +10842,7 @@
           <p:cNvPr id="10" name="case-row-3">
             <a:extLst xmlns:a="http://schemas.openxmlformats.org/drawingml/2006/main">
               <a:ext uri="{FF2B5EF4-FFF2-40B4-BE49-F238E27FC236}">
-                <a16:creationId xmlns:a16="http://schemas.microsoft.com/office/drawing/2014/main" id="{EE469E77-A792-403A-9550-5D4997E7A51E}"/>
+                <a16:creationId xmlns:a16="http://schemas.microsoft.com/office/drawing/2014/main" id="{C4E94300-E041-45AE-86A7-6D1DEAAA4157}"/>
               </a:ext>
             </a:extLst>
           </p:cNvPr>
@@ -10906,7 +10906,7 @@
           <p:cNvPr id="11" name="s9-takeaway-rule">
             <a:extLst xmlns:a="http://schemas.openxmlformats.org/drawingml/2006/main">
               <a:ext uri="{FF2B5EF4-FFF2-40B4-BE49-F238E27FC236}">
-                <a16:creationId xmlns:a16="http://schemas.microsoft.com/office/drawing/2014/main" id="{ACB0943E-1B70-419A-818A-852F28290B6D}"/>
+                <a16:creationId xmlns:a16="http://schemas.microsoft.com/office/drawing/2014/main" id="{4A33E40C-071B-4A33-8953-B53162438C7E}"/>
               </a:ext>
             </a:extLst>
           </p:cNvPr>
@@ -10939,7 +10939,7 @@
           <p:cNvPr id="12" name="s9-takeaway">
             <a:extLst xmlns:a="http://schemas.openxmlformats.org/drawingml/2006/main">
               <a:ext uri="{FF2B5EF4-FFF2-40B4-BE49-F238E27FC236}">
-                <a16:creationId xmlns:a16="http://schemas.microsoft.com/office/drawing/2014/main" id="{864AFEFB-8964-4830-BF7E-CC5D7B50B62F}"/>
+                <a16:creationId xmlns:a16="http://schemas.microsoft.com/office/drawing/2014/main" id="{2B88307C-9261-4BDC-BD26-5C378AC1E75E}"/>
               </a:ext>
             </a:extLst>
           </p:cNvPr>
@@ -10995,7 +10995,7 @@
     </p:spTree>
     <p:extLst>
       <p:ext uri="{BB962C8B-B14F-4D97-AF65-F5344CB8AC3E}">
-        <p14:creationId xmlns:p14="http://schemas.microsoft.com/office/powerpoint/2010/main" val="261333662"/>
+        <p14:creationId xmlns:p14="http://schemas.microsoft.com/office/powerpoint/2010/main" val="141089760"/>
       </p:ext>
     </p:extLst>
   </p:cSld>

--- a/docs/public/course-assets/course-pptx/in-008.pptx
+++ b/docs/public/course-assets/course-pptx/in-008.pptx
@@ -2,25 +2,25 @@
 <file path=ppt/presentation.xml><?xml version="1.0" encoding="utf-8"?>
 <p:presentation xmlns:p="http://schemas.openxmlformats.org/presentationml/2006/main">
   <p:sldMasterIdLst>
-    <p:sldMasterId xmlns:r="http://schemas.openxmlformats.org/officeDocument/2006/relationships" id="2147483648" r:id="R4d61392c552d4822"/>
+    <p:sldMasterId xmlns:r="http://schemas.openxmlformats.org/officeDocument/2006/relationships" id="2147483648" r:id="Racce6a96db2f46cb"/>
   </p:sldMasterIdLst>
   <p:notesMasterIdLst>
-    <p:notesMasterId xmlns:r="http://schemas.openxmlformats.org/officeDocument/2006/relationships" r:id="R846f6affd94c4b63"/>
+    <p:notesMasterId xmlns:r="http://schemas.openxmlformats.org/officeDocument/2006/relationships" r:id="R6b48e617a9b04c7e"/>
   </p:notesMasterIdLst>
   <p:sldIdLst>
-    <p:sldId xmlns:r="http://schemas.openxmlformats.org/officeDocument/2006/relationships" id="256" r:id="Rf5ba0996040d49df"/>
-    <p:sldId xmlns:r="http://schemas.openxmlformats.org/officeDocument/2006/relationships" id="257" r:id="R8ed80f53f2d0454b"/>
-    <p:sldId xmlns:r="http://schemas.openxmlformats.org/officeDocument/2006/relationships" id="258" r:id="R85406e9b3b314690"/>
-    <p:sldId xmlns:r="http://schemas.openxmlformats.org/officeDocument/2006/relationships" id="259" r:id="Ra947179a69264b30"/>
-    <p:sldId xmlns:r="http://schemas.openxmlformats.org/officeDocument/2006/relationships" id="260" r:id="R0610296c382d46db"/>
-    <p:sldId xmlns:r="http://schemas.openxmlformats.org/officeDocument/2006/relationships" id="261" r:id="Rd447726cac494d9f"/>
-    <p:sldId xmlns:r="http://schemas.openxmlformats.org/officeDocument/2006/relationships" id="262" r:id="R139bbe8871f14a3b"/>
-    <p:sldId xmlns:r="http://schemas.openxmlformats.org/officeDocument/2006/relationships" id="263" r:id="Rbf71dc0cee1e429c"/>
-    <p:sldId xmlns:r="http://schemas.openxmlformats.org/officeDocument/2006/relationships" id="264" r:id="Rb8be3165650947e9"/>
-    <p:sldId xmlns:r="http://schemas.openxmlformats.org/officeDocument/2006/relationships" id="265" r:id="R8c9ab71d21ec4e1d"/>
-    <p:sldId xmlns:r="http://schemas.openxmlformats.org/officeDocument/2006/relationships" id="266" r:id="R7ee44430369748e8"/>
-    <p:sldId xmlns:r="http://schemas.openxmlformats.org/officeDocument/2006/relationships" id="267" r:id="R9bacd9430b80490a"/>
-    <p:sldId xmlns:r="http://schemas.openxmlformats.org/officeDocument/2006/relationships" id="268" r:id="Rae4dc4eae2194079"/>
+    <p:sldId xmlns:r="http://schemas.openxmlformats.org/officeDocument/2006/relationships" id="256" r:id="Rc827860e8e7d4fbf"/>
+    <p:sldId xmlns:r="http://schemas.openxmlformats.org/officeDocument/2006/relationships" id="257" r:id="R714b82a528a64124"/>
+    <p:sldId xmlns:r="http://schemas.openxmlformats.org/officeDocument/2006/relationships" id="258" r:id="R5c8304fe6f6a4cfc"/>
+    <p:sldId xmlns:r="http://schemas.openxmlformats.org/officeDocument/2006/relationships" id="259" r:id="R220203be612f44ae"/>
+    <p:sldId xmlns:r="http://schemas.openxmlformats.org/officeDocument/2006/relationships" id="260" r:id="Rd9ccb560909d458e"/>
+    <p:sldId xmlns:r="http://schemas.openxmlformats.org/officeDocument/2006/relationships" id="261" r:id="Rafacce62a4c1482b"/>
+    <p:sldId xmlns:r="http://schemas.openxmlformats.org/officeDocument/2006/relationships" id="262" r:id="R55171a152a0f4e3b"/>
+    <p:sldId xmlns:r="http://schemas.openxmlformats.org/officeDocument/2006/relationships" id="263" r:id="R93116b8bcaba4475"/>
+    <p:sldId xmlns:r="http://schemas.openxmlformats.org/officeDocument/2006/relationships" id="264" r:id="Rb30dd4f408f3436f"/>
+    <p:sldId xmlns:r="http://schemas.openxmlformats.org/officeDocument/2006/relationships" id="265" r:id="R0b169fa58b3f4b96"/>
+    <p:sldId xmlns:r="http://schemas.openxmlformats.org/officeDocument/2006/relationships" id="266" r:id="Re223e195f4d74066"/>
+    <p:sldId xmlns:r="http://schemas.openxmlformats.org/officeDocument/2006/relationships" id="267" r:id="R3de8f039fc7849d9"/>
+    <p:sldId xmlns:r="http://schemas.openxmlformats.org/officeDocument/2006/relationships" id="268" r:id="Re242435d1ddc4750"/>
   </p:sldIdLst>
   <p:sldSz cx="12192000" cy="6858000"/>
   <p:notesSz cx="6858000" cy="9144000"/>
@@ -1405,7 +1405,7 @@
   </p:cSld>
   <p:clrMap bg1="lt1" tx1="dk1" bg2="lt2" tx2="dk2" accent1="accent1" accent2="accent2" accent3="accent3" accent4="accent4" accent5="accent5" accent6="accent6" hlink="hlink" folHlink="folHlink"/>
   <p:sldLayoutIdLst>
-    <p:sldLayoutId xmlns:r="http://schemas.openxmlformats.org/officeDocument/2006/relationships" id="2147483649" r:id="R6c9ef3ebaed9482a"/>
+    <p:sldLayoutId xmlns:r="http://schemas.openxmlformats.org/officeDocument/2006/relationships" id="2147483649" r:id="R1c6aa87b67a7428e"/>
   </p:sldLayoutIdLst>
   <p:txStyles>
     <p:titleStyle>
@@ -1956,7 +1956,7 @@
           <p:cNvPr id="1" name="cover-rule">
             <a:extLst xmlns:a="http://schemas.openxmlformats.org/drawingml/2006/main">
               <a:ext uri="{FF2B5EF4-FFF2-40B4-BE49-F238E27FC236}">
-                <a16:creationId xmlns:a16="http://schemas.microsoft.com/office/drawing/2014/main" id="{A9A18F95-505A-42ED-93B1-039AA7076626}"/>
+                <a16:creationId xmlns:a16="http://schemas.microsoft.com/office/drawing/2014/main" id="{73C28FEF-A24D-4A68-81B3-202CD65D0227}"/>
               </a:ext>
             </a:extLst>
           </p:cNvPr>
@@ -1989,7 +1989,7 @@
           <p:cNvPr id="2" name="cover-ring-1">
             <a:extLst xmlns:a="http://schemas.openxmlformats.org/drawingml/2006/main">
               <a:ext uri="{FF2B5EF4-FFF2-40B4-BE49-F238E27FC236}">
-                <a16:creationId xmlns:a16="http://schemas.microsoft.com/office/drawing/2014/main" id="{4C8D0CEA-6B58-435E-BE3C-407C329AD3C5}"/>
+                <a16:creationId xmlns:a16="http://schemas.microsoft.com/office/drawing/2014/main" id="{891F0B3F-2151-4CBF-A6D3-2DB786279F19}"/>
               </a:ext>
             </a:extLst>
           </p:cNvPr>
@@ -2020,7 +2020,7 @@
           <p:cNvPr id="3" name="cover-ring-2">
             <a:extLst xmlns:a="http://schemas.openxmlformats.org/drawingml/2006/main">
               <a:ext uri="{FF2B5EF4-FFF2-40B4-BE49-F238E27FC236}">
-                <a16:creationId xmlns:a16="http://schemas.microsoft.com/office/drawing/2014/main" id="{B2E04F63-07F5-4419-9955-340B8492D5D2}"/>
+                <a16:creationId xmlns:a16="http://schemas.microsoft.com/office/drawing/2014/main" id="{290BF998-5043-4338-AE96-B6B2AF00DE76}"/>
               </a:ext>
             </a:extLst>
           </p:cNvPr>
@@ -2051,7 +2051,7 @@
           <p:cNvPr id="4" name="cover-core">
             <a:extLst xmlns:a="http://schemas.openxmlformats.org/drawingml/2006/main">
               <a:ext uri="{FF2B5EF4-FFF2-40B4-BE49-F238E27FC236}">
-                <a16:creationId xmlns:a16="http://schemas.microsoft.com/office/drawing/2014/main" id="{A85B9161-47DA-4CEE-9969-B2EBE8E3F237}"/>
+                <a16:creationId xmlns:a16="http://schemas.microsoft.com/office/drawing/2014/main" id="{5A02976F-39E2-4117-83D6-0974FAE0C0CA}"/>
               </a:ext>
             </a:extLst>
           </p:cNvPr>
@@ -2084,7 +2084,7 @@
           <p:cNvPr id="5" name="cover-line-1">
             <a:extLst xmlns:a="http://schemas.openxmlformats.org/drawingml/2006/main">
               <a:ext uri="{FF2B5EF4-FFF2-40B4-BE49-F238E27FC236}">
-                <a16:creationId xmlns:a16="http://schemas.microsoft.com/office/drawing/2014/main" id="{7FBB6718-1580-4F40-A2C5-D7E3CA6F7ADC}"/>
+                <a16:creationId xmlns:a16="http://schemas.microsoft.com/office/drawing/2014/main" id="{8315B0FB-EACD-4F87-9E10-C2D20747D5FF}"/>
               </a:ext>
             </a:extLst>
           </p:cNvPr>
@@ -2115,7 +2115,7 @@
           <p:cNvPr id="6" name="cover-line-2">
             <a:extLst xmlns:a="http://schemas.openxmlformats.org/drawingml/2006/main">
               <a:ext uri="{FF2B5EF4-FFF2-40B4-BE49-F238E27FC236}">
-                <a16:creationId xmlns:a16="http://schemas.microsoft.com/office/drawing/2014/main" id="{E2E257C5-A404-4266-9F47-F627879B873B}"/>
+                <a16:creationId xmlns:a16="http://schemas.microsoft.com/office/drawing/2014/main" id="{8CB75B89-E0A2-4728-9726-453276B38C57}"/>
               </a:ext>
             </a:extLst>
           </p:cNvPr>
@@ -2146,7 +2146,7 @@
           <p:cNvPr id="7" name="cover-eyebrow">
             <a:extLst xmlns:a="http://schemas.openxmlformats.org/drawingml/2006/main">
               <a:ext uri="{FF2B5EF4-FFF2-40B4-BE49-F238E27FC236}">
-                <a16:creationId xmlns:a16="http://schemas.microsoft.com/office/drawing/2014/main" id="{A5ACDB3A-2B03-47C6-905A-BE16FBF54A8D}"/>
+                <a16:creationId xmlns:a16="http://schemas.microsoft.com/office/drawing/2014/main" id="{C34B9D7D-8F59-425E-A9A3-E5AB0DE2F526}"/>
               </a:ext>
             </a:extLst>
           </p:cNvPr>
@@ -2204,7 +2204,7 @@
           <p:cNvPr id="8" name="cover-title">
             <a:extLst xmlns:a="http://schemas.openxmlformats.org/drawingml/2006/main">
               <a:ext uri="{FF2B5EF4-FFF2-40B4-BE49-F238E27FC236}">
-                <a16:creationId xmlns:a16="http://schemas.microsoft.com/office/drawing/2014/main" id="{6929237D-B69A-4270-AD3A-CFCAAD61E100}"/>
+                <a16:creationId xmlns:a16="http://schemas.microsoft.com/office/drawing/2014/main" id="{4D841968-A08B-4A48-AA34-8796A8F36B80}"/>
               </a:ext>
             </a:extLst>
           </p:cNvPr>
@@ -2262,7 +2262,7 @@
           <p:cNvPr id="9" name="cover-subtitle">
             <a:extLst xmlns:a="http://schemas.openxmlformats.org/drawingml/2006/main">
               <a:ext uri="{FF2B5EF4-FFF2-40B4-BE49-F238E27FC236}">
-                <a16:creationId xmlns:a16="http://schemas.microsoft.com/office/drawing/2014/main" id="{903E2714-899C-46D7-BEEB-C5309D505A51}"/>
+                <a16:creationId xmlns:a16="http://schemas.microsoft.com/office/drawing/2014/main" id="{7B3EB934-F46D-49BB-9895-A71F109BE479}"/>
               </a:ext>
             </a:extLst>
           </p:cNvPr>
@@ -2324,7 +2324,7 @@
           <p:cNvPr id="10" name="cover-lead">
             <a:extLst xmlns:a="http://schemas.openxmlformats.org/drawingml/2006/main">
               <a:ext uri="{FF2B5EF4-FFF2-40B4-BE49-F238E27FC236}">
-                <a16:creationId xmlns:a16="http://schemas.microsoft.com/office/drawing/2014/main" id="{0A3D182A-14EA-4339-A315-9338C7AA01FC}"/>
+                <a16:creationId xmlns:a16="http://schemas.microsoft.com/office/drawing/2014/main" id="{1F18E887-A1E5-4011-8602-984DD2D821B8}"/>
               </a:ext>
             </a:extLst>
           </p:cNvPr>
@@ -2382,7 +2382,7 @@
           <p:cNvPr id="11" name="cover-course">
             <a:extLst xmlns:a="http://schemas.openxmlformats.org/drawingml/2006/main">
               <a:ext uri="{FF2B5EF4-FFF2-40B4-BE49-F238E27FC236}">
-                <a16:creationId xmlns:a16="http://schemas.microsoft.com/office/drawing/2014/main" id="{54F838C4-0C04-4986-9BE6-C026E2D23532}"/>
+                <a16:creationId xmlns:a16="http://schemas.microsoft.com/office/drawing/2014/main" id="{2D13D087-274B-4E14-985C-39EA7E516E83}"/>
               </a:ext>
             </a:extLst>
           </p:cNvPr>
@@ -2440,7 +2440,7 @@
           <p:cNvPr id="12" name="cover-id">
             <a:extLst xmlns:a="http://schemas.openxmlformats.org/drawingml/2006/main">
               <a:ext uri="{FF2B5EF4-FFF2-40B4-BE49-F238E27FC236}">
-                <a16:creationId xmlns:a16="http://schemas.microsoft.com/office/drawing/2014/main" id="{68C9ACB2-C743-4A88-89C8-05BC4F484DCC}"/>
+                <a16:creationId xmlns:a16="http://schemas.microsoft.com/office/drawing/2014/main" id="{59FC52FC-4B29-40B6-88C1-C90B5A544B73}"/>
               </a:ext>
             </a:extLst>
           </p:cNvPr>
@@ -2496,7 +2496,7 @@
     </p:spTree>
     <p:extLst>
       <p:ext uri="{BB962C8B-B14F-4D97-AF65-F5344CB8AC3E}">
-        <p14:creationId xmlns:p14="http://schemas.microsoft.com/office/powerpoint/2010/main" val="1686830272"/>
+        <p14:creationId xmlns:p14="http://schemas.microsoft.com/office/powerpoint/2010/main" val="771677299"/>
       </p:ext>
     </p:extLst>
   </p:cSld>
@@ -2527,7 +2527,7 @@
           <p:cNvPr id="1" name="s10-rule">
             <a:extLst xmlns:a="http://schemas.openxmlformats.org/drawingml/2006/main">
               <a:ext uri="{FF2B5EF4-FFF2-40B4-BE49-F238E27FC236}">
-                <a16:creationId xmlns:a16="http://schemas.microsoft.com/office/drawing/2014/main" id="{72FC8CE4-B52E-4891-958E-D6650E0E7B94}"/>
+                <a16:creationId xmlns:a16="http://schemas.microsoft.com/office/drawing/2014/main" id="{42E23366-0D45-43FC-AC44-485C9F1E2986}"/>
               </a:ext>
             </a:extLst>
           </p:cNvPr>
@@ -2560,7 +2560,7 @@
           <p:cNvPr id="2" name="s10-eyebrow">
             <a:extLst xmlns:a="http://schemas.openxmlformats.org/drawingml/2006/main">
               <a:ext uri="{FF2B5EF4-FFF2-40B4-BE49-F238E27FC236}">
-                <a16:creationId xmlns:a16="http://schemas.microsoft.com/office/drawing/2014/main" id="{0336F813-46EE-4519-BD9F-85A141D2B02B}"/>
+                <a16:creationId xmlns:a16="http://schemas.microsoft.com/office/drawing/2014/main" id="{9CC635A9-A761-4FF0-9BBB-C34C7C5AA1C7}"/>
               </a:ext>
             </a:extLst>
           </p:cNvPr>
@@ -2618,7 +2618,7 @@
           <p:cNvPr id="3" name="s10-title">
             <a:extLst xmlns:a="http://schemas.openxmlformats.org/drawingml/2006/main">
               <a:ext uri="{FF2B5EF4-FFF2-40B4-BE49-F238E27FC236}">
-                <a16:creationId xmlns:a16="http://schemas.microsoft.com/office/drawing/2014/main" id="{0D07CBF5-553F-420B-B749-B55AFD43F043}"/>
+                <a16:creationId xmlns:a16="http://schemas.microsoft.com/office/drawing/2014/main" id="{E561E7F1-E75F-4505-977D-2583CAA0E743}"/>
               </a:ext>
             </a:extLst>
           </p:cNvPr>
@@ -2676,7 +2676,7 @@
           <p:cNvPr id="4" name="s10-footer">
             <a:extLst xmlns:a="http://schemas.openxmlformats.org/drawingml/2006/main">
               <a:ext uri="{FF2B5EF4-FFF2-40B4-BE49-F238E27FC236}">
-                <a16:creationId xmlns:a16="http://schemas.microsoft.com/office/drawing/2014/main" id="{61817112-DBC6-482A-BAB4-A2084A563ADD}"/>
+                <a16:creationId xmlns:a16="http://schemas.microsoft.com/office/drawing/2014/main" id="{E0DBD1B2-3631-4CC1-9BCC-14EB5A910F00}"/>
               </a:ext>
             </a:extLst>
           </p:cNvPr>
@@ -2707,7 +2707,7 @@
           <p:cNvPr id="5" name="s10-identity">
             <a:extLst xmlns:a="http://schemas.openxmlformats.org/drawingml/2006/main">
               <a:ext uri="{FF2B5EF4-FFF2-40B4-BE49-F238E27FC236}">
-                <a16:creationId xmlns:a16="http://schemas.microsoft.com/office/drawing/2014/main" id="{16234C18-47F8-43A3-A495-5E103D73ED7C}"/>
+                <a16:creationId xmlns:a16="http://schemas.microsoft.com/office/drawing/2014/main" id="{559A13A5-7084-44CE-B853-A36CA1D86C75}"/>
               </a:ext>
             </a:extLst>
           </p:cNvPr>
@@ -2765,7 +2765,7 @@
           <p:cNvPr id="6" name="case-title">
             <a:extLst xmlns:a="http://schemas.openxmlformats.org/drawingml/2006/main">
               <a:ext uri="{FF2B5EF4-FFF2-40B4-BE49-F238E27FC236}">
-                <a16:creationId xmlns:a16="http://schemas.microsoft.com/office/drawing/2014/main" id="{B1402CC1-8C0B-4EC9-BE5F-956A6DA8222F}"/>
+                <a16:creationId xmlns:a16="http://schemas.microsoft.com/office/drawing/2014/main" id="{9019C549-4F8B-427C-860D-B16BE7746A72}"/>
               </a:ext>
             </a:extLst>
           </p:cNvPr>
@@ -2829,7 +2829,7 @@
           <p:cNvPr id="7" name="case-row-0">
             <a:extLst xmlns:a="http://schemas.openxmlformats.org/drawingml/2006/main">
               <a:ext uri="{FF2B5EF4-FFF2-40B4-BE49-F238E27FC236}">
-                <a16:creationId xmlns:a16="http://schemas.microsoft.com/office/drawing/2014/main" id="{2B229075-3F7C-4BAB-91BE-00DB102E8259}"/>
+                <a16:creationId xmlns:a16="http://schemas.microsoft.com/office/drawing/2014/main" id="{18D19261-D037-4333-B998-A1FDD17F99ED}"/>
               </a:ext>
             </a:extLst>
           </p:cNvPr>
@@ -2893,7 +2893,7 @@
           <p:cNvPr id="8" name="case-row-1">
             <a:extLst xmlns:a="http://schemas.openxmlformats.org/drawingml/2006/main">
               <a:ext uri="{FF2B5EF4-FFF2-40B4-BE49-F238E27FC236}">
-                <a16:creationId xmlns:a16="http://schemas.microsoft.com/office/drawing/2014/main" id="{7D1A063C-FBE9-48F3-A63C-B2B4486F52DB}"/>
+                <a16:creationId xmlns:a16="http://schemas.microsoft.com/office/drawing/2014/main" id="{E4E92E6C-E9CC-4ED4-B666-83FE616348D2}"/>
               </a:ext>
             </a:extLst>
           </p:cNvPr>
@@ -2957,7 +2957,7 @@
           <p:cNvPr id="9" name="case-row-2">
             <a:extLst xmlns:a="http://schemas.openxmlformats.org/drawingml/2006/main">
               <a:ext uri="{FF2B5EF4-FFF2-40B4-BE49-F238E27FC236}">
-                <a16:creationId xmlns:a16="http://schemas.microsoft.com/office/drawing/2014/main" id="{DE61E0C6-3EA4-4DA7-90B3-96618B1BBD1A}"/>
+                <a16:creationId xmlns:a16="http://schemas.microsoft.com/office/drawing/2014/main" id="{61AE3942-40F2-40AC-9D77-0EF1177494DA}"/>
               </a:ext>
             </a:extLst>
           </p:cNvPr>
@@ -3021,7 +3021,7 @@
           <p:cNvPr id="10" name="s10-takeaway-rule">
             <a:extLst xmlns:a="http://schemas.openxmlformats.org/drawingml/2006/main">
               <a:ext uri="{FF2B5EF4-FFF2-40B4-BE49-F238E27FC236}">
-                <a16:creationId xmlns:a16="http://schemas.microsoft.com/office/drawing/2014/main" id="{F4E1DE8F-8FDD-4307-B3BF-C495EBE723CA}"/>
+                <a16:creationId xmlns:a16="http://schemas.microsoft.com/office/drawing/2014/main" id="{DF1ADFC7-F8FF-4753-9DD1-86884FBACD46}"/>
               </a:ext>
             </a:extLst>
           </p:cNvPr>
@@ -3054,7 +3054,7 @@
           <p:cNvPr id="11" name="s10-takeaway">
             <a:extLst xmlns:a="http://schemas.openxmlformats.org/drawingml/2006/main">
               <a:ext uri="{FF2B5EF4-FFF2-40B4-BE49-F238E27FC236}">
-                <a16:creationId xmlns:a16="http://schemas.microsoft.com/office/drawing/2014/main" id="{0C47DE2E-F32D-4DC3-8E15-7332B1E46F52}"/>
+                <a16:creationId xmlns:a16="http://schemas.microsoft.com/office/drawing/2014/main" id="{F7D3AB95-A9CB-498B-9122-A33E96AF077C}"/>
               </a:ext>
             </a:extLst>
           </p:cNvPr>
@@ -3110,7 +3110,7 @@
     </p:spTree>
     <p:extLst>
       <p:ext uri="{BB962C8B-B14F-4D97-AF65-F5344CB8AC3E}">
-        <p14:creationId xmlns:p14="http://schemas.microsoft.com/office/powerpoint/2010/main" val="1765639351"/>
+        <p14:creationId xmlns:p14="http://schemas.microsoft.com/office/powerpoint/2010/main" val="708345962"/>
       </p:ext>
     </p:extLst>
   </p:cSld>
@@ -3141,7 +3141,7 @@
           <p:cNvPr id="1" name="s11-rule">
             <a:extLst xmlns:a="http://schemas.openxmlformats.org/drawingml/2006/main">
               <a:ext uri="{FF2B5EF4-FFF2-40B4-BE49-F238E27FC236}">
-                <a16:creationId xmlns:a16="http://schemas.microsoft.com/office/drawing/2014/main" id="{9823D2AC-D7B2-421E-8D71-29311BAF7A6C}"/>
+                <a16:creationId xmlns:a16="http://schemas.microsoft.com/office/drawing/2014/main" id="{BA63360E-E097-4C98-84E6-14291ACDF964}"/>
               </a:ext>
             </a:extLst>
           </p:cNvPr>
@@ -3174,7 +3174,7 @@
           <p:cNvPr id="2" name="s11-eyebrow">
             <a:extLst xmlns:a="http://schemas.openxmlformats.org/drawingml/2006/main">
               <a:ext uri="{FF2B5EF4-FFF2-40B4-BE49-F238E27FC236}">
-                <a16:creationId xmlns:a16="http://schemas.microsoft.com/office/drawing/2014/main" id="{ED00BBD5-8A0C-4649-B448-DDC4938C6D81}"/>
+                <a16:creationId xmlns:a16="http://schemas.microsoft.com/office/drawing/2014/main" id="{8FF5FF65-047A-4F5A-9408-57F4412DAB11}"/>
               </a:ext>
             </a:extLst>
           </p:cNvPr>
@@ -3232,7 +3232,7 @@
           <p:cNvPr id="3" name="s11-title">
             <a:extLst xmlns:a="http://schemas.openxmlformats.org/drawingml/2006/main">
               <a:ext uri="{FF2B5EF4-FFF2-40B4-BE49-F238E27FC236}">
-                <a16:creationId xmlns:a16="http://schemas.microsoft.com/office/drawing/2014/main" id="{E44AC1C2-BEC8-455C-B7D0-5C444723D5E7}"/>
+                <a16:creationId xmlns:a16="http://schemas.microsoft.com/office/drawing/2014/main" id="{E8B4C3FC-1417-498D-ACD7-D36852529C9C}"/>
               </a:ext>
             </a:extLst>
           </p:cNvPr>
@@ -3290,7 +3290,7 @@
           <p:cNvPr id="4" name="s11-footer">
             <a:extLst xmlns:a="http://schemas.openxmlformats.org/drawingml/2006/main">
               <a:ext uri="{FF2B5EF4-FFF2-40B4-BE49-F238E27FC236}">
-                <a16:creationId xmlns:a16="http://schemas.microsoft.com/office/drawing/2014/main" id="{864BD9F5-A8EB-4018-990A-F540314CD872}"/>
+                <a16:creationId xmlns:a16="http://schemas.microsoft.com/office/drawing/2014/main" id="{0CED756F-F42A-4CD1-BB6B-97692B7658D5}"/>
               </a:ext>
             </a:extLst>
           </p:cNvPr>
@@ -3321,7 +3321,7 @@
           <p:cNvPr id="5" name="s11-identity">
             <a:extLst xmlns:a="http://schemas.openxmlformats.org/drawingml/2006/main">
               <a:ext uri="{FF2B5EF4-FFF2-40B4-BE49-F238E27FC236}">
-                <a16:creationId xmlns:a16="http://schemas.microsoft.com/office/drawing/2014/main" id="{8DF82BB6-9C64-4A5F-9276-5D5357E96144}"/>
+                <a16:creationId xmlns:a16="http://schemas.microsoft.com/office/drawing/2014/main" id="{61965AE8-7770-475E-B80B-102BCB467B8B}"/>
               </a:ext>
             </a:extLst>
           </p:cNvPr>
@@ -3379,7 +3379,7 @@
           <p:cNvPr id="6" name="practice-circle-0">
             <a:extLst xmlns:a="http://schemas.openxmlformats.org/drawingml/2006/main">
               <a:ext uri="{FF2B5EF4-FFF2-40B4-BE49-F238E27FC236}">
-                <a16:creationId xmlns:a16="http://schemas.microsoft.com/office/drawing/2014/main" id="{C7F680F5-A17C-48EA-B0D8-2BE94B43E02E}"/>
+                <a16:creationId xmlns:a16="http://schemas.microsoft.com/office/drawing/2014/main" id="{BD9D644B-F1D2-429E-BBF8-270288B5DD7D}"/>
               </a:ext>
             </a:extLst>
           </p:cNvPr>
@@ -3412,7 +3412,7 @@
           <p:cNvPr id="7" name="practice-number-0">
             <a:extLst xmlns:a="http://schemas.openxmlformats.org/drawingml/2006/main">
               <a:ext uri="{FF2B5EF4-FFF2-40B4-BE49-F238E27FC236}">
-                <a16:creationId xmlns:a16="http://schemas.microsoft.com/office/drawing/2014/main" id="{43E49673-0C7C-4882-9E18-64478916E4BC}"/>
+                <a16:creationId xmlns:a16="http://schemas.microsoft.com/office/drawing/2014/main" id="{C06C3755-444F-4096-A8AC-C73B235F4EEA}"/>
               </a:ext>
             </a:extLst>
           </p:cNvPr>
@@ -3470,7 +3470,7 @@
           <p:cNvPr id="8" name="practice-item-0">
             <a:extLst xmlns:a="http://schemas.openxmlformats.org/drawingml/2006/main">
               <a:ext uri="{FF2B5EF4-FFF2-40B4-BE49-F238E27FC236}">
-                <a16:creationId xmlns:a16="http://schemas.microsoft.com/office/drawing/2014/main" id="{072A0389-1734-47BD-9FC8-5E12F8274D2A}"/>
+                <a16:creationId xmlns:a16="http://schemas.microsoft.com/office/drawing/2014/main" id="{300201F2-D1B8-414D-9E42-DBDF346C40BB}"/>
               </a:ext>
             </a:extLst>
           </p:cNvPr>
@@ -3534,7 +3534,7 @@
           <p:cNvPr id="9" name="practice-connector-0">
             <a:extLst xmlns:a="http://schemas.openxmlformats.org/drawingml/2006/main">
               <a:ext uri="{FF2B5EF4-FFF2-40B4-BE49-F238E27FC236}">
-                <a16:creationId xmlns:a16="http://schemas.microsoft.com/office/drawing/2014/main" id="{767E535A-A1F7-45D9-9E17-688B604B770B}"/>
+                <a16:creationId xmlns:a16="http://schemas.microsoft.com/office/drawing/2014/main" id="{16906EE2-CDD3-49B1-AE36-25333D139A18}"/>
               </a:ext>
             </a:extLst>
           </p:cNvPr>
@@ -3565,7 +3565,7 @@
           <p:cNvPr id="10" name="practice-circle-1">
             <a:extLst xmlns:a="http://schemas.openxmlformats.org/drawingml/2006/main">
               <a:ext uri="{FF2B5EF4-FFF2-40B4-BE49-F238E27FC236}">
-                <a16:creationId xmlns:a16="http://schemas.microsoft.com/office/drawing/2014/main" id="{108B21A8-CA1E-4D50-86BE-1AAD408073CE}"/>
+                <a16:creationId xmlns:a16="http://schemas.microsoft.com/office/drawing/2014/main" id="{938409C6-0D8C-4264-A860-E70E24E0DCFD}"/>
               </a:ext>
             </a:extLst>
           </p:cNvPr>
@@ -3598,7 +3598,7 @@
           <p:cNvPr id="11" name="practice-number-1">
             <a:extLst xmlns:a="http://schemas.openxmlformats.org/drawingml/2006/main">
               <a:ext uri="{FF2B5EF4-FFF2-40B4-BE49-F238E27FC236}">
-                <a16:creationId xmlns:a16="http://schemas.microsoft.com/office/drawing/2014/main" id="{1759F6FC-8467-407D-A6EA-D52581F2B963}"/>
+                <a16:creationId xmlns:a16="http://schemas.microsoft.com/office/drawing/2014/main" id="{54153DD2-84B2-4889-8D0F-CB7DC799C45A}"/>
               </a:ext>
             </a:extLst>
           </p:cNvPr>
@@ -3656,7 +3656,7 @@
           <p:cNvPr id="12" name="practice-item-1">
             <a:extLst xmlns:a="http://schemas.openxmlformats.org/drawingml/2006/main">
               <a:ext uri="{FF2B5EF4-FFF2-40B4-BE49-F238E27FC236}">
-                <a16:creationId xmlns:a16="http://schemas.microsoft.com/office/drawing/2014/main" id="{16450A23-75A4-49C0-ABE1-9F35A110DF4D}"/>
+                <a16:creationId xmlns:a16="http://schemas.microsoft.com/office/drawing/2014/main" id="{3B4644F2-11DA-4F23-B010-2A868FB9CEED}"/>
               </a:ext>
             </a:extLst>
           </p:cNvPr>
@@ -3720,7 +3720,7 @@
           <p:cNvPr id="13" name="practice-connector-1">
             <a:extLst xmlns:a="http://schemas.openxmlformats.org/drawingml/2006/main">
               <a:ext uri="{FF2B5EF4-FFF2-40B4-BE49-F238E27FC236}">
-                <a16:creationId xmlns:a16="http://schemas.microsoft.com/office/drawing/2014/main" id="{4C0D0C18-352F-4E41-A3F8-D2F247C9F6A9}"/>
+                <a16:creationId xmlns:a16="http://schemas.microsoft.com/office/drawing/2014/main" id="{B89B7DBD-85D3-499B-B80C-6858FCD43CD3}"/>
               </a:ext>
             </a:extLst>
           </p:cNvPr>
@@ -3751,7 +3751,7 @@
           <p:cNvPr id="14" name="practice-circle-2">
             <a:extLst xmlns:a="http://schemas.openxmlformats.org/drawingml/2006/main">
               <a:ext uri="{FF2B5EF4-FFF2-40B4-BE49-F238E27FC236}">
-                <a16:creationId xmlns:a16="http://schemas.microsoft.com/office/drawing/2014/main" id="{EFFF3CA4-1C88-4BCB-A11D-A0D9A0196762}"/>
+                <a16:creationId xmlns:a16="http://schemas.microsoft.com/office/drawing/2014/main" id="{5B8FD90B-3391-4B13-BF2A-D0B1BFC35C04}"/>
               </a:ext>
             </a:extLst>
           </p:cNvPr>
@@ -3784,7 +3784,7 @@
           <p:cNvPr id="15" name="practice-number-2">
             <a:extLst xmlns:a="http://schemas.openxmlformats.org/drawingml/2006/main">
               <a:ext uri="{FF2B5EF4-FFF2-40B4-BE49-F238E27FC236}">
-                <a16:creationId xmlns:a16="http://schemas.microsoft.com/office/drawing/2014/main" id="{29A51D32-3EE4-4BC9-ABFA-A9DBB92A608D}"/>
+                <a16:creationId xmlns:a16="http://schemas.microsoft.com/office/drawing/2014/main" id="{422E948F-7FFA-40A5-895D-B50818008575}"/>
               </a:ext>
             </a:extLst>
           </p:cNvPr>
@@ -3842,7 +3842,7 @@
           <p:cNvPr id="16" name="practice-item-2">
             <a:extLst xmlns:a="http://schemas.openxmlformats.org/drawingml/2006/main">
               <a:ext uri="{FF2B5EF4-FFF2-40B4-BE49-F238E27FC236}">
-                <a16:creationId xmlns:a16="http://schemas.microsoft.com/office/drawing/2014/main" id="{CD16567A-C1FA-4229-9EC3-15E12C2AEA3F}"/>
+                <a16:creationId xmlns:a16="http://schemas.microsoft.com/office/drawing/2014/main" id="{F1EFE48A-C52D-4CD2-BEE2-5416408E9F30}"/>
               </a:ext>
             </a:extLst>
           </p:cNvPr>
@@ -3904,7 +3904,7 @@
     </p:spTree>
     <p:extLst>
       <p:ext uri="{BB962C8B-B14F-4D97-AF65-F5344CB8AC3E}">
-        <p14:creationId xmlns:p14="http://schemas.microsoft.com/office/powerpoint/2010/main" val="2107189576"/>
+        <p14:creationId xmlns:p14="http://schemas.microsoft.com/office/powerpoint/2010/main" val="775715394"/>
       </p:ext>
     </p:extLst>
   </p:cSld>
@@ -3935,7 +3935,7 @@
           <p:cNvPr id="1" name="s12-rule">
             <a:extLst xmlns:a="http://schemas.openxmlformats.org/drawingml/2006/main">
               <a:ext uri="{FF2B5EF4-FFF2-40B4-BE49-F238E27FC236}">
-                <a16:creationId xmlns:a16="http://schemas.microsoft.com/office/drawing/2014/main" id="{73589553-0C29-4AE3-8C7E-3EAA0826E0AC}"/>
+                <a16:creationId xmlns:a16="http://schemas.microsoft.com/office/drawing/2014/main" id="{A4F59058-386F-4AEB-B53A-32D89BBA2024}"/>
               </a:ext>
             </a:extLst>
           </p:cNvPr>
@@ -3968,7 +3968,7 @@
           <p:cNvPr id="2" name="s12-eyebrow">
             <a:extLst xmlns:a="http://schemas.openxmlformats.org/drawingml/2006/main">
               <a:ext uri="{FF2B5EF4-FFF2-40B4-BE49-F238E27FC236}">
-                <a16:creationId xmlns:a16="http://schemas.microsoft.com/office/drawing/2014/main" id="{D454657B-5A20-44E8-99F2-AC94833F5E77}"/>
+                <a16:creationId xmlns:a16="http://schemas.microsoft.com/office/drawing/2014/main" id="{86EB7598-CC8B-4748-8F7D-486BE83D9EF3}"/>
               </a:ext>
             </a:extLst>
           </p:cNvPr>
@@ -4026,7 +4026,7 @@
           <p:cNvPr id="3" name="s12-title">
             <a:extLst xmlns:a="http://schemas.openxmlformats.org/drawingml/2006/main">
               <a:ext uri="{FF2B5EF4-FFF2-40B4-BE49-F238E27FC236}">
-                <a16:creationId xmlns:a16="http://schemas.microsoft.com/office/drawing/2014/main" id="{410780D3-26AC-4C99-BE34-5668EE883AE7}"/>
+                <a16:creationId xmlns:a16="http://schemas.microsoft.com/office/drawing/2014/main" id="{BC200E60-B8D1-4F5C-807E-D6D7C855A544}"/>
               </a:ext>
             </a:extLst>
           </p:cNvPr>
@@ -4084,7 +4084,7 @@
           <p:cNvPr id="4" name="s12-footer">
             <a:extLst xmlns:a="http://schemas.openxmlformats.org/drawingml/2006/main">
               <a:ext uri="{FF2B5EF4-FFF2-40B4-BE49-F238E27FC236}">
-                <a16:creationId xmlns:a16="http://schemas.microsoft.com/office/drawing/2014/main" id="{A80D28D6-DB14-48BC-893E-2C6D958F35B9}"/>
+                <a16:creationId xmlns:a16="http://schemas.microsoft.com/office/drawing/2014/main" id="{18E0C0B7-0946-46B5-A758-C316CEE31A18}"/>
               </a:ext>
             </a:extLst>
           </p:cNvPr>
@@ -4115,7 +4115,7 @@
           <p:cNvPr id="5" name="s12-identity">
             <a:extLst xmlns:a="http://schemas.openxmlformats.org/drawingml/2006/main">
               <a:ext uri="{FF2B5EF4-FFF2-40B4-BE49-F238E27FC236}">
-                <a16:creationId xmlns:a16="http://schemas.microsoft.com/office/drawing/2014/main" id="{A2419EE0-06F5-49A1-AE2D-631DCAFD13A9}"/>
+                <a16:creationId xmlns:a16="http://schemas.microsoft.com/office/drawing/2014/main" id="{5EA040EF-38B0-4A60-A786-EC1BEEE165B3}"/>
               </a:ext>
             </a:extLst>
           </p:cNvPr>
@@ -4173,7 +4173,7 @@
           <p:cNvPr id="6" name="recap-circle-0">
             <a:extLst xmlns:a="http://schemas.openxmlformats.org/drawingml/2006/main">
               <a:ext uri="{FF2B5EF4-FFF2-40B4-BE49-F238E27FC236}">
-                <a16:creationId xmlns:a16="http://schemas.microsoft.com/office/drawing/2014/main" id="{8EA16BD0-6566-4A3E-93CD-EB39F8359B9F}"/>
+                <a16:creationId xmlns:a16="http://schemas.microsoft.com/office/drawing/2014/main" id="{A71799CD-5D34-4B26-9694-350FD48C87FF}"/>
               </a:ext>
             </a:extLst>
           </p:cNvPr>
@@ -4206,7 +4206,7 @@
           <p:cNvPr id="7" name="recap-number-0">
             <a:extLst xmlns:a="http://schemas.openxmlformats.org/drawingml/2006/main">
               <a:ext uri="{FF2B5EF4-FFF2-40B4-BE49-F238E27FC236}">
-                <a16:creationId xmlns:a16="http://schemas.microsoft.com/office/drawing/2014/main" id="{0AD2E242-9CE6-45B8-B4A9-2FBF9C99A796}"/>
+                <a16:creationId xmlns:a16="http://schemas.microsoft.com/office/drawing/2014/main" id="{4A84A724-28E2-47C0-8194-632DD5E8176F}"/>
               </a:ext>
             </a:extLst>
           </p:cNvPr>
@@ -4264,7 +4264,7 @@
           <p:cNvPr id="8" name="recap-item-0">
             <a:extLst xmlns:a="http://schemas.openxmlformats.org/drawingml/2006/main">
               <a:ext uri="{FF2B5EF4-FFF2-40B4-BE49-F238E27FC236}">
-                <a16:creationId xmlns:a16="http://schemas.microsoft.com/office/drawing/2014/main" id="{0DA73DA2-724B-488E-8510-C0ADDED457EF}"/>
+                <a16:creationId xmlns:a16="http://schemas.microsoft.com/office/drawing/2014/main" id="{D8897EE4-D638-4CDF-8DF4-124C35D78CA9}"/>
               </a:ext>
             </a:extLst>
           </p:cNvPr>
@@ -4328,7 +4328,7 @@
           <p:cNvPr id="9" name="recap-connector-0">
             <a:extLst xmlns:a="http://schemas.openxmlformats.org/drawingml/2006/main">
               <a:ext uri="{FF2B5EF4-FFF2-40B4-BE49-F238E27FC236}">
-                <a16:creationId xmlns:a16="http://schemas.microsoft.com/office/drawing/2014/main" id="{E5A8D532-F282-41DC-AAF7-F801DECB1A3D}"/>
+                <a16:creationId xmlns:a16="http://schemas.microsoft.com/office/drawing/2014/main" id="{9AA4C22B-A00C-44EF-B94E-246E8819E3C8}"/>
               </a:ext>
             </a:extLst>
           </p:cNvPr>
@@ -4359,7 +4359,7 @@
           <p:cNvPr id="10" name="recap-circle-1">
             <a:extLst xmlns:a="http://schemas.openxmlformats.org/drawingml/2006/main">
               <a:ext uri="{FF2B5EF4-FFF2-40B4-BE49-F238E27FC236}">
-                <a16:creationId xmlns:a16="http://schemas.microsoft.com/office/drawing/2014/main" id="{C87D591E-85C2-4AB6-A44F-FE4F5DEC75A3}"/>
+                <a16:creationId xmlns:a16="http://schemas.microsoft.com/office/drawing/2014/main" id="{65B64094-085A-45CF-B048-F1CC6AE8B9E9}"/>
               </a:ext>
             </a:extLst>
           </p:cNvPr>
@@ -4392,7 +4392,7 @@
           <p:cNvPr id="11" name="recap-number-1">
             <a:extLst xmlns:a="http://schemas.openxmlformats.org/drawingml/2006/main">
               <a:ext uri="{FF2B5EF4-FFF2-40B4-BE49-F238E27FC236}">
-                <a16:creationId xmlns:a16="http://schemas.microsoft.com/office/drawing/2014/main" id="{6E740936-2349-45B8-9F58-4794E83516F5}"/>
+                <a16:creationId xmlns:a16="http://schemas.microsoft.com/office/drawing/2014/main" id="{3242834A-230D-44D9-82BF-D238BA3DB43A}"/>
               </a:ext>
             </a:extLst>
           </p:cNvPr>
@@ -4450,7 +4450,7 @@
           <p:cNvPr id="12" name="recap-item-1">
             <a:extLst xmlns:a="http://schemas.openxmlformats.org/drawingml/2006/main">
               <a:ext uri="{FF2B5EF4-FFF2-40B4-BE49-F238E27FC236}">
-                <a16:creationId xmlns:a16="http://schemas.microsoft.com/office/drawing/2014/main" id="{AAD0CF4B-481C-4A1B-9EB0-90A76E1CC219}"/>
+                <a16:creationId xmlns:a16="http://schemas.microsoft.com/office/drawing/2014/main" id="{DFCE2ADE-EB5C-4E08-B6EE-C362E641EF04}"/>
               </a:ext>
             </a:extLst>
           </p:cNvPr>
@@ -4514,7 +4514,7 @@
           <p:cNvPr id="13" name="recap-connector-1">
             <a:extLst xmlns:a="http://schemas.openxmlformats.org/drawingml/2006/main">
               <a:ext uri="{FF2B5EF4-FFF2-40B4-BE49-F238E27FC236}">
-                <a16:creationId xmlns:a16="http://schemas.microsoft.com/office/drawing/2014/main" id="{0EE0B3FD-2B7E-4F4B-B1A9-E339A1FC7E37}"/>
+                <a16:creationId xmlns:a16="http://schemas.microsoft.com/office/drawing/2014/main" id="{D67FEA9B-BD9E-4FDA-AB4A-D5123E73D445}"/>
               </a:ext>
             </a:extLst>
           </p:cNvPr>
@@ -4545,7 +4545,7 @@
           <p:cNvPr id="14" name="recap-circle-2">
             <a:extLst xmlns:a="http://schemas.openxmlformats.org/drawingml/2006/main">
               <a:ext uri="{FF2B5EF4-FFF2-40B4-BE49-F238E27FC236}">
-                <a16:creationId xmlns:a16="http://schemas.microsoft.com/office/drawing/2014/main" id="{02E73BA6-3E52-4E60-901F-E3AC8617834F}"/>
+                <a16:creationId xmlns:a16="http://schemas.microsoft.com/office/drawing/2014/main" id="{540B0A09-A8CB-49E5-AF56-4B9A21B37232}"/>
               </a:ext>
             </a:extLst>
           </p:cNvPr>
@@ -4578,7 +4578,7 @@
           <p:cNvPr id="15" name="recap-number-2">
             <a:extLst xmlns:a="http://schemas.openxmlformats.org/drawingml/2006/main">
               <a:ext uri="{FF2B5EF4-FFF2-40B4-BE49-F238E27FC236}">
-                <a16:creationId xmlns:a16="http://schemas.microsoft.com/office/drawing/2014/main" id="{79C5A8E8-F5B1-431D-889B-5D84D585B3D9}"/>
+                <a16:creationId xmlns:a16="http://schemas.microsoft.com/office/drawing/2014/main" id="{AA068A85-4119-44EE-97F6-305D8A859E98}"/>
               </a:ext>
             </a:extLst>
           </p:cNvPr>
@@ -4636,7 +4636,7 @@
           <p:cNvPr id="16" name="recap-item-2">
             <a:extLst xmlns:a="http://schemas.openxmlformats.org/drawingml/2006/main">
               <a:ext uri="{FF2B5EF4-FFF2-40B4-BE49-F238E27FC236}">
-                <a16:creationId xmlns:a16="http://schemas.microsoft.com/office/drawing/2014/main" id="{D242B9B0-DCAB-4FAD-A63E-9AAB419D2BF4}"/>
+                <a16:creationId xmlns:a16="http://schemas.microsoft.com/office/drawing/2014/main" id="{695FEF5F-AEA1-4CD7-BA87-DFFDC9117DA0}"/>
               </a:ext>
             </a:extLst>
           </p:cNvPr>
@@ -4698,7 +4698,7 @@
     </p:spTree>
     <p:extLst>
       <p:ext uri="{BB962C8B-B14F-4D97-AF65-F5344CB8AC3E}">
-        <p14:creationId xmlns:p14="http://schemas.microsoft.com/office/powerpoint/2010/main" val="157049385"/>
+        <p14:creationId xmlns:p14="http://schemas.microsoft.com/office/powerpoint/2010/main" val="1426970270"/>
       </p:ext>
     </p:extLst>
   </p:cSld>
@@ -4729,7 +4729,7 @@
           <p:cNvPr id="1" name="s13-rule">
             <a:extLst xmlns:a="http://schemas.openxmlformats.org/drawingml/2006/main">
               <a:ext uri="{FF2B5EF4-FFF2-40B4-BE49-F238E27FC236}">
-                <a16:creationId xmlns:a16="http://schemas.microsoft.com/office/drawing/2014/main" id="{CB1068A1-5244-4EFC-863E-B29DCA13F599}"/>
+                <a16:creationId xmlns:a16="http://schemas.microsoft.com/office/drawing/2014/main" id="{8F36E76C-83EB-4592-87F4-1D5EF087A61C}"/>
               </a:ext>
             </a:extLst>
           </p:cNvPr>
@@ -4762,7 +4762,7 @@
           <p:cNvPr id="2" name="s13-eyebrow">
             <a:extLst xmlns:a="http://schemas.openxmlformats.org/drawingml/2006/main">
               <a:ext uri="{FF2B5EF4-FFF2-40B4-BE49-F238E27FC236}">
-                <a16:creationId xmlns:a16="http://schemas.microsoft.com/office/drawing/2014/main" id="{376BF3D4-A0A2-415F-AE7A-AEB9A5F7FFAE}"/>
+                <a16:creationId xmlns:a16="http://schemas.microsoft.com/office/drawing/2014/main" id="{E4AB30A7-07BB-44A2-8F11-A370D07A1D5B}"/>
               </a:ext>
             </a:extLst>
           </p:cNvPr>
@@ -4820,7 +4820,7 @@
           <p:cNvPr id="3" name="s13-title">
             <a:extLst xmlns:a="http://schemas.openxmlformats.org/drawingml/2006/main">
               <a:ext uri="{FF2B5EF4-FFF2-40B4-BE49-F238E27FC236}">
-                <a16:creationId xmlns:a16="http://schemas.microsoft.com/office/drawing/2014/main" id="{22996CCA-0739-41D4-945C-1FDC22F5FA98}"/>
+                <a16:creationId xmlns:a16="http://schemas.microsoft.com/office/drawing/2014/main" id="{20B1BEBC-1C6A-4593-999A-5DADE31BC374}"/>
               </a:ext>
             </a:extLst>
           </p:cNvPr>
@@ -4878,7 +4878,7 @@
           <p:cNvPr id="4" name="s13-footer">
             <a:extLst xmlns:a="http://schemas.openxmlformats.org/drawingml/2006/main">
               <a:ext uri="{FF2B5EF4-FFF2-40B4-BE49-F238E27FC236}">
-                <a16:creationId xmlns:a16="http://schemas.microsoft.com/office/drawing/2014/main" id="{5D1BBA8E-A05E-4AEE-9FB1-6797C1DF88A2}"/>
+                <a16:creationId xmlns:a16="http://schemas.microsoft.com/office/drawing/2014/main" id="{E0A596C9-67FB-4D3B-8EC7-4D8D512F56A4}"/>
               </a:ext>
             </a:extLst>
           </p:cNvPr>
@@ -4909,7 +4909,7 @@
           <p:cNvPr id="5" name="s13-identity">
             <a:extLst xmlns:a="http://schemas.openxmlformats.org/drawingml/2006/main">
               <a:ext uri="{FF2B5EF4-FFF2-40B4-BE49-F238E27FC236}">
-                <a16:creationId xmlns:a16="http://schemas.microsoft.com/office/drawing/2014/main" id="{B70CF714-A1FF-4342-9152-257BEC458CB9}"/>
+                <a16:creationId xmlns:a16="http://schemas.microsoft.com/office/drawing/2014/main" id="{2F1BFC15-A64D-4601-939D-F0C517752714}"/>
               </a:ext>
             </a:extLst>
           </p:cNvPr>
@@ -4967,7 +4967,7 @@
           <p:cNvPr id="6" name="source-0">
             <a:extLst xmlns:a="http://schemas.openxmlformats.org/drawingml/2006/main">
               <a:ext uri="{FF2B5EF4-FFF2-40B4-BE49-F238E27FC236}">
-                <a16:creationId xmlns:a16="http://schemas.microsoft.com/office/drawing/2014/main" id="{2F246205-F447-420B-98C6-F20AFDABFBDC}"/>
+                <a16:creationId xmlns:a16="http://schemas.microsoft.com/office/drawing/2014/main" id="{A76B5ABD-0141-4C86-96F5-083C15253384}"/>
               </a:ext>
             </a:extLst>
           </p:cNvPr>
@@ -5031,7 +5031,7 @@
           <p:cNvPr id="7" name="source-1">
             <a:extLst xmlns:a="http://schemas.openxmlformats.org/drawingml/2006/main">
               <a:ext uri="{FF2B5EF4-FFF2-40B4-BE49-F238E27FC236}">
-                <a16:creationId xmlns:a16="http://schemas.microsoft.com/office/drawing/2014/main" id="{3032DF3B-2FCD-4ECE-B2AF-9671D6FEDEA9}"/>
+                <a16:creationId xmlns:a16="http://schemas.microsoft.com/office/drawing/2014/main" id="{FF649A7A-75A7-443F-AD40-E5417F5EF77F}"/>
               </a:ext>
             </a:extLst>
           </p:cNvPr>
@@ -5095,7 +5095,7 @@
           <p:cNvPr id="8" name="source-2">
             <a:extLst xmlns:a="http://schemas.openxmlformats.org/drawingml/2006/main">
               <a:ext uri="{FF2B5EF4-FFF2-40B4-BE49-F238E27FC236}">
-                <a16:creationId xmlns:a16="http://schemas.microsoft.com/office/drawing/2014/main" id="{365E7616-1001-460E-B054-A089DB6EF89C}"/>
+                <a16:creationId xmlns:a16="http://schemas.microsoft.com/office/drawing/2014/main" id="{98F0664F-6E70-4F78-894C-F43EB37B4BCE}"/>
               </a:ext>
             </a:extLst>
           </p:cNvPr>
@@ -5159,7 +5159,7 @@
           <p:cNvPr id="9" name="source-3">
             <a:extLst xmlns:a="http://schemas.openxmlformats.org/drawingml/2006/main">
               <a:ext uri="{FF2B5EF4-FFF2-40B4-BE49-F238E27FC236}">
-                <a16:creationId xmlns:a16="http://schemas.microsoft.com/office/drawing/2014/main" id="{113AA22B-97CC-4665-9DA0-F596EFFC7598}"/>
+                <a16:creationId xmlns:a16="http://schemas.microsoft.com/office/drawing/2014/main" id="{A0073DBF-4C96-47A8-A3F7-939A14E7F546}"/>
               </a:ext>
             </a:extLst>
           </p:cNvPr>
@@ -5223,7 +5223,7 @@
           <p:cNvPr id="10" name="source-4">
             <a:extLst xmlns:a="http://schemas.openxmlformats.org/drawingml/2006/main">
               <a:ext uri="{FF2B5EF4-FFF2-40B4-BE49-F238E27FC236}">
-                <a16:creationId xmlns:a16="http://schemas.microsoft.com/office/drawing/2014/main" id="{0E0CF988-BF04-4D4F-9AFA-30E9826460A9}"/>
+                <a16:creationId xmlns:a16="http://schemas.microsoft.com/office/drawing/2014/main" id="{33E62BF1-8EE1-4798-AFE5-1EE0495F3060}"/>
               </a:ext>
             </a:extLst>
           </p:cNvPr>
@@ -5287,7 +5287,7 @@
           <p:cNvPr id="11" name="s13-takeaway-rule">
             <a:extLst xmlns:a="http://schemas.openxmlformats.org/drawingml/2006/main">
               <a:ext uri="{FF2B5EF4-FFF2-40B4-BE49-F238E27FC236}">
-                <a16:creationId xmlns:a16="http://schemas.microsoft.com/office/drawing/2014/main" id="{1BC4F100-101B-4286-8818-7D7DC59DBFB9}"/>
+                <a16:creationId xmlns:a16="http://schemas.microsoft.com/office/drawing/2014/main" id="{7FA07220-5811-4AE8-A394-C3BF76664095}"/>
               </a:ext>
             </a:extLst>
           </p:cNvPr>
@@ -5320,7 +5320,7 @@
           <p:cNvPr id="12" name="s13-takeaway">
             <a:extLst xmlns:a="http://schemas.openxmlformats.org/drawingml/2006/main">
               <a:ext uri="{FF2B5EF4-FFF2-40B4-BE49-F238E27FC236}">
-                <a16:creationId xmlns:a16="http://schemas.microsoft.com/office/drawing/2014/main" id="{D6DA61DD-ADE7-42B8-A52F-8CD91C6AD81A}"/>
+                <a16:creationId xmlns:a16="http://schemas.microsoft.com/office/drawing/2014/main" id="{7D3D5D53-E066-40D5-8350-A3FA873F84BD}"/>
               </a:ext>
             </a:extLst>
           </p:cNvPr>
@@ -5345,7 +5345,7 @@
         </p:spPr>
         <p:txBody>
           <a:bodyPr xmlns:a="http://schemas.openxmlformats.org/drawingml/2006/main" lIns="0" tIns="0" rIns="0" bIns="0" anchor="ctr">
-            <a:normAutofit fontScale="95911"/>
+            <a:normAutofit fontScale="100000"/>
           </a:bodyPr>
           <a:lstStyle xmlns:a="http://schemas.openxmlformats.org/drawingml/2006/main"/>
           <a:p xmlns:a="http://schemas.openxmlformats.org/drawingml/2006/main">
@@ -5368,7 +5368,7 @@
                 <a:ea typeface="PingFang SC"/>
                 <a:cs typeface="PingFang SC"/>
               </a:rPr>
-              <a:t>课程精编页用于讲授主线；播放器中的“原课件”模式保留团队 PowerPoint 精选页、真实图片和可播放视频。</a:t>
+              <a:t>课程正文与幻灯片共享同一知识主线，图片和视频用于帮助理解本节概念与案例。</a:t>
             </a:r>
           </a:p>
         </p:txBody>
@@ -5376,7 +5376,7 @@
     </p:spTree>
     <p:extLst>
       <p:ext uri="{BB962C8B-B14F-4D97-AF65-F5344CB8AC3E}">
-        <p14:creationId xmlns:p14="http://schemas.microsoft.com/office/powerpoint/2010/main" val="760921154"/>
+        <p14:creationId xmlns:p14="http://schemas.microsoft.com/office/powerpoint/2010/main" val="2106191916"/>
       </p:ext>
     </p:extLst>
   </p:cSld>
@@ -5407,7 +5407,7 @@
           <p:cNvPr id="1" name="s2-rule">
             <a:extLst xmlns:a="http://schemas.openxmlformats.org/drawingml/2006/main">
               <a:ext uri="{FF2B5EF4-FFF2-40B4-BE49-F238E27FC236}">
-                <a16:creationId xmlns:a16="http://schemas.microsoft.com/office/drawing/2014/main" id="{6A95903E-CF3F-4886-B136-53B77EF8197A}"/>
+                <a16:creationId xmlns:a16="http://schemas.microsoft.com/office/drawing/2014/main" id="{D9352988-75C3-470B-9ABB-E4F38B9F1192}"/>
               </a:ext>
             </a:extLst>
           </p:cNvPr>
@@ -5440,7 +5440,7 @@
           <p:cNvPr id="2" name="s2-eyebrow">
             <a:extLst xmlns:a="http://schemas.openxmlformats.org/drawingml/2006/main">
               <a:ext uri="{FF2B5EF4-FFF2-40B4-BE49-F238E27FC236}">
-                <a16:creationId xmlns:a16="http://schemas.microsoft.com/office/drawing/2014/main" id="{F53BAA81-BD2C-45A0-9C82-0A9058351C75}"/>
+                <a16:creationId xmlns:a16="http://schemas.microsoft.com/office/drawing/2014/main" id="{1D61D534-423C-4456-BED7-FA1BC11CE351}"/>
               </a:ext>
             </a:extLst>
           </p:cNvPr>
@@ -5498,7 +5498,7 @@
           <p:cNvPr id="3" name="s2-title">
             <a:extLst xmlns:a="http://schemas.openxmlformats.org/drawingml/2006/main">
               <a:ext uri="{FF2B5EF4-FFF2-40B4-BE49-F238E27FC236}">
-                <a16:creationId xmlns:a16="http://schemas.microsoft.com/office/drawing/2014/main" id="{D1FA23E4-6D97-4B95-A186-D1817E9A8CC4}"/>
+                <a16:creationId xmlns:a16="http://schemas.microsoft.com/office/drawing/2014/main" id="{48301529-DA34-43EB-8DF9-332A66E3C84A}"/>
               </a:ext>
             </a:extLst>
           </p:cNvPr>
@@ -5556,7 +5556,7 @@
           <p:cNvPr id="4" name="s2-footer">
             <a:extLst xmlns:a="http://schemas.openxmlformats.org/drawingml/2006/main">
               <a:ext uri="{FF2B5EF4-FFF2-40B4-BE49-F238E27FC236}">
-                <a16:creationId xmlns:a16="http://schemas.microsoft.com/office/drawing/2014/main" id="{F512852F-909F-43A0-B313-9FC1B583F10F}"/>
+                <a16:creationId xmlns:a16="http://schemas.microsoft.com/office/drawing/2014/main" id="{166C79D1-4CE6-4468-A5F3-D7EB1570E00B}"/>
               </a:ext>
             </a:extLst>
           </p:cNvPr>
@@ -5587,7 +5587,7 @@
           <p:cNvPr id="5" name="s2-identity">
             <a:extLst xmlns:a="http://schemas.openxmlformats.org/drawingml/2006/main">
               <a:ext uri="{FF2B5EF4-FFF2-40B4-BE49-F238E27FC236}">
-                <a16:creationId xmlns:a16="http://schemas.microsoft.com/office/drawing/2014/main" id="{31EC85F6-A716-404A-8026-674A1F316CE8}"/>
+                <a16:creationId xmlns:a16="http://schemas.microsoft.com/office/drawing/2014/main" id="{04D3C105-D5F8-4F77-B4A2-58F49E3F9EDD}"/>
               </a:ext>
             </a:extLst>
           </p:cNvPr>
@@ -5645,7 +5645,7 @@
           <p:cNvPr id="6" name="objective-1">
             <a:extLst xmlns:a="http://schemas.openxmlformats.org/drawingml/2006/main">
               <a:ext uri="{FF2B5EF4-FFF2-40B4-BE49-F238E27FC236}">
-                <a16:creationId xmlns:a16="http://schemas.microsoft.com/office/drawing/2014/main" id="{26535EB5-B8EE-4874-9DD8-098E4B6D5035}"/>
+                <a16:creationId xmlns:a16="http://schemas.microsoft.com/office/drawing/2014/main" id="{AB2F1D80-C52C-4DD4-881C-A46A850A4232}"/>
               </a:ext>
             </a:extLst>
           </p:cNvPr>
@@ -5732,7 +5732,7 @@
           <p:cNvPr id="7" name="objective-2">
             <a:extLst xmlns:a="http://schemas.openxmlformats.org/drawingml/2006/main">
               <a:ext uri="{FF2B5EF4-FFF2-40B4-BE49-F238E27FC236}">
-                <a16:creationId xmlns:a16="http://schemas.microsoft.com/office/drawing/2014/main" id="{288A0625-D37B-476D-B8FF-D0ECCEDA4D6A}"/>
+                <a16:creationId xmlns:a16="http://schemas.microsoft.com/office/drawing/2014/main" id="{484B4F14-B815-427F-9004-F65CBE51EBF3}"/>
               </a:ext>
             </a:extLst>
           </p:cNvPr>
@@ -5819,7 +5819,7 @@
           <p:cNvPr id="8" name="objective-3">
             <a:extLst xmlns:a="http://schemas.openxmlformats.org/drawingml/2006/main">
               <a:ext uri="{FF2B5EF4-FFF2-40B4-BE49-F238E27FC236}">
-                <a16:creationId xmlns:a16="http://schemas.microsoft.com/office/drawing/2014/main" id="{5F07CE7B-FFB9-4E2D-B002-0B32CDD752F0}"/>
+                <a16:creationId xmlns:a16="http://schemas.microsoft.com/office/drawing/2014/main" id="{2B810D0F-C4AF-4B0D-B3F9-D4C6F0CBEA08}"/>
               </a:ext>
             </a:extLst>
           </p:cNvPr>
@@ -5906,7 +5906,7 @@
           <p:cNvPr id="9" name="objective-4">
             <a:extLst xmlns:a="http://schemas.openxmlformats.org/drawingml/2006/main">
               <a:ext uri="{FF2B5EF4-FFF2-40B4-BE49-F238E27FC236}">
-                <a16:creationId xmlns:a16="http://schemas.microsoft.com/office/drawing/2014/main" id="{9E9572DB-1265-4115-A3CA-1ACF4CAAF44E}"/>
+                <a16:creationId xmlns:a16="http://schemas.microsoft.com/office/drawing/2014/main" id="{73A0C2CA-B316-4209-93E7-79F769B25731}"/>
               </a:ext>
             </a:extLst>
           </p:cNvPr>
@@ -5991,7 +5991,7 @@
     </p:spTree>
     <p:extLst>
       <p:ext uri="{BB962C8B-B14F-4D97-AF65-F5344CB8AC3E}">
-        <p14:creationId xmlns:p14="http://schemas.microsoft.com/office/powerpoint/2010/main" val="879997924"/>
+        <p14:creationId xmlns:p14="http://schemas.microsoft.com/office/powerpoint/2010/main" val="1824914610"/>
       </p:ext>
     </p:extLst>
   </p:cSld>
@@ -6022,7 +6022,7 @@
           <p:cNvPr id="1" name="s3-rule">
             <a:extLst xmlns:a="http://schemas.openxmlformats.org/drawingml/2006/main">
               <a:ext uri="{FF2B5EF4-FFF2-40B4-BE49-F238E27FC236}">
-                <a16:creationId xmlns:a16="http://schemas.microsoft.com/office/drawing/2014/main" id="{CB5FB75C-E831-4BF6-91AA-18FDCE749F0C}"/>
+                <a16:creationId xmlns:a16="http://schemas.microsoft.com/office/drawing/2014/main" id="{B72C487A-1D13-43E6-9FFC-1D6354F278F1}"/>
               </a:ext>
             </a:extLst>
           </p:cNvPr>
@@ -6055,7 +6055,7 @@
           <p:cNvPr id="2" name="s3-eyebrow">
             <a:extLst xmlns:a="http://schemas.openxmlformats.org/drawingml/2006/main">
               <a:ext uri="{FF2B5EF4-FFF2-40B4-BE49-F238E27FC236}">
-                <a16:creationId xmlns:a16="http://schemas.microsoft.com/office/drawing/2014/main" id="{BE89566C-F46F-4FA8-A670-382FB07B55F3}"/>
+                <a16:creationId xmlns:a16="http://schemas.microsoft.com/office/drawing/2014/main" id="{22C976E5-E331-4FF3-8918-11C06749C3C7}"/>
               </a:ext>
             </a:extLst>
           </p:cNvPr>
@@ -6113,7 +6113,7 @@
           <p:cNvPr id="3" name="s3-title">
             <a:extLst xmlns:a="http://schemas.openxmlformats.org/drawingml/2006/main">
               <a:ext uri="{FF2B5EF4-FFF2-40B4-BE49-F238E27FC236}">
-                <a16:creationId xmlns:a16="http://schemas.microsoft.com/office/drawing/2014/main" id="{10E9FF07-310E-4B4F-B2E8-D7FBF8C52FFB}"/>
+                <a16:creationId xmlns:a16="http://schemas.microsoft.com/office/drawing/2014/main" id="{F18874D1-557E-4042-A858-4ABA9E97B113}"/>
               </a:ext>
             </a:extLst>
           </p:cNvPr>
@@ -6171,7 +6171,7 @@
           <p:cNvPr id="4" name="s3-footer">
             <a:extLst xmlns:a="http://schemas.openxmlformats.org/drawingml/2006/main">
               <a:ext uri="{FF2B5EF4-FFF2-40B4-BE49-F238E27FC236}">
-                <a16:creationId xmlns:a16="http://schemas.microsoft.com/office/drawing/2014/main" id="{6439D88F-9ED6-4EED-B2DF-093415AF160B}"/>
+                <a16:creationId xmlns:a16="http://schemas.microsoft.com/office/drawing/2014/main" id="{6EFDCF5B-AC1D-4A48-BAD2-56B756614C52}"/>
               </a:ext>
             </a:extLst>
           </p:cNvPr>
@@ -6202,7 +6202,7 @@
           <p:cNvPr id="5" name="s3-identity">
             <a:extLst xmlns:a="http://schemas.openxmlformats.org/drawingml/2006/main">
               <a:ext uri="{FF2B5EF4-FFF2-40B4-BE49-F238E27FC236}">
-                <a16:creationId xmlns:a16="http://schemas.microsoft.com/office/drawing/2014/main" id="{75F1C534-03E8-4068-BFDB-000434C76523}"/>
+                <a16:creationId xmlns:a16="http://schemas.microsoft.com/office/drawing/2014/main" id="{2699E4B4-7661-42EF-8603-19F49CC4AE38}"/>
               </a:ext>
             </a:extLst>
           </p:cNvPr>
@@ -6260,7 +6260,7 @@
           <p:cNvPr id="6" name="core-no-0">
             <a:extLst xmlns:a="http://schemas.openxmlformats.org/drawingml/2006/main">
               <a:ext uri="{FF2B5EF4-FFF2-40B4-BE49-F238E27FC236}">
-                <a16:creationId xmlns:a16="http://schemas.microsoft.com/office/drawing/2014/main" id="{78F7C225-F4E6-46BC-BC8D-5F907682C136}"/>
+                <a16:creationId xmlns:a16="http://schemas.microsoft.com/office/drawing/2014/main" id="{9A66BE18-412E-41E6-821B-310B1D653463}"/>
               </a:ext>
             </a:extLst>
           </p:cNvPr>
@@ -6318,7 +6318,7 @@
           <p:cNvPr id="7" name="core-label-0">
             <a:extLst xmlns:a="http://schemas.openxmlformats.org/drawingml/2006/main">
               <a:ext uri="{FF2B5EF4-FFF2-40B4-BE49-F238E27FC236}">
-                <a16:creationId xmlns:a16="http://schemas.microsoft.com/office/drawing/2014/main" id="{C85896EA-DC52-4CC3-932E-53DBDF0DC909}"/>
+                <a16:creationId xmlns:a16="http://schemas.microsoft.com/office/drawing/2014/main" id="{CBDF2AF2-8BD0-4CC3-AE62-1C73142732F9}"/>
               </a:ext>
             </a:extLst>
           </p:cNvPr>
@@ -6376,7 +6376,7 @@
           <p:cNvPr id="8" name="core-body-0">
             <a:extLst xmlns:a="http://schemas.openxmlformats.org/drawingml/2006/main">
               <a:ext uri="{FF2B5EF4-FFF2-40B4-BE49-F238E27FC236}">
-                <a16:creationId xmlns:a16="http://schemas.microsoft.com/office/drawing/2014/main" id="{47499122-4687-4756-97BB-B5A0A1E99B1B}"/>
+                <a16:creationId xmlns:a16="http://schemas.microsoft.com/office/drawing/2014/main" id="{57690119-8697-40A9-856A-0E0A23879D00}"/>
               </a:ext>
             </a:extLst>
           </p:cNvPr>
@@ -6440,7 +6440,7 @@
           <p:cNvPr id="9" name="core-no-1">
             <a:extLst xmlns:a="http://schemas.openxmlformats.org/drawingml/2006/main">
               <a:ext uri="{FF2B5EF4-FFF2-40B4-BE49-F238E27FC236}">
-                <a16:creationId xmlns:a16="http://schemas.microsoft.com/office/drawing/2014/main" id="{78BB3E22-2A60-4D81-B3D7-53DE63AB3963}"/>
+                <a16:creationId xmlns:a16="http://schemas.microsoft.com/office/drawing/2014/main" id="{BAE18228-D1DB-48EB-9FD1-F1CDDF559ADC}"/>
               </a:ext>
             </a:extLst>
           </p:cNvPr>
@@ -6498,7 +6498,7 @@
           <p:cNvPr id="10" name="core-body-1">
             <a:extLst xmlns:a="http://schemas.openxmlformats.org/drawingml/2006/main">
               <a:ext uri="{FF2B5EF4-FFF2-40B4-BE49-F238E27FC236}">
-                <a16:creationId xmlns:a16="http://schemas.microsoft.com/office/drawing/2014/main" id="{D4ECA574-6925-4AED-B5E4-B078BEE8D493}"/>
+                <a16:creationId xmlns:a16="http://schemas.microsoft.com/office/drawing/2014/main" id="{C268E046-8FEA-4612-9B9F-B9048B49D4F1}"/>
               </a:ext>
             </a:extLst>
           </p:cNvPr>
@@ -6562,7 +6562,7 @@
           <p:cNvPr id="11" name="core-no-2">
             <a:extLst xmlns:a="http://schemas.openxmlformats.org/drawingml/2006/main">
               <a:ext uri="{FF2B5EF4-FFF2-40B4-BE49-F238E27FC236}">
-                <a16:creationId xmlns:a16="http://schemas.microsoft.com/office/drawing/2014/main" id="{0648D0B2-AECB-4F73-BA5C-F2D56FD336D7}"/>
+                <a16:creationId xmlns:a16="http://schemas.microsoft.com/office/drawing/2014/main" id="{9EA9A036-3464-423F-9266-30660844158E}"/>
               </a:ext>
             </a:extLst>
           </p:cNvPr>
@@ -6620,7 +6620,7 @@
           <p:cNvPr id="12" name="core-body-2">
             <a:extLst xmlns:a="http://schemas.openxmlformats.org/drawingml/2006/main">
               <a:ext uri="{FF2B5EF4-FFF2-40B4-BE49-F238E27FC236}">
-                <a16:creationId xmlns:a16="http://schemas.microsoft.com/office/drawing/2014/main" id="{56F1C9B7-CE5B-4FA9-9C90-102BF8E9D0CB}"/>
+                <a16:creationId xmlns:a16="http://schemas.microsoft.com/office/drawing/2014/main" id="{4E2A7DD6-BF8B-4D80-AA75-30343381D644}"/>
               </a:ext>
             </a:extLst>
           </p:cNvPr>
@@ -6684,7 +6684,7 @@
           <p:cNvPr id="13" name="s3-takeaway-rule">
             <a:extLst xmlns:a="http://schemas.openxmlformats.org/drawingml/2006/main">
               <a:ext uri="{FF2B5EF4-FFF2-40B4-BE49-F238E27FC236}">
-                <a16:creationId xmlns:a16="http://schemas.microsoft.com/office/drawing/2014/main" id="{B96F3160-42F1-4606-A5AB-91C446F38EAE}"/>
+                <a16:creationId xmlns:a16="http://schemas.microsoft.com/office/drawing/2014/main" id="{E8E172DF-2C4C-465F-8D6C-52313904F910}"/>
               </a:ext>
             </a:extLst>
           </p:cNvPr>
@@ -6717,7 +6717,7 @@
           <p:cNvPr id="14" name="s3-takeaway">
             <a:extLst xmlns:a="http://schemas.openxmlformats.org/drawingml/2006/main">
               <a:ext uri="{FF2B5EF4-FFF2-40B4-BE49-F238E27FC236}">
-                <a16:creationId xmlns:a16="http://schemas.microsoft.com/office/drawing/2014/main" id="{5EB73960-A1AF-49FE-936D-C010DB0FA9FC}"/>
+                <a16:creationId xmlns:a16="http://schemas.microsoft.com/office/drawing/2014/main" id="{24FFC8B5-316B-4BC2-AEED-591FE47DBE84}"/>
               </a:ext>
             </a:extLst>
           </p:cNvPr>
@@ -6773,7 +6773,7 @@
     </p:spTree>
     <p:extLst>
       <p:ext uri="{BB962C8B-B14F-4D97-AF65-F5344CB8AC3E}">
-        <p14:creationId xmlns:p14="http://schemas.microsoft.com/office/powerpoint/2010/main" val="474168246"/>
+        <p14:creationId xmlns:p14="http://schemas.microsoft.com/office/powerpoint/2010/main" val="601922754"/>
       </p:ext>
     </p:extLst>
   </p:cSld>
@@ -6804,7 +6804,7 @@
           <p:cNvPr id="1" name="s4-rule">
             <a:extLst xmlns:a="http://schemas.openxmlformats.org/drawingml/2006/main">
               <a:ext uri="{FF2B5EF4-FFF2-40B4-BE49-F238E27FC236}">
-                <a16:creationId xmlns:a16="http://schemas.microsoft.com/office/drawing/2014/main" id="{4A6D9330-2F79-44E0-92B7-07B42591A213}"/>
+                <a16:creationId xmlns:a16="http://schemas.microsoft.com/office/drawing/2014/main" id="{832D179F-8BBD-4D44-86CA-096CAF0D85BB}"/>
               </a:ext>
             </a:extLst>
           </p:cNvPr>
@@ -6837,7 +6837,7 @@
           <p:cNvPr id="2" name="s4-eyebrow">
             <a:extLst xmlns:a="http://schemas.openxmlformats.org/drawingml/2006/main">
               <a:ext uri="{FF2B5EF4-FFF2-40B4-BE49-F238E27FC236}">
-                <a16:creationId xmlns:a16="http://schemas.microsoft.com/office/drawing/2014/main" id="{6A39CDAE-6504-41F7-8C8B-2FD5B3303F75}"/>
+                <a16:creationId xmlns:a16="http://schemas.microsoft.com/office/drawing/2014/main" id="{9576C2D3-13DC-49EB-BAAC-9AB8DBA04BAD}"/>
               </a:ext>
             </a:extLst>
           </p:cNvPr>
@@ -6895,7 +6895,7 @@
           <p:cNvPr id="3" name="s4-title">
             <a:extLst xmlns:a="http://schemas.openxmlformats.org/drawingml/2006/main">
               <a:ext uri="{FF2B5EF4-FFF2-40B4-BE49-F238E27FC236}">
-                <a16:creationId xmlns:a16="http://schemas.microsoft.com/office/drawing/2014/main" id="{269DC253-DD04-457F-B55C-4EBC0A7D7DCC}"/>
+                <a16:creationId xmlns:a16="http://schemas.microsoft.com/office/drawing/2014/main" id="{8ADFA706-4606-4139-AC24-A947E64B5DF6}"/>
               </a:ext>
             </a:extLst>
           </p:cNvPr>
@@ -6953,7 +6953,7 @@
           <p:cNvPr id="4" name="s4-footer">
             <a:extLst xmlns:a="http://schemas.openxmlformats.org/drawingml/2006/main">
               <a:ext uri="{FF2B5EF4-FFF2-40B4-BE49-F238E27FC236}">
-                <a16:creationId xmlns:a16="http://schemas.microsoft.com/office/drawing/2014/main" id="{3CF4F92F-DF6C-404E-BB83-84E56B4EC3FC}"/>
+                <a16:creationId xmlns:a16="http://schemas.microsoft.com/office/drawing/2014/main" id="{74C2AD00-A0A4-486C-816A-6DDE5D1CF072}"/>
               </a:ext>
             </a:extLst>
           </p:cNvPr>
@@ -6984,7 +6984,7 @@
           <p:cNvPr id="5" name="s4-identity">
             <a:extLst xmlns:a="http://schemas.openxmlformats.org/drawingml/2006/main">
               <a:ext uri="{FF2B5EF4-FFF2-40B4-BE49-F238E27FC236}">
-                <a16:creationId xmlns:a16="http://schemas.microsoft.com/office/drawing/2014/main" id="{0E5C9B42-678B-45BE-B234-E1F57AD8CE68}"/>
+                <a16:creationId xmlns:a16="http://schemas.microsoft.com/office/drawing/2014/main" id="{C6B27717-BE07-4EBC-BD4E-D3D4C3AEE1B9}"/>
               </a:ext>
             </a:extLst>
           </p:cNvPr>
@@ -7042,7 +7042,7 @@
           <p:cNvPr id="6" name="core-no-0">
             <a:extLst xmlns:a="http://schemas.openxmlformats.org/drawingml/2006/main">
               <a:ext uri="{FF2B5EF4-FFF2-40B4-BE49-F238E27FC236}">
-                <a16:creationId xmlns:a16="http://schemas.microsoft.com/office/drawing/2014/main" id="{E63D03F1-DE81-4836-9DB8-65BF05E680FE}"/>
+                <a16:creationId xmlns:a16="http://schemas.microsoft.com/office/drawing/2014/main" id="{66F2E733-3932-4513-9927-C1BE7A6B243C}"/>
               </a:ext>
             </a:extLst>
           </p:cNvPr>
@@ -7100,7 +7100,7 @@
           <p:cNvPr id="7" name="core-label-0">
             <a:extLst xmlns:a="http://schemas.openxmlformats.org/drawingml/2006/main">
               <a:ext uri="{FF2B5EF4-FFF2-40B4-BE49-F238E27FC236}">
-                <a16:creationId xmlns:a16="http://schemas.microsoft.com/office/drawing/2014/main" id="{22B3CFF1-DD0F-45E2-992F-F4254D2369B7}"/>
+                <a16:creationId xmlns:a16="http://schemas.microsoft.com/office/drawing/2014/main" id="{C951F6B3-561A-48CF-8B45-5DC38FE28C66}"/>
               </a:ext>
             </a:extLst>
           </p:cNvPr>
@@ -7158,7 +7158,7 @@
           <p:cNvPr id="8" name="core-body-0">
             <a:extLst xmlns:a="http://schemas.openxmlformats.org/drawingml/2006/main">
               <a:ext uri="{FF2B5EF4-FFF2-40B4-BE49-F238E27FC236}">
-                <a16:creationId xmlns:a16="http://schemas.microsoft.com/office/drawing/2014/main" id="{3D0E8345-3CE1-4425-B887-96FE982AED28}"/>
+                <a16:creationId xmlns:a16="http://schemas.microsoft.com/office/drawing/2014/main" id="{028C2584-406D-43D8-947D-5C7F4786B461}"/>
               </a:ext>
             </a:extLst>
           </p:cNvPr>
@@ -7222,7 +7222,7 @@
           <p:cNvPr id="9" name="core-no-1">
             <a:extLst xmlns:a="http://schemas.openxmlformats.org/drawingml/2006/main">
               <a:ext uri="{FF2B5EF4-FFF2-40B4-BE49-F238E27FC236}">
-                <a16:creationId xmlns:a16="http://schemas.microsoft.com/office/drawing/2014/main" id="{7E498B2F-A308-4397-8B82-B78D92C247DF}"/>
+                <a16:creationId xmlns:a16="http://schemas.microsoft.com/office/drawing/2014/main" id="{339C509D-77A2-4080-B052-54A7D4784DEB}"/>
               </a:ext>
             </a:extLst>
           </p:cNvPr>
@@ -7280,7 +7280,7 @@
           <p:cNvPr id="10" name="core-body-1">
             <a:extLst xmlns:a="http://schemas.openxmlformats.org/drawingml/2006/main">
               <a:ext uri="{FF2B5EF4-FFF2-40B4-BE49-F238E27FC236}">
-                <a16:creationId xmlns:a16="http://schemas.microsoft.com/office/drawing/2014/main" id="{21D4E792-3708-4704-804D-8AA1A28237A2}"/>
+                <a16:creationId xmlns:a16="http://schemas.microsoft.com/office/drawing/2014/main" id="{2E95F0CA-DDB2-4B89-B087-EA8914AAD7AA}"/>
               </a:ext>
             </a:extLst>
           </p:cNvPr>
@@ -7344,7 +7344,7 @@
           <p:cNvPr id="11" name="core-no-2">
             <a:extLst xmlns:a="http://schemas.openxmlformats.org/drawingml/2006/main">
               <a:ext uri="{FF2B5EF4-FFF2-40B4-BE49-F238E27FC236}">
-                <a16:creationId xmlns:a16="http://schemas.microsoft.com/office/drawing/2014/main" id="{19D0032D-BBD3-4569-A0EF-D1AE0EAB2EA8}"/>
+                <a16:creationId xmlns:a16="http://schemas.microsoft.com/office/drawing/2014/main" id="{41FFE7E8-6ABC-4A90-BC85-65A04122E922}"/>
               </a:ext>
             </a:extLst>
           </p:cNvPr>
@@ -7402,7 +7402,7 @@
           <p:cNvPr id="12" name="core-body-2">
             <a:extLst xmlns:a="http://schemas.openxmlformats.org/drawingml/2006/main">
               <a:ext uri="{FF2B5EF4-FFF2-40B4-BE49-F238E27FC236}">
-                <a16:creationId xmlns:a16="http://schemas.microsoft.com/office/drawing/2014/main" id="{D909F7D7-8C1C-42C4-8DB2-5DE957545FFC}"/>
+                <a16:creationId xmlns:a16="http://schemas.microsoft.com/office/drawing/2014/main" id="{D58F8532-8C57-46B5-B9EA-676E55200F2D}"/>
               </a:ext>
             </a:extLst>
           </p:cNvPr>
@@ -7466,7 +7466,7 @@
           <p:cNvPr id="13" name="s4-takeaway-rule">
             <a:extLst xmlns:a="http://schemas.openxmlformats.org/drawingml/2006/main">
               <a:ext uri="{FF2B5EF4-FFF2-40B4-BE49-F238E27FC236}">
-                <a16:creationId xmlns:a16="http://schemas.microsoft.com/office/drawing/2014/main" id="{6BF66AA4-AB5C-493F-9F63-268A85A68B01}"/>
+                <a16:creationId xmlns:a16="http://schemas.microsoft.com/office/drawing/2014/main" id="{62A09346-4743-49D4-A2AA-4A8DF49BD5FA}"/>
               </a:ext>
             </a:extLst>
           </p:cNvPr>
@@ -7499,7 +7499,7 @@
           <p:cNvPr id="14" name="s4-takeaway">
             <a:extLst xmlns:a="http://schemas.openxmlformats.org/drawingml/2006/main">
               <a:ext uri="{FF2B5EF4-FFF2-40B4-BE49-F238E27FC236}">
-                <a16:creationId xmlns:a16="http://schemas.microsoft.com/office/drawing/2014/main" id="{8C240751-4AF4-4429-9227-113A4010715B}"/>
+                <a16:creationId xmlns:a16="http://schemas.microsoft.com/office/drawing/2014/main" id="{BDBA081E-45AE-42ED-A7B6-6EA6779B7A88}"/>
               </a:ext>
             </a:extLst>
           </p:cNvPr>
@@ -7555,7 +7555,7 @@
     </p:spTree>
     <p:extLst>
       <p:ext uri="{BB962C8B-B14F-4D97-AF65-F5344CB8AC3E}">
-        <p14:creationId xmlns:p14="http://schemas.microsoft.com/office/powerpoint/2010/main" val="1503489180"/>
+        <p14:creationId xmlns:p14="http://schemas.microsoft.com/office/powerpoint/2010/main" val="102938482"/>
       </p:ext>
     </p:extLst>
   </p:cSld>
@@ -7586,7 +7586,7 @@
           <p:cNvPr id="1" name="s5-rule">
             <a:extLst xmlns:a="http://schemas.openxmlformats.org/drawingml/2006/main">
               <a:ext uri="{FF2B5EF4-FFF2-40B4-BE49-F238E27FC236}">
-                <a16:creationId xmlns:a16="http://schemas.microsoft.com/office/drawing/2014/main" id="{BF972F01-1190-4E24-B65D-FF57A86AE0E6}"/>
+                <a16:creationId xmlns:a16="http://schemas.microsoft.com/office/drawing/2014/main" id="{1B50D485-174F-4AE1-ADB1-56361F6DB9C2}"/>
               </a:ext>
             </a:extLst>
           </p:cNvPr>
@@ -7619,7 +7619,7 @@
           <p:cNvPr id="2" name="s5-eyebrow">
             <a:extLst xmlns:a="http://schemas.openxmlformats.org/drawingml/2006/main">
               <a:ext uri="{FF2B5EF4-FFF2-40B4-BE49-F238E27FC236}">
-                <a16:creationId xmlns:a16="http://schemas.microsoft.com/office/drawing/2014/main" id="{8F18B888-04C0-4DC3-BD67-1FE83EB9DF31}"/>
+                <a16:creationId xmlns:a16="http://schemas.microsoft.com/office/drawing/2014/main" id="{E722062A-E194-4AD5-86D6-B9B0C101D2CE}"/>
               </a:ext>
             </a:extLst>
           </p:cNvPr>
@@ -7677,7 +7677,7 @@
           <p:cNvPr id="3" name="s5-title">
             <a:extLst xmlns:a="http://schemas.openxmlformats.org/drawingml/2006/main">
               <a:ext uri="{FF2B5EF4-FFF2-40B4-BE49-F238E27FC236}">
-                <a16:creationId xmlns:a16="http://schemas.microsoft.com/office/drawing/2014/main" id="{4B1347B4-3884-4B7C-84CE-3A95C1559B91}"/>
+                <a16:creationId xmlns:a16="http://schemas.microsoft.com/office/drawing/2014/main" id="{7B29B877-0B16-4F2D-9A7C-FD6E3A522AAD}"/>
               </a:ext>
             </a:extLst>
           </p:cNvPr>
@@ -7735,7 +7735,7 @@
           <p:cNvPr id="4" name="s5-footer">
             <a:extLst xmlns:a="http://schemas.openxmlformats.org/drawingml/2006/main">
               <a:ext uri="{FF2B5EF4-FFF2-40B4-BE49-F238E27FC236}">
-                <a16:creationId xmlns:a16="http://schemas.microsoft.com/office/drawing/2014/main" id="{421F03A8-B141-4093-BF0C-0C25A2EFAAE4}"/>
+                <a16:creationId xmlns:a16="http://schemas.microsoft.com/office/drawing/2014/main" id="{6656E836-54F4-45BD-970C-B58686E45437}"/>
               </a:ext>
             </a:extLst>
           </p:cNvPr>
@@ -7766,7 +7766,7 @@
           <p:cNvPr id="5" name="s5-identity">
             <a:extLst xmlns:a="http://schemas.openxmlformats.org/drawingml/2006/main">
               <a:ext uri="{FF2B5EF4-FFF2-40B4-BE49-F238E27FC236}">
-                <a16:creationId xmlns:a16="http://schemas.microsoft.com/office/drawing/2014/main" id="{064EF1A6-1B75-496A-8C6F-671D5D61D01A}"/>
+                <a16:creationId xmlns:a16="http://schemas.microsoft.com/office/drawing/2014/main" id="{20F0DD6B-C86A-461D-AC6F-DAD43D099483}"/>
               </a:ext>
             </a:extLst>
           </p:cNvPr>
@@ -7824,7 +7824,7 @@
           <p:cNvPr id="6" name="core-no-0">
             <a:extLst xmlns:a="http://schemas.openxmlformats.org/drawingml/2006/main">
               <a:ext uri="{FF2B5EF4-FFF2-40B4-BE49-F238E27FC236}">
-                <a16:creationId xmlns:a16="http://schemas.microsoft.com/office/drawing/2014/main" id="{C174DDBA-A204-4B58-9991-F792E4BDAF5B}"/>
+                <a16:creationId xmlns:a16="http://schemas.microsoft.com/office/drawing/2014/main" id="{017121E6-8A2C-4B86-897C-1D2A1504A032}"/>
               </a:ext>
             </a:extLst>
           </p:cNvPr>
@@ -7882,7 +7882,7 @@
           <p:cNvPr id="7" name="core-label-0">
             <a:extLst xmlns:a="http://schemas.openxmlformats.org/drawingml/2006/main">
               <a:ext uri="{FF2B5EF4-FFF2-40B4-BE49-F238E27FC236}">
-                <a16:creationId xmlns:a16="http://schemas.microsoft.com/office/drawing/2014/main" id="{7AE3DE41-11D5-4482-A2CB-9E4CA646EE8D}"/>
+                <a16:creationId xmlns:a16="http://schemas.microsoft.com/office/drawing/2014/main" id="{F2D5E0BE-0B12-4FFA-83AE-48C2C48F3016}"/>
               </a:ext>
             </a:extLst>
           </p:cNvPr>
@@ -7940,7 +7940,7 @@
           <p:cNvPr id="8" name="core-body-0">
             <a:extLst xmlns:a="http://schemas.openxmlformats.org/drawingml/2006/main">
               <a:ext uri="{FF2B5EF4-FFF2-40B4-BE49-F238E27FC236}">
-                <a16:creationId xmlns:a16="http://schemas.microsoft.com/office/drawing/2014/main" id="{4F07A212-ED66-40ED-B7F0-0415ED7E63F4}"/>
+                <a16:creationId xmlns:a16="http://schemas.microsoft.com/office/drawing/2014/main" id="{7B099127-BAFD-4BB2-A314-F92C9F76274C}"/>
               </a:ext>
             </a:extLst>
           </p:cNvPr>
@@ -8004,7 +8004,7 @@
           <p:cNvPr id="9" name="core-no-1">
             <a:extLst xmlns:a="http://schemas.openxmlformats.org/drawingml/2006/main">
               <a:ext uri="{FF2B5EF4-FFF2-40B4-BE49-F238E27FC236}">
-                <a16:creationId xmlns:a16="http://schemas.microsoft.com/office/drawing/2014/main" id="{AF18298C-531B-4FEC-9FB7-223FC4BFBEBB}"/>
+                <a16:creationId xmlns:a16="http://schemas.microsoft.com/office/drawing/2014/main" id="{2C65EEFD-6A33-434B-AB42-3AC579803589}"/>
               </a:ext>
             </a:extLst>
           </p:cNvPr>
@@ -8062,7 +8062,7 @@
           <p:cNvPr id="10" name="core-body-1">
             <a:extLst xmlns:a="http://schemas.openxmlformats.org/drawingml/2006/main">
               <a:ext uri="{FF2B5EF4-FFF2-40B4-BE49-F238E27FC236}">
-                <a16:creationId xmlns:a16="http://schemas.microsoft.com/office/drawing/2014/main" id="{2EBE817A-7363-480F-9811-E52850D2E214}"/>
+                <a16:creationId xmlns:a16="http://schemas.microsoft.com/office/drawing/2014/main" id="{CDE4FDC8-4879-4C86-BB4C-FED5A2AB0B2A}"/>
               </a:ext>
             </a:extLst>
           </p:cNvPr>
@@ -8126,7 +8126,7 @@
           <p:cNvPr id="11" name="s5-takeaway-rule">
             <a:extLst xmlns:a="http://schemas.openxmlformats.org/drawingml/2006/main">
               <a:ext uri="{FF2B5EF4-FFF2-40B4-BE49-F238E27FC236}">
-                <a16:creationId xmlns:a16="http://schemas.microsoft.com/office/drawing/2014/main" id="{BA88684D-CEB1-4E20-9E9E-AC62DBD9FE8F}"/>
+                <a16:creationId xmlns:a16="http://schemas.microsoft.com/office/drawing/2014/main" id="{EDE647AE-FEA7-47FD-866E-FB7962803246}"/>
               </a:ext>
             </a:extLst>
           </p:cNvPr>
@@ -8159,7 +8159,7 @@
           <p:cNvPr id="12" name="s5-takeaway">
             <a:extLst xmlns:a="http://schemas.openxmlformats.org/drawingml/2006/main">
               <a:ext uri="{FF2B5EF4-FFF2-40B4-BE49-F238E27FC236}">
-                <a16:creationId xmlns:a16="http://schemas.microsoft.com/office/drawing/2014/main" id="{61893F1F-8101-40D7-88A5-7D51AAD166E9}"/>
+                <a16:creationId xmlns:a16="http://schemas.microsoft.com/office/drawing/2014/main" id="{F0CD4291-D950-4754-B980-724E58C8F261}"/>
               </a:ext>
             </a:extLst>
           </p:cNvPr>
@@ -8215,7 +8215,7 @@
     </p:spTree>
     <p:extLst>
       <p:ext uri="{BB962C8B-B14F-4D97-AF65-F5344CB8AC3E}">
-        <p14:creationId xmlns:p14="http://schemas.microsoft.com/office/powerpoint/2010/main" val="542995129"/>
+        <p14:creationId xmlns:p14="http://schemas.microsoft.com/office/powerpoint/2010/main" val="166891183"/>
       </p:ext>
     </p:extLst>
   </p:cSld>
@@ -8246,7 +8246,7 @@
           <p:cNvPr id="1" name="s6-rule">
             <a:extLst xmlns:a="http://schemas.openxmlformats.org/drawingml/2006/main">
               <a:ext uri="{FF2B5EF4-FFF2-40B4-BE49-F238E27FC236}">
-                <a16:creationId xmlns:a16="http://schemas.microsoft.com/office/drawing/2014/main" id="{A230FF66-77C7-42AA-B3EF-C17AC42B5073}"/>
+                <a16:creationId xmlns:a16="http://schemas.microsoft.com/office/drawing/2014/main" id="{AF933C50-20B2-4982-B550-19B1AF20BF0B}"/>
               </a:ext>
             </a:extLst>
           </p:cNvPr>
@@ -8279,7 +8279,7 @@
           <p:cNvPr id="2" name="s6-eyebrow">
             <a:extLst xmlns:a="http://schemas.openxmlformats.org/drawingml/2006/main">
               <a:ext uri="{FF2B5EF4-FFF2-40B4-BE49-F238E27FC236}">
-                <a16:creationId xmlns:a16="http://schemas.microsoft.com/office/drawing/2014/main" id="{88DBC71A-67B2-432E-B120-22A9B4D65471}"/>
+                <a16:creationId xmlns:a16="http://schemas.microsoft.com/office/drawing/2014/main" id="{AF765368-B040-48CD-A055-B00DE51AC43D}"/>
               </a:ext>
             </a:extLst>
           </p:cNvPr>
@@ -8337,7 +8337,7 @@
           <p:cNvPr id="3" name="s6-title">
             <a:extLst xmlns:a="http://schemas.openxmlformats.org/drawingml/2006/main">
               <a:ext uri="{FF2B5EF4-FFF2-40B4-BE49-F238E27FC236}">
-                <a16:creationId xmlns:a16="http://schemas.microsoft.com/office/drawing/2014/main" id="{2BBA7DF6-CD17-474B-8118-7F39E63D519A}"/>
+                <a16:creationId xmlns:a16="http://schemas.microsoft.com/office/drawing/2014/main" id="{56549F99-3C68-4471-8FBA-86BECDF77A1C}"/>
               </a:ext>
             </a:extLst>
           </p:cNvPr>
@@ -8395,7 +8395,7 @@
           <p:cNvPr id="4" name="s6-footer">
             <a:extLst xmlns:a="http://schemas.openxmlformats.org/drawingml/2006/main">
               <a:ext uri="{FF2B5EF4-FFF2-40B4-BE49-F238E27FC236}">
-                <a16:creationId xmlns:a16="http://schemas.microsoft.com/office/drawing/2014/main" id="{D44D1EE8-1DB8-4575-B815-970CB6516399}"/>
+                <a16:creationId xmlns:a16="http://schemas.microsoft.com/office/drawing/2014/main" id="{2A5A249A-6B9D-430F-AEBB-30012CCB1939}"/>
               </a:ext>
             </a:extLst>
           </p:cNvPr>
@@ -8426,7 +8426,7 @@
           <p:cNvPr id="5" name="s6-identity">
             <a:extLst xmlns:a="http://schemas.openxmlformats.org/drawingml/2006/main">
               <a:ext uri="{FF2B5EF4-FFF2-40B4-BE49-F238E27FC236}">
-                <a16:creationId xmlns:a16="http://schemas.microsoft.com/office/drawing/2014/main" id="{4444A47D-7442-41A6-925D-E383D116D3B8}"/>
+                <a16:creationId xmlns:a16="http://schemas.microsoft.com/office/drawing/2014/main" id="{E1804DD0-352E-40AA-AF85-4765F72C7759}"/>
               </a:ext>
             </a:extLst>
           </p:cNvPr>
@@ -8484,7 +8484,7 @@
           <p:cNvPr id="6" name="core-no-0">
             <a:extLst xmlns:a="http://schemas.openxmlformats.org/drawingml/2006/main">
               <a:ext uri="{FF2B5EF4-FFF2-40B4-BE49-F238E27FC236}">
-                <a16:creationId xmlns:a16="http://schemas.microsoft.com/office/drawing/2014/main" id="{E1235ADD-4950-41F2-93C0-141C38D92933}"/>
+                <a16:creationId xmlns:a16="http://schemas.microsoft.com/office/drawing/2014/main" id="{C916521B-3D84-42A2-902C-14DE71DCE1B9}"/>
               </a:ext>
             </a:extLst>
           </p:cNvPr>
@@ -8542,7 +8542,7 @@
           <p:cNvPr id="7" name="core-label-0">
             <a:extLst xmlns:a="http://schemas.openxmlformats.org/drawingml/2006/main">
               <a:ext uri="{FF2B5EF4-FFF2-40B4-BE49-F238E27FC236}">
-                <a16:creationId xmlns:a16="http://schemas.microsoft.com/office/drawing/2014/main" id="{43457E3A-CCF6-442D-9D89-A7611761BE09}"/>
+                <a16:creationId xmlns:a16="http://schemas.microsoft.com/office/drawing/2014/main" id="{313A9EF7-080E-4CAD-8922-22D79160F908}"/>
               </a:ext>
             </a:extLst>
           </p:cNvPr>
@@ -8600,7 +8600,7 @@
           <p:cNvPr id="8" name="core-body-0">
             <a:extLst xmlns:a="http://schemas.openxmlformats.org/drawingml/2006/main">
               <a:ext uri="{FF2B5EF4-FFF2-40B4-BE49-F238E27FC236}">
-                <a16:creationId xmlns:a16="http://schemas.microsoft.com/office/drawing/2014/main" id="{64EAD693-5AEE-466D-83C1-D4751FADB1AC}"/>
+                <a16:creationId xmlns:a16="http://schemas.microsoft.com/office/drawing/2014/main" id="{D78932EF-717C-4070-AFE5-F27FBBEDD72E}"/>
               </a:ext>
             </a:extLst>
           </p:cNvPr>
@@ -8664,7 +8664,7 @@
           <p:cNvPr id="9" name="core-no-1">
             <a:extLst xmlns:a="http://schemas.openxmlformats.org/drawingml/2006/main">
               <a:ext uri="{FF2B5EF4-FFF2-40B4-BE49-F238E27FC236}">
-                <a16:creationId xmlns:a16="http://schemas.microsoft.com/office/drawing/2014/main" id="{842AABB4-57DC-4FA9-872A-6091F16FD80B}"/>
+                <a16:creationId xmlns:a16="http://schemas.microsoft.com/office/drawing/2014/main" id="{79E6B585-4D80-4B90-8596-D301D59CD820}"/>
               </a:ext>
             </a:extLst>
           </p:cNvPr>
@@ -8722,7 +8722,7 @@
           <p:cNvPr id="10" name="core-body-1">
             <a:extLst xmlns:a="http://schemas.openxmlformats.org/drawingml/2006/main">
               <a:ext uri="{FF2B5EF4-FFF2-40B4-BE49-F238E27FC236}">
-                <a16:creationId xmlns:a16="http://schemas.microsoft.com/office/drawing/2014/main" id="{905160D4-7C71-4941-886F-C7269C242AFD}"/>
+                <a16:creationId xmlns:a16="http://schemas.microsoft.com/office/drawing/2014/main" id="{D54F2D38-72FE-44FC-8424-AFD206C580E3}"/>
               </a:ext>
             </a:extLst>
           </p:cNvPr>
@@ -8786,7 +8786,7 @@
           <p:cNvPr id="11" name="core-no-2">
             <a:extLst xmlns:a="http://schemas.openxmlformats.org/drawingml/2006/main">
               <a:ext uri="{FF2B5EF4-FFF2-40B4-BE49-F238E27FC236}">
-                <a16:creationId xmlns:a16="http://schemas.microsoft.com/office/drawing/2014/main" id="{28474D08-5EE7-4E92-B4AC-A6C48EFCA790}"/>
+                <a16:creationId xmlns:a16="http://schemas.microsoft.com/office/drawing/2014/main" id="{0520AA92-91DC-4F8F-9365-BA993987AD97}"/>
               </a:ext>
             </a:extLst>
           </p:cNvPr>
@@ -8844,7 +8844,7 @@
           <p:cNvPr id="12" name="core-body-2">
             <a:extLst xmlns:a="http://schemas.openxmlformats.org/drawingml/2006/main">
               <a:ext uri="{FF2B5EF4-FFF2-40B4-BE49-F238E27FC236}">
-                <a16:creationId xmlns:a16="http://schemas.microsoft.com/office/drawing/2014/main" id="{24DE8009-B725-46C8-B523-9A5447E1FE14}"/>
+                <a16:creationId xmlns:a16="http://schemas.microsoft.com/office/drawing/2014/main" id="{79FFAC86-43B3-41D5-9B66-130E493F5299}"/>
               </a:ext>
             </a:extLst>
           </p:cNvPr>
@@ -8908,7 +8908,7 @@
           <p:cNvPr id="13" name="s6-takeaway-rule">
             <a:extLst xmlns:a="http://schemas.openxmlformats.org/drawingml/2006/main">
               <a:ext uri="{FF2B5EF4-FFF2-40B4-BE49-F238E27FC236}">
-                <a16:creationId xmlns:a16="http://schemas.microsoft.com/office/drawing/2014/main" id="{AD02B8B3-9371-4B45-AB41-FBDAB727B862}"/>
+                <a16:creationId xmlns:a16="http://schemas.microsoft.com/office/drawing/2014/main" id="{D1BB2D05-E224-4150-B8BD-43B5FAAC2246}"/>
               </a:ext>
             </a:extLst>
           </p:cNvPr>
@@ -8941,7 +8941,7 @@
           <p:cNvPr id="14" name="s6-takeaway">
             <a:extLst xmlns:a="http://schemas.openxmlformats.org/drawingml/2006/main">
               <a:ext uri="{FF2B5EF4-FFF2-40B4-BE49-F238E27FC236}">
-                <a16:creationId xmlns:a16="http://schemas.microsoft.com/office/drawing/2014/main" id="{C574A53F-E59F-4FFC-ABFE-BA91710300E5}"/>
+                <a16:creationId xmlns:a16="http://schemas.microsoft.com/office/drawing/2014/main" id="{90BFEAD3-60D8-41F1-808A-2A47572188E5}"/>
               </a:ext>
             </a:extLst>
           </p:cNvPr>
@@ -8997,7 +8997,7 @@
     </p:spTree>
     <p:extLst>
       <p:ext uri="{BB962C8B-B14F-4D97-AF65-F5344CB8AC3E}">
-        <p14:creationId xmlns:p14="http://schemas.microsoft.com/office/powerpoint/2010/main" val="1966273452"/>
+        <p14:creationId xmlns:p14="http://schemas.microsoft.com/office/powerpoint/2010/main" val="654127545"/>
       </p:ext>
     </p:extLst>
   </p:cSld>
@@ -9028,7 +9028,7 @@
           <p:cNvPr id="1" name="s7-rule">
             <a:extLst xmlns:a="http://schemas.openxmlformats.org/drawingml/2006/main">
               <a:ext uri="{FF2B5EF4-FFF2-40B4-BE49-F238E27FC236}">
-                <a16:creationId xmlns:a16="http://schemas.microsoft.com/office/drawing/2014/main" id="{D23AD9F9-5286-483B-B9C7-E68FF13B0EB9}"/>
+                <a16:creationId xmlns:a16="http://schemas.microsoft.com/office/drawing/2014/main" id="{C7AF68A4-D3E0-42BA-8623-4FF5ED3B3899}"/>
               </a:ext>
             </a:extLst>
           </p:cNvPr>
@@ -9061,7 +9061,7 @@
           <p:cNvPr id="2" name="s7-eyebrow">
             <a:extLst xmlns:a="http://schemas.openxmlformats.org/drawingml/2006/main">
               <a:ext uri="{FF2B5EF4-FFF2-40B4-BE49-F238E27FC236}">
-                <a16:creationId xmlns:a16="http://schemas.microsoft.com/office/drawing/2014/main" id="{5C81E623-0AFB-4BB9-81D2-D50B6B2D6F62}"/>
+                <a16:creationId xmlns:a16="http://schemas.microsoft.com/office/drawing/2014/main" id="{A3298C7B-16DE-4416-B95E-C66B6257DF2D}"/>
               </a:ext>
             </a:extLst>
           </p:cNvPr>
@@ -9119,7 +9119,7 @@
           <p:cNvPr id="3" name="s7-title">
             <a:extLst xmlns:a="http://schemas.openxmlformats.org/drawingml/2006/main">
               <a:ext uri="{FF2B5EF4-FFF2-40B4-BE49-F238E27FC236}">
-                <a16:creationId xmlns:a16="http://schemas.microsoft.com/office/drawing/2014/main" id="{C7CA4E46-E1C7-431C-9B08-F131667AC557}"/>
+                <a16:creationId xmlns:a16="http://schemas.microsoft.com/office/drawing/2014/main" id="{14263F6C-D4A2-46B0-8ACE-961645A3ACD5}"/>
               </a:ext>
             </a:extLst>
           </p:cNvPr>
@@ -9177,7 +9177,7 @@
           <p:cNvPr id="4" name="s7-footer">
             <a:extLst xmlns:a="http://schemas.openxmlformats.org/drawingml/2006/main">
               <a:ext uri="{FF2B5EF4-FFF2-40B4-BE49-F238E27FC236}">
-                <a16:creationId xmlns:a16="http://schemas.microsoft.com/office/drawing/2014/main" id="{9F1F9DDE-E4D6-442F-9A32-2229DA7E83AE}"/>
+                <a16:creationId xmlns:a16="http://schemas.microsoft.com/office/drawing/2014/main" id="{A0B7FF88-0EC0-4504-BC98-1DE4E769868C}"/>
               </a:ext>
             </a:extLst>
           </p:cNvPr>
@@ -9208,7 +9208,7 @@
           <p:cNvPr id="5" name="s7-identity">
             <a:extLst xmlns:a="http://schemas.openxmlformats.org/drawingml/2006/main">
               <a:ext uri="{FF2B5EF4-FFF2-40B4-BE49-F238E27FC236}">
-                <a16:creationId xmlns:a16="http://schemas.microsoft.com/office/drawing/2014/main" id="{BAB019C9-2CA1-4594-84C6-38078F3D7AC2}"/>
+                <a16:creationId xmlns:a16="http://schemas.microsoft.com/office/drawing/2014/main" id="{EB386F74-7EA9-4145-AA5C-EB663AB4920C}"/>
               </a:ext>
             </a:extLst>
           </p:cNvPr>
@@ -9266,7 +9266,7 @@
           <p:cNvPr id="6" name="core-no-0">
             <a:extLst xmlns:a="http://schemas.openxmlformats.org/drawingml/2006/main">
               <a:ext uri="{FF2B5EF4-FFF2-40B4-BE49-F238E27FC236}">
-                <a16:creationId xmlns:a16="http://schemas.microsoft.com/office/drawing/2014/main" id="{5D7A1C68-A72D-4F1A-841E-C8D5E5D3C5FD}"/>
+                <a16:creationId xmlns:a16="http://schemas.microsoft.com/office/drawing/2014/main" id="{98858AFC-F0BB-44CB-BCEF-B923DACF85C7}"/>
               </a:ext>
             </a:extLst>
           </p:cNvPr>
@@ -9324,7 +9324,7 @@
           <p:cNvPr id="7" name="core-label-0">
             <a:extLst xmlns:a="http://schemas.openxmlformats.org/drawingml/2006/main">
               <a:ext uri="{FF2B5EF4-FFF2-40B4-BE49-F238E27FC236}">
-                <a16:creationId xmlns:a16="http://schemas.microsoft.com/office/drawing/2014/main" id="{9857E075-2EA1-4472-8856-6D701115B384}"/>
+                <a16:creationId xmlns:a16="http://schemas.microsoft.com/office/drawing/2014/main" id="{0BD82B45-9678-4DBC-AF4E-D45E7F060DF6}"/>
               </a:ext>
             </a:extLst>
           </p:cNvPr>
@@ -9382,7 +9382,7 @@
           <p:cNvPr id="8" name="core-body-0">
             <a:extLst xmlns:a="http://schemas.openxmlformats.org/drawingml/2006/main">
               <a:ext uri="{FF2B5EF4-FFF2-40B4-BE49-F238E27FC236}">
-                <a16:creationId xmlns:a16="http://schemas.microsoft.com/office/drawing/2014/main" id="{8A61D80E-0AC2-4387-B062-947D2C0E3B32}"/>
+                <a16:creationId xmlns:a16="http://schemas.microsoft.com/office/drawing/2014/main" id="{CDBFF377-14AB-4084-B252-F8EF8B74EF5E}"/>
               </a:ext>
             </a:extLst>
           </p:cNvPr>
@@ -9446,7 +9446,7 @@
           <p:cNvPr id="9" name="core-no-1">
             <a:extLst xmlns:a="http://schemas.openxmlformats.org/drawingml/2006/main">
               <a:ext uri="{FF2B5EF4-FFF2-40B4-BE49-F238E27FC236}">
-                <a16:creationId xmlns:a16="http://schemas.microsoft.com/office/drawing/2014/main" id="{B0A924A3-3F47-4AAC-BF51-E1A789691D40}"/>
+                <a16:creationId xmlns:a16="http://schemas.microsoft.com/office/drawing/2014/main" id="{BD1CD272-42C9-48B9-A384-9EC45F20FE0B}"/>
               </a:ext>
             </a:extLst>
           </p:cNvPr>
@@ -9504,7 +9504,7 @@
           <p:cNvPr id="10" name="core-body-1">
             <a:extLst xmlns:a="http://schemas.openxmlformats.org/drawingml/2006/main">
               <a:ext uri="{FF2B5EF4-FFF2-40B4-BE49-F238E27FC236}">
-                <a16:creationId xmlns:a16="http://schemas.microsoft.com/office/drawing/2014/main" id="{F1165833-D958-44F8-B0FF-C704F099BE12}"/>
+                <a16:creationId xmlns:a16="http://schemas.microsoft.com/office/drawing/2014/main" id="{39F7EF18-B9FE-4D31-B8EC-E3D8AA4CF21A}"/>
               </a:ext>
             </a:extLst>
           </p:cNvPr>
@@ -9568,7 +9568,7 @@
           <p:cNvPr id="11" name="s7-takeaway-rule">
             <a:extLst xmlns:a="http://schemas.openxmlformats.org/drawingml/2006/main">
               <a:ext uri="{FF2B5EF4-FFF2-40B4-BE49-F238E27FC236}">
-                <a16:creationId xmlns:a16="http://schemas.microsoft.com/office/drawing/2014/main" id="{E39119C2-C680-4183-926D-4BE4A2CBEE30}"/>
+                <a16:creationId xmlns:a16="http://schemas.microsoft.com/office/drawing/2014/main" id="{842D22FC-43A9-43F9-9E72-D0B191E44CBC}"/>
               </a:ext>
             </a:extLst>
           </p:cNvPr>
@@ -9601,7 +9601,7 @@
           <p:cNvPr id="12" name="s7-takeaway">
             <a:extLst xmlns:a="http://schemas.openxmlformats.org/drawingml/2006/main">
               <a:ext uri="{FF2B5EF4-FFF2-40B4-BE49-F238E27FC236}">
-                <a16:creationId xmlns:a16="http://schemas.microsoft.com/office/drawing/2014/main" id="{533EE253-28A8-4E70-8EA5-301CDA368D04}"/>
+                <a16:creationId xmlns:a16="http://schemas.microsoft.com/office/drawing/2014/main" id="{D4279108-B531-42AA-83DC-4AF0083D8EF8}"/>
               </a:ext>
             </a:extLst>
           </p:cNvPr>
@@ -9657,7 +9657,7 @@
     </p:spTree>
     <p:extLst>
       <p:ext uri="{BB962C8B-B14F-4D97-AF65-F5344CB8AC3E}">
-        <p14:creationId xmlns:p14="http://schemas.microsoft.com/office/powerpoint/2010/main" val="1096544860"/>
+        <p14:creationId xmlns:p14="http://schemas.microsoft.com/office/powerpoint/2010/main" val="488570623"/>
       </p:ext>
     </p:extLst>
   </p:cSld>
@@ -9688,7 +9688,7 @@
           <p:cNvPr id="1" name="s8-rule">
             <a:extLst xmlns:a="http://schemas.openxmlformats.org/drawingml/2006/main">
               <a:ext uri="{FF2B5EF4-FFF2-40B4-BE49-F238E27FC236}">
-                <a16:creationId xmlns:a16="http://schemas.microsoft.com/office/drawing/2014/main" id="{7FC4E89D-9D7F-40A0-8230-B2A7B1F637BC}"/>
+                <a16:creationId xmlns:a16="http://schemas.microsoft.com/office/drawing/2014/main" id="{7D184D5A-B957-4D50-8ADA-031DCD7FD8ED}"/>
               </a:ext>
             </a:extLst>
           </p:cNvPr>
@@ -9721,7 +9721,7 @@
           <p:cNvPr id="2" name="s8-eyebrow">
             <a:extLst xmlns:a="http://schemas.openxmlformats.org/drawingml/2006/main">
               <a:ext uri="{FF2B5EF4-FFF2-40B4-BE49-F238E27FC236}">
-                <a16:creationId xmlns:a16="http://schemas.microsoft.com/office/drawing/2014/main" id="{06D12C13-2117-4A06-88B4-0D9FFC92FCEA}"/>
+                <a16:creationId xmlns:a16="http://schemas.microsoft.com/office/drawing/2014/main" id="{688A97F5-2624-4D9B-82BD-94A28AF213A4}"/>
               </a:ext>
             </a:extLst>
           </p:cNvPr>
@@ -9779,7 +9779,7 @@
           <p:cNvPr id="3" name="s8-title">
             <a:extLst xmlns:a="http://schemas.openxmlformats.org/drawingml/2006/main">
               <a:ext uri="{FF2B5EF4-FFF2-40B4-BE49-F238E27FC236}">
-                <a16:creationId xmlns:a16="http://schemas.microsoft.com/office/drawing/2014/main" id="{3D30F455-150E-42A9-B59B-7DAD16E73095}"/>
+                <a16:creationId xmlns:a16="http://schemas.microsoft.com/office/drawing/2014/main" id="{66AD3414-AF16-4A57-B855-36FCDB78D8C8}"/>
               </a:ext>
             </a:extLst>
           </p:cNvPr>
@@ -9837,7 +9837,7 @@
           <p:cNvPr id="4" name="s8-footer">
             <a:extLst xmlns:a="http://schemas.openxmlformats.org/drawingml/2006/main">
               <a:ext uri="{FF2B5EF4-FFF2-40B4-BE49-F238E27FC236}">
-                <a16:creationId xmlns:a16="http://schemas.microsoft.com/office/drawing/2014/main" id="{77F765BB-14B6-49BB-B601-33B16D6B1957}"/>
+                <a16:creationId xmlns:a16="http://schemas.microsoft.com/office/drawing/2014/main" id="{E55BA5D2-4148-4F6D-BA80-7A6158DA62D8}"/>
               </a:ext>
             </a:extLst>
           </p:cNvPr>
@@ -9868,7 +9868,7 @@
           <p:cNvPr id="5" name="s8-identity">
             <a:extLst xmlns:a="http://schemas.openxmlformats.org/drawingml/2006/main">
               <a:ext uri="{FF2B5EF4-FFF2-40B4-BE49-F238E27FC236}">
-                <a16:creationId xmlns:a16="http://schemas.microsoft.com/office/drawing/2014/main" id="{EBA54C2E-4475-44E1-82EA-7D369A04DC1D}"/>
+                <a16:creationId xmlns:a16="http://schemas.microsoft.com/office/drawing/2014/main" id="{344B615A-AFF9-4D7C-A1F6-3F0CCFF32CDD}"/>
               </a:ext>
             </a:extLst>
           </p:cNvPr>
@@ -9926,7 +9926,7 @@
           <p:cNvPr id="6" name="core-no-0">
             <a:extLst xmlns:a="http://schemas.openxmlformats.org/drawingml/2006/main">
               <a:ext uri="{FF2B5EF4-FFF2-40B4-BE49-F238E27FC236}">
-                <a16:creationId xmlns:a16="http://schemas.microsoft.com/office/drawing/2014/main" id="{0F124693-A165-456C-9EBC-2DFC50C6018F}"/>
+                <a16:creationId xmlns:a16="http://schemas.microsoft.com/office/drawing/2014/main" id="{C9347D08-2D7A-4410-8ACA-B0D65BFC8E71}"/>
               </a:ext>
             </a:extLst>
           </p:cNvPr>
@@ -9984,7 +9984,7 @@
           <p:cNvPr id="7" name="core-label-0">
             <a:extLst xmlns:a="http://schemas.openxmlformats.org/drawingml/2006/main">
               <a:ext uri="{FF2B5EF4-FFF2-40B4-BE49-F238E27FC236}">
-                <a16:creationId xmlns:a16="http://schemas.microsoft.com/office/drawing/2014/main" id="{FCE4E7E0-2EC6-4115-83FD-8DD4C5C87EE9}"/>
+                <a16:creationId xmlns:a16="http://schemas.microsoft.com/office/drawing/2014/main" id="{12B0568A-7F0D-465E-89C6-11E698AA7575}"/>
               </a:ext>
             </a:extLst>
           </p:cNvPr>
@@ -10042,7 +10042,7 @@
           <p:cNvPr id="8" name="core-body-0">
             <a:extLst xmlns:a="http://schemas.openxmlformats.org/drawingml/2006/main">
               <a:ext uri="{FF2B5EF4-FFF2-40B4-BE49-F238E27FC236}">
-                <a16:creationId xmlns:a16="http://schemas.microsoft.com/office/drawing/2014/main" id="{AD03625B-AD28-449B-84E2-6F527CEF7203}"/>
+                <a16:creationId xmlns:a16="http://schemas.microsoft.com/office/drawing/2014/main" id="{8B9D320C-2743-4303-AF98-123EA64F5654}"/>
               </a:ext>
             </a:extLst>
           </p:cNvPr>
@@ -10106,7 +10106,7 @@
           <p:cNvPr id="9" name="core-no-1">
             <a:extLst xmlns:a="http://schemas.openxmlformats.org/drawingml/2006/main">
               <a:ext uri="{FF2B5EF4-FFF2-40B4-BE49-F238E27FC236}">
-                <a16:creationId xmlns:a16="http://schemas.microsoft.com/office/drawing/2014/main" id="{0CBEC322-BEF8-4F8B-A68E-AE65C320CD4E}"/>
+                <a16:creationId xmlns:a16="http://schemas.microsoft.com/office/drawing/2014/main" id="{32268429-4566-466B-A6AA-8157CEBA1DDE}"/>
               </a:ext>
             </a:extLst>
           </p:cNvPr>
@@ -10164,7 +10164,7 @@
           <p:cNvPr id="10" name="core-body-1">
             <a:extLst xmlns:a="http://schemas.openxmlformats.org/drawingml/2006/main">
               <a:ext uri="{FF2B5EF4-FFF2-40B4-BE49-F238E27FC236}">
-                <a16:creationId xmlns:a16="http://schemas.microsoft.com/office/drawing/2014/main" id="{E1803548-4D77-4DA5-8DC7-9309AD38504A}"/>
+                <a16:creationId xmlns:a16="http://schemas.microsoft.com/office/drawing/2014/main" id="{AE9A83CD-B632-4AD8-92A1-FB3ACD5CE646}"/>
               </a:ext>
             </a:extLst>
           </p:cNvPr>
@@ -10228,7 +10228,7 @@
           <p:cNvPr id="11" name="s8-takeaway-rule">
             <a:extLst xmlns:a="http://schemas.openxmlformats.org/drawingml/2006/main">
               <a:ext uri="{FF2B5EF4-FFF2-40B4-BE49-F238E27FC236}">
-                <a16:creationId xmlns:a16="http://schemas.microsoft.com/office/drawing/2014/main" id="{A584D9E9-B6A6-4C89-AC60-C31B342EB750}"/>
+                <a16:creationId xmlns:a16="http://schemas.microsoft.com/office/drawing/2014/main" id="{8F4D72A2-044B-4EB2-B375-BF9775DA08BA}"/>
               </a:ext>
             </a:extLst>
           </p:cNvPr>
@@ -10261,7 +10261,7 @@
           <p:cNvPr id="12" name="s8-takeaway">
             <a:extLst xmlns:a="http://schemas.openxmlformats.org/drawingml/2006/main">
               <a:ext uri="{FF2B5EF4-FFF2-40B4-BE49-F238E27FC236}">
-                <a16:creationId xmlns:a16="http://schemas.microsoft.com/office/drawing/2014/main" id="{384F1B01-3873-414F-9F98-64173C7BC17A}"/>
+                <a16:creationId xmlns:a16="http://schemas.microsoft.com/office/drawing/2014/main" id="{4A1447AE-0F92-45B8-A5F6-B34BB2E90827}"/>
               </a:ext>
             </a:extLst>
           </p:cNvPr>
@@ -10317,7 +10317,7 @@
     </p:spTree>
     <p:extLst>
       <p:ext uri="{BB962C8B-B14F-4D97-AF65-F5344CB8AC3E}">
-        <p14:creationId xmlns:p14="http://schemas.microsoft.com/office/powerpoint/2010/main" val="1396712685"/>
+        <p14:creationId xmlns:p14="http://schemas.microsoft.com/office/powerpoint/2010/main" val="977046134"/>
       </p:ext>
     </p:extLst>
   </p:cSld>
@@ -10348,7 +10348,7 @@
           <p:cNvPr id="1" name="s9-rule">
             <a:extLst xmlns:a="http://schemas.openxmlformats.org/drawingml/2006/main">
               <a:ext uri="{FF2B5EF4-FFF2-40B4-BE49-F238E27FC236}">
-                <a16:creationId xmlns:a16="http://schemas.microsoft.com/office/drawing/2014/main" id="{DE70E4C7-CD11-4D07-9E9E-6FE72039DDAE}"/>
+                <a16:creationId xmlns:a16="http://schemas.microsoft.com/office/drawing/2014/main" id="{90ADC2A5-5C21-4CF5-BC85-79605EA9919B}"/>
               </a:ext>
             </a:extLst>
           </p:cNvPr>
@@ -10381,7 +10381,7 @@
           <p:cNvPr id="2" name="s9-eyebrow">
             <a:extLst xmlns:a="http://schemas.openxmlformats.org/drawingml/2006/main">
               <a:ext uri="{FF2B5EF4-FFF2-40B4-BE49-F238E27FC236}">
-                <a16:creationId xmlns:a16="http://schemas.microsoft.com/office/drawing/2014/main" id="{32B43663-DA3B-481B-9276-CE007A986950}"/>
+                <a16:creationId xmlns:a16="http://schemas.microsoft.com/office/drawing/2014/main" id="{5F6F3DC2-7F01-4EBD-BE20-53D5B674B01B}"/>
               </a:ext>
             </a:extLst>
           </p:cNvPr>
@@ -10439,7 +10439,7 @@
           <p:cNvPr id="3" name="s9-title">
             <a:extLst xmlns:a="http://schemas.openxmlformats.org/drawingml/2006/main">
               <a:ext uri="{FF2B5EF4-FFF2-40B4-BE49-F238E27FC236}">
-                <a16:creationId xmlns:a16="http://schemas.microsoft.com/office/drawing/2014/main" id="{8DCED290-A4DC-484D-9828-71A0A2A370FE}"/>
+                <a16:creationId xmlns:a16="http://schemas.microsoft.com/office/drawing/2014/main" id="{C22D9004-3A53-4080-92B2-32DB271CAD27}"/>
               </a:ext>
             </a:extLst>
           </p:cNvPr>
@@ -10497,7 +10497,7 @@
           <p:cNvPr id="4" name="s9-footer">
             <a:extLst xmlns:a="http://schemas.openxmlformats.org/drawingml/2006/main">
               <a:ext uri="{FF2B5EF4-FFF2-40B4-BE49-F238E27FC236}">
-                <a16:creationId xmlns:a16="http://schemas.microsoft.com/office/drawing/2014/main" id="{C8A1205B-BB2F-462A-843A-F90F4B772F2A}"/>
+                <a16:creationId xmlns:a16="http://schemas.microsoft.com/office/drawing/2014/main" id="{7BA7472C-1947-4C43-8100-C734DEBF76B8}"/>
               </a:ext>
             </a:extLst>
           </p:cNvPr>
@@ -10528,7 +10528,7 @@
           <p:cNvPr id="5" name="s9-identity">
             <a:extLst xmlns:a="http://schemas.openxmlformats.org/drawingml/2006/main">
               <a:ext uri="{FF2B5EF4-FFF2-40B4-BE49-F238E27FC236}">
-                <a16:creationId xmlns:a16="http://schemas.microsoft.com/office/drawing/2014/main" id="{2467F1FF-0410-49B8-BB1D-EDF64AFB0EC1}"/>
+                <a16:creationId xmlns:a16="http://schemas.microsoft.com/office/drawing/2014/main" id="{4958ABA1-00C4-49E3-AB53-D95163A5900C}"/>
               </a:ext>
             </a:extLst>
           </p:cNvPr>
@@ -10586,7 +10586,7 @@
           <p:cNvPr id="6" name="case-title">
             <a:extLst xmlns:a="http://schemas.openxmlformats.org/drawingml/2006/main">
               <a:ext uri="{FF2B5EF4-FFF2-40B4-BE49-F238E27FC236}">
-                <a16:creationId xmlns:a16="http://schemas.microsoft.com/office/drawing/2014/main" id="{478E9A00-D047-4610-934A-124FC3781E61}"/>
+                <a16:creationId xmlns:a16="http://schemas.microsoft.com/office/drawing/2014/main" id="{56B811B7-5957-43B3-8105-1F66B6E0705D}"/>
               </a:ext>
             </a:extLst>
           </p:cNvPr>
@@ -10650,7 +10650,7 @@
           <p:cNvPr id="7" name="case-row-0">
             <a:extLst xmlns:a="http://schemas.openxmlformats.org/drawingml/2006/main">
               <a:ext uri="{FF2B5EF4-FFF2-40B4-BE49-F238E27FC236}">
-                <a16:creationId xmlns:a16="http://schemas.microsoft.com/office/drawing/2014/main" id="{81EE1EAA-9768-4C07-A2EC-2780C291DE72}"/>
+                <a16:creationId xmlns:a16="http://schemas.microsoft.com/office/drawing/2014/main" id="{74020A6B-75C0-4D60-8E46-BE058ED2C3B8}"/>
               </a:ext>
             </a:extLst>
           </p:cNvPr>
@@ -10714,7 +10714,7 @@
           <p:cNvPr id="8" name="case-row-1">
             <a:extLst xmlns:a="http://schemas.openxmlformats.org/drawingml/2006/main">
               <a:ext uri="{FF2B5EF4-FFF2-40B4-BE49-F238E27FC236}">
-                <a16:creationId xmlns:a16="http://schemas.microsoft.com/office/drawing/2014/main" id="{C0155C5A-C759-4ACD-A2C9-71FF714BEDC6}"/>
+                <a16:creationId xmlns:a16="http://schemas.microsoft.com/office/drawing/2014/main" id="{FCCDA97E-4DFB-4D0A-B63C-3911B9F0C3F3}"/>
               </a:ext>
             </a:extLst>
           </p:cNvPr>
@@ -10778,7 +10778,7 @@
           <p:cNvPr id="9" name="case-row-2">
             <a:extLst xmlns:a="http://schemas.openxmlformats.org/drawingml/2006/main">
               <a:ext uri="{FF2B5EF4-FFF2-40B4-BE49-F238E27FC236}">
-                <a16:creationId xmlns:a16="http://schemas.microsoft.com/office/drawing/2014/main" id="{FA036E1A-B2BB-4EEE-9170-5B3DE06C16AC}"/>
+                <a16:creationId xmlns:a16="http://schemas.microsoft.com/office/drawing/2014/main" id="{FE1895E3-30DC-4645-89E5-88629C6A26FB}"/>
               </a:ext>
             </a:extLst>
           </p:cNvPr>
@@ -10842,7 +10842,7 @@
           <p:cNvPr id="10" name="case-row-3">
             <a:extLst xmlns:a="http://schemas.openxmlformats.org/drawingml/2006/main">
               <a:ext uri="{FF2B5EF4-FFF2-40B4-BE49-F238E27FC236}">
-                <a16:creationId xmlns:a16="http://schemas.microsoft.com/office/drawing/2014/main" id="{C4E94300-E041-45AE-86A7-6D1DEAAA4157}"/>
+                <a16:creationId xmlns:a16="http://schemas.microsoft.com/office/drawing/2014/main" id="{F470F5AB-66B9-460D-9615-1B2489573BE9}"/>
               </a:ext>
             </a:extLst>
           </p:cNvPr>
@@ -10906,7 +10906,7 @@
           <p:cNvPr id="11" name="s9-takeaway-rule">
             <a:extLst xmlns:a="http://schemas.openxmlformats.org/drawingml/2006/main">
               <a:ext uri="{FF2B5EF4-FFF2-40B4-BE49-F238E27FC236}">
-                <a16:creationId xmlns:a16="http://schemas.microsoft.com/office/drawing/2014/main" id="{4A33E40C-071B-4A33-8953-B53162438C7E}"/>
+                <a16:creationId xmlns:a16="http://schemas.microsoft.com/office/drawing/2014/main" id="{1060B8CD-7381-42F4-83D0-A0468F5F8497}"/>
               </a:ext>
             </a:extLst>
           </p:cNvPr>
@@ -10939,7 +10939,7 @@
           <p:cNvPr id="12" name="s9-takeaway">
             <a:extLst xmlns:a="http://schemas.openxmlformats.org/drawingml/2006/main">
               <a:ext uri="{FF2B5EF4-FFF2-40B4-BE49-F238E27FC236}">
-                <a16:creationId xmlns:a16="http://schemas.microsoft.com/office/drawing/2014/main" id="{2B88307C-9261-4BDC-BD26-5C378AC1E75E}"/>
+                <a16:creationId xmlns:a16="http://schemas.microsoft.com/office/drawing/2014/main" id="{808A2961-2623-4186-92FE-87D24809471B}"/>
               </a:ext>
             </a:extLst>
           </p:cNvPr>
@@ -10995,7 +10995,7 @@
     </p:spTree>
     <p:extLst>
       <p:ext uri="{BB962C8B-B14F-4D97-AF65-F5344CB8AC3E}">
-        <p14:creationId xmlns:p14="http://schemas.microsoft.com/office/powerpoint/2010/main" val="141089760"/>
+        <p14:creationId xmlns:p14="http://schemas.microsoft.com/office/powerpoint/2010/main" val="520801795"/>
       </p:ext>
     </p:extLst>
   </p:cSld>
